--- a/slides/06-canvases.pptx
+++ b/slides/06-canvases.pptx
@@ -559,355 +559,355 @@
 </file>
 
 <file path=ppt/notesSlides/notesSlide10.xml><?xml version="1.0" encoding="utf-8"?>
-<p:notes xmlns:a="http://schemas.openxmlformats.org/drawingml/2006/main" xmlns:r="http://schemas.openxmlformats.org/officeDocument/2006/relationships" xmlns:p="http://schemas.openxmlformats.org/presentationml/2006/main">
-  <p:cSld>
-    <p:spTree>
-      <p:nvGrpSpPr>
-        <p:cNvPr id="1" name=""/>
-        <p:cNvGrpSpPr/>
-        <p:nvPr/>
-      </p:nvGrpSpPr>
-      <p:grpSpPr>
-        <a:xfrm>
-          <a:off x="0" y="0"/>
-          <a:ext cx="0" cy="0"/>
-          <a:chOff x="0" y="0"/>
-          <a:chExt cx="0" cy="0"/>
-        </a:xfrm>
-      </p:grpSpPr>
-      <p:sp>
-        <p:nvSpPr>
-          <p:cNvPr id="2" name="Slide Image Placeholder 1"/>
-          <p:cNvSpPr>
-            <a:spLocks noGrp="1" noRot="1" noChangeAspect="1"/>
-          </p:cNvSpPr>
-          <p:nvPr>
-            <p:ph type="sldImg"/>
-          </p:nvPr>
-        </p:nvSpPr>
-        <p:spPr/>
-      </p:sp>
-      <p:sp>
-        <p:nvSpPr>
-          <p:cNvPr id="3" name="Notes Placeholder 2"/>
-          <p:cNvSpPr>
-            <a:spLocks noGrp="1"/>
-          </p:cNvSpPr>
-          <p:nvPr>
-            <p:ph type="body" idx="1"/>
-          </p:nvPr>
-        </p:nvSpPr>
-        <p:spPr/>
-        <p:txBody>
-          <a:bodyPr/>
-          <a:lstStyle/>
-          <a:p>
-            <a:r>
-              <a:rPr lang="en-US" dirty="0"/>
-              <a:t>The prompt is dense because it is written for the app, not for you to memorize. It asks for a progress rail with five stages, a proposal field with one Generate plan button, eight checklist items, action buttons that ask the agent to do real work with long timeouts, and a read-only evidence area. Use your most capable model for the first generation. Results differ between runs. If a part is missing, use one of the focused repair prompts in the chapter. After two failed repairs, use the Markdown fallback.</a:t>
-            </a:r>
-            <a:endParaRPr lang="en-US" dirty="0"/>
-          </a:p>
-        </p:txBody>
-      </p:sp>
-      <p:sp>
-        <p:nvSpPr>
-          <p:cNvPr id="4" name="Slide Number Placeholder 3"/>
-          <p:cNvSpPr>
-            <a:spLocks noGrp="1"/>
-          </p:cNvSpPr>
-          <p:nvPr>
-            <p:ph type="sldNum" sz="quarter" idx="10"/>
-          </p:nvPr>
-        </p:nvSpPr>
-        <p:spPr/>
-        <p:txBody>
-          <a:bodyPr/>
-          <a:lstStyle/>
-          <a:p>
-            <a:fld id="{F7021451-1387-4CA6-816F-3879F97B5CBC}" type="slidenum">
-              <a:rPr lang="en-US"/>
-              <a:t>10</a:t>
-            </a:fld>
-            <a:endParaRPr lang="en-US"/>
-          </a:p>
-        </p:txBody>
-      </p:sp>
-    </p:spTree>
-    <p:extLst>
-      <p:ext uri="{BB962C8B-B14F-4D97-AF65-F5344CB8AC3E}">
-        <p14:creationId xmlns:p14="http://schemas.microsoft.com/office/powerpoint/2010/main" val="1024086991"/>
-      </p:ext>
-    </p:extLst>
-  </p:cSld>
-  <p:clrMapOvr>
-    <a:masterClrMapping/>
-  </p:clrMapOvr>
-</p:notes>
+<ns0:notes xmlns:ns0="http://schemas.openxmlformats.org/presentationml/2006/main" xmlns:ns1="http://schemas.openxmlformats.org/drawingml/2006/main" xmlns:ns2="http://schemas.microsoft.com/office/powerpoint/2010/main">
+  <ns0:cSld>
+    <ns0:spTree>
+      <ns0:nvGrpSpPr>
+        <ns0:cNvPr id="1" name=""/>
+        <ns0:cNvGrpSpPr/>
+        <ns0:nvPr/>
+      </ns0:nvGrpSpPr>
+      <ns0:grpSpPr>
+        <ns1:xfrm>
+          <ns1:off x="0" y="0"/>
+          <ns1:ext cx="0" cy="0"/>
+          <ns1:chOff x="0" y="0"/>
+          <ns1:chExt cx="0" cy="0"/>
+        </ns1:xfrm>
+      </ns0:grpSpPr>
+      <ns0:sp>
+        <ns0:nvSpPr>
+          <ns0:cNvPr id="2" name="Slide Image Placeholder 1"/>
+          <ns0:cNvSpPr>
+            <ns1:spLocks noGrp="1" noRot="1" noChangeAspect="1"/>
+          </ns0:cNvSpPr>
+          <ns0:nvPr>
+            <ns0:ph type="sldImg"/>
+          </ns0:nvPr>
+        </ns0:nvSpPr>
+        <ns0:spPr/>
+      </ns0:sp>
+      <ns0:sp>
+        <ns0:nvSpPr>
+          <ns0:cNvPr id="3" name="Notes Placeholder 2"/>
+          <ns0:cNvSpPr>
+            <ns1:spLocks noGrp="1"/>
+          </ns0:cNvSpPr>
+          <ns0:nvPr>
+            <ns0:ph type="body" idx="1"/>
+          </ns0:nvPr>
+        </ns0:nvSpPr>
+        <ns0:spPr/>
+        <ns0:txBody>
+          <ns1:bodyPr/>
+          <ns1:lstStyle/>
+          <ns1:p>
+            <ns1:r>
+              <ns1:rPr lang="en-US" dirty="0"/>
+              <ns1:t>The prompt is written for the app, not for you to memorize. It asks for five stages, a proposal field with one Generate plan button, eight checklist items, action buttons, and a read-only evidence area. Use your most capable model for the first generation. Results differ between runs. Screenshots are optional, and unsupported browser checks are recorded as notes, not failures. An action ends when its evidence is recorded and returns the session to Interactive mode. If a part is missing, use one focused repair prompt. After two failed repairs, use the Markdown fallback.</ns1:t>
+            </ns1:r>
+            <ns1:endParaRPr lang="en-US" dirty="0"/>
+          </ns1:p>
+        </ns0:txBody>
+      </ns0:sp>
+      <ns0:sp>
+        <ns0:nvSpPr>
+          <ns0:cNvPr id="4" name="Slide Number Placeholder 3"/>
+          <ns0:cNvSpPr>
+            <ns1:spLocks noGrp="1"/>
+          </ns0:cNvSpPr>
+          <ns0:nvPr>
+            <ns0:ph type="sldNum" sz="quarter" idx="10"/>
+          </ns0:nvPr>
+        </ns0:nvSpPr>
+        <ns0:spPr/>
+        <ns0:txBody>
+          <ns1:bodyPr/>
+          <ns1:lstStyle/>
+          <ns1:p>
+            <ns1:fld id="{F7021451-1387-4CA6-816F-3879F97B5CBC}" type="slidenum">
+              <ns1:rPr lang="en-US"/>
+              <ns1:t>10</ns1:t>
+            </ns1:fld>
+            <ns1:endParaRPr lang="en-US"/>
+          </ns1:p>
+        </ns0:txBody>
+      </ns0:sp>
+    </ns0:spTree>
+    <ns0:extLst>
+      <ns0:ext uri="{BB962C8B-B14F-4D97-AF65-F5344CB8AC3E}">
+        <ns2:creationId val="1024086991"/>
+      </ns0:ext>
+    </ns0:extLst>
+  </ns0:cSld>
+  <ns0:clrMapOvr>
+    <ns1:masterClrMapping/>
+  </ns0:clrMapOvr>
+</ns0:notes>
 </file>
 
 <file path=ppt/notesSlides/notesSlide11.xml><?xml version="1.0" encoding="utf-8"?>
-<p:notes xmlns:a="http://schemas.openxmlformats.org/drawingml/2006/main" xmlns:r="http://schemas.openxmlformats.org/officeDocument/2006/relationships" xmlns:p="http://schemas.openxmlformats.org/presentationml/2006/main">
-  <p:cSld>
-    <p:spTree>
-      <p:nvGrpSpPr>
-        <p:cNvPr id="1" name=""/>
-        <p:cNvGrpSpPr/>
-        <p:nvPr/>
-      </p:nvGrpSpPr>
-      <p:grpSpPr>
-        <a:xfrm>
-          <a:off x="0" y="0"/>
-          <a:ext cx="0" cy="0"/>
-          <a:chOff x="0" y="0"/>
-          <a:chExt cx="0" cy="0"/>
-        </a:xfrm>
-      </p:grpSpPr>
-      <p:sp>
-        <p:nvSpPr>
-          <p:cNvPr id="2" name="Slide Image Placeholder 1"/>
-          <p:cNvSpPr>
-            <a:spLocks noGrp="1" noRot="1" noChangeAspect="1"/>
-          </p:cNvSpPr>
-          <p:nvPr>
-            <p:ph type="sldImg"/>
-          </p:nvPr>
-        </p:nvSpPr>
-        <p:spPr/>
-      </p:sp>
-      <p:sp>
-        <p:nvSpPr>
-          <p:cNvPr id="3" name="Notes Placeholder 2"/>
-          <p:cNvSpPr>
-            <a:spLocks noGrp="1"/>
-          </p:cNvSpPr>
-          <p:nvPr>
-            <p:ph type="body" idx="1"/>
-          </p:nvPr>
-        </p:nvSpPr>
-        <p:spPr/>
-        <p:txBody>
-          <a:bodyPr/>
-          <a:lstStyle/>
-          <a:p>
-            <a:r>
-              <a:rPr lang="en-US" dirty="0"/>
-              <a:t>Paste the Clear filters proposal and select Generate plan. The session switches to Plan mode and the status pill shows Working. Review the plan in the Plan tab. In the Review plan box at the bottom of the chat, choose Exit plan mode and I will prompt myself, then select the Feature Workbench tab; the canvas shows Approved. Then select Run baseline. The canvas records the Vitest total and build result. Expand the tool calls in chat to confirm Copilot ran npm test and npm run build, and that the evidence matches their output. The board is only useful if it stays linked to evidence from this session.</a:t>
-            </a:r>
-            <a:endParaRPr lang="en-US" dirty="0"/>
-          </a:p>
-        </p:txBody>
-      </p:sp>
-      <p:sp>
-        <p:nvSpPr>
-          <p:cNvPr id="4" name="Slide Number Placeholder 3"/>
-          <p:cNvSpPr>
-            <a:spLocks noGrp="1"/>
-          </p:cNvSpPr>
-          <p:nvPr>
-            <p:ph type="sldNum" sz="quarter" idx="10"/>
-          </p:nvPr>
-        </p:nvSpPr>
-        <p:spPr/>
-        <p:txBody>
-          <a:bodyPr/>
-          <a:lstStyle/>
-          <a:p>
-            <a:fld id="{F7021451-1387-4CA6-816F-3879F97B5CBC}" type="slidenum">
-              <a:rPr lang="en-US"/>
-              <a:t>11</a:t>
-            </a:fld>
-            <a:endParaRPr lang="en-US"/>
-          </a:p>
-        </p:txBody>
-      </p:sp>
-    </p:spTree>
-    <p:extLst>
-      <p:ext uri="{BB962C8B-B14F-4D97-AF65-F5344CB8AC3E}">
-        <p14:creationId xmlns:p14="http://schemas.microsoft.com/office/powerpoint/2010/main" val="1024086991"/>
-      </p:ext>
-    </p:extLst>
-  </p:cSld>
-  <p:clrMapOvr>
-    <a:masterClrMapping/>
-  </p:clrMapOvr>
-</p:notes>
+<ns0:notes xmlns:ns0="http://schemas.openxmlformats.org/presentationml/2006/main" xmlns:ns1="http://schemas.openxmlformats.org/drawingml/2006/main" xmlns:ns2="http://schemas.microsoft.com/office/powerpoint/2010/main">
+  <ns0:cSld>
+    <ns0:spTree>
+      <ns0:nvGrpSpPr>
+        <ns0:cNvPr id="1" name=""/>
+        <ns0:cNvGrpSpPr/>
+        <ns0:nvPr/>
+      </ns0:nvGrpSpPr>
+      <ns0:grpSpPr>
+        <ns1:xfrm>
+          <ns1:off x="0" y="0"/>
+          <ns1:ext cx="0" cy="0"/>
+          <ns1:chOff x="0" y="0"/>
+          <ns1:chExt cx="0" cy="0"/>
+        </ns1:xfrm>
+      </ns0:grpSpPr>
+      <ns0:sp>
+        <ns0:nvSpPr>
+          <ns0:cNvPr id="2" name="Slide Image Placeholder 1"/>
+          <ns0:cNvSpPr>
+            <ns1:spLocks noGrp="1" noRot="1" noChangeAspect="1"/>
+          </ns0:cNvSpPr>
+          <ns0:nvPr>
+            <ns0:ph type="sldImg"/>
+          </ns0:nvPr>
+        </ns0:nvSpPr>
+        <ns0:spPr/>
+      </ns0:sp>
+      <ns0:sp>
+        <ns0:nvSpPr>
+          <ns0:cNvPr id="3" name="Notes Placeholder 2"/>
+          <ns0:cNvSpPr>
+            <ns1:spLocks noGrp="1"/>
+          </ns0:cNvSpPr>
+          <ns0:nvPr>
+            <ns0:ph type="body" idx="1"/>
+          </ns0:nvPr>
+        </ns0:nvSpPr>
+        <ns0:spPr/>
+        <ns0:txBody>
+          <ns1:bodyPr/>
+          <ns1:lstStyle/>
+          <ns1:p>
+            <ns1:r>
+              <ns1:rPr lang="en-US" dirty="0"/>
+              <ns1:t>Paste the Clear filters proposal and select Generate plan. The session switches to Plan mode and the status pill shows Working. Review the plan in the Plan tab. In the Review plan box at the bottom of the chat, choose Exit plan mode and I will prompt myself. If the box stays open, select Continue. Confirm the session is back in Interactive mode, then select the Feature Workbench tab; the canvas shows Approved. Select Run baseline. The canvas records the test total and build result. Expand the tool calls in chat and confirm the evidence matches their output.</ns1:t>
+            </ns1:r>
+            <ns1:endParaRPr lang="en-US" dirty="0"/>
+          </ns1:p>
+        </ns0:txBody>
+      </ns0:sp>
+      <ns0:sp>
+        <ns0:nvSpPr>
+          <ns0:cNvPr id="4" name="Slide Number Placeholder 3"/>
+          <ns0:cNvSpPr>
+            <ns1:spLocks noGrp="1"/>
+          </ns0:cNvSpPr>
+          <ns0:nvPr>
+            <ns0:ph type="sldNum" sz="quarter" idx="10"/>
+          </ns0:nvPr>
+        </ns0:nvSpPr>
+        <ns0:spPr/>
+        <ns0:txBody>
+          <ns1:bodyPr/>
+          <ns1:lstStyle/>
+          <ns1:p>
+            <ns1:fld id="{F7021451-1387-4CA6-816F-3879F97B5CBC}" type="slidenum">
+              <ns1:rPr lang="en-US"/>
+              <ns1:t>11</ns1:t>
+            </ns1:fld>
+            <ns1:endParaRPr lang="en-US"/>
+          </ns1:p>
+        </ns0:txBody>
+      </ns0:sp>
+    </ns0:spTree>
+    <ns0:extLst>
+      <ns0:ext uri="{BB962C8B-B14F-4D97-AF65-F5344CB8AC3E}">
+        <ns2:creationId val="1024086991"/>
+      </ns0:ext>
+    </ns0:extLst>
+  </ns0:cSld>
+  <ns0:clrMapOvr>
+    <ns1:masterClrMapping/>
+  </ns0:clrMapOvr>
+</ns0:notes>
 </file>
 
 <file path=ppt/notesSlides/notesSlide12.xml><?xml version="1.0" encoding="utf-8"?>
-<p:notes xmlns:a="http://schemas.openxmlformats.org/drawingml/2006/main" xmlns:r="http://schemas.openxmlformats.org/officeDocument/2006/relationships" xmlns:p="http://schemas.openxmlformats.org/presentationml/2006/main">
-  <p:cSld>
-    <p:spTree>
-      <p:nvGrpSpPr>
-        <p:cNvPr id="1" name=""/>
-        <p:cNvGrpSpPr/>
-        <p:nvPr/>
-      </p:nvGrpSpPr>
-      <p:grpSpPr>
-        <a:xfrm>
-          <a:off x="0" y="0"/>
-          <a:ext cx="0" cy="0"/>
-          <a:chOff x="0" y="0"/>
-          <a:chExt cx="0" cy="0"/>
-        </a:xfrm>
-      </p:grpSpPr>
-      <p:sp>
-        <p:nvSpPr>
-          <p:cNvPr id="2" name="Slide Image Placeholder 1"/>
-          <p:cNvSpPr>
-            <a:spLocks noGrp="1" noRot="1" noChangeAspect="1"/>
-          </p:cNvSpPr>
-          <p:nvPr>
-            <p:ph type="sldImg"/>
-          </p:nvPr>
-        </p:nvSpPr>
-        <p:spPr/>
-      </p:sp>
-      <p:sp>
-        <p:nvSpPr>
-          <p:cNvPr id="3" name="Notes Placeholder 2"/>
-          <p:cNvSpPr>
-            <a:spLocks noGrp="1"/>
-          </p:cNvSpPr>
-          <p:nvPr>
-            <p:ph type="body" idx="1"/>
-          </p:nvPr>
-        </p:nvSpPr>
-        <p:spPr/>
-        <p:txBody>
-          <a:bodyPr/>
-          <a:lstStyle/>
-          <a:p>
-            <a:r>
-              <a:rPr lang="en-US" dirty="0"/>
-              <a:t>Select Implement. When it finishes, the canvas marks Implement complete, checks off the implementation items, and adds a Diff row to the evidence, as shown. Select the Changes pill above the prompt box and confirm the changes are limited to the approved feature. Then select Browser validation. The agent starts or reuses the dev server, exercises the feature, and captures screenshots. Check it yourself too: with no filters the control is hidden; with a search, genre, or status it appears; selecting it resets all three; afterward it disappears and the full list and statistics return. When you finish, select Background above the prompt box and stop the dev server; until it stops, Browser validation can keep showing Working.</a:t>
-            </a:r>
-            <a:endParaRPr lang="en-US" dirty="0"/>
-          </a:p>
-        </p:txBody>
-      </p:sp>
-      <p:sp>
-        <p:nvSpPr>
-          <p:cNvPr id="4" name="Slide Number Placeholder 3"/>
-          <p:cNvSpPr>
-            <a:spLocks noGrp="1"/>
-          </p:cNvSpPr>
-          <p:nvPr>
-            <p:ph type="sldNum" sz="quarter" idx="10"/>
-          </p:nvPr>
-        </p:nvSpPr>
-        <p:spPr/>
-        <p:txBody>
-          <a:bodyPr/>
-          <a:lstStyle/>
-          <a:p>
-            <a:fld id="{F7021451-1387-4CA6-816F-3879F97B5CBC}" type="slidenum">
-              <a:rPr lang="en-US"/>
-              <a:t>12</a:t>
-            </a:fld>
-            <a:endParaRPr lang="en-US"/>
-          </a:p>
-        </p:txBody>
-      </p:sp>
-    </p:spTree>
-    <p:extLst>
-      <p:ext uri="{BB962C8B-B14F-4D97-AF65-F5344CB8AC3E}">
-        <p14:creationId xmlns:p14="http://schemas.microsoft.com/office/powerpoint/2010/main" val="1024086991"/>
-      </p:ext>
-    </p:extLst>
-  </p:cSld>
-  <p:clrMapOvr>
-    <a:masterClrMapping/>
-  </p:clrMapOvr>
-</p:notes>
+<ns0:notes xmlns:ns0="http://schemas.openxmlformats.org/presentationml/2006/main" xmlns:ns1="http://schemas.openxmlformats.org/drawingml/2006/main" xmlns:ns2="http://schemas.microsoft.com/office/powerpoint/2010/main">
+  <ns0:cSld>
+    <ns0:spTree>
+      <ns0:nvGrpSpPr>
+        <ns0:cNvPr id="1" name=""/>
+        <ns0:cNvGrpSpPr/>
+        <ns0:nvPr/>
+      </ns0:nvGrpSpPr>
+      <ns0:grpSpPr>
+        <ns1:xfrm>
+          <ns1:off x="0" y="0"/>
+          <ns1:ext cx="0" cy="0"/>
+          <ns1:chOff x="0" y="0"/>
+          <ns1:chExt cx="0" cy="0"/>
+        </ns1:xfrm>
+      </ns0:grpSpPr>
+      <ns0:sp>
+        <ns0:nvSpPr>
+          <ns0:cNvPr id="2" name="Slide Image Placeholder 1"/>
+          <ns0:cNvSpPr>
+            <ns1:spLocks noGrp="1" noRot="1" noChangeAspect="1"/>
+          </ns0:cNvSpPr>
+          <ns0:nvPr>
+            <ns0:ph type="sldImg"/>
+          </ns0:nvPr>
+        </ns0:nvSpPr>
+        <ns0:spPr/>
+      </ns0:sp>
+      <ns0:sp>
+        <ns0:nvSpPr>
+          <ns0:cNvPr id="3" name="Notes Placeholder 2"/>
+          <ns0:cNvSpPr>
+            <ns1:spLocks noGrp="1"/>
+          </ns0:cNvSpPr>
+          <ns0:nvPr>
+            <ns0:ph type="body" idx="1"/>
+          </ns0:nvPr>
+        </ns0:nvSpPr>
+        <ns0:spPr/>
+        <ns0:txBody>
+          <ns1:bodyPr/>
+          <ns1:lstStyle/>
+          <ns1:p>
+            <ns1:r>
+              <ns1:rPr lang="en-US" dirty="0"/>
+              <ns1:t>Select Implement. When it finishes, the canvas marks Implement complete, checks off the implementation items, and adds a Diff row to the evidence. Select Changes and confirm the edits match the approved feature. Then select Browser validation. The agent checks the app in the Browser tab and records evidence. Unsupported checks become notes, not failures. The action ends when evidence is recorded and the session returns to Interactive mode. Do not wait for the dev server to stop before checking the result. Confirm that Clear filters is hidden by default, appears when a filter is active, resets all filters, and hides again.</ns1:t>
+            </ns1:r>
+            <ns1:endParaRPr lang="en-US" dirty="0"/>
+          </ns1:p>
+        </ns0:txBody>
+      </ns0:sp>
+      <ns0:sp>
+        <ns0:nvSpPr>
+          <ns0:cNvPr id="4" name="Slide Number Placeholder 3"/>
+          <ns0:cNvSpPr>
+            <ns1:spLocks noGrp="1"/>
+          </ns0:cNvSpPr>
+          <ns0:nvPr>
+            <ns0:ph type="sldNum" sz="quarter" idx="10"/>
+          </ns0:nvPr>
+        </ns0:nvSpPr>
+        <ns0:spPr/>
+        <ns0:txBody>
+          <ns1:bodyPr/>
+          <ns1:lstStyle/>
+          <ns1:p>
+            <ns1:fld id="{F7021451-1387-4CA6-816F-3879F97B5CBC}" type="slidenum">
+              <ns1:rPr lang="en-US"/>
+              <ns1:t>12</ns1:t>
+            </ns1:fld>
+            <ns1:endParaRPr lang="en-US"/>
+          </ns1:p>
+        </ns0:txBody>
+      </ns0:sp>
+    </ns0:spTree>
+    <ns0:extLst>
+      <ns0:ext uri="{BB962C8B-B14F-4D97-AF65-F5344CB8AC3E}">
+        <ns2:creationId val="1024086991"/>
+      </ns0:ext>
+    </ns0:extLst>
+  </ns0:cSld>
+  <ns0:clrMapOvr>
+    <ns1:masterClrMapping/>
+  </ns0:clrMapOvr>
+</ns0:notes>
 </file>
 
 <file path=ppt/notesSlides/notesSlide13.xml><?xml version="1.0" encoding="utf-8"?>
-<p:notes xmlns:a="http://schemas.openxmlformats.org/drawingml/2006/main" xmlns:r="http://schemas.openxmlformats.org/officeDocument/2006/relationships" xmlns:p="http://schemas.openxmlformats.org/presentationml/2006/main">
-  <p:cSld>
-    <p:spTree>
-      <p:nvGrpSpPr>
-        <p:cNvPr id="1" name=""/>
-        <p:cNvGrpSpPr/>
-        <p:nvPr/>
-      </p:nvGrpSpPr>
-      <p:grpSpPr>
-        <a:xfrm>
-          <a:off x="0" y="0"/>
-          <a:ext cx="0" cy="0"/>
-          <a:chOff x="0" y="0"/>
-          <a:chExt cx="0" cy="0"/>
-        </a:xfrm>
-      </p:grpSpPr>
-      <p:sp>
-        <p:nvSpPr>
-          <p:cNvPr id="2" name="Slide Image Placeholder 1"/>
-          <p:cNvSpPr>
-            <a:spLocks noGrp="1" noRot="1" noChangeAspect="1"/>
-          </p:cNvSpPr>
-          <p:nvPr>
-            <p:ph type="sldImg"/>
-          </p:nvPr>
-        </p:nvSpPr>
-        <p:spPr/>
-      </p:sp>
-      <p:sp>
-        <p:nvSpPr>
-          <p:cNvPr id="3" name="Notes Placeholder 2"/>
-          <p:cNvSpPr>
-            <a:spLocks noGrp="1"/>
-          </p:cNvSpPr>
-          <p:nvPr>
-            <p:ph type="body" idx="1"/>
-          </p:nvPr>
-        </p:nvSpPr>
-        <p:spPr/>
-        <p:txBody>
-          <a:bodyPr/>
-          <a:lstStyle/>
-          <a:p>
-            <a:r>
-              <a:rPr lang="en-US" dirty="0"/>
-              <a:t>Select Run final checks and compare with the baseline. Test counts can go up when implementation adds focused tests, but the final total must never be lower than the baseline. In this example, 4 baseline tests became 9. Use your own numbers from this worktree, not from the screenshot. Confirm the baseline matches the original terminal output, the diff is limited to the feature, all browser states were checked, and final tests and build pass. Uncheck anything that lacks evidence.</a:t>
-            </a:r>
-            <a:endParaRPr lang="en-US" dirty="0"/>
-          </a:p>
-        </p:txBody>
-      </p:sp>
-      <p:sp>
-        <p:nvSpPr>
-          <p:cNvPr id="4" name="Slide Number Placeholder 3"/>
-          <p:cNvSpPr>
-            <a:spLocks noGrp="1"/>
-          </p:cNvSpPr>
-          <p:nvPr>
-            <p:ph type="sldNum" sz="quarter" idx="10"/>
-          </p:nvPr>
-        </p:nvSpPr>
-        <p:spPr/>
-        <p:txBody>
-          <a:bodyPr/>
-          <a:lstStyle/>
-          <a:p>
-            <a:fld id="{F7021451-1387-4CA6-816F-3879F97B5CBC}" type="slidenum">
-              <a:rPr lang="en-US"/>
-              <a:t>13</a:t>
-            </a:fld>
-            <a:endParaRPr lang="en-US"/>
-          </a:p>
-        </p:txBody>
-      </p:sp>
-    </p:spTree>
-    <p:extLst>
-      <p:ext uri="{BB962C8B-B14F-4D97-AF65-F5344CB8AC3E}">
-        <p14:creationId xmlns:p14="http://schemas.microsoft.com/office/powerpoint/2010/main" val="1024086991"/>
-      </p:ext>
-    </p:extLst>
-  </p:cSld>
-  <p:clrMapOvr>
-    <a:masterClrMapping/>
-  </p:clrMapOvr>
-</p:notes>
+<ns0:notes xmlns:ns0="http://schemas.openxmlformats.org/presentationml/2006/main" xmlns:ns1="http://schemas.openxmlformats.org/drawingml/2006/main" xmlns:ns2="http://schemas.microsoft.com/office/powerpoint/2010/main">
+  <ns0:cSld>
+    <ns0:spTree>
+      <ns0:nvGrpSpPr>
+        <ns0:cNvPr id="1" name=""/>
+        <ns0:cNvGrpSpPr/>
+        <ns0:nvPr/>
+      </ns0:nvGrpSpPr>
+      <ns0:grpSpPr>
+        <ns1:xfrm>
+          <ns1:off x="0" y="0"/>
+          <ns1:ext cx="0" cy="0"/>
+          <ns1:chOff x="0" y="0"/>
+          <ns1:chExt cx="0" cy="0"/>
+        </ns1:xfrm>
+      </ns0:grpSpPr>
+      <ns0:sp>
+        <ns0:nvSpPr>
+          <ns0:cNvPr id="2" name="Slide Image Placeholder 1"/>
+          <ns0:cNvSpPr>
+            <ns1:spLocks noGrp="1" noRot="1" noChangeAspect="1"/>
+          </ns0:cNvSpPr>
+          <ns0:nvPr>
+            <ns0:ph type="sldImg"/>
+          </ns0:nvPr>
+        </ns0:nvSpPr>
+        <ns0:spPr/>
+      </ns0:sp>
+      <ns0:sp>
+        <ns0:nvSpPr>
+          <ns0:cNvPr id="3" name="Notes Placeholder 2"/>
+          <ns0:cNvSpPr>
+            <ns1:spLocks noGrp="1"/>
+          </ns0:cNvSpPr>
+          <ns0:nvPr>
+            <ns0:ph type="body" idx="1"/>
+          </ns0:nvPr>
+        </ns0:nvSpPr>
+        <ns0:spPr/>
+        <ns0:txBody>
+          <ns1:bodyPr/>
+          <ns1:lstStyle/>
+          <ns1:p>
+            <ns1:r>
+              <ns1:rPr lang="en-US" dirty="0"/>
+              <ns1:t>Select Run final checks and compare with the baseline. Test counts can go up when implementation adds focused tests, but the final total must never be lower than the baseline. The image shows 14 final tests as one example; your total can differ. Confirm the baseline matches the original output, the diff is limited to the feature, browser checks were recorded, and final tests and build pass. Uncheck anything that lacks evidence.</ns1:t>
+            </ns1:r>
+            <ns1:endParaRPr lang="en-US" dirty="0"/>
+          </ns1:p>
+        </ns0:txBody>
+      </ns0:sp>
+      <ns0:sp>
+        <ns0:nvSpPr>
+          <ns0:cNvPr id="4" name="Slide Number Placeholder 3"/>
+          <ns0:cNvSpPr>
+            <ns1:spLocks noGrp="1"/>
+          </ns0:cNvSpPr>
+          <ns0:nvPr>
+            <ns0:ph type="sldNum" sz="quarter" idx="10"/>
+          </ns0:nvPr>
+        </ns0:nvSpPr>
+        <ns0:spPr/>
+        <ns0:txBody>
+          <ns1:bodyPr/>
+          <ns1:lstStyle/>
+          <ns1:p>
+            <ns1:fld id="{F7021451-1387-4CA6-816F-3879F97B5CBC}" type="slidenum">
+              <ns1:rPr lang="en-US"/>
+              <ns1:t>13</ns1:t>
+            </ns1:fld>
+            <ns1:endParaRPr lang="en-US"/>
+          </ns1:p>
+        </ns0:txBody>
+      </ns0:sp>
+    </ns0:spTree>
+    <ns0:extLst>
+      <ns0:ext uri="{BB962C8B-B14F-4D97-AF65-F5344CB8AC3E}">
+        <ns2:creationId val="1024086991"/>
+      </ns0:ext>
+    </ns0:extLst>
+  </ns0:cSld>
+  <ns0:clrMapOvr>
+    <ns1:masterClrMapping/>
+  </ns0:clrMapOvr>
+</ns0:notes>
 </file>
 
 <file path=ppt/notesSlides/notesSlide14.xml><?xml version="1.0" encoding="utf-8"?>
@@ -1527,91 +1527,91 @@
 </file>
 
 <file path=ppt/notesSlides/notesSlide7.xml><?xml version="1.0" encoding="utf-8"?>
-<p:notes xmlns:a="http://schemas.openxmlformats.org/drawingml/2006/main" xmlns:r="http://schemas.openxmlformats.org/officeDocument/2006/relationships" xmlns:p="http://schemas.openxmlformats.org/presentationml/2006/main">
-  <p:cSld>
-    <p:spTree>
-      <p:nvGrpSpPr>
-        <p:cNvPr id="1" name=""/>
-        <p:cNvGrpSpPr/>
-        <p:nvPr/>
-      </p:nvGrpSpPr>
-      <p:grpSpPr>
-        <a:xfrm>
-          <a:off x="0" y="0"/>
-          <a:ext cx="0" cy="0"/>
-          <a:chOff x="0" y="0"/>
-          <a:chExt cx="0" cy="0"/>
-        </a:xfrm>
-      </p:grpSpPr>
-      <p:sp>
-        <p:nvSpPr>
-          <p:cNvPr id="2" name="Slide Image Placeholder 1"/>
-          <p:cNvSpPr>
-            <a:spLocks noGrp="1" noRot="1" noChangeAspect="1"/>
-          </p:cNvSpPr>
-          <p:nvPr>
-            <p:ph type="sldImg"/>
-          </p:nvPr>
-        </p:nvSpPr>
-        <p:spPr/>
-      </p:sp>
-      <p:sp>
-        <p:nvSpPr>
-          <p:cNvPr id="3" name="Notes Placeholder 2"/>
-          <p:cNvSpPr>
-            <a:spLocks noGrp="1"/>
-          </p:cNvSpPr>
-          <p:nvPr>
-            <p:ph type="body" idx="1"/>
-          </p:nvPr>
-        </p:nvSpPr>
-        <p:spPr/>
-        <p:txBody>
-          <a:bodyPr/>
-          <a:lstStyle/>
-          <a:p>
-            <a:r>
-              <a:rPr lang="en-US" dirty="0"/>
-              <a:t>Before the exercises, prepare a worktree session from main and record the baseline test and build totals. On the Repository Issues Kanban page of the Awesome Copilot website, select Open in Copilot app. Allow the Install plugin dialog, confirm the name accessibility-kanban@awesome-copilot, and select Install. Confirm it is listed under Installed in Customize, Plugins. Ask the session to restart canvas extensions. Then in the review panel select plus, Canvas, Repository Issues Kanban. Drag an issue between columns. If your organization blocks plugins, read this exercise and continue to Exercise 2.</a:t>
-            </a:r>
-            <a:endParaRPr lang="en-US" dirty="0"/>
-          </a:p>
-        </p:txBody>
-      </p:sp>
-      <p:sp>
-        <p:nvSpPr>
-          <p:cNvPr id="4" name="Slide Number Placeholder 3"/>
-          <p:cNvSpPr>
-            <a:spLocks noGrp="1"/>
-          </p:cNvSpPr>
-          <p:nvPr>
-            <p:ph type="sldNum" sz="quarter" idx="10"/>
-          </p:nvPr>
-        </p:nvSpPr>
-        <p:spPr/>
-        <p:txBody>
-          <a:bodyPr/>
-          <a:lstStyle/>
-          <a:p>
-            <a:fld id="{F7021451-1387-4CA6-816F-3879F97B5CBC}" type="slidenum">
-              <a:rPr lang="en-US"/>
-              <a:t>7</a:t>
-            </a:fld>
-            <a:endParaRPr lang="en-US"/>
-          </a:p>
-        </p:txBody>
-      </p:sp>
-    </p:spTree>
-    <p:extLst>
-      <p:ext uri="{BB962C8B-B14F-4D97-AF65-F5344CB8AC3E}">
-        <p14:creationId xmlns:p14="http://schemas.microsoft.com/office/powerpoint/2010/main" val="1024086991"/>
-      </p:ext>
-    </p:extLst>
-  </p:cSld>
-  <p:clrMapOvr>
-    <a:masterClrMapping/>
-  </p:clrMapOvr>
-</p:notes>
+<ns0:notes xmlns:ns0="http://schemas.openxmlformats.org/presentationml/2006/main" xmlns:ns1="http://schemas.openxmlformats.org/drawingml/2006/main" xmlns:ns2="http://schemas.microsoft.com/office/powerpoint/2010/main">
+  <ns0:cSld>
+    <ns0:spTree>
+      <ns0:nvGrpSpPr>
+        <ns0:cNvPr id="1" name=""/>
+        <ns0:cNvGrpSpPr/>
+        <ns0:nvPr/>
+      </ns0:nvGrpSpPr>
+      <ns0:grpSpPr>
+        <ns1:xfrm>
+          <ns1:off x="0" y="0"/>
+          <ns1:ext cx="0" cy="0"/>
+          <ns1:chOff x="0" y="0"/>
+          <ns1:chExt cx="0" cy="0"/>
+        </ns1:xfrm>
+      </ns0:grpSpPr>
+      <ns0:sp>
+        <ns0:nvSpPr>
+          <ns0:cNvPr id="2" name="Slide Image Placeholder 1"/>
+          <ns0:cNvSpPr>
+            <ns1:spLocks noGrp="1" noRot="1" noChangeAspect="1"/>
+          </ns0:cNvSpPr>
+          <ns0:nvPr>
+            <ns0:ph type="sldImg"/>
+          </ns0:nvPr>
+        </ns0:nvSpPr>
+        <ns0:spPr/>
+      </ns0:sp>
+      <ns0:sp>
+        <ns0:nvSpPr>
+          <ns0:cNvPr id="3" name="Notes Placeholder 2"/>
+          <ns0:cNvSpPr>
+            <ns1:spLocks noGrp="1"/>
+          </ns0:cNvSpPr>
+          <ns0:nvPr>
+            <ns0:ph type="body" idx="1"/>
+          </ns0:nvPr>
+        </ns0:nvSpPr>
+        <ns0:spPr/>
+        <ns0:txBody>
+          <ns1:bodyPr/>
+          <ns1:lstStyle/>
+          <ns1:p>
+            <ns1:r>
+              <ns1:rPr lang="en-US" dirty="0"/>
+              <ns1:t>Before the exercises, prepare a worktree session from main and record the baseline test and build totals. On the Repository Issues Kanban page of the Awesome Copilot website, select Open in Copilot app. Allow the Install plugin dialog, confirm the name accessibility-kanban@awesome-copilot, and select Install. Confirm it is listed under Installed in Customize, Plugins. Ask the session to restart canvas extensions. Open it from Add tab &gt; Canvas. Moving one issue card to Plan starts a background planning run; move one card at a time. If your organization blocks plugins, read this exercise and continue to Exercise 2.</ns1:t>
+            </ns1:r>
+            <ns1:endParaRPr lang="en-US" dirty="0"/>
+          </ns1:p>
+        </ns0:txBody>
+      </ns0:sp>
+      <ns0:sp>
+        <ns0:nvSpPr>
+          <ns0:cNvPr id="4" name="Slide Number Placeholder 3"/>
+          <ns0:cNvSpPr>
+            <ns1:spLocks noGrp="1"/>
+          </ns0:cNvSpPr>
+          <ns0:nvPr>
+            <ns0:ph type="sldNum" sz="quarter" idx="10"/>
+          </ns0:nvPr>
+        </ns0:nvSpPr>
+        <ns0:spPr/>
+        <ns0:txBody>
+          <ns1:bodyPr/>
+          <ns1:lstStyle/>
+          <ns1:p>
+            <ns1:fld id="{F7021451-1387-4CA6-816F-3879F97B5CBC}" type="slidenum">
+              <ns1:rPr lang="en-US"/>
+              <ns1:t>7</ns1:t>
+            </ns1:fld>
+            <ns1:endParaRPr lang="en-US"/>
+          </ns1:p>
+        </ns0:txBody>
+      </ns0:sp>
+    </ns0:spTree>
+    <ns0:extLst>
+      <ns0:ext uri="{BB962C8B-B14F-4D97-AF65-F5344CB8AC3E}">
+        <ns2:creationId val="1024086991"/>
+      </ns0:ext>
+    </ns0:extLst>
+  </ns0:cSld>
+  <ns0:clrMapOvr>
+    <ns1:masterClrMapping/>
+  </ns0:clrMapOvr>
+</ns0:notes>
 </file>
 
 <file path=ppt/notesSlides/notesSlide8.xml><?xml version="1.0" encoding="utf-8"?>
@@ -2420,3524 +2420,3524 @@
 </file>
 
 <file path=ppt/slides/slide10.xml><?xml version="1.0" encoding="utf-8"?>
-<p:sld xmlns:a="http://schemas.openxmlformats.org/drawingml/2006/main" xmlns:r="http://schemas.openxmlformats.org/officeDocument/2006/relationships" xmlns:p="http://schemas.openxmlformats.org/presentationml/2006/main">
-  <p:cSld name="Slide 10">
-    <p:bg>
-      <p:bgPr>
-        <a:solidFill>
-          <a:srgbClr val="FFFFFF"/>
-        </a:solidFill>
-      </p:bgPr>
-    </p:bg>
-    <p:spTree>
-      <p:nvGrpSpPr>
-        <p:cNvPr id="1" name=""/>
-        <p:cNvGrpSpPr/>
-        <p:nvPr/>
-      </p:nvGrpSpPr>
-      <p:grpSpPr>
-        <a:xfrm>
-          <a:off x="0" y="0"/>
-          <a:ext cx="0" cy="0"/>
-          <a:chOff x="0" y="0"/>
-          <a:chExt cx="0" cy="0"/>
-        </a:xfrm>
-      </p:grpSpPr>
-      <p:pic>
-        <p:nvPicPr>
-          <p:cNvPr id="2" name="Image 0" descr="">
-            <a:extLst>
-              <a:ext uri="{C183D7F6-B498-43B3-948B-1728B52AA6E4}">
-                <adec:decorative xmlns:adec="http://schemas.microsoft.com/office/drawing/2017/decorative" val="1"/>
-              </a:ext>
-            </a:extLst>
-          </p:cNvPr>
-          <p:cNvPicPr>
-            <a:picLocks noChangeAspect="1"/>
-          </p:cNvPicPr>
-          <p:nvPr/>
-        </p:nvPicPr>
-        <p:blipFill>
-          <a:blip r:embed="rId1"/>
-          <a:stretch>
-            <a:fillRect/>
-          </a:stretch>
-        </p:blipFill>
-        <p:spPr>
-          <a:xfrm>
-            <a:off x="6349901" y="0"/>
-            <a:ext cx="2793950" cy="1308050"/>
-          </a:xfrm>
-          <a:prstGeom prst="rect">
-            <a:avLst/>
-          </a:prstGeom>
-        </p:spPr>
-      </p:pic>
-      <p:sp>
-        <p:nvSpPr>
-          <p:cNvPr id="3" name="Text 0"/>
-          <p:cNvSpPr/>
-          <p:nvPr/>
-        </p:nvSpPr>
-        <p:spPr>
-          <a:xfrm>
-            <a:off x="7340501" y="177701"/>
-            <a:ext cx="1168301" cy="279350"/>
-          </a:xfrm>
-          <a:prstGeom prst="roundRect">
-            <a:avLst>
-              <a:gd name="adj" fmla="val 22731"/>
-            </a:avLst>
-          </a:prstGeom>
-          <a:solidFill>
-            <a:srgbClr val="1A7F37"/>
-          </a:solidFill>
-          <a:ln/>
-        </p:spPr>
-        <p:txBody>
-          <a:bodyPr wrap="square" rtlCol="0" anchor="ctr"/>
-          <a:lstStyle/>
-          <a:p>
-            <a:pPr indent="0" marL="0">
-              <a:buNone/>
-            </a:pPr>
-            <a:endParaRPr lang="en-US" dirty="0"/>
-          </a:p>
-        </p:txBody>
-      </p:sp>
-      <p:sp>
-        <p:nvSpPr>
-          <p:cNvPr id="4" name="Text 1"/>
-          <p:cNvSpPr/>
-          <p:nvPr/>
-        </p:nvSpPr>
-        <p:spPr>
-          <a:xfrm>
-            <a:off x="7461041" y="231577"/>
-            <a:ext cx="927071" cy="171450"/>
-          </a:xfrm>
-          <a:prstGeom prst="rect">
-            <a:avLst/>
-          </a:prstGeom>
-          <a:noFill/>
-          <a:ln/>
-        </p:spPr>
-        <p:txBody>
-          <a:bodyPr wrap="square" lIns="0" tIns="0" rIns="0" bIns="0" rtlCol="0" anchor="t"/>
-          <a:lstStyle/>
-          <a:p>
-            <a:pPr algn="ctr" indent="0" marL="0">
-              <a:buNone/>
-            </a:pPr>
-            <a:r>
-              <a:rPr lang="en-US" sz="1150" b="1" dirty="0">
-                <a:solidFill>
-                  <a:srgbClr val="FFFFFF"/>
-                </a:solidFill>
-                <a:latin typeface="Arial" pitchFamily="34" charset="0"/>
-                <a:ea typeface="Arial" pitchFamily="34" charset="-122"/>
-                <a:cs typeface="Arial" pitchFamily="34" charset="-120"/>
-              </a:rPr>
-              <a:t>CHAPTER 06</a:t>
-            </a:r>
-            <a:endParaRPr lang="en-US" sz="1150" dirty="0"/>
-          </a:p>
-        </p:txBody>
-      </p:sp>
-      <p:pic>
-        <p:nvPicPr>
-          <p:cNvPr id="5" name="Image 1" descr="Open this chapter on GitHub">
-            <a:hlinkClick r:id="rId3" tooltip="https://github.com/github/copilot-app-for-beginners/tree/main/06-canvases"/>
-          </p:cNvPr>
-          <p:cNvPicPr>
-            <a:picLocks noChangeAspect="1"/>
-          </p:cNvPicPr>
-          <p:nvPr/>
-        </p:nvPicPr>
-        <p:blipFill>
-          <a:blip r:embed="rId2"/>
-          <a:stretch>
-            <a:fillRect/>
-          </a:stretch>
-        </p:blipFill>
-        <p:spPr>
-          <a:xfrm>
-            <a:off x="8610600" y="165050"/>
-            <a:ext cx="304800" cy="304800"/>
-          </a:xfrm>
-          <a:prstGeom prst="rect">
-            <a:avLst/>
-          </a:prstGeom>
-        </p:spPr>
-      </p:pic>
-      <p:sp>
-        <p:nvSpPr>
-          <p:cNvPr id="6" name="Text 2"/>
-          <p:cNvSpPr/>
-          <p:nvPr/>
-        </p:nvSpPr>
-        <p:spPr>
-          <a:xfrm>
-            <a:off x="507950" y="381000"/>
-            <a:ext cx="8161020" cy="190500"/>
-          </a:xfrm>
-          <a:prstGeom prst="rect">
-            <a:avLst/>
-          </a:prstGeom>
-          <a:noFill/>
-          <a:ln/>
-        </p:spPr>
-        <p:txBody>
-          <a:bodyPr wrap="square" lIns="0" tIns="0" rIns="0" bIns="0" rtlCol="0" anchor="t"/>
-          <a:lstStyle/>
-          <a:p>
-            <a:pPr algn="l" indent="0" marL="0">
-              <a:buNone/>
-            </a:pPr>
-            <a:r>
-              <a:rPr lang="en-US" sz="1250" b="1" dirty="0">
-                <a:solidFill>
-                  <a:srgbClr val="1A7F37"/>
-                </a:solidFill>
-                <a:latin typeface="Arial" pitchFamily="34" charset="0"/>
-                <a:ea typeface="Arial" pitchFamily="34" charset="-122"/>
-                <a:cs typeface="Arial" pitchFamily="34" charset="-120"/>
-              </a:rPr>
-              <a:t>EXERCISE 3</a:t>
-            </a:r>
-            <a:endParaRPr lang="en-US" sz="1250" dirty="0"/>
-          </a:p>
-        </p:txBody>
-      </p:sp>
-      <p:sp>
-        <p:nvSpPr>
-          <p:cNvPr id="7" name="Text 3"/>
-          <p:cNvSpPr/>
-          <p:nvPr/>
-        </p:nvSpPr>
-        <p:spPr>
-          <a:xfrm>
-            <a:off x="507950" y="622250"/>
-            <a:ext cx="8161020" cy="419100"/>
-          </a:xfrm>
-          <a:prstGeom prst="rect">
-            <a:avLst/>
-          </a:prstGeom>
-          <a:noFill/>
-          <a:ln/>
-        </p:spPr>
-        <p:txBody>
-          <a:bodyPr wrap="square" lIns="0" tIns="0" rIns="0" bIns="0" rtlCol="0" anchor="t"/>
-          <a:lstStyle/>
-          <a:p>
-            <a:pPr algn="l" indent="0" marL="0">
-              <a:lnSpc>
-                <a:spcPts val="3300"/>
-              </a:lnSpc>
-              <a:spcBef>
-                <a:spcPts val="400"/>
-              </a:spcBef>
-              <a:buNone/>
-            </a:pPr>
-            <a:r>
-              <a:rPr lang="en-US" sz="2800" b="1" dirty="0">
-                <a:solidFill>
-                  <a:srgbClr val="1F2328"/>
-                </a:solidFill>
-                <a:latin typeface="Arial" pitchFamily="34" charset="0"/>
-                <a:ea typeface="Arial" pitchFamily="34" charset="-122"/>
-                <a:cs typeface="Arial" pitchFamily="34" charset="-120"/>
-              </a:rPr>
-              <a:t>The Feature Workbench</a:t>
-            </a:r>
-            <a:endParaRPr lang="en-US" sz="2800" dirty="0"/>
-          </a:p>
-        </p:txBody>
-      </p:sp>
-      <p:sp>
-        <p:nvSpPr>
-          <p:cNvPr id="8" name="Text 4"/>
-          <p:cNvSpPr/>
-          <p:nvPr/>
-        </p:nvSpPr>
-        <p:spPr>
-          <a:xfrm>
-            <a:off x="507950" y="1104751"/>
-            <a:ext cx="8161020" cy="273100"/>
-          </a:xfrm>
-          <a:prstGeom prst="rect">
-            <a:avLst/>
-          </a:prstGeom>
-          <a:noFill/>
-          <a:ln/>
-        </p:spPr>
-        <p:txBody>
-          <a:bodyPr wrap="square" lIns="0" tIns="0" rIns="0" bIns="0" rtlCol="0" anchor="t"/>
-          <a:lstStyle/>
-          <a:p>
-            <a:pPr algn="l" indent="0" marL="0">
-              <a:lnSpc>
-                <a:spcPts val="2000"/>
-              </a:lnSpc>
-              <a:spcBef>
-                <a:spcPts val="500"/>
-              </a:spcBef>
-              <a:buNone/>
-            </a:pPr>
-            <a:r>
-              <a:rPr lang="en-US" sz="1650" dirty="0">
-                <a:solidFill>
-                  <a:srgbClr val="59636E"/>
-                </a:solidFill>
-                <a:latin typeface="Arial" pitchFamily="34" charset="0"/>
-                <a:ea typeface="Arial" pitchFamily="34" charset="-122"/>
-                <a:cs typeface="Arial" pitchFamily="34" charset="-120"/>
-              </a:rPr>
-              <a:t>One </a:t>
-            </a:r>
-            <a:pPr algn="l" indent="0" marL="0">
-              <a:lnSpc>
-                <a:spcPts val="2000"/>
-              </a:lnSpc>
-              <a:spcBef>
-                <a:spcPts val="500"/>
-              </a:spcBef>
-              <a:buNone/>
-            </a:pPr>
-            <a:r>
-              <a:rPr lang="en-US" sz="1650" b="1" dirty="0">
-                <a:solidFill>
-                  <a:srgbClr val="0550AE"/>
-                </a:solidFill>
-                <a:latin typeface="Courier New" pitchFamily="34" charset="0"/>
-                <a:ea typeface="Courier New" pitchFamily="34" charset="-122"/>
-                <a:cs typeface="Courier New" pitchFamily="34" charset="-120"/>
-              </a:rPr>
-              <a:t>/create-canvas</a:t>
-            </a:r>
-            <a:pPr algn="l" indent="0" marL="0">
-              <a:lnSpc>
-                <a:spcPts val="2000"/>
-              </a:lnSpc>
-              <a:spcBef>
-                <a:spcPts val="500"/>
-              </a:spcBef>
-              <a:buNone/>
-            </a:pPr>
-            <a:r>
-              <a:rPr lang="en-US" sz="1650" dirty="0">
-                <a:solidFill>
-                  <a:srgbClr val="59636E"/>
-                </a:solidFill>
-                <a:latin typeface="Arial" pitchFamily="34" charset="0"/>
-                <a:ea typeface="Arial" pitchFamily="34" charset="-122"/>
-                <a:cs typeface="Arial" pitchFamily="34" charset="-120"/>
-              </a:rPr>
-              <a:t> prompt builds it.</a:t>
-            </a:r>
-            <a:endParaRPr lang="en-US" sz="1650" dirty="0"/>
-          </a:p>
-        </p:txBody>
-      </p:sp>
-      <p:sp>
-        <p:nvSpPr>
-          <p:cNvPr id="9" name="Text 5"/>
-          <p:cNvSpPr/>
-          <p:nvPr/>
-        </p:nvSpPr>
-        <p:spPr>
-          <a:xfrm>
-            <a:off x="507950" y="1765548"/>
-            <a:ext cx="381000" cy="381000"/>
-          </a:xfrm>
-          <a:prstGeom prst="roundRect">
-            <a:avLst>
-              <a:gd name="adj" fmla="val 23333"/>
-            </a:avLst>
-          </a:prstGeom>
-          <a:solidFill>
-            <a:srgbClr val="DAFBE1"/>
-          </a:solidFill>
-          <a:ln/>
-        </p:spPr>
-        <p:txBody>
-          <a:bodyPr wrap="square" rtlCol="0" anchor="ctr"/>
-          <a:lstStyle/>
-          <a:p>
-            <a:pPr indent="0" marL="0">
-              <a:buNone/>
-            </a:pPr>
-            <a:endParaRPr lang="en-US" dirty="0"/>
-          </a:p>
-        </p:txBody>
-      </p:sp>
-      <p:pic>
-        <p:nvPicPr>
-          <p:cNvPr id="10" name="Image 2" descr="">
-            <a:extLst>
-              <a:ext uri="{C183D7F6-B498-43B3-948B-1728B52AA6E4}">
-                <adec:decorative xmlns:adec="http://schemas.microsoft.com/office/drawing/2017/decorative" val="1"/>
-              </a:ext>
-            </a:extLst>
-          </p:cNvPr>
-          <p:cNvPicPr>
-            <a:picLocks noChangeAspect="1"/>
-          </p:cNvPicPr>
-          <p:nvPr/>
-        </p:nvPicPr>
-        <p:blipFill>
-          <a:blip r:embed="rId4"/>
-          <a:stretch>
-            <a:fillRect/>
-          </a:stretch>
-        </p:blipFill>
-        <p:spPr>
-          <a:xfrm>
-            <a:off x="590550" y="1848148"/>
-            <a:ext cx="215801" cy="215801"/>
-          </a:xfrm>
-          <a:prstGeom prst="rect">
-            <a:avLst/>
-          </a:prstGeom>
-        </p:spPr>
-      </p:pic>
-      <p:sp>
-        <p:nvSpPr>
-          <p:cNvPr id="11" name="Text 6"/>
-          <p:cNvSpPr/>
-          <p:nvPr/>
-        </p:nvSpPr>
-        <p:spPr>
-          <a:xfrm>
-            <a:off x="1041350" y="1730127"/>
-            <a:ext cx="1562070" cy="228600"/>
-          </a:xfrm>
-          <a:prstGeom prst="rect">
-            <a:avLst/>
-          </a:prstGeom>
-          <a:noFill/>
-          <a:ln/>
-        </p:spPr>
-        <p:txBody>
-          <a:bodyPr wrap="square" lIns="0" tIns="0" rIns="0" bIns="0" rtlCol="0" anchor="t"/>
-          <a:lstStyle/>
-          <a:p>
-            <a:pPr algn="l" indent="0" marL="0">
-              <a:buNone/>
-            </a:pPr>
-            <a:r>
-              <a:rPr lang="en-US" sz="1550" b="1" dirty="0">
-                <a:solidFill>
-                  <a:srgbClr val="1F2328"/>
-                </a:solidFill>
-                <a:latin typeface="Arial" pitchFamily="34" charset="0"/>
-                <a:ea typeface="Arial" pitchFamily="34" charset="-122"/>
-                <a:cs typeface="Arial" pitchFamily="34" charset="-120"/>
-              </a:rPr>
-              <a:t>Five stages</a:t>
-            </a:r>
-            <a:endParaRPr lang="en-US" sz="1550" dirty="0"/>
-          </a:p>
-        </p:txBody>
-      </p:sp>
-      <p:sp>
-        <p:nvSpPr>
-          <p:cNvPr id="12" name="Text 7"/>
-          <p:cNvSpPr/>
-          <p:nvPr/>
-        </p:nvSpPr>
-        <p:spPr>
-          <a:xfrm>
-            <a:off x="1041350" y="1984028"/>
-            <a:ext cx="1562070" cy="198090"/>
-          </a:xfrm>
-          <a:prstGeom prst="rect">
-            <a:avLst/>
-          </a:prstGeom>
-          <a:noFill/>
-          <a:ln/>
-        </p:spPr>
-        <p:txBody>
-          <a:bodyPr wrap="square" lIns="0" tIns="0" rIns="0" bIns="0" rtlCol="0" anchor="t"/>
-          <a:lstStyle/>
-          <a:p>
-            <a:pPr algn="l" indent="0" marL="0">
-              <a:lnSpc>
-                <a:spcPts val="1560"/>
-              </a:lnSpc>
-              <a:buNone/>
-            </a:pPr>
-            <a:r>
-              <a:rPr lang="en-US" sz="1350" dirty="0">
-                <a:solidFill>
-                  <a:srgbClr val="59636E"/>
-                </a:solidFill>
-                <a:latin typeface="Arial" pitchFamily="34" charset="0"/>
-                <a:ea typeface="Arial" pitchFamily="34" charset="-122"/>
-                <a:cs typeface="Arial" pitchFamily="34" charset="-120"/>
-              </a:rPr>
-              <a:t>Propose to Validate.</a:t>
-            </a:r>
-            <a:endParaRPr lang="en-US" sz="1350" dirty="0"/>
-          </a:p>
-        </p:txBody>
-      </p:sp>
-      <p:sp>
-        <p:nvSpPr>
-          <p:cNvPr id="13" name="Text 8"/>
-          <p:cNvSpPr/>
-          <p:nvPr/>
-        </p:nvSpPr>
-        <p:spPr>
-          <a:xfrm>
-            <a:off x="507950" y="2494359"/>
-            <a:ext cx="381000" cy="381000"/>
-          </a:xfrm>
-          <a:prstGeom prst="roundRect">
-            <a:avLst>
-              <a:gd name="adj" fmla="val 23333"/>
-            </a:avLst>
-          </a:prstGeom>
-          <a:solidFill>
-            <a:srgbClr val="DAFBE1"/>
-          </a:solidFill>
-          <a:ln/>
-        </p:spPr>
-        <p:txBody>
-          <a:bodyPr wrap="square" rtlCol="0" anchor="ctr"/>
-          <a:lstStyle/>
-          <a:p>
-            <a:pPr indent="0" marL="0">
-              <a:buNone/>
-            </a:pPr>
-            <a:endParaRPr lang="en-US" dirty="0"/>
-          </a:p>
-        </p:txBody>
-      </p:sp>
-      <p:pic>
-        <p:nvPicPr>
-          <p:cNvPr id="14" name="Image 3" descr="">
-            <a:extLst>
-              <a:ext uri="{C183D7F6-B498-43B3-948B-1728B52AA6E4}">
-                <adec:decorative xmlns:adec="http://schemas.microsoft.com/office/drawing/2017/decorative" val="1"/>
-              </a:ext>
-            </a:extLst>
-          </p:cNvPr>
-          <p:cNvPicPr>
-            <a:picLocks noChangeAspect="1"/>
-          </p:cNvPicPr>
-          <p:nvPr/>
-        </p:nvPicPr>
-        <p:blipFill>
-          <a:blip r:embed="rId5"/>
-          <a:stretch>
-            <a:fillRect/>
-          </a:stretch>
-        </p:blipFill>
-        <p:spPr>
-          <a:xfrm>
-            <a:off x="590550" y="2576959"/>
-            <a:ext cx="215801" cy="215801"/>
-          </a:xfrm>
-          <a:prstGeom prst="rect">
-            <a:avLst/>
-          </a:prstGeom>
-        </p:spPr>
-      </p:pic>
-      <p:sp>
-        <p:nvSpPr>
-          <p:cNvPr id="15" name="Text 9"/>
-          <p:cNvSpPr/>
-          <p:nvPr/>
-        </p:nvSpPr>
-        <p:spPr>
-          <a:xfrm>
-            <a:off x="1041350" y="2359819"/>
-            <a:ext cx="2564892" cy="228600"/>
-          </a:xfrm>
-          <a:prstGeom prst="rect">
-            <a:avLst/>
-          </a:prstGeom>
-          <a:noFill/>
-          <a:ln/>
-        </p:spPr>
-        <p:txBody>
-          <a:bodyPr wrap="square" lIns="0" tIns="0" rIns="0" bIns="0" rtlCol="0" anchor="t"/>
-          <a:lstStyle/>
-          <a:p>
-            <a:pPr algn="l" indent="0" marL="0">
-              <a:buNone/>
-            </a:pPr>
-            <a:r>
-              <a:rPr lang="en-US" sz="1550" b="1" dirty="0">
-                <a:solidFill>
-                  <a:srgbClr val="1F2328"/>
-                </a:solidFill>
-                <a:latin typeface="Arial" pitchFamily="34" charset="0"/>
-                <a:ea typeface="Arial" pitchFamily="34" charset="-122"/>
-                <a:cs typeface="Arial" pitchFamily="34" charset="-120"/>
-              </a:rPr>
-              <a:t>Proposal</a:t>
-            </a:r>
-            <a:endParaRPr lang="en-US" sz="1550" dirty="0"/>
-          </a:p>
-        </p:txBody>
-      </p:sp>
-      <p:sp>
-        <p:nvSpPr>
-          <p:cNvPr id="16" name="Text 10"/>
-          <p:cNvSpPr/>
-          <p:nvPr/>
-        </p:nvSpPr>
-        <p:spPr>
-          <a:xfrm>
-            <a:off x="1041350" y="2613720"/>
-            <a:ext cx="2564892" cy="396180"/>
-          </a:xfrm>
-          <a:prstGeom prst="rect">
-            <a:avLst/>
-          </a:prstGeom>
-          <a:noFill/>
-          <a:ln/>
-        </p:spPr>
-        <p:txBody>
-          <a:bodyPr wrap="square" lIns="0" tIns="0" rIns="0" bIns="0" rtlCol="0" anchor="t"/>
-          <a:lstStyle/>
-          <a:p>
-            <a:pPr algn="l" indent="0" marL="0">
-              <a:lnSpc>
-                <a:spcPts val="1560"/>
-              </a:lnSpc>
-              <a:buNone/>
-            </a:pPr>
-            <a:r>
-              <a:rPr lang="en-US" sz="1350" dirty="0">
-                <a:solidFill>
-                  <a:srgbClr val="59636E"/>
-                </a:solidFill>
-                <a:latin typeface="Arial" pitchFamily="34" charset="0"/>
-                <a:ea typeface="Arial" pitchFamily="34" charset="-122"/>
-                <a:cs typeface="Arial" pitchFamily="34" charset="-120"/>
-              </a:rPr>
-              <a:t>One field, one </a:t>
-            </a:r>
-            <a:pPr algn="l" indent="0" marL="0">
-              <a:lnSpc>
-                <a:spcPts val="1560"/>
-              </a:lnSpc>
-              <a:buNone/>
-            </a:pPr>
-            <a:r>
-              <a:rPr lang="en-US" sz="1350" b="1" dirty="0">
-                <a:solidFill>
-                  <a:srgbClr val="59636E"/>
-                </a:solidFill>
-                <a:latin typeface="Arial" pitchFamily="34" charset="0"/>
-                <a:ea typeface="Arial" pitchFamily="34" charset="-122"/>
-                <a:cs typeface="Arial" pitchFamily="34" charset="-120"/>
-              </a:rPr>
-              <a:t>Generate plan</a:t>
-            </a:r>
-            <a:pPr algn="l" indent="0" marL="0">
-              <a:lnSpc>
-                <a:spcPts val="1560"/>
-              </a:lnSpc>
-              <a:buNone/>
-            </a:pPr>
-            <a:r>
-              <a:rPr lang="en-US" sz="1350" dirty="0">
-                <a:solidFill>
-                  <a:srgbClr val="59636E"/>
-                </a:solidFill>
-                <a:latin typeface="Arial" pitchFamily="34" charset="0"/>
-                <a:ea typeface="Arial" pitchFamily="34" charset="-122"/>
-                <a:cs typeface="Arial" pitchFamily="34" charset="-120"/>
-              </a:rPr>
-              <a:t> button.</a:t>
-            </a:r>
-            <a:endParaRPr lang="en-US" sz="1350" dirty="0"/>
-          </a:p>
-        </p:txBody>
-      </p:sp>
-      <p:sp>
-        <p:nvSpPr>
-          <p:cNvPr id="17" name="Text 11"/>
-          <p:cNvSpPr/>
-          <p:nvPr/>
-        </p:nvSpPr>
-        <p:spPr>
-          <a:xfrm>
-            <a:off x="507950" y="3322141"/>
-            <a:ext cx="381000" cy="381000"/>
-          </a:xfrm>
-          <a:prstGeom prst="roundRect">
-            <a:avLst>
-              <a:gd name="adj" fmla="val 23333"/>
-            </a:avLst>
-          </a:prstGeom>
-          <a:solidFill>
-            <a:srgbClr val="DAFBE1"/>
-          </a:solidFill>
-          <a:ln/>
-        </p:spPr>
-        <p:txBody>
-          <a:bodyPr wrap="square" rtlCol="0" anchor="ctr"/>
-          <a:lstStyle/>
-          <a:p>
-            <a:pPr indent="0" marL="0">
-              <a:buNone/>
-            </a:pPr>
-            <a:endParaRPr lang="en-US" dirty="0"/>
-          </a:p>
-        </p:txBody>
-      </p:sp>
-      <p:pic>
-        <p:nvPicPr>
-          <p:cNvPr id="18" name="Image 4" descr="">
-            <a:extLst>
-              <a:ext uri="{C183D7F6-B498-43B3-948B-1728B52AA6E4}">
-                <adec:decorative xmlns:adec="http://schemas.microsoft.com/office/drawing/2017/decorative" val="1"/>
-              </a:ext>
-            </a:extLst>
-          </p:cNvPr>
-          <p:cNvPicPr>
-            <a:picLocks noChangeAspect="1"/>
-          </p:cNvPicPr>
-          <p:nvPr/>
-        </p:nvPicPr>
-        <p:blipFill>
-          <a:blip r:embed="rId6"/>
-          <a:stretch>
-            <a:fillRect/>
-          </a:stretch>
-        </p:blipFill>
-        <p:spPr>
-          <a:xfrm>
-            <a:off x="590550" y="3404741"/>
-            <a:ext cx="215801" cy="215801"/>
-          </a:xfrm>
-          <a:prstGeom prst="rect">
-            <a:avLst/>
-          </a:prstGeom>
-        </p:spPr>
-      </p:pic>
-      <p:sp>
-        <p:nvSpPr>
-          <p:cNvPr id="19" name="Text 12"/>
-          <p:cNvSpPr/>
-          <p:nvPr/>
-        </p:nvSpPr>
-        <p:spPr>
-          <a:xfrm>
-            <a:off x="1041350" y="3187601"/>
-            <a:ext cx="2564892" cy="228600"/>
-          </a:xfrm>
-          <a:prstGeom prst="rect">
-            <a:avLst/>
-          </a:prstGeom>
-          <a:noFill/>
-          <a:ln/>
-        </p:spPr>
-        <p:txBody>
-          <a:bodyPr wrap="square" lIns="0" tIns="0" rIns="0" bIns="0" rtlCol="0" anchor="t"/>
-          <a:lstStyle/>
-          <a:p>
-            <a:pPr algn="l" indent="0" marL="0">
-              <a:buNone/>
-            </a:pPr>
-            <a:r>
-              <a:rPr lang="en-US" sz="1550" b="1" dirty="0">
-                <a:solidFill>
-                  <a:srgbClr val="1F2328"/>
-                </a:solidFill>
-                <a:latin typeface="Arial" pitchFamily="34" charset="0"/>
-                <a:ea typeface="Arial" pitchFamily="34" charset="-122"/>
-                <a:cs typeface="Arial" pitchFamily="34" charset="-120"/>
-              </a:rPr>
-              <a:t>Actions</a:t>
-            </a:r>
-            <a:endParaRPr lang="en-US" sz="1550" dirty="0"/>
-          </a:p>
-        </p:txBody>
-      </p:sp>
-      <p:sp>
-        <p:nvSpPr>
-          <p:cNvPr id="20" name="Text 13"/>
-          <p:cNvSpPr/>
-          <p:nvPr/>
-        </p:nvSpPr>
-        <p:spPr>
-          <a:xfrm>
-            <a:off x="1041350" y="3441502"/>
-            <a:ext cx="2564892" cy="396180"/>
-          </a:xfrm>
-          <a:prstGeom prst="rect">
-            <a:avLst/>
-          </a:prstGeom>
-          <a:noFill/>
-          <a:ln/>
-        </p:spPr>
-        <p:txBody>
-          <a:bodyPr wrap="square" lIns="0" tIns="0" rIns="0" bIns="0" rtlCol="0" anchor="t"/>
-          <a:lstStyle/>
-          <a:p>
-            <a:pPr algn="l" indent="0" marL="0">
-              <a:lnSpc>
-                <a:spcPts val="1560"/>
-              </a:lnSpc>
-              <a:buNone/>
-            </a:pPr>
-            <a:r>
-              <a:rPr lang="en-US" sz="1350" dirty="0">
-                <a:solidFill>
-                  <a:srgbClr val="59636E"/>
-                </a:solidFill>
-                <a:latin typeface="Arial" pitchFamily="34" charset="0"/>
-                <a:ea typeface="Arial" pitchFamily="34" charset="-122"/>
-                <a:cs typeface="Arial" pitchFamily="34" charset="-120"/>
-              </a:rPr>
-              <a:t>Each one asks the agent to do work.</a:t>
-            </a:r>
-            <a:endParaRPr lang="en-US" sz="1350" dirty="0"/>
-          </a:p>
-        </p:txBody>
-      </p:sp>
-      <p:sp>
-        <p:nvSpPr>
-          <p:cNvPr id="21" name="Text 14"/>
-          <p:cNvSpPr/>
-          <p:nvPr/>
-        </p:nvSpPr>
-        <p:spPr>
-          <a:xfrm>
-            <a:off x="507950" y="4050804"/>
-            <a:ext cx="381000" cy="381000"/>
-          </a:xfrm>
-          <a:prstGeom prst="roundRect">
-            <a:avLst>
-              <a:gd name="adj" fmla="val 23333"/>
-            </a:avLst>
-          </a:prstGeom>
-          <a:solidFill>
-            <a:srgbClr val="DAFBE1"/>
-          </a:solidFill>
-          <a:ln/>
-        </p:spPr>
-        <p:txBody>
-          <a:bodyPr wrap="square" rtlCol="0" anchor="ctr"/>
-          <a:lstStyle/>
-          <a:p>
-            <a:pPr indent="0" marL="0">
-              <a:buNone/>
-            </a:pPr>
-            <a:endParaRPr lang="en-US" dirty="0"/>
-          </a:p>
-        </p:txBody>
-      </p:sp>
-      <p:pic>
-        <p:nvPicPr>
-          <p:cNvPr id="22" name="Image 5" descr="">
-            <a:extLst>
-              <a:ext uri="{C183D7F6-B498-43B3-948B-1728B52AA6E4}">
-                <adec:decorative xmlns:adec="http://schemas.microsoft.com/office/drawing/2017/decorative" val="1"/>
-              </a:ext>
-            </a:extLst>
-          </p:cNvPr>
-          <p:cNvPicPr>
-            <a:picLocks noChangeAspect="1"/>
-          </p:cNvPicPr>
-          <p:nvPr/>
-        </p:nvPicPr>
-        <p:blipFill>
-          <a:blip r:embed="rId7"/>
-          <a:stretch>
-            <a:fillRect/>
-          </a:stretch>
-        </p:blipFill>
-        <p:spPr>
-          <a:xfrm>
-            <a:off x="590550" y="4133404"/>
-            <a:ext cx="215801" cy="215801"/>
-          </a:xfrm>
-          <a:prstGeom prst="rect">
-            <a:avLst/>
-          </a:prstGeom>
-        </p:spPr>
-      </p:pic>
-      <p:sp>
-        <p:nvSpPr>
-          <p:cNvPr id="23" name="Text 15"/>
-          <p:cNvSpPr/>
-          <p:nvPr/>
-        </p:nvSpPr>
-        <p:spPr>
-          <a:xfrm>
-            <a:off x="1041350" y="4015383"/>
-            <a:ext cx="2274490" cy="228600"/>
-          </a:xfrm>
-          <a:prstGeom prst="rect">
-            <a:avLst/>
-          </a:prstGeom>
-          <a:noFill/>
-          <a:ln/>
-        </p:spPr>
-        <p:txBody>
-          <a:bodyPr wrap="square" lIns="0" tIns="0" rIns="0" bIns="0" rtlCol="0" anchor="t"/>
-          <a:lstStyle/>
-          <a:p>
-            <a:pPr algn="l" indent="0" marL="0">
-              <a:buNone/>
-            </a:pPr>
-            <a:r>
-              <a:rPr lang="en-US" sz="1550" b="1" dirty="0">
-                <a:solidFill>
-                  <a:srgbClr val="1F2328"/>
-                </a:solidFill>
-                <a:latin typeface="Arial" pitchFamily="34" charset="0"/>
-                <a:ea typeface="Arial" pitchFamily="34" charset="-122"/>
-                <a:cs typeface="Arial" pitchFamily="34" charset="-120"/>
-              </a:rPr>
-              <a:t>Checklist and evidence</a:t>
-            </a:r>
-            <a:endParaRPr lang="en-US" sz="1550" dirty="0"/>
-          </a:p>
-        </p:txBody>
-      </p:sp>
-      <p:sp>
-        <p:nvSpPr>
-          <p:cNvPr id="24" name="Text 16"/>
-          <p:cNvSpPr/>
-          <p:nvPr/>
-        </p:nvSpPr>
-        <p:spPr>
-          <a:xfrm>
-            <a:off x="1041350" y="4269284"/>
-            <a:ext cx="2274490" cy="198090"/>
-          </a:xfrm>
-          <a:prstGeom prst="rect">
-            <a:avLst/>
-          </a:prstGeom>
-          <a:noFill/>
-          <a:ln/>
-        </p:spPr>
-        <p:txBody>
-          <a:bodyPr wrap="square" lIns="0" tIns="0" rIns="0" bIns="0" rtlCol="0" anchor="t"/>
-          <a:lstStyle/>
-          <a:p>
-            <a:pPr algn="l" indent="0" marL="0">
-              <a:lnSpc>
-                <a:spcPts val="1560"/>
-              </a:lnSpc>
-              <a:buNone/>
-            </a:pPr>
-            <a:r>
-              <a:rPr lang="en-US" sz="1350" dirty="0">
-                <a:solidFill>
-                  <a:srgbClr val="59636E"/>
-                </a:solidFill>
-                <a:latin typeface="Arial" pitchFamily="34" charset="0"/>
-                <a:ea typeface="Arial" pitchFamily="34" charset="-122"/>
-                <a:cs typeface="Arial" pitchFamily="34" charset="-120"/>
-              </a:rPr>
-              <a:t>Marked only from real output.</a:t>
-            </a:r>
-            <a:endParaRPr lang="en-US" sz="1350" dirty="0"/>
-          </a:p>
-        </p:txBody>
-      </p:sp>
-      <p:sp>
-        <p:nvSpPr>
-          <p:cNvPr id="25" name="Text 17"/>
-          <p:cNvSpPr/>
-          <p:nvPr/>
-        </p:nvSpPr>
-        <p:spPr>
-          <a:xfrm>
-            <a:off x="3762226" y="1973461"/>
-            <a:ext cx="4870400" cy="2250430"/>
-          </a:xfrm>
-          <a:prstGeom prst="roundRect">
-            <a:avLst>
-              <a:gd name="adj" fmla="val 3386"/>
-            </a:avLst>
-          </a:prstGeom>
-          <a:solidFill>
-            <a:srgbClr val="FFFFFF"/>
-          </a:solidFill>
-          <a:ln w="9525">
-            <a:solidFill>
-              <a:srgbClr val="D1D9E0"/>
-            </a:solidFill>
-          </a:ln>
-          <a:effectLst>
-            <a:outerShdw sx="100000" sy="100000" kx="0" ky="0" algn="bl" rotWithShape="0" blurRad="38100" dist="9525" dir="5400000">
-              <a:srgbClr val="1f2328">
-                <a:alpha val="12000"/>
-              </a:srgbClr>
-            </a:outerShdw>
-          </a:effectLst>
-        </p:spPr>
-        <p:txBody>
-          <a:bodyPr wrap="square" rtlCol="0" anchor="ctr"/>
-          <a:lstStyle/>
-          <a:p>
-            <a:pPr indent="0" marL="0">
-              <a:buNone/>
-            </a:pPr>
-            <a:endParaRPr lang="en-US" dirty="0"/>
-          </a:p>
-        </p:txBody>
-      </p:sp>
-      <p:pic>
-        <p:nvPicPr>
-          <p:cNvPr id="26" name="Image 6" descr="Feature Workbench canvas in the side panel with five stages, a feature proposal field, actions, a checklist, and an empty evidence area">    </p:cNvPr>
-          <p:cNvPicPr>
-            <a:picLocks noChangeAspect="1"/>
-          </p:cNvPicPr>
-          <p:nvPr/>
-        </p:nvPicPr>
-        <p:blipFill>
-          <a:blip r:embed="rId8"/>
-          <a:stretch>
-            <a:fillRect/>
-          </a:stretch>
-        </p:blipFill>
-        <p:spPr>
-          <a:xfrm>
-            <a:off x="3809851" y="2021086"/>
-            <a:ext cx="4775150" cy="2155180"/>
-          </a:xfrm>
-          <a:prstGeom prst="rect">
-            <a:avLst/>
-          </a:prstGeom>
-        </p:spPr>
-      </p:pic>
-    </p:spTree>
-  </p:cSld>
-  <p:clrMapOvr>
-    <a:masterClrMapping/>
-  </p:clrMapOvr>
-</p:sld>
+<ns0:sld xmlns:ns0="http://schemas.openxmlformats.org/presentationml/2006/main" xmlns:ns1="http://schemas.openxmlformats.org/drawingml/2006/main" xmlns:ns2="http://schemas.microsoft.com/office/drawing/2017/decorative" xmlns:ns3="http://schemas.openxmlformats.org/officeDocument/2006/relationships">
+  <ns0:cSld name="Slide 10">
+    <ns0:bg>
+      <ns0:bgPr>
+        <ns1:solidFill>
+          <ns1:srgbClr val="FFFFFF"/>
+        </ns1:solidFill>
+      </ns0:bgPr>
+    </ns0:bg>
+    <ns0:spTree>
+      <ns0:nvGrpSpPr>
+        <ns0:cNvPr id="1" name=""/>
+        <ns0:cNvGrpSpPr/>
+        <ns0:nvPr/>
+      </ns0:nvGrpSpPr>
+      <ns0:grpSpPr>
+        <ns1:xfrm>
+          <ns1:off x="0" y="0"/>
+          <ns1:ext cx="0" cy="0"/>
+          <ns1:chOff x="0" y="0"/>
+          <ns1:chExt cx="0" cy="0"/>
+        </ns1:xfrm>
+      </ns0:grpSpPr>
+      <ns0:pic>
+        <ns0:nvPicPr>
+          <ns0:cNvPr id="2" name="Image 0" descr="">
+            <ns1:extLst>
+              <ns1:ext uri="{C183D7F6-B498-43B3-948B-1728B52AA6E4}">
+                <ns2:decorative val="1"/>
+              </ns1:ext>
+            </ns1:extLst>
+          </ns0:cNvPr>
+          <ns0:cNvPicPr>
+            <ns1:picLocks noChangeAspect="1"/>
+          </ns0:cNvPicPr>
+          <ns0:nvPr/>
+        </ns0:nvPicPr>
+        <ns0:blipFill>
+          <ns1:blip ns3:embed="rId1"/>
+          <ns1:stretch>
+            <ns1:fillRect/>
+          </ns1:stretch>
+        </ns0:blipFill>
+        <ns0:spPr>
+          <ns1:xfrm>
+            <ns1:off x="6349901" y="0"/>
+            <ns1:ext cx="2793950" cy="1308050"/>
+          </ns1:xfrm>
+          <ns1:prstGeom prst="rect">
+            <ns1:avLst/>
+          </ns1:prstGeom>
+        </ns0:spPr>
+      </ns0:pic>
+      <ns0:sp>
+        <ns0:nvSpPr>
+          <ns0:cNvPr id="3" name="Text 0"/>
+          <ns0:cNvSpPr/>
+          <ns0:nvPr/>
+        </ns0:nvSpPr>
+        <ns0:spPr>
+          <ns1:xfrm>
+            <ns1:off x="7340501" y="177701"/>
+            <ns1:ext cx="1168301" cy="279350"/>
+          </ns1:xfrm>
+          <ns1:prstGeom prst="roundRect">
+            <ns1:avLst>
+              <ns1:gd name="adj" fmla="val 22731"/>
+            </ns1:avLst>
+          </ns1:prstGeom>
+          <ns1:solidFill>
+            <ns1:srgbClr val="1A7F37"/>
+          </ns1:solidFill>
+          <ns1:ln/>
+        </ns0:spPr>
+        <ns0:txBody>
+          <ns1:bodyPr wrap="square" rtlCol="0" anchor="ctr"/>
+          <ns1:lstStyle/>
+          <ns1:p>
+            <ns1:pPr indent="0" marL="0">
+              <ns1:buNone/>
+            </ns1:pPr>
+            <ns1:endParaRPr lang="en-US" dirty="0"/>
+          </ns1:p>
+        </ns0:txBody>
+      </ns0:sp>
+      <ns0:sp>
+        <ns0:nvSpPr>
+          <ns0:cNvPr id="4" name="Text 1"/>
+          <ns0:cNvSpPr/>
+          <ns0:nvPr/>
+        </ns0:nvSpPr>
+        <ns0:spPr>
+          <ns1:xfrm>
+            <ns1:off x="7461041" y="231577"/>
+            <ns1:ext cx="927071" cy="171450"/>
+          </ns1:xfrm>
+          <ns1:prstGeom prst="rect">
+            <ns1:avLst/>
+          </ns1:prstGeom>
+          <ns1:noFill/>
+          <ns1:ln/>
+        </ns0:spPr>
+        <ns0:txBody>
+          <ns1:bodyPr wrap="square" lIns="0" tIns="0" rIns="0" bIns="0" rtlCol="0" anchor="t"/>
+          <ns1:lstStyle/>
+          <ns1:p>
+            <ns1:pPr algn="ctr" indent="0" marL="0">
+              <ns1:buNone/>
+            </ns1:pPr>
+            <ns1:r>
+              <ns1:rPr lang="en-US" sz="1150" b="1" dirty="0">
+                <ns1:solidFill>
+                  <ns1:srgbClr val="FFFFFF"/>
+                </ns1:solidFill>
+                <ns1:latin typeface="Arial" pitchFamily="34" charset="0"/>
+                <ns1:ea typeface="Arial" pitchFamily="34" charset="-122"/>
+                <ns1:cs typeface="Arial" pitchFamily="34" charset="-120"/>
+              </ns1:rPr>
+              <ns1:t>CHAPTER 06</ns1:t>
+            </ns1:r>
+            <ns1:endParaRPr lang="en-US" sz="1150" dirty="0"/>
+          </ns1:p>
+        </ns0:txBody>
+      </ns0:sp>
+      <ns0:pic>
+        <ns0:nvPicPr>
+          <ns0:cNvPr id="5" name="Image 1" descr="Open this chapter on GitHub">
+            <ns1:hlinkClick ns3:id="rId3" tooltip="https://github.com/github/copilot-app-for-beginners/tree/main/06-canvases"/>
+          </ns0:cNvPr>
+          <ns0:cNvPicPr>
+            <ns1:picLocks noChangeAspect="1"/>
+          </ns0:cNvPicPr>
+          <ns0:nvPr/>
+        </ns0:nvPicPr>
+        <ns0:blipFill>
+          <ns1:blip ns3:embed="rId2"/>
+          <ns1:stretch>
+            <ns1:fillRect/>
+          </ns1:stretch>
+        </ns0:blipFill>
+        <ns0:spPr>
+          <ns1:xfrm>
+            <ns1:off x="8610600" y="165050"/>
+            <ns1:ext cx="304800" cy="304800"/>
+          </ns1:xfrm>
+          <ns1:prstGeom prst="rect">
+            <ns1:avLst/>
+          </ns1:prstGeom>
+        </ns0:spPr>
+      </ns0:pic>
+      <ns0:sp>
+        <ns0:nvSpPr>
+          <ns0:cNvPr id="6" name="Text 2"/>
+          <ns0:cNvSpPr/>
+          <ns0:nvPr/>
+        </ns0:nvSpPr>
+        <ns0:spPr>
+          <ns1:xfrm>
+            <ns1:off x="507950" y="381000"/>
+            <ns1:ext cx="8161020" cy="190500"/>
+          </ns1:xfrm>
+          <ns1:prstGeom prst="rect">
+            <ns1:avLst/>
+          </ns1:prstGeom>
+          <ns1:noFill/>
+          <ns1:ln/>
+        </ns0:spPr>
+        <ns0:txBody>
+          <ns1:bodyPr wrap="square" lIns="0" tIns="0" rIns="0" bIns="0" rtlCol="0" anchor="t"/>
+          <ns1:lstStyle/>
+          <ns1:p>
+            <ns1:pPr algn="l" indent="0" marL="0">
+              <ns1:buNone/>
+            </ns1:pPr>
+            <ns1:r>
+              <ns1:rPr lang="en-US" sz="1250" b="1" dirty="0">
+                <ns1:solidFill>
+                  <ns1:srgbClr val="1A7F37"/>
+                </ns1:solidFill>
+                <ns1:latin typeface="Arial" pitchFamily="34" charset="0"/>
+                <ns1:ea typeface="Arial" pitchFamily="34" charset="-122"/>
+                <ns1:cs typeface="Arial" pitchFamily="34" charset="-120"/>
+              </ns1:rPr>
+              <ns1:t>EXERCISE 3</ns1:t>
+            </ns1:r>
+            <ns1:endParaRPr lang="en-US" sz="1250" dirty="0"/>
+          </ns1:p>
+        </ns0:txBody>
+      </ns0:sp>
+      <ns0:sp>
+        <ns0:nvSpPr>
+          <ns0:cNvPr id="7" name="Text 3"/>
+          <ns0:cNvSpPr/>
+          <ns0:nvPr/>
+        </ns0:nvSpPr>
+        <ns0:spPr>
+          <ns1:xfrm>
+            <ns1:off x="507950" y="622250"/>
+            <ns1:ext cx="8161020" cy="419100"/>
+          </ns1:xfrm>
+          <ns1:prstGeom prst="rect">
+            <ns1:avLst/>
+          </ns1:prstGeom>
+          <ns1:noFill/>
+          <ns1:ln/>
+        </ns0:spPr>
+        <ns0:txBody>
+          <ns1:bodyPr wrap="square" lIns="0" tIns="0" rIns="0" bIns="0" rtlCol="0" anchor="t"/>
+          <ns1:lstStyle/>
+          <ns1:p>
+            <ns1:pPr algn="l" indent="0" marL="0">
+              <ns1:lnSpc>
+                <ns1:spcPts val="3300"/>
+              </ns1:lnSpc>
+              <ns1:spcBef>
+                <ns1:spcPts val="400"/>
+              </ns1:spcBef>
+              <ns1:buNone/>
+            </ns1:pPr>
+            <ns1:r>
+              <ns1:rPr lang="en-US" sz="2800" b="1" dirty="0">
+                <ns1:solidFill>
+                  <ns1:srgbClr val="1F2328"/>
+                </ns1:solidFill>
+                <ns1:latin typeface="Arial" pitchFamily="34" charset="0"/>
+                <ns1:ea typeface="Arial" pitchFamily="34" charset="-122"/>
+                <ns1:cs typeface="Arial" pitchFamily="34" charset="-120"/>
+              </ns1:rPr>
+              <ns1:t>The Feature Workbench</ns1:t>
+            </ns1:r>
+            <ns1:endParaRPr lang="en-US" sz="2800" dirty="0"/>
+          </ns1:p>
+        </ns0:txBody>
+      </ns0:sp>
+      <ns0:sp>
+        <ns0:nvSpPr>
+          <ns0:cNvPr id="8" name="Text 4"/>
+          <ns0:cNvSpPr/>
+          <ns0:nvPr/>
+        </ns0:nvSpPr>
+        <ns0:spPr>
+          <ns1:xfrm>
+            <ns1:off x="507950" y="1104751"/>
+            <ns1:ext cx="8161020" cy="273100"/>
+          </ns1:xfrm>
+          <ns1:prstGeom prst="rect">
+            <ns1:avLst/>
+          </ns1:prstGeom>
+          <ns1:noFill/>
+          <ns1:ln/>
+        </ns0:spPr>
+        <ns0:txBody>
+          <ns1:bodyPr wrap="square" lIns="0" tIns="0" rIns="0" bIns="0" rtlCol="0" anchor="t"/>
+          <ns1:lstStyle/>
+          <ns1:p>
+            <ns1:pPr algn="l" indent="0" marL="0">
+              <ns1:lnSpc>
+                <ns1:spcPts val="2000"/>
+              </ns1:lnSpc>
+              <ns1:spcBef>
+                <ns1:spcPts val="500"/>
+              </ns1:spcBef>
+              <ns1:buNone/>
+            </ns1:pPr>
+            <ns1:r>
+              <ns1:rPr lang="en-US" sz="1650" dirty="0">
+                <ns1:solidFill>
+                  <ns1:srgbClr val="59636E"/>
+                </ns1:solidFill>
+                <ns1:latin typeface="Arial" pitchFamily="34" charset="0"/>
+                <ns1:ea typeface="Arial" pitchFamily="34" charset="-122"/>
+                <ns1:cs typeface="Arial" pitchFamily="34" charset="-120"/>
+              </ns1:rPr>
+              <ns1:t>One </ns1:t>
+            </ns1:r>
+            <ns1:pPr algn="l" indent="0" marL="0">
+              <ns1:lnSpc>
+                <ns1:spcPts val="2000"/>
+              </ns1:lnSpc>
+              <ns1:spcBef>
+                <ns1:spcPts val="500"/>
+              </ns1:spcBef>
+              <ns1:buNone/>
+            </ns1:pPr>
+            <ns1:r>
+              <ns1:rPr lang="en-US" sz="1650" b="1" dirty="0">
+                <ns1:solidFill>
+                  <ns1:srgbClr val="0550AE"/>
+                </ns1:solidFill>
+                <ns1:latin typeface="Courier New" pitchFamily="34" charset="0"/>
+                <ns1:ea typeface="Courier New" pitchFamily="34" charset="-122"/>
+                <ns1:cs typeface="Courier New" pitchFamily="34" charset="-120"/>
+              </ns1:rPr>
+              <ns1:t>/create-canvas</ns1:t>
+            </ns1:r>
+            <ns1:pPr algn="l" indent="0" marL="0">
+              <ns1:lnSpc>
+                <ns1:spcPts val="2000"/>
+              </ns1:lnSpc>
+              <ns1:spcBef>
+                <ns1:spcPts val="500"/>
+              </ns1:spcBef>
+              <ns1:buNone/>
+            </ns1:pPr>
+            <ns1:r>
+              <ns1:rPr lang="en-US" sz="1650" dirty="0">
+                <ns1:solidFill>
+                  <ns1:srgbClr val="59636E"/>
+                </ns1:solidFill>
+                <ns1:latin typeface="Arial" pitchFamily="34" charset="0"/>
+                <ns1:ea typeface="Arial" pitchFamily="34" charset="-122"/>
+                <ns1:cs typeface="Arial" pitchFamily="34" charset="-120"/>
+              </ns1:rPr>
+              <ns1:t> prompt builds it.</ns1:t>
+            </ns1:r>
+            <ns1:endParaRPr lang="en-US" sz="1650" dirty="0"/>
+          </ns1:p>
+        </ns0:txBody>
+      </ns0:sp>
+      <ns0:sp>
+        <ns0:nvSpPr>
+          <ns0:cNvPr id="9" name="Text 5"/>
+          <ns0:cNvSpPr/>
+          <ns0:nvPr/>
+        </ns0:nvSpPr>
+        <ns0:spPr>
+          <ns1:xfrm>
+            <ns1:off x="507950" y="1765548"/>
+            <ns1:ext cx="381000" cy="381000"/>
+          </ns1:xfrm>
+          <ns1:prstGeom prst="roundRect">
+            <ns1:avLst>
+              <ns1:gd name="adj" fmla="val 23333"/>
+            </ns1:avLst>
+          </ns1:prstGeom>
+          <ns1:solidFill>
+            <ns1:srgbClr val="DAFBE1"/>
+          </ns1:solidFill>
+          <ns1:ln/>
+        </ns0:spPr>
+        <ns0:txBody>
+          <ns1:bodyPr wrap="square" rtlCol="0" anchor="ctr"/>
+          <ns1:lstStyle/>
+          <ns1:p>
+            <ns1:pPr indent="0" marL="0">
+              <ns1:buNone/>
+            </ns1:pPr>
+            <ns1:endParaRPr lang="en-US" dirty="0"/>
+          </ns1:p>
+        </ns0:txBody>
+      </ns0:sp>
+      <ns0:pic>
+        <ns0:nvPicPr>
+          <ns0:cNvPr id="10" name="Image 2" descr="">
+            <ns1:extLst>
+              <ns1:ext uri="{C183D7F6-B498-43B3-948B-1728B52AA6E4}">
+                <ns2:decorative val="1"/>
+              </ns1:ext>
+            </ns1:extLst>
+          </ns0:cNvPr>
+          <ns0:cNvPicPr>
+            <ns1:picLocks noChangeAspect="1"/>
+          </ns0:cNvPicPr>
+          <ns0:nvPr/>
+        </ns0:nvPicPr>
+        <ns0:blipFill>
+          <ns1:blip ns3:embed="rId4"/>
+          <ns1:stretch>
+            <ns1:fillRect/>
+          </ns1:stretch>
+        </ns0:blipFill>
+        <ns0:spPr>
+          <ns1:xfrm>
+            <ns1:off x="590550" y="1848148"/>
+            <ns1:ext cx="215801" cy="215801"/>
+          </ns1:xfrm>
+          <ns1:prstGeom prst="rect">
+            <ns1:avLst/>
+          </ns1:prstGeom>
+        </ns0:spPr>
+      </ns0:pic>
+      <ns0:sp>
+        <ns0:nvSpPr>
+          <ns0:cNvPr id="11" name="Text 6"/>
+          <ns0:cNvSpPr/>
+          <ns0:nvPr/>
+        </ns0:nvSpPr>
+        <ns0:spPr>
+          <ns1:xfrm>
+            <ns1:off x="1041350" y="1730127"/>
+            <ns1:ext cx="1562070" cy="228600"/>
+          </ns1:xfrm>
+          <ns1:prstGeom prst="rect">
+            <ns1:avLst/>
+          </ns1:prstGeom>
+          <ns1:noFill/>
+          <ns1:ln/>
+        </ns0:spPr>
+        <ns0:txBody>
+          <ns1:bodyPr wrap="square" lIns="0" tIns="0" rIns="0" bIns="0" rtlCol="0" anchor="t"/>
+          <ns1:lstStyle/>
+          <ns1:p>
+            <ns1:pPr algn="l" indent="0" marL="0">
+              <ns1:buNone/>
+            </ns1:pPr>
+            <ns1:r>
+              <ns1:rPr lang="en-US" sz="1550" b="1" dirty="0">
+                <ns1:solidFill>
+                  <ns1:srgbClr val="1F2328"/>
+                </ns1:solidFill>
+                <ns1:latin typeface="Arial" pitchFamily="34" charset="0"/>
+                <ns1:ea typeface="Arial" pitchFamily="34" charset="-122"/>
+                <ns1:cs typeface="Arial" pitchFamily="34" charset="-120"/>
+              </ns1:rPr>
+              <ns1:t>Five stages</ns1:t>
+            </ns1:r>
+            <ns1:endParaRPr lang="en-US" sz="1550" dirty="0"/>
+          </ns1:p>
+        </ns0:txBody>
+      </ns0:sp>
+      <ns0:sp>
+        <ns0:nvSpPr>
+          <ns0:cNvPr id="12" name="Text 7"/>
+          <ns0:cNvSpPr/>
+          <ns0:nvPr/>
+        </ns0:nvSpPr>
+        <ns0:spPr>
+          <ns1:xfrm>
+            <ns1:off x="1041350" y="1984028"/>
+            <ns1:ext cx="1562070" cy="198090"/>
+          </ns1:xfrm>
+          <ns1:prstGeom prst="rect">
+            <ns1:avLst/>
+          </ns1:prstGeom>
+          <ns1:noFill/>
+          <ns1:ln/>
+        </ns0:spPr>
+        <ns0:txBody>
+          <ns1:bodyPr wrap="square" lIns="0" tIns="0" rIns="0" bIns="0" rtlCol="0" anchor="t"/>
+          <ns1:lstStyle/>
+          <ns1:p>
+            <ns1:pPr algn="l" indent="0" marL="0">
+              <ns1:lnSpc>
+                <ns1:spcPts val="1560"/>
+              </ns1:lnSpc>
+              <ns1:buNone/>
+            </ns1:pPr>
+            <ns1:r>
+              <ns1:rPr lang="en-US" sz="1350" dirty="0">
+                <ns1:solidFill>
+                  <ns1:srgbClr val="59636E"/>
+                </ns1:solidFill>
+                <ns1:latin typeface="Arial" pitchFamily="34" charset="0"/>
+                <ns1:ea typeface="Arial" pitchFamily="34" charset="-122"/>
+                <ns1:cs typeface="Arial" pitchFamily="34" charset="-120"/>
+              </ns1:rPr>
+              <ns1:t>Propose to Validate.</ns1:t>
+            </ns1:r>
+            <ns1:endParaRPr lang="en-US" sz="1350" dirty="0"/>
+          </ns1:p>
+        </ns0:txBody>
+      </ns0:sp>
+      <ns0:sp>
+        <ns0:nvSpPr>
+          <ns0:cNvPr id="13" name="Text 8"/>
+          <ns0:cNvSpPr/>
+          <ns0:nvPr/>
+        </ns0:nvSpPr>
+        <ns0:spPr>
+          <ns1:xfrm>
+            <ns1:off x="507950" y="2494359"/>
+            <ns1:ext cx="381000" cy="381000"/>
+          </ns1:xfrm>
+          <ns1:prstGeom prst="roundRect">
+            <ns1:avLst>
+              <ns1:gd name="adj" fmla="val 23333"/>
+            </ns1:avLst>
+          </ns1:prstGeom>
+          <ns1:solidFill>
+            <ns1:srgbClr val="DAFBE1"/>
+          </ns1:solidFill>
+          <ns1:ln/>
+        </ns0:spPr>
+        <ns0:txBody>
+          <ns1:bodyPr wrap="square" rtlCol="0" anchor="ctr"/>
+          <ns1:lstStyle/>
+          <ns1:p>
+            <ns1:pPr indent="0" marL="0">
+              <ns1:buNone/>
+            </ns1:pPr>
+            <ns1:endParaRPr lang="en-US" dirty="0"/>
+          </ns1:p>
+        </ns0:txBody>
+      </ns0:sp>
+      <ns0:pic>
+        <ns0:nvPicPr>
+          <ns0:cNvPr id="14" name="Image 3" descr="">
+            <ns1:extLst>
+              <ns1:ext uri="{C183D7F6-B498-43B3-948B-1728B52AA6E4}">
+                <ns2:decorative val="1"/>
+              </ns1:ext>
+            </ns1:extLst>
+          </ns0:cNvPr>
+          <ns0:cNvPicPr>
+            <ns1:picLocks noChangeAspect="1"/>
+          </ns0:cNvPicPr>
+          <ns0:nvPr/>
+        </ns0:nvPicPr>
+        <ns0:blipFill>
+          <ns1:blip ns3:embed="rId5"/>
+          <ns1:stretch>
+            <ns1:fillRect/>
+          </ns1:stretch>
+        </ns0:blipFill>
+        <ns0:spPr>
+          <ns1:xfrm>
+            <ns1:off x="590550" y="2576959"/>
+            <ns1:ext cx="215801" cy="215801"/>
+          </ns1:xfrm>
+          <ns1:prstGeom prst="rect">
+            <ns1:avLst/>
+          </ns1:prstGeom>
+        </ns0:spPr>
+      </ns0:pic>
+      <ns0:sp>
+        <ns0:nvSpPr>
+          <ns0:cNvPr id="15" name="Text 9"/>
+          <ns0:cNvSpPr/>
+          <ns0:nvPr/>
+        </ns0:nvSpPr>
+        <ns0:spPr>
+          <ns1:xfrm>
+            <ns1:off x="1041350" y="2359819"/>
+            <ns1:ext cx="2564892" cy="228600"/>
+          </ns1:xfrm>
+          <ns1:prstGeom prst="rect">
+            <ns1:avLst/>
+          </ns1:prstGeom>
+          <ns1:noFill/>
+          <ns1:ln/>
+        </ns0:spPr>
+        <ns0:txBody>
+          <ns1:bodyPr wrap="square" lIns="0" tIns="0" rIns="0" bIns="0" rtlCol="0" anchor="t"/>
+          <ns1:lstStyle/>
+          <ns1:p>
+            <ns1:pPr algn="l" indent="0" marL="0">
+              <ns1:buNone/>
+            </ns1:pPr>
+            <ns1:r>
+              <ns1:rPr lang="en-US" sz="1550" b="1" dirty="0">
+                <ns1:solidFill>
+                  <ns1:srgbClr val="1F2328"/>
+                </ns1:solidFill>
+                <ns1:latin typeface="Arial" pitchFamily="34" charset="0"/>
+                <ns1:ea typeface="Arial" pitchFamily="34" charset="-122"/>
+                <ns1:cs typeface="Arial" pitchFamily="34" charset="-120"/>
+              </ns1:rPr>
+              <ns1:t>Proposal</ns1:t>
+            </ns1:r>
+            <ns1:endParaRPr lang="en-US" sz="1550" dirty="0"/>
+          </ns1:p>
+        </ns0:txBody>
+      </ns0:sp>
+      <ns0:sp>
+        <ns0:nvSpPr>
+          <ns0:cNvPr id="16" name="Text 10"/>
+          <ns0:cNvSpPr/>
+          <ns0:nvPr/>
+        </ns0:nvSpPr>
+        <ns0:spPr>
+          <ns1:xfrm>
+            <ns1:off x="1041350" y="2613720"/>
+            <ns1:ext cx="2564892" cy="396180"/>
+          </ns1:xfrm>
+          <ns1:prstGeom prst="rect">
+            <ns1:avLst/>
+          </ns1:prstGeom>
+          <ns1:noFill/>
+          <ns1:ln/>
+        </ns0:spPr>
+        <ns0:txBody>
+          <ns1:bodyPr wrap="square" lIns="0" tIns="0" rIns="0" bIns="0" rtlCol="0" anchor="t"/>
+          <ns1:lstStyle/>
+          <ns1:p>
+            <ns1:pPr algn="l" indent="0" marL="0">
+              <ns1:lnSpc>
+                <ns1:spcPts val="1560"/>
+              </ns1:lnSpc>
+              <ns1:buNone/>
+            </ns1:pPr>
+            <ns1:r>
+              <ns1:rPr lang="en-US" sz="1350" dirty="0">
+                <ns1:solidFill>
+                  <ns1:srgbClr val="59636E"/>
+                </ns1:solidFill>
+                <ns1:latin typeface="Arial" pitchFamily="34" charset="0"/>
+                <ns1:ea typeface="Arial" pitchFamily="34" charset="-122"/>
+                <ns1:cs typeface="Arial" pitchFamily="34" charset="-120"/>
+              </ns1:rPr>
+              <ns1:t>One field, one </ns1:t>
+            </ns1:r>
+            <ns1:pPr algn="l" indent="0" marL="0">
+              <ns1:lnSpc>
+                <ns1:spcPts val="1560"/>
+              </ns1:lnSpc>
+              <ns1:buNone/>
+            </ns1:pPr>
+            <ns1:r>
+              <ns1:rPr lang="en-US" sz="1350" b="1" dirty="0">
+                <ns1:solidFill>
+                  <ns1:srgbClr val="59636E"/>
+                </ns1:solidFill>
+                <ns1:latin typeface="Arial" pitchFamily="34" charset="0"/>
+                <ns1:ea typeface="Arial" pitchFamily="34" charset="-122"/>
+                <ns1:cs typeface="Arial" pitchFamily="34" charset="-120"/>
+              </ns1:rPr>
+              <ns1:t>Generate plan</ns1:t>
+            </ns1:r>
+            <ns1:pPr algn="l" indent="0" marL="0">
+              <ns1:lnSpc>
+                <ns1:spcPts val="1560"/>
+              </ns1:lnSpc>
+              <ns1:buNone/>
+            </ns1:pPr>
+            <ns1:r>
+              <ns1:rPr lang="en-US" sz="1350" dirty="0">
+                <ns1:solidFill>
+                  <ns1:srgbClr val="59636E"/>
+                </ns1:solidFill>
+                <ns1:latin typeface="Arial" pitchFamily="34" charset="0"/>
+                <ns1:ea typeface="Arial" pitchFamily="34" charset="-122"/>
+                <ns1:cs typeface="Arial" pitchFamily="34" charset="-120"/>
+              </ns1:rPr>
+              <ns1:t> button.</ns1:t>
+            </ns1:r>
+            <ns1:endParaRPr lang="en-US" sz="1350" dirty="0"/>
+          </ns1:p>
+        </ns0:txBody>
+      </ns0:sp>
+      <ns0:sp>
+        <ns0:nvSpPr>
+          <ns0:cNvPr id="17" name="Text 11"/>
+          <ns0:cNvSpPr/>
+          <ns0:nvPr/>
+        </ns0:nvSpPr>
+        <ns0:spPr>
+          <ns1:xfrm>
+            <ns1:off x="507950" y="3322141"/>
+            <ns1:ext cx="381000" cy="381000"/>
+          </ns1:xfrm>
+          <ns1:prstGeom prst="roundRect">
+            <ns1:avLst>
+              <ns1:gd name="adj" fmla="val 23333"/>
+            </ns1:avLst>
+          </ns1:prstGeom>
+          <ns1:solidFill>
+            <ns1:srgbClr val="DAFBE1"/>
+          </ns1:solidFill>
+          <ns1:ln/>
+        </ns0:spPr>
+        <ns0:txBody>
+          <ns1:bodyPr wrap="square" rtlCol="0" anchor="ctr"/>
+          <ns1:lstStyle/>
+          <ns1:p>
+            <ns1:pPr indent="0" marL="0">
+              <ns1:buNone/>
+            </ns1:pPr>
+            <ns1:endParaRPr lang="en-US" dirty="0"/>
+          </ns1:p>
+        </ns0:txBody>
+      </ns0:sp>
+      <ns0:pic>
+        <ns0:nvPicPr>
+          <ns0:cNvPr id="18" name="Image 4" descr="">
+            <ns1:extLst>
+              <ns1:ext uri="{C183D7F6-B498-43B3-948B-1728B52AA6E4}">
+                <ns2:decorative val="1"/>
+              </ns1:ext>
+            </ns1:extLst>
+          </ns0:cNvPr>
+          <ns0:cNvPicPr>
+            <ns1:picLocks noChangeAspect="1"/>
+          </ns0:cNvPicPr>
+          <ns0:nvPr/>
+        </ns0:nvPicPr>
+        <ns0:blipFill>
+          <ns1:blip ns3:embed="rId6"/>
+          <ns1:stretch>
+            <ns1:fillRect/>
+          </ns1:stretch>
+        </ns0:blipFill>
+        <ns0:spPr>
+          <ns1:xfrm>
+            <ns1:off x="590550" y="3404741"/>
+            <ns1:ext cx="215801" cy="215801"/>
+          </ns1:xfrm>
+          <ns1:prstGeom prst="rect">
+            <ns1:avLst/>
+          </ns1:prstGeom>
+        </ns0:spPr>
+      </ns0:pic>
+      <ns0:sp>
+        <ns0:nvSpPr>
+          <ns0:cNvPr id="19" name="Text 12"/>
+          <ns0:cNvSpPr/>
+          <ns0:nvPr/>
+        </ns0:nvSpPr>
+        <ns0:spPr>
+          <ns1:xfrm>
+            <ns1:off x="1041350" y="3187601"/>
+            <ns1:ext cx="2564892" cy="228600"/>
+          </ns1:xfrm>
+          <ns1:prstGeom prst="rect">
+            <ns1:avLst/>
+          </ns1:prstGeom>
+          <ns1:noFill/>
+          <ns1:ln/>
+        </ns0:spPr>
+        <ns0:txBody>
+          <ns1:bodyPr wrap="square" lIns="0" tIns="0" rIns="0" bIns="0" rtlCol="0" anchor="t"/>
+          <ns1:lstStyle/>
+          <ns1:p>
+            <ns1:pPr algn="l" indent="0" marL="0">
+              <ns1:buNone/>
+            </ns1:pPr>
+            <ns1:r>
+              <ns1:rPr lang="en-US" sz="1550" b="1" dirty="0">
+                <ns1:solidFill>
+                  <ns1:srgbClr val="1F2328"/>
+                </ns1:solidFill>
+                <ns1:latin typeface="Arial" pitchFamily="34" charset="0"/>
+                <ns1:ea typeface="Arial" pitchFamily="34" charset="-122"/>
+                <ns1:cs typeface="Arial" pitchFamily="34" charset="-120"/>
+              </ns1:rPr>
+              <ns1:t>Actions</ns1:t>
+            </ns1:r>
+            <ns1:endParaRPr lang="en-US" sz="1550" dirty="0"/>
+          </ns1:p>
+        </ns0:txBody>
+      </ns0:sp>
+      <ns0:sp>
+        <ns0:nvSpPr>
+          <ns0:cNvPr id="20" name="Text 13"/>
+          <ns0:cNvSpPr/>
+          <ns0:nvPr/>
+        </ns0:nvSpPr>
+        <ns0:spPr>
+          <ns1:xfrm>
+            <ns1:off x="1041350" y="3441502"/>
+            <ns1:ext cx="2564892" cy="396180"/>
+          </ns1:xfrm>
+          <ns1:prstGeom prst="rect">
+            <ns1:avLst/>
+          </ns1:prstGeom>
+          <ns1:noFill/>
+          <ns1:ln/>
+        </ns0:spPr>
+        <ns0:txBody>
+          <ns1:bodyPr wrap="square" lIns="0" tIns="0" rIns="0" bIns="0" rtlCol="0" anchor="t"/>
+          <ns1:lstStyle/>
+          <ns1:p>
+            <ns1:pPr algn="l" indent="0" marL="0">
+              <ns1:lnSpc>
+                <ns1:spcPts val="1560"/>
+              </ns1:lnSpc>
+              <ns1:buNone/>
+            </ns1:pPr>
+            <ns1:r>
+              <ns1:rPr lang="en-US" sz="1350" dirty="0">
+                <ns1:solidFill>
+                  <ns1:srgbClr val="59636E"/>
+                </ns1:solidFill>
+                <ns1:latin typeface="Arial" pitchFamily="34" charset="0"/>
+                <ns1:ea typeface="Arial" pitchFamily="34" charset="-122"/>
+                <ns1:cs typeface="Arial" pitchFamily="34" charset="-120"/>
+              </ns1:rPr>
+              <ns1:t>Each action runs until its evidence is recorded.</ns1:t>
+            </ns1:r>
+            <ns1:endParaRPr lang="en-US" sz="1350" dirty="0"/>
+          </ns1:p>
+        </ns0:txBody>
+      </ns0:sp>
+      <ns0:sp>
+        <ns0:nvSpPr>
+          <ns0:cNvPr id="21" name="Text 14"/>
+          <ns0:cNvSpPr/>
+          <ns0:nvPr/>
+        </ns0:nvSpPr>
+        <ns0:spPr>
+          <ns1:xfrm>
+            <ns1:off x="507950" y="4050804"/>
+            <ns1:ext cx="381000" cy="381000"/>
+          </ns1:xfrm>
+          <ns1:prstGeom prst="roundRect">
+            <ns1:avLst>
+              <ns1:gd name="adj" fmla="val 23333"/>
+            </ns1:avLst>
+          </ns1:prstGeom>
+          <ns1:solidFill>
+            <ns1:srgbClr val="DAFBE1"/>
+          </ns1:solidFill>
+          <ns1:ln/>
+        </ns0:spPr>
+        <ns0:txBody>
+          <ns1:bodyPr wrap="square" rtlCol="0" anchor="ctr"/>
+          <ns1:lstStyle/>
+          <ns1:p>
+            <ns1:pPr indent="0" marL="0">
+              <ns1:buNone/>
+            </ns1:pPr>
+            <ns1:endParaRPr lang="en-US" dirty="0"/>
+          </ns1:p>
+        </ns0:txBody>
+      </ns0:sp>
+      <ns0:pic>
+        <ns0:nvPicPr>
+          <ns0:cNvPr id="22" name="Image 5" descr="">
+            <ns1:extLst>
+              <ns1:ext uri="{C183D7F6-B498-43B3-948B-1728B52AA6E4}">
+                <ns2:decorative val="1"/>
+              </ns1:ext>
+            </ns1:extLst>
+          </ns0:cNvPr>
+          <ns0:cNvPicPr>
+            <ns1:picLocks noChangeAspect="1"/>
+          </ns0:cNvPicPr>
+          <ns0:nvPr/>
+        </ns0:nvPicPr>
+        <ns0:blipFill>
+          <ns1:blip ns3:embed="rId7"/>
+          <ns1:stretch>
+            <ns1:fillRect/>
+          </ns1:stretch>
+        </ns0:blipFill>
+        <ns0:spPr>
+          <ns1:xfrm>
+            <ns1:off x="590550" y="4133404"/>
+            <ns1:ext cx="215801" cy="215801"/>
+          </ns1:xfrm>
+          <ns1:prstGeom prst="rect">
+            <ns1:avLst/>
+          </ns1:prstGeom>
+        </ns0:spPr>
+      </ns0:pic>
+      <ns0:sp>
+        <ns0:nvSpPr>
+          <ns0:cNvPr id="23" name="Text 15"/>
+          <ns0:cNvSpPr/>
+          <ns0:nvPr/>
+        </ns0:nvSpPr>
+        <ns0:spPr>
+          <ns1:xfrm>
+            <ns1:off x="1041350" y="4015383"/>
+            <ns1:ext cx="2274490" cy="228600"/>
+          </ns1:xfrm>
+          <ns1:prstGeom prst="rect">
+            <ns1:avLst/>
+          </ns1:prstGeom>
+          <ns1:noFill/>
+          <ns1:ln/>
+        </ns0:spPr>
+        <ns0:txBody>
+          <ns1:bodyPr wrap="square" lIns="0" tIns="0" rIns="0" bIns="0" rtlCol="0" anchor="t"/>
+          <ns1:lstStyle/>
+          <ns1:p>
+            <ns1:pPr algn="l" indent="0" marL="0">
+              <ns1:buNone/>
+            </ns1:pPr>
+            <ns1:r>
+              <ns1:rPr lang="en-US" sz="1550" b="1" dirty="0">
+                <ns1:solidFill>
+                  <ns1:srgbClr val="1F2328"/>
+                </ns1:solidFill>
+                <ns1:latin typeface="Arial" pitchFamily="34" charset="0"/>
+                <ns1:ea typeface="Arial" pitchFamily="34" charset="-122"/>
+                <ns1:cs typeface="Arial" pitchFamily="34" charset="-120"/>
+              </ns1:rPr>
+              <ns1:t>Checklist and evidence</ns1:t>
+            </ns1:r>
+            <ns1:endParaRPr lang="en-US" sz="1550" dirty="0"/>
+          </ns1:p>
+        </ns0:txBody>
+      </ns0:sp>
+      <ns0:sp>
+        <ns0:nvSpPr>
+          <ns0:cNvPr id="24" name="Text 16"/>
+          <ns0:cNvSpPr/>
+          <ns0:nvPr/>
+        </ns0:nvSpPr>
+        <ns0:spPr>
+          <ns1:xfrm>
+            <ns1:off x="1041350" y="4269284"/>
+            <ns1:ext cx="2274490" cy="198090"/>
+          </ns1:xfrm>
+          <ns1:prstGeom prst="rect">
+            <ns1:avLst/>
+          </ns1:prstGeom>
+          <ns1:noFill/>
+          <ns1:ln/>
+        </ns0:spPr>
+        <ns0:txBody>
+          <ns1:bodyPr wrap="square" lIns="0" tIns="0" rIns="0" bIns="0" rtlCol="0" anchor="t"/>
+          <ns1:lstStyle/>
+          <ns1:p>
+            <ns1:pPr algn="l" indent="0" marL="0">
+              <ns1:lnSpc>
+                <ns1:spcPts val="1560"/>
+              </ns1:lnSpc>
+              <ns1:buNone/>
+            </ns1:pPr>
+            <ns1:r>
+              <ns1:rPr lang="en-US" sz="1350" dirty="0">
+                <ns1:solidFill>
+                  <ns1:srgbClr val="59636E"/>
+                </ns1:solidFill>
+                <ns1:latin typeface="Arial" pitchFamily="34" charset="0"/>
+                <ns1:ea typeface="Arial" pitchFamily="34" charset="-122"/>
+                <ns1:cs typeface="Arial" pitchFamily="34" charset="-120"/>
+              </ns1:rPr>
+              <ns1:t>Marked only from real output.</ns1:t>
+            </ns1:r>
+            <ns1:endParaRPr lang="en-US" sz="1350" dirty="0"/>
+          </ns1:p>
+        </ns0:txBody>
+      </ns0:sp>
+      <ns0:sp>
+        <ns0:nvSpPr>
+          <ns0:cNvPr id="25" name="Text 17"/>
+          <ns0:cNvSpPr/>
+          <ns0:nvPr/>
+        </ns0:nvSpPr>
+        <ns0:spPr>
+          <ns1:xfrm>
+            <ns1:off x="3762226" y="1973461"/>
+            <ns1:ext cx="4870400" cy="2250430"/>
+          </ns1:xfrm>
+          <ns1:prstGeom prst="roundRect">
+            <ns1:avLst>
+              <ns1:gd name="adj" fmla="val 3386"/>
+            </ns1:avLst>
+          </ns1:prstGeom>
+          <ns1:solidFill>
+            <ns1:srgbClr val="FFFFFF"/>
+          </ns1:solidFill>
+          <ns1:ln w="9525">
+            <ns1:solidFill>
+              <ns1:srgbClr val="D1D9E0"/>
+            </ns1:solidFill>
+          </ns1:ln>
+          <ns1:effectLst>
+            <ns1:outerShdw sx="100000" sy="100000" kx="0" ky="0" algn="bl" rotWithShape="0" blurRad="38100" dist="9525" dir="5400000">
+              <ns1:srgbClr val="1f2328">
+                <ns1:alpha val="12000"/>
+              </ns1:srgbClr>
+            </ns1:outerShdw>
+          </ns1:effectLst>
+        </ns0:spPr>
+        <ns0:txBody>
+          <ns1:bodyPr wrap="square" rtlCol="0" anchor="ctr"/>
+          <ns1:lstStyle/>
+          <ns1:p>
+            <ns1:pPr indent="0" marL="0">
+              <ns1:buNone/>
+            </ns1:pPr>
+            <ns1:endParaRPr lang="en-US" dirty="0"/>
+          </ns1:p>
+        </ns0:txBody>
+      </ns0:sp>
+      <ns0:pic>
+        <ns0:nvPicPr>
+          <ns0:cNvPr id="26" name="Image 6" descr="Feature Workbench canvas in the side panel with five stages, a feature proposal field, actions, a checklist, and an empty evidence area"/>
+          <ns0:cNvPicPr>
+            <ns1:picLocks noChangeAspect="1"/>
+          </ns0:cNvPicPr>
+          <ns0:nvPr/>
+        </ns0:nvPicPr>
+        <ns0:blipFill>
+          <ns1:blip ns3:embed="rId8"/>
+          <ns1:stretch>
+            <ns1:fillRect/>
+          </ns1:stretch>
+        </ns0:blipFill>
+        <ns0:spPr>
+          <ns1:xfrm>
+            <ns1:off x="3809851" y="2021086"/>
+            <ns1:ext cx="4775150" cy="2155180"/>
+          </ns1:xfrm>
+          <ns1:prstGeom prst="rect">
+            <ns1:avLst/>
+          </ns1:prstGeom>
+        </ns0:spPr>
+      </ns0:pic>
+    </ns0:spTree>
+  </ns0:cSld>
+  <ns0:clrMapOvr>
+    <ns1:masterClrMapping/>
+  </ns0:clrMapOvr>
+</ns0:sld>
 </file>
 
 <file path=ppt/slides/slide11.xml><?xml version="1.0" encoding="utf-8"?>
-<p:sld xmlns:a="http://schemas.openxmlformats.org/drawingml/2006/main" xmlns:r="http://schemas.openxmlformats.org/officeDocument/2006/relationships" xmlns:p="http://schemas.openxmlformats.org/presentationml/2006/main">
-  <p:cSld name="Slide 11">
-    <p:bg>
-      <p:bgPr>
-        <a:solidFill>
-          <a:srgbClr val="FFFFFF"/>
-        </a:solidFill>
-      </p:bgPr>
-    </p:bg>
-    <p:spTree>
-      <p:nvGrpSpPr>
-        <p:cNvPr id="1" name=""/>
-        <p:cNvGrpSpPr/>
-        <p:nvPr/>
-      </p:nvGrpSpPr>
-      <p:grpSpPr>
-        <a:xfrm>
-          <a:off x="0" y="0"/>
-          <a:ext cx="0" cy="0"/>
-          <a:chOff x="0" y="0"/>
-          <a:chExt cx="0" cy="0"/>
-        </a:xfrm>
-      </p:grpSpPr>
-      <p:pic>
-        <p:nvPicPr>
-          <p:cNvPr id="2" name="Image 0" descr="">
-            <a:extLst>
-              <a:ext uri="{C183D7F6-B498-43B3-948B-1728B52AA6E4}">
-                <adec:decorative xmlns:adec="http://schemas.microsoft.com/office/drawing/2017/decorative" val="1"/>
-              </a:ext>
-            </a:extLst>
-          </p:cNvPr>
-          <p:cNvPicPr>
-            <a:picLocks noChangeAspect="1"/>
-          </p:cNvPicPr>
-          <p:nvPr/>
-        </p:nvPicPr>
-        <p:blipFill>
-          <a:blip r:embed="rId1"/>
-          <a:stretch>
-            <a:fillRect/>
-          </a:stretch>
-        </p:blipFill>
-        <p:spPr>
-          <a:xfrm>
-            <a:off x="6349901" y="0"/>
-            <a:ext cx="2793950" cy="1308050"/>
-          </a:xfrm>
-          <a:prstGeom prst="rect">
-            <a:avLst/>
-          </a:prstGeom>
-        </p:spPr>
-      </p:pic>
-      <p:sp>
-        <p:nvSpPr>
-          <p:cNvPr id="3" name="Text 0"/>
-          <p:cNvSpPr/>
-          <p:nvPr/>
-        </p:nvSpPr>
-        <p:spPr>
-          <a:xfrm>
-            <a:off x="7340501" y="177701"/>
-            <a:ext cx="1168301" cy="279350"/>
-          </a:xfrm>
-          <a:prstGeom prst="roundRect">
-            <a:avLst>
-              <a:gd name="adj" fmla="val 22731"/>
-            </a:avLst>
-          </a:prstGeom>
-          <a:solidFill>
-            <a:srgbClr val="1A7F37"/>
-          </a:solidFill>
-          <a:ln/>
-        </p:spPr>
-        <p:txBody>
-          <a:bodyPr wrap="square" rtlCol="0" anchor="ctr"/>
-          <a:lstStyle/>
-          <a:p>
-            <a:pPr indent="0" marL="0">
-              <a:buNone/>
-            </a:pPr>
-            <a:endParaRPr lang="en-US" dirty="0"/>
-          </a:p>
-        </p:txBody>
-      </p:sp>
-      <p:sp>
-        <p:nvSpPr>
-          <p:cNvPr id="4" name="Text 1"/>
-          <p:cNvSpPr/>
-          <p:nvPr/>
-        </p:nvSpPr>
-        <p:spPr>
-          <a:xfrm>
-            <a:off x="7461041" y="231577"/>
-            <a:ext cx="927071" cy="171450"/>
-          </a:xfrm>
-          <a:prstGeom prst="rect">
-            <a:avLst/>
-          </a:prstGeom>
-          <a:noFill/>
-          <a:ln/>
-        </p:spPr>
-        <p:txBody>
-          <a:bodyPr wrap="square" lIns="0" tIns="0" rIns="0" bIns="0" rtlCol="0" anchor="t"/>
-          <a:lstStyle/>
-          <a:p>
-            <a:pPr algn="ctr" indent="0" marL="0">
-              <a:buNone/>
-            </a:pPr>
-            <a:r>
-              <a:rPr lang="en-US" sz="1150" b="1" dirty="0">
-                <a:solidFill>
-                  <a:srgbClr val="FFFFFF"/>
-                </a:solidFill>
-                <a:latin typeface="Arial" pitchFamily="34" charset="0"/>
-                <a:ea typeface="Arial" pitchFamily="34" charset="-122"/>
-                <a:cs typeface="Arial" pitchFamily="34" charset="-120"/>
-              </a:rPr>
-              <a:t>CHAPTER 06</a:t>
-            </a:r>
-            <a:endParaRPr lang="en-US" sz="1150" dirty="0"/>
-          </a:p>
-        </p:txBody>
-      </p:sp>
-      <p:pic>
-        <p:nvPicPr>
-          <p:cNvPr id="5" name="Image 1" descr="Open this chapter on GitHub">
-            <a:hlinkClick r:id="rId3" tooltip="https://github.com/github/copilot-app-for-beginners/tree/main/06-canvases"/>
-          </p:cNvPr>
-          <p:cNvPicPr>
-            <a:picLocks noChangeAspect="1"/>
-          </p:cNvPicPr>
-          <p:nvPr/>
-        </p:nvPicPr>
-        <p:blipFill>
-          <a:blip r:embed="rId2"/>
-          <a:stretch>
-            <a:fillRect/>
-          </a:stretch>
-        </p:blipFill>
-        <p:spPr>
-          <a:xfrm>
-            <a:off x="8610600" y="165050"/>
-            <a:ext cx="304800" cy="304800"/>
-          </a:xfrm>
-          <a:prstGeom prst="rect">
-            <a:avLst/>
-          </a:prstGeom>
-        </p:spPr>
-      </p:pic>
-      <p:sp>
-        <p:nvSpPr>
-          <p:cNvPr id="6" name="Text 2"/>
-          <p:cNvSpPr/>
-          <p:nvPr/>
-        </p:nvSpPr>
-        <p:spPr>
-          <a:xfrm>
-            <a:off x="507950" y="381000"/>
-            <a:ext cx="8161020" cy="190500"/>
-          </a:xfrm>
-          <a:prstGeom prst="rect">
-            <a:avLst/>
-          </a:prstGeom>
-          <a:noFill/>
-          <a:ln/>
-        </p:spPr>
-        <p:txBody>
-          <a:bodyPr wrap="square" lIns="0" tIns="0" rIns="0" bIns="0" rtlCol="0" anchor="t"/>
-          <a:lstStyle/>
-          <a:p>
-            <a:pPr algn="l" indent="0" marL="0">
-              <a:buNone/>
-            </a:pPr>
-            <a:r>
-              <a:rPr lang="en-US" sz="1250" b="1" dirty="0">
-                <a:solidFill>
-                  <a:srgbClr val="1A7F37"/>
-                </a:solidFill>
-                <a:latin typeface="Arial" pitchFamily="34" charset="0"/>
-                <a:ea typeface="Arial" pitchFamily="34" charset="-122"/>
-                <a:cs typeface="Arial" pitchFamily="34" charset="-120"/>
-              </a:rPr>
-              <a:t>PROPOSE, PLAN, AND BASELINE</a:t>
-            </a:r>
-            <a:endParaRPr lang="en-US" sz="1250" dirty="0"/>
-          </a:p>
-        </p:txBody>
-      </p:sp>
-      <p:sp>
-        <p:nvSpPr>
-          <p:cNvPr id="7" name="Text 3"/>
-          <p:cNvSpPr/>
-          <p:nvPr/>
-        </p:nvSpPr>
-        <p:spPr>
-          <a:xfrm>
-            <a:off x="507950" y="622250"/>
-            <a:ext cx="8161020" cy="419100"/>
-          </a:xfrm>
-          <a:prstGeom prst="rect">
-            <a:avLst/>
-          </a:prstGeom>
-          <a:noFill/>
-          <a:ln/>
-        </p:spPr>
-        <p:txBody>
-          <a:bodyPr wrap="square" lIns="0" tIns="0" rIns="0" bIns="0" rtlCol="0" anchor="t"/>
-          <a:lstStyle/>
-          <a:p>
-            <a:pPr algn="l" indent="0" marL="0">
-              <a:lnSpc>
-                <a:spcPts val="3300"/>
-              </a:lnSpc>
-              <a:spcBef>
-                <a:spcPts val="400"/>
-              </a:spcBef>
-              <a:buNone/>
-            </a:pPr>
-            <a:r>
-              <a:rPr lang="en-US" sz="2800" b="1" dirty="0">
-                <a:solidFill>
-                  <a:srgbClr val="1F2328"/>
-                </a:solidFill>
-                <a:latin typeface="Arial" pitchFamily="34" charset="0"/>
-                <a:ea typeface="Arial" pitchFamily="34" charset="-122"/>
-                <a:cs typeface="Arial" pitchFamily="34" charset="-120"/>
-              </a:rPr>
-              <a:t>Plan on the board. Approve in the Plan tab.</a:t>
-            </a:r>
-            <a:endParaRPr lang="en-US" sz="2800" dirty="0"/>
-          </a:p>
-        </p:txBody>
-      </p:sp>
-      <p:sp>
-        <p:nvSpPr>
-          <p:cNvPr id="8" name="Text 4"/>
-          <p:cNvSpPr/>
-          <p:nvPr/>
-        </p:nvSpPr>
-        <p:spPr>
-          <a:xfrm>
-            <a:off x="507950" y="1104751"/>
-            <a:ext cx="8161020" cy="254050"/>
-          </a:xfrm>
-          <a:prstGeom prst="rect">
-            <a:avLst/>
-          </a:prstGeom>
-          <a:noFill/>
-          <a:ln/>
-        </p:spPr>
-        <p:txBody>
-          <a:bodyPr wrap="square" lIns="0" tIns="0" rIns="0" bIns="0" rtlCol="0" anchor="t"/>
-          <a:lstStyle/>
-          <a:p>
-            <a:pPr algn="l" indent="0" marL="0">
-              <a:lnSpc>
-                <a:spcPts val="2000"/>
-              </a:lnSpc>
-              <a:spcBef>
-                <a:spcPts val="500"/>
-              </a:spcBef>
-              <a:buNone/>
-            </a:pPr>
-            <a:r>
-              <a:rPr lang="en-US" sz="1650" dirty="0">
-                <a:solidFill>
-                  <a:srgbClr val="59636E"/>
-                </a:solidFill>
-                <a:latin typeface="Arial" pitchFamily="34" charset="0"/>
-                <a:ea typeface="Arial" pitchFamily="34" charset="-122"/>
-                <a:cs typeface="Arial" pitchFamily="34" charset="-120"/>
-              </a:rPr>
-              <a:t>Proposal: a </a:t>
-            </a:r>
-            <a:pPr algn="l" indent="0" marL="0">
-              <a:lnSpc>
-                <a:spcPts val="2000"/>
-              </a:lnSpc>
-              <a:spcBef>
-                <a:spcPts val="500"/>
-              </a:spcBef>
-              <a:buNone/>
-            </a:pPr>
-            <a:r>
-              <a:rPr lang="en-US" sz="1650" b="1" dirty="0">
-                <a:solidFill>
-                  <a:srgbClr val="59636E"/>
-                </a:solidFill>
-                <a:latin typeface="Arial" pitchFamily="34" charset="0"/>
-                <a:ea typeface="Arial" pitchFamily="34" charset="-122"/>
-                <a:cs typeface="Arial" pitchFamily="34" charset="-120"/>
-              </a:rPr>
-              <a:t>Clear filters</a:t>
-            </a:r>
-            <a:pPr algn="l" indent="0" marL="0">
-              <a:lnSpc>
-                <a:spcPts val="2000"/>
-              </a:lnSpc>
-              <a:spcBef>
-                <a:spcPts val="500"/>
-              </a:spcBef>
-              <a:buNone/>
-            </a:pPr>
-            <a:r>
-              <a:rPr lang="en-US" sz="1650" dirty="0">
-                <a:solidFill>
-                  <a:srgbClr val="59636E"/>
-                </a:solidFill>
-                <a:latin typeface="Arial" pitchFamily="34" charset="0"/>
-                <a:ea typeface="Arial" pitchFamily="34" charset="-122"/>
-                <a:cs typeface="Arial" pitchFamily="34" charset="-120"/>
-              </a:rPr>
-              <a:t> control, shown only when a filter is active.</a:t>
-            </a:r>
-            <a:endParaRPr lang="en-US" sz="1650" dirty="0"/>
-          </a:p>
-        </p:txBody>
-      </p:sp>
-      <p:sp>
-        <p:nvSpPr>
-          <p:cNvPr id="9" name="Text 5"/>
-          <p:cNvSpPr/>
-          <p:nvPr/>
-        </p:nvSpPr>
-        <p:spPr>
-          <a:xfrm>
-            <a:off x="507950" y="2313980"/>
-            <a:ext cx="330101" cy="330101"/>
-          </a:xfrm>
-          <a:prstGeom prst="roundRect">
-            <a:avLst>
-              <a:gd name="adj" fmla="val 277006"/>
-            </a:avLst>
-          </a:prstGeom>
-          <a:solidFill>
-            <a:srgbClr val="1A7F37"/>
-          </a:solidFill>
-          <a:ln/>
-        </p:spPr>
-        <p:txBody>
-          <a:bodyPr wrap="square" rtlCol="0" anchor="ctr"/>
-          <a:lstStyle/>
-          <a:p>
-            <a:pPr indent="0" marL="0">
-              <a:buNone/>
-            </a:pPr>
-            <a:endParaRPr lang="en-US" dirty="0"/>
-          </a:p>
-        </p:txBody>
-      </p:sp>
-      <p:sp>
-        <p:nvSpPr>
-          <p:cNvPr id="10" name="Text 6"/>
-          <p:cNvSpPr/>
-          <p:nvPr/>
-        </p:nvSpPr>
-        <p:spPr>
-          <a:xfrm>
-            <a:off x="620630" y="2374255"/>
-            <a:ext cx="104593" cy="209550"/>
-          </a:xfrm>
-          <a:prstGeom prst="rect">
-            <a:avLst/>
-          </a:prstGeom>
-          <a:noFill/>
-          <a:ln/>
-        </p:spPr>
-        <p:txBody>
-          <a:bodyPr wrap="square" lIns="0" tIns="0" rIns="0" bIns="0" rtlCol="0" anchor="t"/>
-          <a:lstStyle/>
-          <a:p>
-            <a:pPr algn="ctr" indent="0" marL="0">
-              <a:buNone/>
-            </a:pPr>
-            <a:r>
-              <a:rPr lang="en-US" sz="1450" b="1" dirty="0">
-                <a:solidFill>
-                  <a:srgbClr val="FFFFFF"/>
-                </a:solidFill>
-                <a:latin typeface="Arial" pitchFamily="34" charset="0"/>
-                <a:ea typeface="Arial" pitchFamily="34" charset="-122"/>
-                <a:cs typeface="Arial" pitchFamily="34" charset="-120"/>
-              </a:rPr>
-              <a:t>1</a:t>
-            </a:r>
-            <a:endParaRPr lang="en-US" sz="1450" dirty="0"/>
-          </a:p>
-        </p:txBody>
-      </p:sp>
-      <p:sp>
-        <p:nvSpPr>
-          <p:cNvPr id="11" name="Text 7"/>
-          <p:cNvSpPr/>
-          <p:nvPr/>
-        </p:nvSpPr>
-        <p:spPr>
-          <a:xfrm>
-            <a:off x="1015752" y="1872555"/>
-            <a:ext cx="6475661" cy="1212800"/>
-          </a:xfrm>
-          <a:prstGeom prst="roundRect">
-            <a:avLst>
-              <a:gd name="adj" fmla="val 6283"/>
-            </a:avLst>
-          </a:prstGeom>
-          <a:solidFill>
-            <a:srgbClr val="FFFFFF"/>
-          </a:solidFill>
-          <a:ln w="9525">
-            <a:solidFill>
-              <a:srgbClr val="D1D9E0"/>
-            </a:solidFill>
-          </a:ln>
-          <a:effectLst>
-            <a:outerShdw sx="100000" sy="100000" kx="0" ky="0" algn="bl" rotWithShape="0" blurRad="38100" dist="9525" dir="5400000">
-              <a:srgbClr val="1f2328">
-                <a:alpha val="12000"/>
-              </a:srgbClr>
-            </a:outerShdw>
-          </a:effectLst>
-        </p:spPr>
-        <p:txBody>
-          <a:bodyPr wrap="square" rtlCol="0" anchor="ctr"/>
-          <a:lstStyle/>
-          <a:p>
-            <a:pPr indent="0" marL="0">
-              <a:buNone/>
-            </a:pPr>
-            <a:endParaRPr lang="en-US" dirty="0"/>
-          </a:p>
-        </p:txBody>
-      </p:sp>
-      <p:pic>
-        <p:nvPicPr>
-          <p:cNvPr id="12" name="Image 2" descr="Feature Workbench with the Propose and Plan stages complete and the status Approved">    </p:cNvPr>
-          <p:cNvPicPr>
-            <a:picLocks noChangeAspect="1"/>
-          </p:cNvPicPr>
-          <p:nvPr/>
-        </p:nvPicPr>
-        <p:blipFill>
-          <a:blip r:embed="rId4"/>
-          <a:stretch>
-            <a:fillRect/>
-          </a:stretch>
-        </p:blipFill>
-        <p:spPr>
-          <a:xfrm>
-            <a:off x="1063377" y="1920180"/>
-            <a:ext cx="6380411" cy="1117550"/>
-          </a:xfrm>
-          <a:prstGeom prst="rect">
-            <a:avLst/>
-          </a:prstGeom>
-        </p:spPr>
-      </p:pic>
-      <p:sp>
-        <p:nvSpPr>
-          <p:cNvPr id="13" name="Text 8"/>
-          <p:cNvSpPr/>
-          <p:nvPr/>
-        </p:nvSpPr>
-        <p:spPr>
-          <a:xfrm>
-            <a:off x="507950" y="3444180"/>
-            <a:ext cx="330101" cy="330101"/>
-          </a:xfrm>
-          <a:prstGeom prst="roundRect">
-            <a:avLst>
-              <a:gd name="adj" fmla="val 277006"/>
-            </a:avLst>
-          </a:prstGeom>
-          <a:solidFill>
-            <a:srgbClr val="1A7F37"/>
-          </a:solidFill>
-          <a:ln/>
-        </p:spPr>
-        <p:txBody>
-          <a:bodyPr wrap="square" rtlCol="0" anchor="ctr"/>
-          <a:lstStyle/>
-          <a:p>
-            <a:pPr indent="0" marL="0">
-              <a:buNone/>
-            </a:pPr>
-            <a:endParaRPr lang="en-US" dirty="0"/>
-          </a:p>
-        </p:txBody>
-      </p:sp>
-      <p:sp>
-        <p:nvSpPr>
-          <p:cNvPr id="14" name="Text 9"/>
-          <p:cNvSpPr/>
-          <p:nvPr/>
-        </p:nvSpPr>
-        <p:spPr>
-          <a:xfrm>
-            <a:off x="620630" y="3504456"/>
-            <a:ext cx="104593" cy="209550"/>
-          </a:xfrm>
-          <a:prstGeom prst="rect">
-            <a:avLst/>
-          </a:prstGeom>
-          <a:noFill/>
-          <a:ln/>
-        </p:spPr>
-        <p:txBody>
-          <a:bodyPr wrap="square" lIns="0" tIns="0" rIns="0" bIns="0" rtlCol="0" anchor="t"/>
-          <a:lstStyle/>
-          <a:p>
-            <a:pPr algn="ctr" indent="0" marL="0">
-              <a:buNone/>
-            </a:pPr>
-            <a:r>
-              <a:rPr lang="en-US" sz="1450" b="1" dirty="0">
-                <a:solidFill>
-                  <a:srgbClr val="FFFFFF"/>
-                </a:solidFill>
-                <a:latin typeface="Arial" pitchFamily="34" charset="0"/>
-                <a:ea typeface="Arial" pitchFamily="34" charset="-122"/>
-                <a:cs typeface="Arial" pitchFamily="34" charset="-120"/>
-              </a:rPr>
-              <a:t>2</a:t>
-            </a:r>
-            <a:endParaRPr lang="en-US" sz="1450" dirty="0"/>
-          </a:p>
-        </p:txBody>
-      </p:sp>
-      <p:sp>
-        <p:nvSpPr>
-          <p:cNvPr id="15" name="Text 10"/>
-          <p:cNvSpPr/>
-          <p:nvPr/>
-        </p:nvSpPr>
-        <p:spPr>
-          <a:xfrm>
-            <a:off x="1015752" y="3316486"/>
-            <a:ext cx="7613600" cy="585341"/>
-          </a:xfrm>
-          <a:prstGeom prst="roundRect">
-            <a:avLst>
-              <a:gd name="adj" fmla="val 13018"/>
-            </a:avLst>
-          </a:prstGeom>
-          <a:solidFill>
-            <a:srgbClr val="FFFFFF"/>
-          </a:solidFill>
-          <a:ln w="9525">
-            <a:solidFill>
-              <a:srgbClr val="D1D9E0"/>
-            </a:solidFill>
-          </a:ln>
-          <a:effectLst>
-            <a:outerShdw sx="100000" sy="100000" kx="0" ky="0" algn="bl" rotWithShape="0" blurRad="38100" dist="9525" dir="5400000">
-              <a:srgbClr val="1f2328">
-                <a:alpha val="12000"/>
-              </a:srgbClr>
-            </a:outerShdw>
-          </a:effectLst>
-        </p:spPr>
-        <p:txBody>
-          <a:bodyPr wrap="square" rtlCol="0" anchor="ctr"/>
-          <a:lstStyle/>
-          <a:p>
-            <a:pPr indent="0" marL="0">
-              <a:buNone/>
-            </a:pPr>
-            <a:endParaRPr lang="en-US" dirty="0"/>
-          </a:p>
-        </p:txBody>
-      </p:sp>
-      <p:pic>
-        <p:nvPicPr>
-          <p:cNvPr id="16" name="Image 3" descr="Expanded npm test output with 4 passed tests, next to the Feature Workbench Baseline evidence of 4/4 tests and a passing build">    </p:cNvPr>
-          <p:cNvPicPr>
-            <a:picLocks noChangeAspect="1"/>
-          </p:cNvPicPr>
-          <p:nvPr/>
-        </p:nvPicPr>
-        <p:blipFill>
-          <a:blip r:embed="rId5"/>
-          <a:stretch>
-            <a:fillRect/>
-          </a:stretch>
-        </p:blipFill>
-        <p:spPr>
-          <a:xfrm>
-            <a:off x="1063377" y="3364111"/>
-            <a:ext cx="7518350" cy="490091"/>
-          </a:xfrm>
-          <a:prstGeom prst="rect">
-            <a:avLst/>
-          </a:prstGeom>
-        </p:spPr>
-      </p:pic>
-      <p:sp>
-        <p:nvSpPr>
-          <p:cNvPr id="17" name="Text 11"/>
-          <p:cNvSpPr/>
-          <p:nvPr/>
-        </p:nvSpPr>
-        <p:spPr>
-          <a:xfrm>
-            <a:off x="507950" y="4129832"/>
-            <a:ext cx="8290509" cy="223540"/>
-          </a:xfrm>
-          <a:prstGeom prst="rect">
-            <a:avLst/>
-          </a:prstGeom>
-          <a:noFill/>
-          <a:ln/>
-        </p:spPr>
-        <p:txBody>
-          <a:bodyPr wrap="square" lIns="0" tIns="0" rIns="0" bIns="0" rtlCol="0" anchor="t"/>
-          <a:lstStyle/>
-          <a:p>
-            <a:pPr algn="l" indent="0" marL="0">
-              <a:lnSpc>
-                <a:spcPts val="1760"/>
-              </a:lnSpc>
-              <a:buNone/>
-            </a:pPr>
-            <a:r>
-              <a:rPr lang="en-US" sz="1450" b="1" dirty="0">
-                <a:solidFill>
-                  <a:srgbClr val="1F2328"/>
-                </a:solidFill>
-                <a:latin typeface="Arial" pitchFamily="34" charset="0"/>
-                <a:ea typeface="Arial" pitchFamily="34" charset="-122"/>
-                <a:cs typeface="Arial" pitchFamily="34" charset="-120"/>
-              </a:rPr>
-              <a:t>Generate plan</a:t>
-            </a:r>
-            <a:pPr algn="l" indent="0" marL="0">
-              <a:lnSpc>
-                <a:spcPts val="1760"/>
-              </a:lnSpc>
-              <a:buNone/>
-            </a:pPr>
-            <a:r>
-              <a:rPr lang="en-US" sz="1450" dirty="0">
-                <a:solidFill>
-                  <a:srgbClr val="1F2328"/>
-                </a:solidFill>
-                <a:latin typeface="Arial" pitchFamily="34" charset="0"/>
-                <a:ea typeface="Arial" pitchFamily="34" charset="-122"/>
-                <a:cs typeface="Arial" pitchFamily="34" charset="-120"/>
-              </a:rPr>
-              <a:t>, approve with </a:t>
-            </a:r>
-            <a:pPr algn="l" indent="0" marL="0">
-              <a:lnSpc>
-                <a:spcPts val="1760"/>
-              </a:lnSpc>
-              <a:buNone/>
-            </a:pPr>
-            <a:r>
-              <a:rPr lang="en-US" sz="1450" b="1" dirty="0">
-                <a:solidFill>
-                  <a:srgbClr val="1F2328"/>
-                </a:solidFill>
-                <a:latin typeface="Arial" pitchFamily="34" charset="0"/>
-                <a:ea typeface="Arial" pitchFamily="34" charset="-122"/>
-                <a:cs typeface="Arial" pitchFamily="34" charset="-120"/>
-              </a:rPr>
-              <a:t>Exit plan mode</a:t>
-            </a:r>
-            <a:pPr algn="l" indent="0" marL="0">
-              <a:lnSpc>
-                <a:spcPts val="1760"/>
-              </a:lnSpc>
-              <a:buNone/>
-            </a:pPr>
-            <a:r>
-              <a:rPr lang="en-US" sz="1450" dirty="0">
-                <a:solidFill>
-                  <a:srgbClr val="1F2328"/>
-                </a:solidFill>
-                <a:latin typeface="Arial" pitchFamily="34" charset="0"/>
-                <a:ea typeface="Arial" pitchFamily="34" charset="-122"/>
-                <a:cs typeface="Arial" pitchFamily="34" charset="-120"/>
-              </a:rPr>
-              <a:t>, then </a:t>
-            </a:r>
-            <a:pPr algn="l" indent="0" marL="0">
-              <a:lnSpc>
-                <a:spcPts val="1760"/>
-              </a:lnSpc>
-              <a:buNone/>
-            </a:pPr>
-            <a:r>
-              <a:rPr lang="en-US" sz="1450" b="1" dirty="0">
-                <a:solidFill>
-                  <a:srgbClr val="1F2328"/>
-                </a:solidFill>
-                <a:latin typeface="Arial" pitchFamily="34" charset="0"/>
-                <a:ea typeface="Arial" pitchFamily="34" charset="-122"/>
-                <a:cs typeface="Arial" pitchFamily="34" charset="-120"/>
-              </a:rPr>
-              <a:t>Run baseline</a:t>
-            </a:r>
-            <a:pPr algn="l" indent="0" marL="0">
-              <a:lnSpc>
-                <a:spcPts val="1760"/>
-              </a:lnSpc>
-              <a:buNone/>
-            </a:pPr>
-            <a:r>
-              <a:rPr lang="en-US" sz="1450" dirty="0">
-                <a:solidFill>
-                  <a:srgbClr val="1F2328"/>
-                </a:solidFill>
-                <a:latin typeface="Arial" pitchFamily="34" charset="0"/>
-                <a:ea typeface="Arial" pitchFamily="34" charset="-122"/>
-                <a:cs typeface="Arial" pitchFamily="34" charset="-120"/>
-              </a:rPr>
-              <a:t>: 4 tests pass before any change.</a:t>
-            </a:r>
-            <a:endParaRPr lang="en-US" sz="1450" dirty="0"/>
-          </a:p>
-        </p:txBody>
-      </p:sp>
-    </p:spTree>
-  </p:cSld>
-  <p:clrMapOvr>
-    <a:masterClrMapping/>
-  </p:clrMapOvr>
-</p:sld>
+<ns0:sld xmlns:ns0="http://schemas.openxmlformats.org/presentationml/2006/main" xmlns:ns1="http://schemas.openxmlformats.org/drawingml/2006/main" xmlns:ns2="http://schemas.microsoft.com/office/drawing/2017/decorative" xmlns:ns3="http://schemas.openxmlformats.org/officeDocument/2006/relationships">
+  <ns0:cSld name="Slide 11">
+    <ns0:bg>
+      <ns0:bgPr>
+        <ns1:solidFill>
+          <ns1:srgbClr val="FFFFFF"/>
+        </ns1:solidFill>
+      </ns0:bgPr>
+    </ns0:bg>
+    <ns0:spTree>
+      <ns0:nvGrpSpPr>
+        <ns0:cNvPr id="1" name=""/>
+        <ns0:cNvGrpSpPr/>
+        <ns0:nvPr/>
+      </ns0:nvGrpSpPr>
+      <ns0:grpSpPr>
+        <ns1:xfrm>
+          <ns1:off x="0" y="0"/>
+          <ns1:ext cx="0" cy="0"/>
+          <ns1:chOff x="0" y="0"/>
+          <ns1:chExt cx="0" cy="0"/>
+        </ns1:xfrm>
+      </ns0:grpSpPr>
+      <ns0:pic>
+        <ns0:nvPicPr>
+          <ns0:cNvPr id="2" name="Image 0" descr="">
+            <ns1:extLst>
+              <ns1:ext uri="{C183D7F6-B498-43B3-948B-1728B52AA6E4}">
+                <ns2:decorative val="1"/>
+              </ns1:ext>
+            </ns1:extLst>
+          </ns0:cNvPr>
+          <ns0:cNvPicPr>
+            <ns1:picLocks noChangeAspect="1"/>
+          </ns0:cNvPicPr>
+          <ns0:nvPr/>
+        </ns0:nvPicPr>
+        <ns0:blipFill>
+          <ns1:blip ns3:embed="rId1"/>
+          <ns1:stretch>
+            <ns1:fillRect/>
+          </ns1:stretch>
+        </ns0:blipFill>
+        <ns0:spPr>
+          <ns1:xfrm>
+            <ns1:off x="6349901" y="0"/>
+            <ns1:ext cx="2793950" cy="1308050"/>
+          </ns1:xfrm>
+          <ns1:prstGeom prst="rect">
+            <ns1:avLst/>
+          </ns1:prstGeom>
+        </ns0:spPr>
+      </ns0:pic>
+      <ns0:sp>
+        <ns0:nvSpPr>
+          <ns0:cNvPr id="3" name="Text 0"/>
+          <ns0:cNvSpPr/>
+          <ns0:nvPr/>
+        </ns0:nvSpPr>
+        <ns0:spPr>
+          <ns1:xfrm>
+            <ns1:off x="7340501" y="177701"/>
+            <ns1:ext cx="1168301" cy="279350"/>
+          </ns1:xfrm>
+          <ns1:prstGeom prst="roundRect">
+            <ns1:avLst>
+              <ns1:gd name="adj" fmla="val 22731"/>
+            </ns1:avLst>
+          </ns1:prstGeom>
+          <ns1:solidFill>
+            <ns1:srgbClr val="1A7F37"/>
+          </ns1:solidFill>
+          <ns1:ln/>
+        </ns0:spPr>
+        <ns0:txBody>
+          <ns1:bodyPr wrap="square" rtlCol="0" anchor="ctr"/>
+          <ns1:lstStyle/>
+          <ns1:p>
+            <ns1:pPr indent="0" marL="0">
+              <ns1:buNone/>
+            </ns1:pPr>
+            <ns1:endParaRPr lang="en-US" dirty="0"/>
+          </ns1:p>
+        </ns0:txBody>
+      </ns0:sp>
+      <ns0:sp>
+        <ns0:nvSpPr>
+          <ns0:cNvPr id="4" name="Text 1"/>
+          <ns0:cNvSpPr/>
+          <ns0:nvPr/>
+        </ns0:nvSpPr>
+        <ns0:spPr>
+          <ns1:xfrm>
+            <ns1:off x="7461041" y="231577"/>
+            <ns1:ext cx="927071" cy="171450"/>
+          </ns1:xfrm>
+          <ns1:prstGeom prst="rect">
+            <ns1:avLst/>
+          </ns1:prstGeom>
+          <ns1:noFill/>
+          <ns1:ln/>
+        </ns0:spPr>
+        <ns0:txBody>
+          <ns1:bodyPr wrap="square" lIns="0" tIns="0" rIns="0" bIns="0" rtlCol="0" anchor="t"/>
+          <ns1:lstStyle/>
+          <ns1:p>
+            <ns1:pPr algn="ctr" indent="0" marL="0">
+              <ns1:buNone/>
+            </ns1:pPr>
+            <ns1:r>
+              <ns1:rPr lang="en-US" sz="1150" b="1" dirty="0">
+                <ns1:solidFill>
+                  <ns1:srgbClr val="FFFFFF"/>
+                </ns1:solidFill>
+                <ns1:latin typeface="Arial" pitchFamily="34" charset="0"/>
+                <ns1:ea typeface="Arial" pitchFamily="34" charset="-122"/>
+                <ns1:cs typeface="Arial" pitchFamily="34" charset="-120"/>
+              </ns1:rPr>
+              <ns1:t>CHAPTER 06</ns1:t>
+            </ns1:r>
+            <ns1:endParaRPr lang="en-US" sz="1150" dirty="0"/>
+          </ns1:p>
+        </ns0:txBody>
+      </ns0:sp>
+      <ns0:pic>
+        <ns0:nvPicPr>
+          <ns0:cNvPr id="5" name="Image 1" descr="Open this chapter on GitHub">
+            <ns1:hlinkClick ns3:id="rId3" tooltip="https://github.com/github/copilot-app-for-beginners/tree/main/06-canvases"/>
+          </ns0:cNvPr>
+          <ns0:cNvPicPr>
+            <ns1:picLocks noChangeAspect="1"/>
+          </ns0:cNvPicPr>
+          <ns0:nvPr/>
+        </ns0:nvPicPr>
+        <ns0:blipFill>
+          <ns1:blip ns3:embed="rId2"/>
+          <ns1:stretch>
+            <ns1:fillRect/>
+          </ns1:stretch>
+        </ns0:blipFill>
+        <ns0:spPr>
+          <ns1:xfrm>
+            <ns1:off x="8610600" y="165050"/>
+            <ns1:ext cx="304800" cy="304800"/>
+          </ns1:xfrm>
+          <ns1:prstGeom prst="rect">
+            <ns1:avLst/>
+          </ns1:prstGeom>
+        </ns0:spPr>
+      </ns0:pic>
+      <ns0:sp>
+        <ns0:nvSpPr>
+          <ns0:cNvPr id="6" name="Text 2"/>
+          <ns0:cNvSpPr/>
+          <ns0:nvPr/>
+        </ns0:nvSpPr>
+        <ns0:spPr>
+          <ns1:xfrm>
+            <ns1:off x="507950" y="381000"/>
+            <ns1:ext cx="8161020" cy="190500"/>
+          </ns1:xfrm>
+          <ns1:prstGeom prst="rect">
+            <ns1:avLst/>
+          </ns1:prstGeom>
+          <ns1:noFill/>
+          <ns1:ln/>
+        </ns0:spPr>
+        <ns0:txBody>
+          <ns1:bodyPr wrap="square" lIns="0" tIns="0" rIns="0" bIns="0" rtlCol="0" anchor="t"/>
+          <ns1:lstStyle/>
+          <ns1:p>
+            <ns1:pPr algn="l" indent="0" marL="0">
+              <ns1:buNone/>
+            </ns1:pPr>
+            <ns1:r>
+              <ns1:rPr lang="en-US" sz="1250" b="1" dirty="0">
+                <ns1:solidFill>
+                  <ns1:srgbClr val="1A7F37"/>
+                </ns1:solidFill>
+                <ns1:latin typeface="Arial" pitchFamily="34" charset="0"/>
+                <ns1:ea typeface="Arial" pitchFamily="34" charset="-122"/>
+                <ns1:cs typeface="Arial" pitchFamily="34" charset="-120"/>
+              </ns1:rPr>
+              <ns1:t>PROPOSE, PLAN, AND BASELINE</ns1:t>
+            </ns1:r>
+            <ns1:endParaRPr lang="en-US" sz="1250" dirty="0"/>
+          </ns1:p>
+        </ns0:txBody>
+      </ns0:sp>
+      <ns0:sp>
+        <ns0:nvSpPr>
+          <ns0:cNvPr id="7" name="Text 3"/>
+          <ns0:cNvSpPr/>
+          <ns0:nvPr/>
+        </ns0:nvSpPr>
+        <ns0:spPr>
+          <ns1:xfrm>
+            <ns1:off x="507950" y="622250"/>
+            <ns1:ext cx="8161020" cy="419100"/>
+          </ns1:xfrm>
+          <ns1:prstGeom prst="rect">
+            <ns1:avLst/>
+          </ns1:prstGeom>
+          <ns1:noFill/>
+          <ns1:ln/>
+        </ns0:spPr>
+        <ns0:txBody>
+          <ns1:bodyPr wrap="square" lIns="0" tIns="0" rIns="0" bIns="0" rtlCol="0" anchor="t"/>
+          <ns1:lstStyle/>
+          <ns1:p>
+            <ns1:pPr algn="l" indent="0" marL="0">
+              <ns1:lnSpc>
+                <ns1:spcPts val="3300"/>
+              </ns1:lnSpc>
+              <ns1:spcBef>
+                <ns1:spcPts val="400"/>
+              </ns1:spcBef>
+              <ns1:buNone/>
+            </ns1:pPr>
+            <ns1:r>
+              <ns1:rPr lang="en-US" sz="2800" b="1" dirty="0">
+                <ns1:solidFill>
+                  <ns1:srgbClr val="1F2328"/>
+                </ns1:solidFill>
+                <ns1:latin typeface="Arial" pitchFamily="34" charset="0"/>
+                <ns1:ea typeface="Arial" pitchFamily="34" charset="-122"/>
+                <ns1:cs typeface="Arial" pitchFamily="34" charset="-120"/>
+              </ns1:rPr>
+              <ns1:t>Plan on the board. Approve in the Plan tab.</ns1:t>
+            </ns1:r>
+            <ns1:endParaRPr lang="en-US" sz="2800" dirty="0"/>
+          </ns1:p>
+        </ns0:txBody>
+      </ns0:sp>
+      <ns0:sp>
+        <ns0:nvSpPr>
+          <ns0:cNvPr id="8" name="Text 4"/>
+          <ns0:cNvSpPr/>
+          <ns0:nvPr/>
+        </ns0:nvSpPr>
+        <ns0:spPr>
+          <ns1:xfrm>
+            <ns1:off x="507950" y="1104751"/>
+            <ns1:ext cx="8161020" cy="254050"/>
+          </ns1:xfrm>
+          <ns1:prstGeom prst="rect">
+            <ns1:avLst/>
+          </ns1:prstGeom>
+          <ns1:noFill/>
+          <ns1:ln/>
+        </ns0:spPr>
+        <ns0:txBody>
+          <ns1:bodyPr wrap="square" lIns="0" tIns="0" rIns="0" bIns="0" rtlCol="0" anchor="t"/>
+          <ns1:lstStyle/>
+          <ns1:p>
+            <ns1:pPr algn="l" indent="0" marL="0">
+              <ns1:lnSpc>
+                <ns1:spcPts val="2000"/>
+              </ns1:lnSpc>
+              <ns1:spcBef>
+                <ns1:spcPts val="500"/>
+              </ns1:spcBef>
+              <ns1:buNone/>
+            </ns1:pPr>
+            <ns1:r>
+              <ns1:rPr lang="en-US" sz="1650" dirty="0">
+                <ns1:solidFill>
+                  <ns1:srgbClr val="59636E"/>
+                </ns1:solidFill>
+                <ns1:latin typeface="Arial" pitchFamily="34" charset="0"/>
+                <ns1:ea typeface="Arial" pitchFamily="34" charset="-122"/>
+                <ns1:cs typeface="Arial" pitchFamily="34" charset="-120"/>
+              </ns1:rPr>
+              <ns1:t>Proposal: a </ns1:t>
+            </ns1:r>
+            <ns1:pPr algn="l" indent="0" marL="0">
+              <ns1:lnSpc>
+                <ns1:spcPts val="2000"/>
+              </ns1:lnSpc>
+              <ns1:spcBef>
+                <ns1:spcPts val="500"/>
+              </ns1:spcBef>
+              <ns1:buNone/>
+            </ns1:pPr>
+            <ns1:r>
+              <ns1:rPr lang="en-US" sz="1650" b="1" dirty="0">
+                <ns1:solidFill>
+                  <ns1:srgbClr val="59636E"/>
+                </ns1:solidFill>
+                <ns1:latin typeface="Arial" pitchFamily="34" charset="0"/>
+                <ns1:ea typeface="Arial" pitchFamily="34" charset="-122"/>
+                <ns1:cs typeface="Arial" pitchFamily="34" charset="-120"/>
+              </ns1:rPr>
+              <ns1:t>Clear filters</ns1:t>
+            </ns1:r>
+            <ns1:pPr algn="l" indent="0" marL="0">
+              <ns1:lnSpc>
+                <ns1:spcPts val="2000"/>
+              </ns1:lnSpc>
+              <ns1:spcBef>
+                <ns1:spcPts val="500"/>
+              </ns1:spcBef>
+              <ns1:buNone/>
+            </ns1:pPr>
+            <ns1:r>
+              <ns1:rPr lang="en-US" sz="1650" dirty="0">
+                <ns1:solidFill>
+                  <ns1:srgbClr val="59636E"/>
+                </ns1:solidFill>
+                <ns1:latin typeface="Arial" pitchFamily="34" charset="0"/>
+                <ns1:ea typeface="Arial" pitchFamily="34" charset="-122"/>
+                <ns1:cs typeface="Arial" pitchFamily="34" charset="-120"/>
+              </ns1:rPr>
+              <ns1:t> control, shown only when a filter is active.</ns1:t>
+            </ns1:r>
+            <ns1:endParaRPr lang="en-US" sz="1650" dirty="0"/>
+          </ns1:p>
+        </ns0:txBody>
+      </ns0:sp>
+      <ns0:sp>
+        <ns0:nvSpPr>
+          <ns0:cNvPr id="9" name="Text 5"/>
+          <ns0:cNvSpPr/>
+          <ns0:nvPr/>
+        </ns0:nvSpPr>
+        <ns0:spPr>
+          <ns1:xfrm>
+            <ns1:off x="507950" y="2313980"/>
+            <ns1:ext cx="330101" cy="330101"/>
+          </ns1:xfrm>
+          <ns1:prstGeom prst="roundRect">
+            <ns1:avLst>
+              <ns1:gd name="adj" fmla="val 277006"/>
+            </ns1:avLst>
+          </ns1:prstGeom>
+          <ns1:solidFill>
+            <ns1:srgbClr val="1A7F37"/>
+          </ns1:solidFill>
+          <ns1:ln/>
+        </ns0:spPr>
+        <ns0:txBody>
+          <ns1:bodyPr wrap="square" rtlCol="0" anchor="ctr"/>
+          <ns1:lstStyle/>
+          <ns1:p>
+            <ns1:pPr indent="0" marL="0">
+              <ns1:buNone/>
+            </ns1:pPr>
+            <ns1:endParaRPr lang="en-US" dirty="0"/>
+          </ns1:p>
+        </ns0:txBody>
+      </ns0:sp>
+      <ns0:sp>
+        <ns0:nvSpPr>
+          <ns0:cNvPr id="10" name="Text 6"/>
+          <ns0:cNvSpPr/>
+          <ns0:nvPr/>
+        </ns0:nvSpPr>
+        <ns0:spPr>
+          <ns1:xfrm>
+            <ns1:off x="620630" y="2374255"/>
+            <ns1:ext cx="104593" cy="209550"/>
+          </ns1:xfrm>
+          <ns1:prstGeom prst="rect">
+            <ns1:avLst/>
+          </ns1:prstGeom>
+          <ns1:noFill/>
+          <ns1:ln/>
+        </ns0:spPr>
+        <ns0:txBody>
+          <ns1:bodyPr wrap="square" lIns="0" tIns="0" rIns="0" bIns="0" rtlCol="0" anchor="t"/>
+          <ns1:lstStyle/>
+          <ns1:p>
+            <ns1:pPr algn="ctr" indent="0" marL="0">
+              <ns1:buNone/>
+            </ns1:pPr>
+            <ns1:r>
+              <ns1:rPr lang="en-US" sz="1450" b="1" dirty="0">
+                <ns1:solidFill>
+                  <ns1:srgbClr val="FFFFFF"/>
+                </ns1:solidFill>
+                <ns1:latin typeface="Arial" pitchFamily="34" charset="0"/>
+                <ns1:ea typeface="Arial" pitchFamily="34" charset="-122"/>
+                <ns1:cs typeface="Arial" pitchFamily="34" charset="-120"/>
+              </ns1:rPr>
+              <ns1:t>1</ns1:t>
+            </ns1:r>
+            <ns1:endParaRPr lang="en-US" sz="1450" dirty="0"/>
+          </ns1:p>
+        </ns0:txBody>
+      </ns0:sp>
+      <ns0:sp>
+        <ns0:nvSpPr>
+          <ns0:cNvPr id="11" name="Text 7"/>
+          <ns0:cNvSpPr/>
+          <ns0:nvPr/>
+        </ns0:nvSpPr>
+        <ns0:spPr>
+          <ns1:xfrm>
+            <ns1:off x="1015752" y="1872555"/>
+            <ns1:ext cx="6475661" cy="1212800"/>
+          </ns1:xfrm>
+          <ns1:prstGeom prst="roundRect">
+            <ns1:avLst>
+              <ns1:gd name="adj" fmla="val 6283"/>
+            </ns1:avLst>
+          </ns1:prstGeom>
+          <ns1:solidFill>
+            <ns1:srgbClr val="FFFFFF"/>
+          </ns1:solidFill>
+          <ns1:ln w="9525">
+            <ns1:solidFill>
+              <ns1:srgbClr val="D1D9E0"/>
+            </ns1:solidFill>
+          </ns1:ln>
+          <ns1:effectLst>
+            <ns1:outerShdw sx="100000" sy="100000" kx="0" ky="0" algn="bl" rotWithShape="0" blurRad="38100" dist="9525" dir="5400000">
+              <ns1:srgbClr val="1f2328">
+                <ns1:alpha val="12000"/>
+              </ns1:srgbClr>
+            </ns1:outerShdw>
+          </ns1:effectLst>
+        </ns0:spPr>
+        <ns0:txBody>
+          <ns1:bodyPr wrap="square" rtlCol="0" anchor="ctr"/>
+          <ns1:lstStyle/>
+          <ns1:p>
+            <ns1:pPr indent="0" marL="0">
+              <ns1:buNone/>
+            </ns1:pPr>
+            <ns1:endParaRPr lang="en-US" dirty="0"/>
+          </ns1:p>
+        </ns0:txBody>
+      </ns0:sp>
+      <ns0:pic>
+        <ns0:nvPicPr>
+          <ns0:cNvPr id="12" name="Image 2" descr="Feature Workbench with the Propose and Plan stages complete and the status Approved"/>
+          <ns0:cNvPicPr>
+            <ns1:picLocks noChangeAspect="1"/>
+          </ns0:cNvPicPr>
+          <ns0:nvPr/>
+        </ns0:nvPicPr>
+        <ns0:blipFill>
+          <ns1:blip ns3:embed="rId4"/>
+          <ns1:stretch>
+            <ns1:fillRect/>
+          </ns1:stretch>
+        </ns0:blipFill>
+        <ns0:spPr>
+          <ns1:xfrm>
+            <ns1:off x="1063377" y="1920180"/>
+            <ns1:ext cx="6380411" cy="1117550"/>
+          </ns1:xfrm>
+          <ns1:prstGeom prst="rect">
+            <ns1:avLst/>
+          </ns1:prstGeom>
+        </ns0:spPr>
+      </ns0:pic>
+      <ns0:sp>
+        <ns0:nvSpPr>
+          <ns0:cNvPr id="13" name="Text 8"/>
+          <ns0:cNvSpPr/>
+          <ns0:nvPr/>
+        </ns0:nvSpPr>
+        <ns0:spPr>
+          <ns1:xfrm>
+            <ns1:off x="507950" y="3444180"/>
+            <ns1:ext cx="330101" cy="330101"/>
+          </ns1:xfrm>
+          <ns1:prstGeom prst="roundRect">
+            <ns1:avLst>
+              <ns1:gd name="adj" fmla="val 277006"/>
+            </ns1:avLst>
+          </ns1:prstGeom>
+          <ns1:solidFill>
+            <ns1:srgbClr val="1A7F37"/>
+          </ns1:solidFill>
+          <ns1:ln/>
+        </ns0:spPr>
+        <ns0:txBody>
+          <ns1:bodyPr wrap="square" rtlCol="0" anchor="ctr"/>
+          <ns1:lstStyle/>
+          <ns1:p>
+            <ns1:pPr indent="0" marL="0">
+              <ns1:buNone/>
+            </ns1:pPr>
+            <ns1:endParaRPr lang="en-US" dirty="0"/>
+          </ns1:p>
+        </ns0:txBody>
+      </ns0:sp>
+      <ns0:sp>
+        <ns0:nvSpPr>
+          <ns0:cNvPr id="14" name="Text 9"/>
+          <ns0:cNvSpPr/>
+          <ns0:nvPr/>
+        </ns0:nvSpPr>
+        <ns0:spPr>
+          <ns1:xfrm>
+            <ns1:off x="620630" y="3504456"/>
+            <ns1:ext cx="104593" cy="209550"/>
+          </ns1:xfrm>
+          <ns1:prstGeom prst="rect">
+            <ns1:avLst/>
+          </ns1:prstGeom>
+          <ns1:noFill/>
+          <ns1:ln/>
+        </ns0:spPr>
+        <ns0:txBody>
+          <ns1:bodyPr wrap="square" lIns="0" tIns="0" rIns="0" bIns="0" rtlCol="0" anchor="t"/>
+          <ns1:lstStyle/>
+          <ns1:p>
+            <ns1:pPr algn="ctr" indent="0" marL="0">
+              <ns1:buNone/>
+            </ns1:pPr>
+            <ns1:r>
+              <ns1:rPr lang="en-US" sz="1450" b="1" dirty="0">
+                <ns1:solidFill>
+                  <ns1:srgbClr val="FFFFFF"/>
+                </ns1:solidFill>
+                <ns1:latin typeface="Arial" pitchFamily="34" charset="0"/>
+                <ns1:ea typeface="Arial" pitchFamily="34" charset="-122"/>
+                <ns1:cs typeface="Arial" pitchFamily="34" charset="-120"/>
+              </ns1:rPr>
+              <ns1:t>2</ns1:t>
+            </ns1:r>
+            <ns1:endParaRPr lang="en-US" sz="1450" dirty="0"/>
+          </ns1:p>
+        </ns0:txBody>
+      </ns0:sp>
+      <ns0:sp>
+        <ns0:nvSpPr>
+          <ns0:cNvPr id="15" name="Text 10"/>
+          <ns0:cNvSpPr/>
+          <ns0:nvPr/>
+        </ns0:nvSpPr>
+        <ns0:spPr>
+          <ns1:xfrm>
+            <ns1:off x="1015752" y="3316486"/>
+            <ns1:ext cx="7613600" cy="585341"/>
+          </ns1:xfrm>
+          <ns1:prstGeom prst="roundRect">
+            <ns1:avLst>
+              <ns1:gd name="adj" fmla="val 13018"/>
+            </ns1:avLst>
+          </ns1:prstGeom>
+          <ns1:solidFill>
+            <ns1:srgbClr val="FFFFFF"/>
+          </ns1:solidFill>
+          <ns1:ln w="9525">
+            <ns1:solidFill>
+              <ns1:srgbClr val="D1D9E0"/>
+            </ns1:solidFill>
+          </ns1:ln>
+          <ns1:effectLst>
+            <ns1:outerShdw sx="100000" sy="100000" kx="0" ky="0" algn="bl" rotWithShape="0" blurRad="38100" dist="9525" dir="5400000">
+              <ns1:srgbClr val="1f2328">
+                <ns1:alpha val="12000"/>
+              </ns1:srgbClr>
+            </ns1:outerShdw>
+          </ns1:effectLst>
+        </ns0:spPr>
+        <ns0:txBody>
+          <ns1:bodyPr wrap="square" rtlCol="0" anchor="ctr"/>
+          <ns1:lstStyle/>
+          <ns1:p>
+            <ns1:pPr indent="0" marL="0">
+              <ns1:buNone/>
+            </ns1:pPr>
+            <ns1:endParaRPr lang="en-US" dirty="0"/>
+          </ns1:p>
+        </ns0:txBody>
+      </ns0:sp>
+      <ns0:pic>
+        <ns0:nvPicPr>
+          <ns0:cNvPr id="16" name="Image 3" descr="Feature Workbench baseline evidence with 4 of 4 tests passed and a passing build"/>
+          <ns0:cNvPicPr>
+            <ns1:picLocks noChangeAspect="1"/>
+          </ns0:cNvPicPr>
+          <ns0:nvPr/>
+        </ns0:nvPicPr>
+        <ns0:blipFill>
+          <ns1:blip ns3:embed="rId5"/>
+          <ns1:stretch>
+            <ns1:fillRect/>
+          </ns1:stretch>
+        </ns0:blipFill>
+        <ns0:spPr>
+          <ns1:xfrm>
+            <ns1:off x="1063377" y="3364111"/>
+            <ns1:ext cx="7518350" cy="490091"/>
+          </ns1:xfrm>
+          <ns1:prstGeom prst="rect">
+            <ns1:avLst/>
+          </ns1:prstGeom>
+        </ns0:spPr>
+      </ns0:pic>
+      <ns0:sp>
+        <ns0:nvSpPr>
+          <ns0:cNvPr id="17" name="Text 11"/>
+          <ns0:cNvSpPr/>
+          <ns0:nvPr/>
+        </ns0:nvSpPr>
+        <ns0:spPr>
+          <ns1:xfrm>
+            <ns1:off x="507950" y="4129832"/>
+            <ns1:ext cx="8290509" cy="223540"/>
+          </ns1:xfrm>
+          <ns1:prstGeom prst="rect">
+            <ns1:avLst/>
+          </ns1:prstGeom>
+          <ns1:noFill/>
+          <ns1:ln/>
+        </ns0:spPr>
+        <ns0:txBody>
+          <ns1:bodyPr wrap="square" lIns="0" tIns="0" rIns="0" bIns="0" rtlCol="0" anchor="t"/>
+          <ns1:lstStyle/>
+          <ns1:p>
+            <ns1:pPr algn="l" indent="0" marL="0">
+              <ns1:lnSpc>
+                <ns1:spcPts val="1760"/>
+              </ns1:lnSpc>
+              <ns1:buNone/>
+            </ns1:pPr>
+            <ns1:r>
+              <ns1:rPr lang="en-US" sz="1450" b="1" dirty="0">
+                <ns1:solidFill>
+                  <ns1:srgbClr val="1F2328"/>
+                </ns1:solidFill>
+                <ns1:latin typeface="Arial" pitchFamily="34" charset="0"/>
+                <ns1:ea typeface="Arial" pitchFamily="34" charset="-122"/>
+                <ns1:cs typeface="Arial" pitchFamily="34" charset="-120"/>
+              </ns1:rPr>
+              <ns1:t>Generate the plan, exit Plan mode, then record baseline checks.</ns1:t>
+            </ns1:r>
+            <ns1:pPr algn="l" indent="0" marL="0">
+              <ns1:lnSpc>
+                <ns1:spcPts val="1760"/>
+              </ns1:lnSpc>
+              <ns1:buNone/>
+            </ns1:pPr>
+            <ns1:r>
+              <ns1:rPr lang="en-US" sz="1450" dirty="0">
+                <ns1:solidFill>
+                  <ns1:srgbClr val="1F2328"/>
+                </ns1:solidFill>
+                <ns1:latin typeface="Arial" pitchFamily="34" charset="0"/>
+                <ns1:ea typeface="Arial" pitchFamily="34" charset="-122"/>
+                <ns1:cs typeface="Arial" pitchFamily="34" charset="-120"/>
+              </ns1:rPr>
+              <ns1:t/>
+            </ns1:r>
+            <ns1:pPr algn="l" indent="0" marL="0">
+              <ns1:lnSpc>
+                <ns1:spcPts val="1760"/>
+              </ns1:lnSpc>
+              <ns1:buNone/>
+            </ns1:pPr>
+            <ns1:r>
+              <ns1:rPr lang="en-US" sz="1450" b="1" dirty="0">
+                <ns1:solidFill>
+                  <ns1:srgbClr val="1F2328"/>
+                </ns1:solidFill>
+                <ns1:latin typeface="Arial" pitchFamily="34" charset="0"/>
+                <ns1:ea typeface="Arial" pitchFamily="34" charset="-122"/>
+                <ns1:cs typeface="Arial" pitchFamily="34" charset="-120"/>
+              </ns1:rPr>
+              <ns1:t/>
+            </ns1:r>
+            <ns1:pPr algn="l" indent="0" marL="0">
+              <ns1:lnSpc>
+                <ns1:spcPts val="1760"/>
+              </ns1:lnSpc>
+              <ns1:buNone/>
+            </ns1:pPr>
+            <ns1:r>
+              <ns1:rPr lang="en-US" sz="1450" dirty="0">
+                <ns1:solidFill>
+                  <ns1:srgbClr val="1F2328"/>
+                </ns1:solidFill>
+                <ns1:latin typeface="Arial" pitchFamily="34" charset="0"/>
+                <ns1:ea typeface="Arial" pitchFamily="34" charset="-122"/>
+                <ns1:cs typeface="Arial" pitchFamily="34" charset="-120"/>
+              </ns1:rPr>
+              <ns1:t/>
+            </ns1:r>
+            <ns1:pPr algn="l" indent="0" marL="0">
+              <ns1:lnSpc>
+                <ns1:spcPts val="1760"/>
+              </ns1:lnSpc>
+              <ns1:buNone/>
+            </ns1:pPr>
+            <ns1:r>
+              <ns1:rPr lang="en-US" sz="1450" b="1" dirty="0">
+                <ns1:solidFill>
+                  <ns1:srgbClr val="1F2328"/>
+                </ns1:solidFill>
+                <ns1:latin typeface="Arial" pitchFamily="34" charset="0"/>
+                <ns1:ea typeface="Arial" pitchFamily="34" charset="-122"/>
+                <ns1:cs typeface="Arial" pitchFamily="34" charset="-120"/>
+              </ns1:rPr>
+              <ns1:t/>
+            </ns1:r>
+            <ns1:pPr algn="l" indent="0" marL="0">
+              <ns1:lnSpc>
+                <ns1:spcPts val="1760"/>
+              </ns1:lnSpc>
+              <ns1:buNone/>
+            </ns1:pPr>
+            <ns1:r>
+              <ns1:rPr lang="en-US" sz="1450" dirty="0">
+                <ns1:solidFill>
+                  <ns1:srgbClr val="1F2328"/>
+                </ns1:solidFill>
+                <ns1:latin typeface="Arial" pitchFamily="34" charset="0"/>
+                <ns1:ea typeface="Arial" pitchFamily="34" charset="-122"/>
+                <ns1:cs typeface="Arial" pitchFamily="34" charset="-120"/>
+              </ns1:rPr>
+              <ns1:t/>
+            </ns1:r>
+            <ns1:endParaRPr lang="en-US" sz="1450" dirty="0"/>
+          </ns1:p>
+        </ns0:txBody>
+      </ns0:sp>
+    </ns0:spTree>
+  </ns0:cSld>
+  <ns0:clrMapOvr>
+    <ns1:masterClrMapping/>
+  </ns0:clrMapOvr>
+</ns0:sld>
 </file>
 
 <file path=ppt/slides/slide12.xml><?xml version="1.0" encoding="utf-8"?>
-<p:sld xmlns:a="http://schemas.openxmlformats.org/drawingml/2006/main" xmlns:r="http://schemas.openxmlformats.org/officeDocument/2006/relationships" xmlns:p="http://schemas.openxmlformats.org/presentationml/2006/main">
-  <p:cSld name="Slide 12">
-    <p:bg>
-      <p:bgPr>
-        <a:solidFill>
-          <a:srgbClr val="FFFFFF"/>
-        </a:solidFill>
-      </p:bgPr>
-    </p:bg>
-    <p:spTree>
-      <p:nvGrpSpPr>
-        <p:cNvPr id="1" name=""/>
-        <p:cNvGrpSpPr/>
-        <p:nvPr/>
-      </p:nvGrpSpPr>
-      <p:grpSpPr>
-        <a:xfrm>
-          <a:off x="0" y="0"/>
-          <a:ext cx="0" cy="0"/>
-          <a:chOff x="0" y="0"/>
-          <a:chExt cx="0" cy="0"/>
-        </a:xfrm>
-      </p:grpSpPr>
-      <p:pic>
-        <p:nvPicPr>
-          <p:cNvPr id="2" name="Image 0" descr="">
-            <a:extLst>
-              <a:ext uri="{C183D7F6-B498-43B3-948B-1728B52AA6E4}">
-                <adec:decorative xmlns:adec="http://schemas.microsoft.com/office/drawing/2017/decorative" val="1"/>
-              </a:ext>
-            </a:extLst>
-          </p:cNvPr>
-          <p:cNvPicPr>
-            <a:picLocks noChangeAspect="1"/>
-          </p:cNvPicPr>
-          <p:nvPr/>
-        </p:nvPicPr>
-        <p:blipFill>
-          <a:blip r:embed="rId1"/>
-          <a:stretch>
-            <a:fillRect/>
-          </a:stretch>
-        </p:blipFill>
-        <p:spPr>
-          <a:xfrm>
-            <a:off x="6349901" y="0"/>
-            <a:ext cx="2793950" cy="1308050"/>
-          </a:xfrm>
-          <a:prstGeom prst="rect">
-            <a:avLst/>
-          </a:prstGeom>
-        </p:spPr>
-      </p:pic>
-      <p:sp>
-        <p:nvSpPr>
-          <p:cNvPr id="3" name="Text 0"/>
-          <p:cNvSpPr/>
-          <p:nvPr/>
-        </p:nvSpPr>
-        <p:spPr>
-          <a:xfrm>
-            <a:off x="7340501" y="177701"/>
-            <a:ext cx="1168301" cy="279350"/>
-          </a:xfrm>
-          <a:prstGeom prst="roundRect">
-            <a:avLst>
-              <a:gd name="adj" fmla="val 22731"/>
-            </a:avLst>
-          </a:prstGeom>
-          <a:solidFill>
-            <a:srgbClr val="1A7F37"/>
-          </a:solidFill>
-          <a:ln/>
-        </p:spPr>
-        <p:txBody>
-          <a:bodyPr wrap="square" rtlCol="0" anchor="ctr"/>
-          <a:lstStyle/>
-          <a:p>
-            <a:pPr indent="0" marL="0">
-              <a:buNone/>
-            </a:pPr>
-            <a:endParaRPr lang="en-US" dirty="0"/>
-          </a:p>
-        </p:txBody>
-      </p:sp>
-      <p:sp>
-        <p:nvSpPr>
-          <p:cNvPr id="4" name="Text 1"/>
-          <p:cNvSpPr/>
-          <p:nvPr/>
-        </p:nvSpPr>
-        <p:spPr>
-          <a:xfrm>
-            <a:off x="7461041" y="231577"/>
-            <a:ext cx="927071" cy="171450"/>
-          </a:xfrm>
-          <a:prstGeom prst="rect">
-            <a:avLst/>
-          </a:prstGeom>
-          <a:noFill/>
-          <a:ln/>
-        </p:spPr>
-        <p:txBody>
-          <a:bodyPr wrap="square" lIns="0" tIns="0" rIns="0" bIns="0" rtlCol="0" anchor="t"/>
-          <a:lstStyle/>
-          <a:p>
-            <a:pPr algn="ctr" indent="0" marL="0">
-              <a:buNone/>
-            </a:pPr>
-            <a:r>
-              <a:rPr lang="en-US" sz="1150" b="1" dirty="0">
-                <a:solidFill>
-                  <a:srgbClr val="FFFFFF"/>
-                </a:solidFill>
-                <a:latin typeface="Arial" pitchFamily="34" charset="0"/>
-                <a:ea typeface="Arial" pitchFamily="34" charset="-122"/>
-                <a:cs typeface="Arial" pitchFamily="34" charset="-120"/>
-              </a:rPr>
-              <a:t>CHAPTER 06</a:t>
-            </a:r>
-            <a:endParaRPr lang="en-US" sz="1150" dirty="0"/>
-          </a:p>
-        </p:txBody>
-      </p:sp>
-      <p:pic>
-        <p:nvPicPr>
-          <p:cNvPr id="5" name="Image 1" descr="Open this chapter on GitHub">
-            <a:hlinkClick r:id="rId3" tooltip="https://github.com/github/copilot-app-for-beginners/tree/main/06-canvases"/>
-          </p:cNvPr>
-          <p:cNvPicPr>
-            <a:picLocks noChangeAspect="1"/>
-          </p:cNvPicPr>
-          <p:nvPr/>
-        </p:nvPicPr>
-        <p:blipFill>
-          <a:blip r:embed="rId2"/>
-          <a:stretch>
-            <a:fillRect/>
-          </a:stretch>
-        </p:blipFill>
-        <p:spPr>
-          <a:xfrm>
-            <a:off x="8610600" y="165050"/>
-            <a:ext cx="304800" cy="304800"/>
-          </a:xfrm>
-          <a:prstGeom prst="rect">
-            <a:avLst/>
-          </a:prstGeom>
-        </p:spPr>
-      </p:pic>
-      <p:sp>
-        <p:nvSpPr>
-          <p:cNvPr id="6" name="Text 2"/>
-          <p:cNvSpPr/>
-          <p:nvPr/>
-        </p:nvSpPr>
-        <p:spPr>
-          <a:xfrm>
-            <a:off x="507950" y="381000"/>
-            <a:ext cx="8161020" cy="190500"/>
-          </a:xfrm>
-          <a:prstGeom prst="rect">
-            <a:avLst/>
-          </a:prstGeom>
-          <a:noFill/>
-          <a:ln/>
-        </p:spPr>
-        <p:txBody>
-          <a:bodyPr wrap="square" lIns="0" tIns="0" rIns="0" bIns="0" rtlCol="0" anchor="t"/>
-          <a:lstStyle/>
-          <a:p>
-            <a:pPr algn="l" indent="0" marL="0">
-              <a:buNone/>
-            </a:pPr>
-            <a:r>
-              <a:rPr lang="en-US" sz="1250" b="1" dirty="0">
-                <a:solidFill>
-                  <a:srgbClr val="1A7F37"/>
-                </a:solidFill>
-                <a:latin typeface="Arial" pitchFamily="34" charset="0"/>
-                <a:ea typeface="Arial" pitchFamily="34" charset="-122"/>
-                <a:cs typeface="Arial" pitchFamily="34" charset="-120"/>
-              </a:rPr>
-              <a:t>IMPLEMENT AND VALIDATE</a:t>
-            </a:r>
-            <a:endParaRPr lang="en-US" sz="1250" dirty="0"/>
-          </a:p>
-        </p:txBody>
-      </p:sp>
-      <p:sp>
-        <p:nvSpPr>
-          <p:cNvPr id="7" name="Text 3"/>
-          <p:cNvSpPr/>
-          <p:nvPr/>
-        </p:nvSpPr>
-        <p:spPr>
-          <a:xfrm>
-            <a:off x="507950" y="622250"/>
-            <a:ext cx="8161020" cy="419100"/>
-          </a:xfrm>
-          <a:prstGeom prst="rect">
-            <a:avLst/>
-          </a:prstGeom>
-          <a:noFill/>
-          <a:ln/>
-        </p:spPr>
-        <p:txBody>
-          <a:bodyPr wrap="square" lIns="0" tIns="0" rIns="0" bIns="0" rtlCol="0" anchor="t"/>
-          <a:lstStyle/>
-          <a:p>
-            <a:pPr algn="l" indent="0" marL="0">
-              <a:lnSpc>
-                <a:spcPts val="3300"/>
-              </a:lnSpc>
-              <a:spcBef>
-                <a:spcPts val="400"/>
-              </a:spcBef>
-              <a:buNone/>
-            </a:pPr>
-            <a:r>
-              <a:rPr lang="en-US" sz="2800" b="1" dirty="0">
-                <a:solidFill>
-                  <a:srgbClr val="1F2328"/>
-                </a:solidFill>
-                <a:latin typeface="Arial" pitchFamily="34" charset="0"/>
-                <a:ea typeface="Arial" pitchFamily="34" charset="-122"/>
-                <a:cs typeface="Arial" pitchFamily="34" charset="-120"/>
-              </a:rPr>
-              <a:t>Implement, then check five states</a:t>
-            </a:r>
-            <a:endParaRPr lang="en-US" sz="2800" dirty="0"/>
-          </a:p>
-        </p:txBody>
-      </p:sp>
-      <p:sp>
-        <p:nvSpPr>
-          <p:cNvPr id="8" name="Text 4"/>
-          <p:cNvSpPr/>
-          <p:nvPr/>
-        </p:nvSpPr>
-        <p:spPr>
-          <a:xfrm>
-            <a:off x="507950" y="1104751"/>
-            <a:ext cx="8161020" cy="254050"/>
-          </a:xfrm>
-          <a:prstGeom prst="rect">
-            <a:avLst/>
-          </a:prstGeom>
-          <a:noFill/>
-          <a:ln/>
-        </p:spPr>
-        <p:txBody>
-          <a:bodyPr wrap="square" lIns="0" tIns="0" rIns="0" bIns="0" rtlCol="0" anchor="t"/>
-          <a:lstStyle/>
-          <a:p>
-            <a:pPr algn="l" indent="0" marL="0">
-              <a:lnSpc>
-                <a:spcPts val="2000"/>
-              </a:lnSpc>
-              <a:spcBef>
-                <a:spcPts val="500"/>
-              </a:spcBef>
-              <a:buNone/>
-            </a:pPr>
-            <a:r>
-              <a:rPr lang="en-US" sz="1650" dirty="0">
-                <a:solidFill>
-                  <a:srgbClr val="59636E"/>
-                </a:solidFill>
-                <a:latin typeface="Arial" pitchFamily="34" charset="0"/>
-                <a:ea typeface="Arial" pitchFamily="34" charset="-122"/>
-                <a:cs typeface="Arial" pitchFamily="34" charset="-120"/>
-              </a:rPr>
-              <a:t>Select </a:t>
-            </a:r>
-            <a:pPr algn="l" indent="0" marL="0">
-              <a:lnSpc>
-                <a:spcPts val="2000"/>
-              </a:lnSpc>
-              <a:spcBef>
-                <a:spcPts val="500"/>
-              </a:spcBef>
-              <a:buNone/>
-            </a:pPr>
-            <a:r>
-              <a:rPr lang="en-US" sz="1650" b="1" dirty="0">
-                <a:solidFill>
-                  <a:srgbClr val="59636E"/>
-                </a:solidFill>
-                <a:latin typeface="Arial" pitchFamily="34" charset="0"/>
-                <a:ea typeface="Arial" pitchFamily="34" charset="-122"/>
-                <a:cs typeface="Arial" pitchFamily="34" charset="-120"/>
-              </a:rPr>
-              <a:t>Implement</a:t>
-            </a:r>
-            <a:pPr algn="l" indent="0" marL="0">
-              <a:lnSpc>
-                <a:spcPts val="2000"/>
-              </a:lnSpc>
-              <a:spcBef>
-                <a:spcPts val="500"/>
-              </a:spcBef>
-              <a:buNone/>
-            </a:pPr>
-            <a:r>
-              <a:rPr lang="en-US" sz="1650" dirty="0">
-                <a:solidFill>
-                  <a:srgbClr val="59636E"/>
-                </a:solidFill>
-                <a:latin typeface="Arial" pitchFamily="34" charset="0"/>
-                <a:ea typeface="Arial" pitchFamily="34" charset="-122"/>
-                <a:cs typeface="Arial" pitchFamily="34" charset="-120"/>
-              </a:rPr>
-              <a:t>, then </a:t>
-            </a:r>
-            <a:pPr algn="l" indent="0" marL="0">
-              <a:lnSpc>
-                <a:spcPts val="2000"/>
-              </a:lnSpc>
-              <a:spcBef>
-                <a:spcPts val="500"/>
-              </a:spcBef>
-              <a:buNone/>
-            </a:pPr>
-            <a:r>
-              <a:rPr lang="en-US" sz="1650" b="1" dirty="0">
-                <a:solidFill>
-                  <a:srgbClr val="59636E"/>
-                </a:solidFill>
-                <a:latin typeface="Arial" pitchFamily="34" charset="0"/>
-                <a:ea typeface="Arial" pitchFamily="34" charset="-122"/>
-                <a:cs typeface="Arial" pitchFamily="34" charset="-120"/>
-              </a:rPr>
-              <a:t>Browser validation</a:t>
-            </a:r>
-            <a:pPr algn="l" indent="0" marL="0">
-              <a:lnSpc>
-                <a:spcPts val="2000"/>
-              </a:lnSpc>
-              <a:spcBef>
-                <a:spcPts val="500"/>
-              </a:spcBef>
-              <a:buNone/>
-            </a:pPr>
-            <a:r>
-              <a:rPr lang="en-US" sz="1650" dirty="0">
-                <a:solidFill>
-                  <a:srgbClr val="59636E"/>
-                </a:solidFill>
-                <a:latin typeface="Arial" pitchFamily="34" charset="0"/>
-                <a:ea typeface="Arial" pitchFamily="34" charset="-122"/>
-                <a:cs typeface="Arial" pitchFamily="34" charset="-120"/>
-              </a:rPr>
-              <a:t>.</a:t>
-            </a:r>
-            <a:endParaRPr lang="en-US" sz="1650" dirty="0"/>
-          </a:p>
-        </p:txBody>
-      </p:sp>
-      <p:sp>
-        <p:nvSpPr>
-          <p:cNvPr id="9" name="Text 5"/>
-          <p:cNvSpPr/>
-          <p:nvPr/>
-        </p:nvSpPr>
-        <p:spPr>
-          <a:xfrm>
-            <a:off x="754261" y="1580108"/>
-            <a:ext cx="7635180" cy="1415951"/>
-          </a:xfrm>
-          <a:prstGeom prst="roundRect">
-            <a:avLst>
-              <a:gd name="adj" fmla="val 5382"/>
-            </a:avLst>
-          </a:prstGeom>
-          <a:solidFill>
-            <a:srgbClr val="FFFFFF"/>
-          </a:solidFill>
-          <a:ln w="9525">
-            <a:solidFill>
-              <a:srgbClr val="D1D9E0"/>
-            </a:solidFill>
-          </a:ln>
-          <a:effectLst>
-            <a:outerShdw sx="100000" sy="100000" kx="0" ky="0" algn="bl" rotWithShape="0" blurRad="38100" dist="9525" dir="5400000">
-              <a:srgbClr val="1f2328">
-                <a:alpha val="12000"/>
-              </a:srgbClr>
-            </a:outerShdw>
-          </a:effectLst>
-        </p:spPr>
-        <p:txBody>
-          <a:bodyPr wrap="square" rtlCol="0" anchor="ctr"/>
-          <a:lstStyle/>
-          <a:p>
-            <a:pPr indent="0" marL="0">
-              <a:buNone/>
-            </a:pPr>
-            <a:endParaRPr lang="en-US" dirty="0"/>
-          </a:p>
-        </p:txBody>
-      </p:sp>
-      <p:pic>
-        <p:nvPicPr>
-          <p:cNvPr id="10" name="Image 2" descr="Feature Workbench with the Implement stage complete and a Diff row in the evidence, next to the Changes pill above the prompt box">    </p:cNvPr>
-          <p:cNvPicPr>
-            <a:picLocks noChangeAspect="1"/>
-          </p:cNvPicPr>
-          <p:nvPr/>
-        </p:nvPicPr>
-        <p:blipFill>
-          <a:blip r:embed="rId4"/>
-          <a:stretch>
-            <a:fillRect/>
-          </a:stretch>
-        </p:blipFill>
-        <p:spPr>
-          <a:xfrm>
-            <a:off x="801886" y="1627733"/>
-            <a:ext cx="7539930" cy="1320701"/>
-          </a:xfrm>
-          <a:prstGeom prst="rect">
-            <a:avLst/>
-          </a:prstGeom>
-        </p:spPr>
-      </p:pic>
-      <p:sp>
-        <p:nvSpPr>
-          <p:cNvPr id="11" name="Text 6"/>
-          <p:cNvSpPr/>
-          <p:nvPr/>
-        </p:nvSpPr>
-        <p:spPr>
-          <a:xfrm>
-            <a:off x="507950" y="3202484"/>
-            <a:ext cx="4825901" cy="1443335"/>
-          </a:xfrm>
-          <a:prstGeom prst="roundRect">
-            <a:avLst>
-              <a:gd name="adj" fmla="val 7039"/>
-            </a:avLst>
-          </a:prstGeom>
-          <a:solidFill>
-            <a:srgbClr val="FFFFFF"/>
-          </a:solidFill>
-          <a:ln w="9525">
-            <a:solidFill>
-              <a:srgbClr val="D1D9E0"/>
-            </a:solidFill>
-          </a:ln>
-        </p:spPr>
-        <p:txBody>
-          <a:bodyPr wrap="square" rtlCol="0" anchor="ctr"/>
-          <a:lstStyle/>
-          <a:p>
-            <a:pPr indent="0" marL="0">
-              <a:buNone/>
-            </a:pPr>
-            <a:endParaRPr lang="en-US" dirty="0"/>
-          </a:p>
-        </p:txBody>
-      </p:sp>
-      <p:sp>
-        <p:nvSpPr>
-          <p:cNvPr id="12" name="Text 7"/>
-          <p:cNvSpPr/>
-          <p:nvPr/>
-        </p:nvSpPr>
-        <p:spPr>
-          <a:xfrm>
-            <a:off x="517475" y="3212009"/>
-            <a:ext cx="4806851" cy="326975"/>
-          </a:xfrm>
-          <a:prstGeom prst="rect">
-            <a:avLst/>
-          </a:prstGeom>
-          <a:solidFill>
-            <a:srgbClr val="DDF4FF"/>
-          </a:solidFill>
-          <a:ln/>
-        </p:spPr>
-        <p:txBody>
-          <a:bodyPr wrap="square" rtlCol="0" anchor="ctr"/>
-          <a:lstStyle/>
-          <a:p>
-            <a:pPr indent="0" marL="0">
-              <a:buNone/>
-            </a:pPr>
-            <a:endParaRPr lang="en-US" dirty="0"/>
-          </a:p>
-        </p:txBody>
-      </p:sp>
-      <p:sp>
-        <p:nvSpPr>
-          <p:cNvPr id="13" name="Shape 8"/>
-          <p:cNvSpPr/>
-          <p:nvPr/>
-        </p:nvSpPr>
-        <p:spPr>
-          <a:xfrm>
-            <a:off x="517475" y="3534221"/>
-            <a:ext cx="4806851" cy="0"/>
-          </a:xfrm>
-          <a:prstGeom prst="line">
-            <a:avLst/>
-          </a:prstGeom>
-          <a:noFill/>
-          <a:ln w="9525">
-            <a:solidFill>
-              <a:srgbClr val="9CD7FF"/>
-            </a:solidFill>
-            <a:prstDash val="solid"/>
-          </a:ln>
-        </p:spPr>
-      </p:sp>
-      <p:sp>
-        <p:nvSpPr>
-          <p:cNvPr id="14" name="Text 9"/>
-          <p:cNvSpPr/>
-          <p:nvPr/>
-        </p:nvSpPr>
-        <p:spPr>
-          <a:xfrm>
-            <a:off x="669875" y="3288209"/>
-            <a:ext cx="2409444" cy="165050"/>
-          </a:xfrm>
-          <a:prstGeom prst="rect">
-            <a:avLst/>
-          </a:prstGeom>
-          <a:noFill/>
-          <a:ln/>
-        </p:spPr>
-        <p:txBody>
-          <a:bodyPr wrap="square" lIns="0" tIns="0" rIns="0" bIns="0" rtlCol="0" anchor="t"/>
-          <a:lstStyle/>
-          <a:p>
-            <a:pPr algn="l" indent="0" marL="0">
-              <a:lnSpc>
-                <a:spcPts val="1300"/>
-              </a:lnSpc>
-              <a:buNone/>
-            </a:pPr>
-            <a:r>
-              <a:rPr lang="en-US" sz="1150" b="1" dirty="0">
-                <a:solidFill>
-                  <a:srgbClr val="0969DA"/>
-                </a:solidFill>
-                <a:latin typeface="Arial" pitchFamily="34" charset="0"/>
-                <a:ea typeface="Arial" pitchFamily="34" charset="-122"/>
-                <a:cs typeface="Arial" pitchFamily="34" charset="-120"/>
-              </a:rPr>
-              <a:t>STATE</a:t>
-            </a:r>
-            <a:endParaRPr lang="en-US" sz="1150" dirty="0"/>
-          </a:p>
-        </p:txBody>
-      </p:sp>
-      <p:sp>
-        <p:nvSpPr>
-          <p:cNvPr id="15" name="Text 10"/>
-          <p:cNvSpPr/>
-          <p:nvPr/>
-        </p:nvSpPr>
-        <p:spPr>
-          <a:xfrm>
-            <a:off x="3336875" y="3288209"/>
-            <a:ext cx="1891183" cy="165050"/>
-          </a:xfrm>
-          <a:prstGeom prst="rect">
-            <a:avLst/>
-          </a:prstGeom>
-          <a:noFill/>
-          <a:ln/>
-        </p:spPr>
-        <p:txBody>
-          <a:bodyPr wrap="square" lIns="0" tIns="0" rIns="0" bIns="0" rtlCol="0" anchor="t"/>
-          <a:lstStyle/>
-          <a:p>
-            <a:pPr algn="l" indent="0" marL="0">
-              <a:lnSpc>
-                <a:spcPts val="1300"/>
-              </a:lnSpc>
-              <a:buNone/>
-            </a:pPr>
-            <a:r>
-              <a:rPr lang="en-US" sz="1150" b="1" dirty="0">
-                <a:solidFill>
-                  <a:srgbClr val="0969DA"/>
-                </a:solidFill>
-                <a:latin typeface="Arial" pitchFamily="34" charset="0"/>
-                <a:ea typeface="Arial" pitchFamily="34" charset="-122"/>
-                <a:cs typeface="Arial" pitchFamily="34" charset="-120"/>
-              </a:rPr>
-              <a:t>CLEAR FILTERS</a:t>
-            </a:r>
-            <a:endParaRPr lang="en-US" sz="1150" dirty="0"/>
-          </a:p>
-        </p:txBody>
-      </p:sp>
-      <p:sp>
-        <p:nvSpPr>
-          <p:cNvPr id="16" name="Shape 11"/>
-          <p:cNvSpPr/>
-          <p:nvPr/>
-        </p:nvSpPr>
-        <p:spPr>
-          <a:xfrm>
-            <a:off x="517475" y="3903166"/>
-            <a:ext cx="4806851" cy="0"/>
-          </a:xfrm>
-          <a:prstGeom prst="line">
-            <a:avLst/>
-          </a:prstGeom>
-          <a:noFill/>
-          <a:ln w="9525">
-            <a:solidFill>
-              <a:srgbClr val="D1D9E0"/>
-            </a:solidFill>
-            <a:prstDash val="solid"/>
-          </a:ln>
-        </p:spPr>
-      </p:sp>
-      <p:sp>
-        <p:nvSpPr>
-          <p:cNvPr id="17" name="Text 12"/>
-          <p:cNvSpPr/>
-          <p:nvPr/>
-        </p:nvSpPr>
-        <p:spPr>
-          <a:xfrm>
-            <a:off x="669875" y="3615184"/>
-            <a:ext cx="2409444" cy="207020"/>
-          </a:xfrm>
-          <a:prstGeom prst="rect">
-            <a:avLst/>
-          </a:prstGeom>
-          <a:noFill/>
-          <a:ln/>
-        </p:spPr>
-        <p:txBody>
-          <a:bodyPr wrap="square" lIns="0" tIns="0" rIns="0" bIns="0" rtlCol="0" anchor="t"/>
-          <a:lstStyle/>
-          <a:p>
-            <a:pPr algn="l" indent="0" marL="0">
-              <a:lnSpc>
-                <a:spcPts val="1630"/>
-              </a:lnSpc>
-              <a:buNone/>
-            </a:pPr>
-            <a:r>
-              <a:rPr lang="en-US" sz="1400" b="1" dirty="0">
-                <a:solidFill>
-                  <a:srgbClr val="1F2328"/>
-                </a:solidFill>
-                <a:latin typeface="Arial" pitchFamily="34" charset="0"/>
-                <a:ea typeface="Arial" pitchFamily="34" charset="-122"/>
-                <a:cs typeface="Arial" pitchFamily="34" charset="-120"/>
-              </a:rPr>
-              <a:t>No filters active</a:t>
-            </a:r>
-            <a:endParaRPr lang="en-US" sz="1400" dirty="0"/>
-          </a:p>
-        </p:txBody>
-      </p:sp>
-      <p:sp>
-        <p:nvSpPr>
-          <p:cNvPr id="18" name="Text 13"/>
-          <p:cNvSpPr/>
-          <p:nvPr/>
-        </p:nvSpPr>
-        <p:spPr>
-          <a:xfrm>
-            <a:off x="3336875" y="3615184"/>
-            <a:ext cx="1891183" cy="207020"/>
-          </a:xfrm>
-          <a:prstGeom prst="rect">
-            <a:avLst/>
-          </a:prstGeom>
-          <a:noFill/>
-          <a:ln/>
-        </p:spPr>
-        <p:txBody>
-          <a:bodyPr wrap="square" lIns="0" tIns="0" rIns="0" bIns="0" rtlCol="0" anchor="t"/>
-          <a:lstStyle/>
-          <a:p>
-            <a:pPr algn="l" indent="0" marL="0">
-              <a:lnSpc>
-                <a:spcPts val="1630"/>
-              </a:lnSpc>
-              <a:buNone/>
-            </a:pPr>
-            <a:r>
-              <a:rPr lang="en-US" sz="1400" dirty="0">
-                <a:solidFill>
-                  <a:srgbClr val="59636E"/>
-                </a:solidFill>
-                <a:latin typeface="Arial" pitchFamily="34" charset="0"/>
-                <a:ea typeface="Arial" pitchFamily="34" charset="-122"/>
-                <a:cs typeface="Arial" pitchFamily="34" charset="-120"/>
-              </a:rPr>
-              <a:t>Hidden</a:t>
-            </a:r>
-            <a:endParaRPr lang="en-US" sz="1400" dirty="0"/>
-          </a:p>
-        </p:txBody>
-      </p:sp>
-      <p:sp>
-        <p:nvSpPr>
-          <p:cNvPr id="19" name="Shape 14"/>
-          <p:cNvSpPr/>
-          <p:nvPr/>
-        </p:nvSpPr>
-        <p:spPr>
-          <a:xfrm>
-            <a:off x="517475" y="4272111"/>
-            <a:ext cx="4806851" cy="0"/>
-          </a:xfrm>
-          <a:prstGeom prst="line">
-            <a:avLst/>
-          </a:prstGeom>
-          <a:noFill/>
-          <a:ln w="9525">
-            <a:solidFill>
-              <a:srgbClr val="D1D9E0"/>
-            </a:solidFill>
-            <a:prstDash val="solid"/>
-          </a:ln>
-        </p:spPr>
-      </p:sp>
-      <p:sp>
-        <p:nvSpPr>
-          <p:cNvPr id="20" name="Text 15"/>
-          <p:cNvSpPr/>
-          <p:nvPr/>
-        </p:nvSpPr>
-        <p:spPr>
-          <a:xfrm>
-            <a:off x="669875" y="3984129"/>
-            <a:ext cx="2409444" cy="207020"/>
-          </a:xfrm>
-          <a:prstGeom prst="rect">
-            <a:avLst/>
-          </a:prstGeom>
-          <a:noFill/>
-          <a:ln/>
-        </p:spPr>
-        <p:txBody>
-          <a:bodyPr wrap="square" lIns="0" tIns="0" rIns="0" bIns="0" rtlCol="0" anchor="t"/>
-          <a:lstStyle/>
-          <a:p>
-            <a:pPr algn="l" indent="0" marL="0">
-              <a:lnSpc>
-                <a:spcPts val="1630"/>
-              </a:lnSpc>
-              <a:buNone/>
-            </a:pPr>
-            <a:r>
-              <a:rPr lang="en-US" sz="1400" b="1" dirty="0">
-                <a:solidFill>
-                  <a:srgbClr val="1F2328"/>
-                </a:solidFill>
-                <a:latin typeface="Arial" pitchFamily="34" charset="0"/>
-                <a:ea typeface="Arial" pitchFamily="34" charset="-122"/>
-                <a:cs typeface="Arial" pitchFamily="34" charset="-120"/>
-              </a:rPr>
-              <a:t>Any filter set</a:t>
-            </a:r>
-            <a:endParaRPr lang="en-US" sz="1400" dirty="0"/>
-          </a:p>
-        </p:txBody>
-      </p:sp>
-      <p:sp>
-        <p:nvSpPr>
-          <p:cNvPr id="21" name="Text 16"/>
-          <p:cNvSpPr/>
-          <p:nvPr/>
-        </p:nvSpPr>
-        <p:spPr>
-          <a:xfrm>
-            <a:off x="3336875" y="3984129"/>
-            <a:ext cx="1891183" cy="207020"/>
-          </a:xfrm>
-          <a:prstGeom prst="rect">
-            <a:avLst/>
-          </a:prstGeom>
-          <a:noFill/>
-          <a:ln/>
-        </p:spPr>
-        <p:txBody>
-          <a:bodyPr wrap="square" lIns="0" tIns="0" rIns="0" bIns="0" rtlCol="0" anchor="t"/>
-          <a:lstStyle/>
-          <a:p>
-            <a:pPr algn="l" indent="0" marL="0">
-              <a:lnSpc>
-                <a:spcPts val="1630"/>
-              </a:lnSpc>
-              <a:buNone/>
-            </a:pPr>
-            <a:r>
-              <a:rPr lang="en-US" sz="1400" dirty="0">
-                <a:solidFill>
-                  <a:srgbClr val="59636E"/>
-                </a:solidFill>
-                <a:latin typeface="Arial" pitchFamily="34" charset="0"/>
-                <a:ea typeface="Arial" pitchFamily="34" charset="-122"/>
-                <a:cs typeface="Arial" pitchFamily="34" charset="-120"/>
-              </a:rPr>
-              <a:t>Visible</a:t>
-            </a:r>
-            <a:endParaRPr lang="en-US" sz="1400" dirty="0"/>
-          </a:p>
-        </p:txBody>
-      </p:sp>
-      <p:sp>
-        <p:nvSpPr>
-          <p:cNvPr id="22" name="Text 17"/>
-          <p:cNvSpPr/>
-          <p:nvPr/>
-        </p:nvSpPr>
-        <p:spPr>
-          <a:xfrm>
-            <a:off x="669875" y="4353074"/>
-            <a:ext cx="2409444" cy="207020"/>
-          </a:xfrm>
-          <a:prstGeom prst="rect">
-            <a:avLst/>
-          </a:prstGeom>
-          <a:noFill/>
-          <a:ln/>
-        </p:spPr>
-        <p:txBody>
-          <a:bodyPr wrap="square" lIns="0" tIns="0" rIns="0" bIns="0" rtlCol="0" anchor="t"/>
-          <a:lstStyle/>
-          <a:p>
-            <a:pPr algn="l" indent="0" marL="0">
-              <a:lnSpc>
-                <a:spcPts val="1630"/>
-              </a:lnSpc>
-              <a:buNone/>
-            </a:pPr>
-            <a:r>
-              <a:rPr lang="en-US" sz="1400" b="1" dirty="0">
-                <a:solidFill>
-                  <a:srgbClr val="1F2328"/>
-                </a:solidFill>
-                <a:latin typeface="Arial" pitchFamily="34" charset="0"/>
-                <a:ea typeface="Arial" pitchFamily="34" charset="-122"/>
-                <a:cs typeface="Arial" pitchFamily="34" charset="-120"/>
-              </a:rPr>
-              <a:t>After selecting it</a:t>
-            </a:r>
-            <a:endParaRPr lang="en-US" sz="1400" dirty="0"/>
-          </a:p>
-        </p:txBody>
-      </p:sp>
-      <p:sp>
-        <p:nvSpPr>
-          <p:cNvPr id="23" name="Text 18"/>
-          <p:cNvSpPr/>
-          <p:nvPr/>
-        </p:nvSpPr>
-        <p:spPr>
-          <a:xfrm>
-            <a:off x="3336875" y="4353074"/>
-            <a:ext cx="1891183" cy="207020"/>
-          </a:xfrm>
-          <a:prstGeom prst="rect">
-            <a:avLst/>
-          </a:prstGeom>
-          <a:noFill/>
-          <a:ln/>
-        </p:spPr>
-        <p:txBody>
-          <a:bodyPr wrap="square" lIns="0" tIns="0" rIns="0" bIns="0" rtlCol="0" anchor="t"/>
-          <a:lstStyle/>
-          <a:p>
-            <a:pPr algn="l" indent="0" marL="0">
-              <a:lnSpc>
-                <a:spcPts val="1630"/>
-              </a:lnSpc>
-              <a:buNone/>
-            </a:pPr>
-            <a:r>
-              <a:rPr lang="en-US" sz="1400" dirty="0">
-                <a:solidFill>
-                  <a:srgbClr val="59636E"/>
-                </a:solidFill>
-                <a:latin typeface="Arial" pitchFamily="34" charset="0"/>
-                <a:ea typeface="Arial" pitchFamily="34" charset="-122"/>
-                <a:cs typeface="Arial" pitchFamily="34" charset="-120"/>
-              </a:rPr>
-              <a:t>All filters reset</a:t>
-            </a:r>
-            <a:endParaRPr lang="en-US" sz="1400" dirty="0"/>
-          </a:p>
-        </p:txBody>
-      </p:sp>
-      <p:sp>
-        <p:nvSpPr>
-          <p:cNvPr id="24" name="Text 19"/>
-          <p:cNvSpPr/>
-          <p:nvPr/>
-        </p:nvSpPr>
-        <p:spPr>
-          <a:xfrm>
-            <a:off x="5537002" y="3564136"/>
-            <a:ext cx="3098899" cy="720030"/>
-          </a:xfrm>
-          <a:prstGeom prst="roundRect">
-            <a:avLst>
-              <a:gd name="adj" fmla="val 14111"/>
-            </a:avLst>
-          </a:prstGeom>
-          <a:solidFill>
-            <a:srgbClr val="FBEFFF"/>
-          </a:solidFill>
-          <a:ln w="9525">
-            <a:solidFill>
-              <a:srgbClr val="E0C5FF"/>
-            </a:solidFill>
-          </a:ln>
-        </p:spPr>
-        <p:txBody>
-          <a:bodyPr wrap="square" rtlCol="0" anchor="ctr"/>
-          <a:lstStyle/>
-          <a:p>
-            <a:pPr indent="0" marL="0">
-              <a:buNone/>
-            </a:pPr>
-            <a:endParaRPr lang="en-US" dirty="0"/>
-          </a:p>
-        </p:txBody>
-      </p:sp>
-      <p:pic>
-        <p:nvPicPr>
-          <p:cNvPr id="25" name="Image 3" descr="">
-            <a:extLst>
-              <a:ext uri="{C183D7F6-B498-43B3-948B-1728B52AA6E4}">
-                <adec:decorative xmlns:adec="http://schemas.microsoft.com/office/drawing/2017/decorative" val="1"/>
-              </a:ext>
-            </a:extLst>
-          </p:cNvPr>
-          <p:cNvPicPr>
-            <a:picLocks noChangeAspect="1"/>
-          </p:cNvPicPr>
-          <p:nvPr/>
-        </p:nvPicPr>
-        <p:blipFill>
-          <a:blip r:embed="rId5"/>
-          <a:stretch>
-            <a:fillRect/>
-          </a:stretch>
-        </p:blipFill>
-        <p:spPr>
-          <a:xfrm>
-            <a:off x="5724227" y="3822502"/>
-            <a:ext cx="203150" cy="203150"/>
-          </a:xfrm>
-          <a:prstGeom prst="rect">
-            <a:avLst/>
-          </a:prstGeom>
-        </p:spPr>
-      </p:pic>
-      <p:sp>
-        <p:nvSpPr>
-          <p:cNvPr id="26" name="Text 20"/>
-          <p:cNvSpPr/>
-          <p:nvPr/>
-        </p:nvSpPr>
-        <p:spPr>
-          <a:xfrm>
-            <a:off x="6054328" y="3700611"/>
-            <a:ext cx="2442234" cy="447080"/>
-          </a:xfrm>
-          <a:prstGeom prst="rect">
-            <a:avLst/>
-          </a:prstGeom>
-          <a:noFill/>
-          <a:ln/>
-        </p:spPr>
-        <p:txBody>
-          <a:bodyPr wrap="square" lIns="0" tIns="0" rIns="0" bIns="0" rtlCol="0" anchor="t"/>
-          <a:lstStyle/>
-          <a:p>
-            <a:pPr algn="l" indent="0" marL="0">
-              <a:lnSpc>
-                <a:spcPts val="1760"/>
-              </a:lnSpc>
-              <a:buNone/>
-            </a:pPr>
-            <a:r>
-              <a:rPr lang="en-US" sz="1450" dirty="0">
-                <a:solidFill>
-                  <a:srgbClr val="1F2328"/>
-                </a:solidFill>
-                <a:latin typeface="Arial" pitchFamily="34" charset="0"/>
-                <a:ea typeface="Arial" pitchFamily="34" charset="-122"/>
-                <a:cs typeface="Arial" pitchFamily="34" charset="-120"/>
-              </a:rPr>
-              <a:t>Check the </a:t>
-            </a:r>
-            <a:pPr algn="l" indent="0" marL="0">
-              <a:lnSpc>
-                <a:spcPts val="1760"/>
-              </a:lnSpc>
-              <a:buNone/>
-            </a:pPr>
-            <a:r>
-              <a:rPr lang="en-US" sz="1450" b="1" dirty="0">
-                <a:solidFill>
-                  <a:srgbClr val="1F2328"/>
-                </a:solidFill>
-                <a:latin typeface="Arial" pitchFamily="34" charset="0"/>
-                <a:ea typeface="Arial" pitchFamily="34" charset="-122"/>
-                <a:cs typeface="Arial" pitchFamily="34" charset="-120"/>
-              </a:rPr>
-              <a:t>Changes</a:t>
-            </a:r>
-            <a:pPr algn="l" indent="0" marL="0">
-              <a:lnSpc>
-                <a:spcPts val="1760"/>
-              </a:lnSpc>
-              <a:buNone/>
-            </a:pPr>
-            <a:r>
-              <a:rPr lang="en-US" sz="1450" dirty="0">
-                <a:solidFill>
-                  <a:srgbClr val="1F2328"/>
-                </a:solidFill>
-                <a:latin typeface="Arial" pitchFamily="34" charset="0"/>
-                <a:ea typeface="Arial" pitchFamily="34" charset="-122"/>
-                <a:cs typeface="Arial" pitchFamily="34" charset="-120"/>
-              </a:rPr>
-              <a:t> tab: only the approved feature.</a:t>
-            </a:r>
-            <a:endParaRPr lang="en-US" sz="1450" dirty="0"/>
-          </a:p>
-        </p:txBody>
-      </p:sp>
-    </p:spTree>
-  </p:cSld>
-  <p:clrMapOvr>
-    <a:masterClrMapping/>
-  </p:clrMapOvr>
-</p:sld>
+<ns0:sld xmlns:ns0="http://schemas.openxmlformats.org/presentationml/2006/main" xmlns:ns1="http://schemas.openxmlformats.org/drawingml/2006/main" xmlns:ns2="http://schemas.microsoft.com/office/drawing/2017/decorative" xmlns:ns3="http://schemas.openxmlformats.org/officeDocument/2006/relationships">
+  <ns0:cSld name="Slide 12">
+    <ns0:bg>
+      <ns0:bgPr>
+        <ns1:solidFill>
+          <ns1:srgbClr val="FFFFFF"/>
+        </ns1:solidFill>
+      </ns0:bgPr>
+    </ns0:bg>
+    <ns0:spTree>
+      <ns0:nvGrpSpPr>
+        <ns0:cNvPr id="1" name=""/>
+        <ns0:cNvGrpSpPr/>
+        <ns0:nvPr/>
+      </ns0:nvGrpSpPr>
+      <ns0:grpSpPr>
+        <ns1:xfrm>
+          <ns1:off x="0" y="0"/>
+          <ns1:ext cx="0" cy="0"/>
+          <ns1:chOff x="0" y="0"/>
+          <ns1:chExt cx="0" cy="0"/>
+        </ns1:xfrm>
+      </ns0:grpSpPr>
+      <ns0:pic>
+        <ns0:nvPicPr>
+          <ns0:cNvPr id="2" name="Image 0" descr="">
+            <ns1:extLst>
+              <ns1:ext uri="{C183D7F6-B498-43B3-948B-1728B52AA6E4}">
+                <ns2:decorative val="1"/>
+              </ns1:ext>
+            </ns1:extLst>
+          </ns0:cNvPr>
+          <ns0:cNvPicPr>
+            <ns1:picLocks noChangeAspect="1"/>
+          </ns0:cNvPicPr>
+          <ns0:nvPr/>
+        </ns0:nvPicPr>
+        <ns0:blipFill>
+          <ns1:blip ns3:embed="rId1"/>
+          <ns1:stretch>
+            <ns1:fillRect/>
+          </ns1:stretch>
+        </ns0:blipFill>
+        <ns0:spPr>
+          <ns1:xfrm>
+            <ns1:off x="6349901" y="0"/>
+            <ns1:ext cx="2793950" cy="1308050"/>
+          </ns1:xfrm>
+          <ns1:prstGeom prst="rect">
+            <ns1:avLst/>
+          </ns1:prstGeom>
+        </ns0:spPr>
+      </ns0:pic>
+      <ns0:sp>
+        <ns0:nvSpPr>
+          <ns0:cNvPr id="3" name="Text 0"/>
+          <ns0:cNvSpPr/>
+          <ns0:nvPr/>
+        </ns0:nvSpPr>
+        <ns0:spPr>
+          <ns1:xfrm>
+            <ns1:off x="7340501" y="177701"/>
+            <ns1:ext cx="1168301" cy="279350"/>
+          </ns1:xfrm>
+          <ns1:prstGeom prst="roundRect">
+            <ns1:avLst>
+              <ns1:gd name="adj" fmla="val 22731"/>
+            </ns1:avLst>
+          </ns1:prstGeom>
+          <ns1:solidFill>
+            <ns1:srgbClr val="1A7F37"/>
+          </ns1:solidFill>
+          <ns1:ln/>
+        </ns0:spPr>
+        <ns0:txBody>
+          <ns1:bodyPr wrap="square" rtlCol="0" anchor="ctr"/>
+          <ns1:lstStyle/>
+          <ns1:p>
+            <ns1:pPr indent="0" marL="0">
+              <ns1:buNone/>
+            </ns1:pPr>
+            <ns1:endParaRPr lang="en-US" dirty="0"/>
+          </ns1:p>
+        </ns0:txBody>
+      </ns0:sp>
+      <ns0:sp>
+        <ns0:nvSpPr>
+          <ns0:cNvPr id="4" name="Text 1"/>
+          <ns0:cNvSpPr/>
+          <ns0:nvPr/>
+        </ns0:nvSpPr>
+        <ns0:spPr>
+          <ns1:xfrm>
+            <ns1:off x="7461041" y="231577"/>
+            <ns1:ext cx="927071" cy="171450"/>
+          </ns1:xfrm>
+          <ns1:prstGeom prst="rect">
+            <ns1:avLst/>
+          </ns1:prstGeom>
+          <ns1:noFill/>
+          <ns1:ln/>
+        </ns0:spPr>
+        <ns0:txBody>
+          <ns1:bodyPr wrap="square" lIns="0" tIns="0" rIns="0" bIns="0" rtlCol="0" anchor="t"/>
+          <ns1:lstStyle/>
+          <ns1:p>
+            <ns1:pPr algn="ctr" indent="0" marL="0">
+              <ns1:buNone/>
+            </ns1:pPr>
+            <ns1:r>
+              <ns1:rPr lang="en-US" sz="1150" b="1" dirty="0">
+                <ns1:solidFill>
+                  <ns1:srgbClr val="FFFFFF"/>
+                </ns1:solidFill>
+                <ns1:latin typeface="Arial" pitchFamily="34" charset="0"/>
+                <ns1:ea typeface="Arial" pitchFamily="34" charset="-122"/>
+                <ns1:cs typeface="Arial" pitchFamily="34" charset="-120"/>
+              </ns1:rPr>
+              <ns1:t>CHAPTER 06</ns1:t>
+            </ns1:r>
+            <ns1:endParaRPr lang="en-US" sz="1150" dirty="0"/>
+          </ns1:p>
+        </ns0:txBody>
+      </ns0:sp>
+      <ns0:pic>
+        <ns0:nvPicPr>
+          <ns0:cNvPr id="5" name="Image 1" descr="Open this chapter on GitHub">
+            <ns1:hlinkClick ns3:id="rId3" tooltip="https://github.com/github/copilot-app-for-beginners/tree/main/06-canvases"/>
+          </ns0:cNvPr>
+          <ns0:cNvPicPr>
+            <ns1:picLocks noChangeAspect="1"/>
+          </ns0:cNvPicPr>
+          <ns0:nvPr/>
+        </ns0:nvPicPr>
+        <ns0:blipFill>
+          <ns1:blip ns3:embed="rId2"/>
+          <ns1:stretch>
+            <ns1:fillRect/>
+          </ns1:stretch>
+        </ns0:blipFill>
+        <ns0:spPr>
+          <ns1:xfrm>
+            <ns1:off x="8610600" y="165050"/>
+            <ns1:ext cx="304800" cy="304800"/>
+          </ns1:xfrm>
+          <ns1:prstGeom prst="rect">
+            <ns1:avLst/>
+          </ns1:prstGeom>
+        </ns0:spPr>
+      </ns0:pic>
+      <ns0:sp>
+        <ns0:nvSpPr>
+          <ns0:cNvPr id="6" name="Text 2"/>
+          <ns0:cNvSpPr/>
+          <ns0:nvPr/>
+        </ns0:nvSpPr>
+        <ns0:spPr>
+          <ns1:xfrm>
+            <ns1:off x="507950" y="381000"/>
+            <ns1:ext cx="8161020" cy="190500"/>
+          </ns1:xfrm>
+          <ns1:prstGeom prst="rect">
+            <ns1:avLst/>
+          </ns1:prstGeom>
+          <ns1:noFill/>
+          <ns1:ln/>
+        </ns0:spPr>
+        <ns0:txBody>
+          <ns1:bodyPr wrap="square" lIns="0" tIns="0" rIns="0" bIns="0" rtlCol="0" anchor="t"/>
+          <ns1:lstStyle/>
+          <ns1:p>
+            <ns1:pPr algn="l" indent="0" marL="0">
+              <ns1:buNone/>
+            </ns1:pPr>
+            <ns1:r>
+              <ns1:rPr lang="en-US" sz="1250" b="1" dirty="0">
+                <ns1:solidFill>
+                  <ns1:srgbClr val="1A7F37"/>
+                </ns1:solidFill>
+                <ns1:latin typeface="Arial" pitchFamily="34" charset="0"/>
+                <ns1:ea typeface="Arial" pitchFamily="34" charset="-122"/>
+                <ns1:cs typeface="Arial" pitchFamily="34" charset="-120"/>
+              </ns1:rPr>
+              <ns1:t>IMPLEMENT AND VALIDATE</ns1:t>
+            </ns1:r>
+            <ns1:endParaRPr lang="en-US" sz="1250" dirty="0"/>
+          </ns1:p>
+        </ns0:txBody>
+      </ns0:sp>
+      <ns0:sp>
+        <ns0:nvSpPr>
+          <ns0:cNvPr id="7" name="Text 3"/>
+          <ns0:cNvSpPr/>
+          <ns0:nvPr/>
+        </ns0:nvSpPr>
+        <ns0:spPr>
+          <ns1:xfrm>
+            <ns1:off x="507950" y="622250"/>
+            <ns1:ext cx="8161020" cy="419100"/>
+          </ns1:xfrm>
+          <ns1:prstGeom prst="rect">
+            <ns1:avLst/>
+          </ns1:prstGeom>
+          <ns1:noFill/>
+          <ns1:ln/>
+        </ns0:spPr>
+        <ns0:txBody>
+          <ns1:bodyPr wrap="square" lIns="0" tIns="0" rIns="0" bIns="0" rtlCol="0" anchor="t"/>
+          <ns1:lstStyle/>
+          <ns1:p>
+            <ns1:pPr algn="l" indent="0" marL="0">
+              <ns1:lnSpc>
+                <ns1:spcPts val="3300"/>
+              </ns1:lnSpc>
+              <ns1:spcBef>
+                <ns1:spcPts val="400"/>
+              </ns1:spcBef>
+              <ns1:buNone/>
+            </ns1:pPr>
+            <ns1:r>
+              <ns1:rPr lang="en-US" sz="2800" b="1" dirty="0">
+                <ns1:solidFill>
+                  <ns1:srgbClr val="1F2328"/>
+                </ns1:solidFill>
+                <ns1:latin typeface="Arial" pitchFamily="34" charset="0"/>
+                <ns1:ea typeface="Arial" pitchFamily="34" charset="-122"/>
+                <ns1:cs typeface="Arial" pitchFamily="34" charset="-120"/>
+              </ns1:rPr>
+              <ns1:t>Implement, then check five states</ns1:t>
+            </ns1:r>
+            <ns1:endParaRPr lang="en-US" sz="2800" dirty="0"/>
+          </ns1:p>
+        </ns0:txBody>
+      </ns0:sp>
+      <ns0:sp>
+        <ns0:nvSpPr>
+          <ns0:cNvPr id="8" name="Text 4"/>
+          <ns0:cNvSpPr/>
+          <ns0:nvPr/>
+        </ns0:nvSpPr>
+        <ns0:spPr>
+          <ns1:xfrm>
+            <ns1:off x="507950" y="1104751"/>
+            <ns1:ext cx="8161020" cy="254050"/>
+          </ns1:xfrm>
+          <ns1:prstGeom prst="rect">
+            <ns1:avLst/>
+          </ns1:prstGeom>
+          <ns1:noFill/>
+          <ns1:ln/>
+        </ns0:spPr>
+        <ns0:txBody>
+          <ns1:bodyPr wrap="square" lIns="0" tIns="0" rIns="0" bIns="0" rtlCol="0" anchor="t"/>
+          <ns1:lstStyle/>
+          <ns1:p>
+            <ns1:pPr algn="l" indent="0" marL="0">
+              <ns1:lnSpc>
+                <ns1:spcPts val="2000"/>
+              </ns1:lnSpc>
+              <ns1:spcBef>
+                <ns1:spcPts val="500"/>
+              </ns1:spcBef>
+              <ns1:buNone/>
+            </ns1:pPr>
+            <ns1:r>
+              <ns1:rPr lang="en-US" sz="1650" dirty="0">
+                <ns1:solidFill>
+                  <ns1:srgbClr val="59636E"/>
+                </ns1:solidFill>
+                <ns1:latin typeface="Arial" pitchFamily="34" charset="0"/>
+                <ns1:ea typeface="Arial" pitchFamily="34" charset="-122"/>
+                <ns1:cs typeface="Arial" pitchFamily="34" charset="-120"/>
+              </ns1:rPr>
+              <ns1:t>Implement, then validate. Browser limits become notes.</ns1:t>
+            </ns1:r>
+            <ns1:pPr algn="l" indent="0" marL="0">
+              <ns1:lnSpc>
+                <ns1:spcPts val="2000"/>
+              </ns1:lnSpc>
+              <ns1:spcBef>
+                <ns1:spcPts val="500"/>
+              </ns1:spcBef>
+              <ns1:buNone/>
+            </ns1:pPr>
+            <ns1:r>
+              <ns1:rPr lang="en-US" sz="1650" b="1" dirty="0">
+                <ns1:solidFill>
+                  <ns1:srgbClr val="59636E"/>
+                </ns1:solidFill>
+                <ns1:latin typeface="Arial" pitchFamily="34" charset="0"/>
+                <ns1:ea typeface="Arial" pitchFamily="34" charset="-122"/>
+                <ns1:cs typeface="Arial" pitchFamily="34" charset="-120"/>
+              </ns1:rPr>
+              <ns1:t/>
+            </ns1:r>
+            <ns1:pPr algn="l" indent="0" marL="0">
+              <ns1:lnSpc>
+                <ns1:spcPts val="2000"/>
+              </ns1:lnSpc>
+              <ns1:spcBef>
+                <ns1:spcPts val="500"/>
+              </ns1:spcBef>
+              <ns1:buNone/>
+            </ns1:pPr>
+            <ns1:r>
+              <ns1:rPr lang="en-US" sz="1650" dirty="0">
+                <ns1:solidFill>
+                  <ns1:srgbClr val="59636E"/>
+                </ns1:solidFill>
+                <ns1:latin typeface="Arial" pitchFamily="34" charset="0"/>
+                <ns1:ea typeface="Arial" pitchFamily="34" charset="-122"/>
+                <ns1:cs typeface="Arial" pitchFamily="34" charset="-120"/>
+              </ns1:rPr>
+              <ns1:t/>
+            </ns1:r>
+            <ns1:pPr algn="l" indent="0" marL="0">
+              <ns1:lnSpc>
+                <ns1:spcPts val="2000"/>
+              </ns1:lnSpc>
+              <ns1:spcBef>
+                <ns1:spcPts val="500"/>
+              </ns1:spcBef>
+              <ns1:buNone/>
+            </ns1:pPr>
+            <ns1:r>
+              <ns1:rPr lang="en-US" sz="1650" b="1" dirty="0">
+                <ns1:solidFill>
+                  <ns1:srgbClr val="59636E"/>
+                </ns1:solidFill>
+                <ns1:latin typeface="Arial" pitchFamily="34" charset="0"/>
+                <ns1:ea typeface="Arial" pitchFamily="34" charset="-122"/>
+                <ns1:cs typeface="Arial" pitchFamily="34" charset="-120"/>
+              </ns1:rPr>
+              <ns1:t/>
+            </ns1:r>
+            <ns1:pPr algn="l" indent="0" marL="0">
+              <ns1:lnSpc>
+                <ns1:spcPts val="2000"/>
+              </ns1:lnSpc>
+              <ns1:spcBef>
+                <ns1:spcPts val="500"/>
+              </ns1:spcBef>
+              <ns1:buNone/>
+            </ns1:pPr>
+            <ns1:r>
+              <ns1:rPr lang="en-US" sz="1650" dirty="0">
+                <ns1:solidFill>
+                  <ns1:srgbClr val="59636E"/>
+                </ns1:solidFill>
+                <ns1:latin typeface="Arial" pitchFamily="34" charset="0"/>
+                <ns1:ea typeface="Arial" pitchFamily="34" charset="-122"/>
+                <ns1:cs typeface="Arial" pitchFamily="34" charset="-120"/>
+              </ns1:rPr>
+              <ns1:t/>
+            </ns1:r>
+            <ns1:endParaRPr lang="en-US" sz="1650" dirty="0"/>
+          </ns1:p>
+        </ns0:txBody>
+      </ns0:sp>
+      <ns0:sp>
+        <ns0:nvSpPr>
+          <ns0:cNvPr id="9" name="Text 5"/>
+          <ns0:cNvSpPr/>
+          <ns0:nvPr/>
+        </ns0:nvSpPr>
+        <ns0:spPr>
+          <ns1:xfrm>
+            <ns1:off x="754261" y="1580108"/>
+            <ns1:ext cx="7635180" cy="1415951"/>
+          </ns1:xfrm>
+          <ns1:prstGeom prst="roundRect">
+            <ns1:avLst>
+              <ns1:gd name="adj" fmla="val 5382"/>
+            </ns1:avLst>
+          </ns1:prstGeom>
+          <ns1:solidFill>
+            <ns1:srgbClr val="FFFFFF"/>
+          </ns1:solidFill>
+          <ns1:ln w="9525">
+            <ns1:solidFill>
+              <ns1:srgbClr val="D1D9E0"/>
+            </ns1:solidFill>
+          </ns1:ln>
+          <ns1:effectLst>
+            <ns1:outerShdw sx="100000" sy="100000" kx="0" ky="0" algn="bl" rotWithShape="0" blurRad="38100" dist="9525" dir="5400000">
+              <ns1:srgbClr val="1f2328">
+                <ns1:alpha val="12000"/>
+              </ns1:srgbClr>
+            </ns1:outerShdw>
+          </ns1:effectLst>
+        </ns0:spPr>
+        <ns0:txBody>
+          <ns1:bodyPr wrap="square" rtlCol="0" anchor="ctr"/>
+          <ns1:lstStyle/>
+          <ns1:p>
+            <ns1:pPr indent="0" marL="0">
+              <ns1:buNone/>
+            </ns1:pPr>
+            <ns1:endParaRPr lang="en-US" dirty="0"/>
+          </ns1:p>
+        </ns0:txBody>
+      </ns0:sp>
+      <ns0:pic>
+        <ns0:nvPicPr>
+          <ns0:cNvPr id="10" name="Image 2" descr="Feature Workbench with the Implement stage complete and a Diff row in the evidence, next to the Changes pill above the prompt box"/>
+          <ns0:cNvPicPr>
+            <ns1:picLocks noChangeAspect="1"/>
+          </ns0:cNvPicPr>
+          <ns0:nvPr/>
+        </ns0:nvPicPr>
+        <ns0:blipFill>
+          <ns1:blip ns3:embed="rId4"/>
+          <ns1:stretch>
+            <ns1:fillRect/>
+          </ns1:stretch>
+        </ns0:blipFill>
+        <ns0:spPr>
+          <ns1:xfrm>
+            <ns1:off x="801886" y="1627733"/>
+            <ns1:ext cx="7539930" cy="1320701"/>
+          </ns1:xfrm>
+          <ns1:prstGeom prst="rect">
+            <ns1:avLst/>
+          </ns1:prstGeom>
+        </ns0:spPr>
+      </ns0:pic>
+      <ns0:sp>
+        <ns0:nvSpPr>
+          <ns0:cNvPr id="11" name="Text 6"/>
+          <ns0:cNvSpPr/>
+          <ns0:nvPr/>
+        </ns0:nvSpPr>
+        <ns0:spPr>
+          <ns1:xfrm>
+            <ns1:off x="507950" y="3202484"/>
+            <ns1:ext cx="4825901" cy="1443335"/>
+          </ns1:xfrm>
+          <ns1:prstGeom prst="roundRect">
+            <ns1:avLst>
+              <ns1:gd name="adj" fmla="val 7039"/>
+            </ns1:avLst>
+          </ns1:prstGeom>
+          <ns1:solidFill>
+            <ns1:srgbClr val="FFFFFF"/>
+          </ns1:solidFill>
+          <ns1:ln w="9525">
+            <ns1:solidFill>
+              <ns1:srgbClr val="D1D9E0"/>
+            </ns1:solidFill>
+          </ns1:ln>
+        </ns0:spPr>
+        <ns0:txBody>
+          <ns1:bodyPr wrap="square" rtlCol="0" anchor="ctr"/>
+          <ns1:lstStyle/>
+          <ns1:p>
+            <ns1:pPr indent="0" marL="0">
+              <ns1:buNone/>
+            </ns1:pPr>
+            <ns1:endParaRPr lang="en-US" dirty="0"/>
+          </ns1:p>
+        </ns0:txBody>
+      </ns0:sp>
+      <ns0:sp>
+        <ns0:nvSpPr>
+          <ns0:cNvPr id="12" name="Text 7"/>
+          <ns0:cNvSpPr/>
+          <ns0:nvPr/>
+        </ns0:nvSpPr>
+        <ns0:spPr>
+          <ns1:xfrm>
+            <ns1:off x="517475" y="3212009"/>
+            <ns1:ext cx="4806851" cy="326975"/>
+          </ns1:xfrm>
+          <ns1:prstGeom prst="rect">
+            <ns1:avLst/>
+          </ns1:prstGeom>
+          <ns1:solidFill>
+            <ns1:srgbClr val="DDF4FF"/>
+          </ns1:solidFill>
+          <ns1:ln/>
+        </ns0:spPr>
+        <ns0:txBody>
+          <ns1:bodyPr wrap="square" rtlCol="0" anchor="ctr"/>
+          <ns1:lstStyle/>
+          <ns1:p>
+            <ns1:pPr indent="0" marL="0">
+              <ns1:buNone/>
+            </ns1:pPr>
+            <ns1:endParaRPr lang="en-US" dirty="0"/>
+          </ns1:p>
+        </ns0:txBody>
+      </ns0:sp>
+      <ns0:sp>
+        <ns0:nvSpPr>
+          <ns0:cNvPr id="13" name="Shape 8"/>
+          <ns0:cNvSpPr/>
+          <ns0:nvPr/>
+        </ns0:nvSpPr>
+        <ns0:spPr>
+          <ns1:xfrm>
+            <ns1:off x="517475" y="3534221"/>
+            <ns1:ext cx="4806851" cy="0"/>
+          </ns1:xfrm>
+          <ns1:prstGeom prst="line">
+            <ns1:avLst/>
+          </ns1:prstGeom>
+          <ns1:noFill/>
+          <ns1:ln w="9525">
+            <ns1:solidFill>
+              <ns1:srgbClr val="9CD7FF"/>
+            </ns1:solidFill>
+            <ns1:prstDash val="solid"/>
+          </ns1:ln>
+        </ns0:spPr>
+      </ns0:sp>
+      <ns0:sp>
+        <ns0:nvSpPr>
+          <ns0:cNvPr id="14" name="Text 9"/>
+          <ns0:cNvSpPr/>
+          <ns0:nvPr/>
+        </ns0:nvSpPr>
+        <ns0:spPr>
+          <ns1:xfrm>
+            <ns1:off x="669875" y="3288209"/>
+            <ns1:ext cx="2409444" cy="165050"/>
+          </ns1:xfrm>
+          <ns1:prstGeom prst="rect">
+            <ns1:avLst/>
+          </ns1:prstGeom>
+          <ns1:noFill/>
+          <ns1:ln/>
+        </ns0:spPr>
+        <ns0:txBody>
+          <ns1:bodyPr wrap="square" lIns="0" tIns="0" rIns="0" bIns="0" rtlCol="0" anchor="t"/>
+          <ns1:lstStyle/>
+          <ns1:p>
+            <ns1:pPr algn="l" indent="0" marL="0">
+              <ns1:lnSpc>
+                <ns1:spcPts val="1300"/>
+              </ns1:lnSpc>
+              <ns1:buNone/>
+            </ns1:pPr>
+            <ns1:r>
+              <ns1:rPr lang="en-US" sz="1150" b="1" dirty="0">
+                <ns1:solidFill>
+                  <ns1:srgbClr val="0969DA"/>
+                </ns1:solidFill>
+                <ns1:latin typeface="Arial" pitchFamily="34" charset="0"/>
+                <ns1:ea typeface="Arial" pitchFamily="34" charset="-122"/>
+                <ns1:cs typeface="Arial" pitchFamily="34" charset="-120"/>
+              </ns1:rPr>
+              <ns1:t>STATE</ns1:t>
+            </ns1:r>
+            <ns1:endParaRPr lang="en-US" sz="1150" dirty="0"/>
+          </ns1:p>
+        </ns0:txBody>
+      </ns0:sp>
+      <ns0:sp>
+        <ns0:nvSpPr>
+          <ns0:cNvPr id="15" name="Text 10"/>
+          <ns0:cNvSpPr/>
+          <ns0:nvPr/>
+        </ns0:nvSpPr>
+        <ns0:spPr>
+          <ns1:xfrm>
+            <ns1:off x="3336875" y="3288209"/>
+            <ns1:ext cx="1891183" cy="165050"/>
+          </ns1:xfrm>
+          <ns1:prstGeom prst="rect">
+            <ns1:avLst/>
+          </ns1:prstGeom>
+          <ns1:noFill/>
+          <ns1:ln/>
+        </ns0:spPr>
+        <ns0:txBody>
+          <ns1:bodyPr wrap="square" lIns="0" tIns="0" rIns="0" bIns="0" rtlCol="0" anchor="t"/>
+          <ns1:lstStyle/>
+          <ns1:p>
+            <ns1:pPr algn="l" indent="0" marL="0">
+              <ns1:lnSpc>
+                <ns1:spcPts val="1300"/>
+              </ns1:lnSpc>
+              <ns1:buNone/>
+            </ns1:pPr>
+            <ns1:r>
+              <ns1:rPr lang="en-US" sz="1150" b="1" dirty="0">
+                <ns1:solidFill>
+                  <ns1:srgbClr val="0969DA"/>
+                </ns1:solidFill>
+                <ns1:latin typeface="Arial" pitchFamily="34" charset="0"/>
+                <ns1:ea typeface="Arial" pitchFamily="34" charset="-122"/>
+                <ns1:cs typeface="Arial" pitchFamily="34" charset="-120"/>
+              </ns1:rPr>
+              <ns1:t>CLEAR FILTERS</ns1:t>
+            </ns1:r>
+            <ns1:endParaRPr lang="en-US" sz="1150" dirty="0"/>
+          </ns1:p>
+        </ns0:txBody>
+      </ns0:sp>
+      <ns0:sp>
+        <ns0:nvSpPr>
+          <ns0:cNvPr id="16" name="Shape 11"/>
+          <ns0:cNvSpPr/>
+          <ns0:nvPr/>
+        </ns0:nvSpPr>
+        <ns0:spPr>
+          <ns1:xfrm>
+            <ns1:off x="517475" y="3903166"/>
+            <ns1:ext cx="4806851" cy="0"/>
+          </ns1:xfrm>
+          <ns1:prstGeom prst="line">
+            <ns1:avLst/>
+          </ns1:prstGeom>
+          <ns1:noFill/>
+          <ns1:ln w="9525">
+            <ns1:solidFill>
+              <ns1:srgbClr val="D1D9E0"/>
+            </ns1:solidFill>
+            <ns1:prstDash val="solid"/>
+          </ns1:ln>
+        </ns0:spPr>
+      </ns0:sp>
+      <ns0:sp>
+        <ns0:nvSpPr>
+          <ns0:cNvPr id="17" name="Text 12"/>
+          <ns0:cNvSpPr/>
+          <ns0:nvPr/>
+        </ns0:nvSpPr>
+        <ns0:spPr>
+          <ns1:xfrm>
+            <ns1:off x="669875" y="3615184"/>
+            <ns1:ext cx="2409444" cy="207020"/>
+          </ns1:xfrm>
+          <ns1:prstGeom prst="rect">
+            <ns1:avLst/>
+          </ns1:prstGeom>
+          <ns1:noFill/>
+          <ns1:ln/>
+        </ns0:spPr>
+        <ns0:txBody>
+          <ns1:bodyPr wrap="square" lIns="0" tIns="0" rIns="0" bIns="0" rtlCol="0" anchor="t"/>
+          <ns1:lstStyle/>
+          <ns1:p>
+            <ns1:pPr algn="l" indent="0" marL="0">
+              <ns1:lnSpc>
+                <ns1:spcPts val="1630"/>
+              </ns1:lnSpc>
+              <ns1:buNone/>
+            </ns1:pPr>
+            <ns1:r>
+              <ns1:rPr lang="en-US" sz="1400" b="1" dirty="0">
+                <ns1:solidFill>
+                  <ns1:srgbClr val="1F2328"/>
+                </ns1:solidFill>
+                <ns1:latin typeface="Arial" pitchFamily="34" charset="0"/>
+                <ns1:ea typeface="Arial" pitchFamily="34" charset="-122"/>
+                <ns1:cs typeface="Arial" pitchFamily="34" charset="-120"/>
+              </ns1:rPr>
+              <ns1:t>No filters active</ns1:t>
+            </ns1:r>
+            <ns1:endParaRPr lang="en-US" sz="1400" dirty="0"/>
+          </ns1:p>
+        </ns0:txBody>
+      </ns0:sp>
+      <ns0:sp>
+        <ns0:nvSpPr>
+          <ns0:cNvPr id="18" name="Text 13"/>
+          <ns0:cNvSpPr/>
+          <ns0:nvPr/>
+        </ns0:nvSpPr>
+        <ns0:spPr>
+          <ns1:xfrm>
+            <ns1:off x="3336875" y="3615184"/>
+            <ns1:ext cx="1891183" cy="207020"/>
+          </ns1:xfrm>
+          <ns1:prstGeom prst="rect">
+            <ns1:avLst/>
+          </ns1:prstGeom>
+          <ns1:noFill/>
+          <ns1:ln/>
+        </ns0:spPr>
+        <ns0:txBody>
+          <ns1:bodyPr wrap="square" lIns="0" tIns="0" rIns="0" bIns="0" rtlCol="0" anchor="t"/>
+          <ns1:lstStyle/>
+          <ns1:p>
+            <ns1:pPr algn="l" indent="0" marL="0">
+              <ns1:lnSpc>
+                <ns1:spcPts val="1630"/>
+              </ns1:lnSpc>
+              <ns1:buNone/>
+            </ns1:pPr>
+            <ns1:r>
+              <ns1:rPr lang="en-US" sz="1400" dirty="0">
+                <ns1:solidFill>
+                  <ns1:srgbClr val="59636E"/>
+                </ns1:solidFill>
+                <ns1:latin typeface="Arial" pitchFamily="34" charset="0"/>
+                <ns1:ea typeface="Arial" pitchFamily="34" charset="-122"/>
+                <ns1:cs typeface="Arial" pitchFamily="34" charset="-120"/>
+              </ns1:rPr>
+              <ns1:t>Hidden</ns1:t>
+            </ns1:r>
+            <ns1:endParaRPr lang="en-US" sz="1400" dirty="0"/>
+          </ns1:p>
+        </ns0:txBody>
+      </ns0:sp>
+      <ns0:sp>
+        <ns0:nvSpPr>
+          <ns0:cNvPr id="19" name="Shape 14"/>
+          <ns0:cNvSpPr/>
+          <ns0:nvPr/>
+        </ns0:nvSpPr>
+        <ns0:spPr>
+          <ns1:xfrm>
+            <ns1:off x="517475" y="4272111"/>
+            <ns1:ext cx="4806851" cy="0"/>
+          </ns1:xfrm>
+          <ns1:prstGeom prst="line">
+            <ns1:avLst/>
+          </ns1:prstGeom>
+          <ns1:noFill/>
+          <ns1:ln w="9525">
+            <ns1:solidFill>
+              <ns1:srgbClr val="D1D9E0"/>
+            </ns1:solidFill>
+            <ns1:prstDash val="solid"/>
+          </ns1:ln>
+        </ns0:spPr>
+      </ns0:sp>
+      <ns0:sp>
+        <ns0:nvSpPr>
+          <ns0:cNvPr id="20" name="Text 15"/>
+          <ns0:cNvSpPr/>
+          <ns0:nvPr/>
+        </ns0:nvSpPr>
+        <ns0:spPr>
+          <ns1:xfrm>
+            <ns1:off x="669875" y="3984129"/>
+            <ns1:ext cx="2409444" cy="207020"/>
+          </ns1:xfrm>
+          <ns1:prstGeom prst="rect">
+            <ns1:avLst/>
+          </ns1:prstGeom>
+          <ns1:noFill/>
+          <ns1:ln/>
+        </ns0:spPr>
+        <ns0:txBody>
+          <ns1:bodyPr wrap="square" lIns="0" tIns="0" rIns="0" bIns="0" rtlCol="0" anchor="t"/>
+          <ns1:lstStyle/>
+          <ns1:p>
+            <ns1:pPr algn="l" indent="0" marL="0">
+              <ns1:lnSpc>
+                <ns1:spcPts val="1630"/>
+              </ns1:lnSpc>
+              <ns1:buNone/>
+            </ns1:pPr>
+            <ns1:r>
+              <ns1:rPr lang="en-US" sz="1400" b="1" dirty="0">
+                <ns1:solidFill>
+                  <ns1:srgbClr val="1F2328"/>
+                </ns1:solidFill>
+                <ns1:latin typeface="Arial" pitchFamily="34" charset="0"/>
+                <ns1:ea typeface="Arial" pitchFamily="34" charset="-122"/>
+                <ns1:cs typeface="Arial" pitchFamily="34" charset="-120"/>
+              </ns1:rPr>
+              <ns1:t>Any filter set</ns1:t>
+            </ns1:r>
+            <ns1:endParaRPr lang="en-US" sz="1400" dirty="0"/>
+          </ns1:p>
+        </ns0:txBody>
+      </ns0:sp>
+      <ns0:sp>
+        <ns0:nvSpPr>
+          <ns0:cNvPr id="21" name="Text 16"/>
+          <ns0:cNvSpPr/>
+          <ns0:nvPr/>
+        </ns0:nvSpPr>
+        <ns0:spPr>
+          <ns1:xfrm>
+            <ns1:off x="3336875" y="3984129"/>
+            <ns1:ext cx="1891183" cy="207020"/>
+          </ns1:xfrm>
+          <ns1:prstGeom prst="rect">
+            <ns1:avLst/>
+          </ns1:prstGeom>
+          <ns1:noFill/>
+          <ns1:ln/>
+        </ns0:spPr>
+        <ns0:txBody>
+          <ns1:bodyPr wrap="square" lIns="0" tIns="0" rIns="0" bIns="0" rtlCol="0" anchor="t"/>
+          <ns1:lstStyle/>
+          <ns1:p>
+            <ns1:pPr algn="l" indent="0" marL="0">
+              <ns1:lnSpc>
+                <ns1:spcPts val="1630"/>
+              </ns1:lnSpc>
+              <ns1:buNone/>
+            </ns1:pPr>
+            <ns1:r>
+              <ns1:rPr lang="en-US" sz="1400" dirty="0">
+                <ns1:solidFill>
+                  <ns1:srgbClr val="59636E"/>
+                </ns1:solidFill>
+                <ns1:latin typeface="Arial" pitchFamily="34" charset="0"/>
+                <ns1:ea typeface="Arial" pitchFamily="34" charset="-122"/>
+                <ns1:cs typeface="Arial" pitchFamily="34" charset="-120"/>
+              </ns1:rPr>
+              <ns1:t>Visible</ns1:t>
+            </ns1:r>
+            <ns1:endParaRPr lang="en-US" sz="1400" dirty="0"/>
+          </ns1:p>
+        </ns0:txBody>
+      </ns0:sp>
+      <ns0:sp>
+        <ns0:nvSpPr>
+          <ns0:cNvPr id="22" name="Text 17"/>
+          <ns0:cNvSpPr/>
+          <ns0:nvPr/>
+        </ns0:nvSpPr>
+        <ns0:spPr>
+          <ns1:xfrm>
+            <ns1:off x="669875" y="4353074"/>
+            <ns1:ext cx="2409444" cy="207020"/>
+          </ns1:xfrm>
+          <ns1:prstGeom prst="rect">
+            <ns1:avLst/>
+          </ns1:prstGeom>
+          <ns1:noFill/>
+          <ns1:ln/>
+        </ns0:spPr>
+        <ns0:txBody>
+          <ns1:bodyPr wrap="square" lIns="0" tIns="0" rIns="0" bIns="0" rtlCol="0" anchor="t"/>
+          <ns1:lstStyle/>
+          <ns1:p>
+            <ns1:pPr algn="l" indent="0" marL="0">
+              <ns1:lnSpc>
+                <ns1:spcPts val="1630"/>
+              </ns1:lnSpc>
+              <ns1:buNone/>
+            </ns1:pPr>
+            <ns1:r>
+              <ns1:rPr lang="en-US" sz="1400" b="1" dirty="0">
+                <ns1:solidFill>
+                  <ns1:srgbClr val="1F2328"/>
+                </ns1:solidFill>
+                <ns1:latin typeface="Arial" pitchFamily="34" charset="0"/>
+                <ns1:ea typeface="Arial" pitchFamily="34" charset="-122"/>
+                <ns1:cs typeface="Arial" pitchFamily="34" charset="-120"/>
+              </ns1:rPr>
+              <ns1:t>After selecting it</ns1:t>
+            </ns1:r>
+            <ns1:endParaRPr lang="en-US" sz="1400" dirty="0"/>
+          </ns1:p>
+        </ns0:txBody>
+      </ns0:sp>
+      <ns0:sp>
+        <ns0:nvSpPr>
+          <ns0:cNvPr id="23" name="Text 18"/>
+          <ns0:cNvSpPr/>
+          <ns0:nvPr/>
+        </ns0:nvSpPr>
+        <ns0:spPr>
+          <ns1:xfrm>
+            <ns1:off x="3336875" y="4353074"/>
+            <ns1:ext cx="1891183" cy="207020"/>
+          </ns1:xfrm>
+          <ns1:prstGeom prst="rect">
+            <ns1:avLst/>
+          </ns1:prstGeom>
+          <ns1:noFill/>
+          <ns1:ln/>
+        </ns0:spPr>
+        <ns0:txBody>
+          <ns1:bodyPr wrap="square" lIns="0" tIns="0" rIns="0" bIns="0" rtlCol="0" anchor="t"/>
+          <ns1:lstStyle/>
+          <ns1:p>
+            <ns1:pPr algn="l" indent="0" marL="0">
+              <ns1:lnSpc>
+                <ns1:spcPts val="1630"/>
+              </ns1:lnSpc>
+              <ns1:buNone/>
+            </ns1:pPr>
+            <ns1:r>
+              <ns1:rPr lang="en-US" sz="1400" dirty="0">
+                <ns1:solidFill>
+                  <ns1:srgbClr val="59636E"/>
+                </ns1:solidFill>
+                <ns1:latin typeface="Arial" pitchFamily="34" charset="0"/>
+                <ns1:ea typeface="Arial" pitchFamily="34" charset="-122"/>
+                <ns1:cs typeface="Arial" pitchFamily="34" charset="-120"/>
+              </ns1:rPr>
+              <ns1:t>All filters reset</ns1:t>
+            </ns1:r>
+            <ns1:endParaRPr lang="en-US" sz="1400" dirty="0"/>
+          </ns1:p>
+        </ns0:txBody>
+      </ns0:sp>
+      <ns0:sp>
+        <ns0:nvSpPr>
+          <ns0:cNvPr id="24" name="Text 19"/>
+          <ns0:cNvSpPr/>
+          <ns0:nvPr/>
+        </ns0:nvSpPr>
+        <ns0:spPr>
+          <ns1:xfrm>
+            <ns1:off x="5537002" y="3564136"/>
+            <ns1:ext cx="3098899" cy="720030"/>
+          </ns1:xfrm>
+          <ns1:prstGeom prst="roundRect">
+            <ns1:avLst>
+              <ns1:gd name="adj" fmla="val 14111"/>
+            </ns1:avLst>
+          </ns1:prstGeom>
+          <ns1:solidFill>
+            <ns1:srgbClr val="FBEFFF"/>
+          </ns1:solidFill>
+          <ns1:ln w="9525">
+            <ns1:solidFill>
+              <ns1:srgbClr val="E0C5FF"/>
+            </ns1:solidFill>
+          </ns1:ln>
+        </ns0:spPr>
+        <ns0:txBody>
+          <ns1:bodyPr wrap="square" rtlCol="0" anchor="ctr"/>
+          <ns1:lstStyle/>
+          <ns1:p>
+            <ns1:pPr indent="0" marL="0">
+              <ns1:buNone/>
+            </ns1:pPr>
+            <ns1:endParaRPr lang="en-US" dirty="0"/>
+          </ns1:p>
+        </ns0:txBody>
+      </ns0:sp>
+      <ns0:pic>
+        <ns0:nvPicPr>
+          <ns0:cNvPr id="25" name="Image 3" descr="">
+            <ns1:extLst>
+              <ns1:ext uri="{C183D7F6-B498-43B3-948B-1728B52AA6E4}">
+                <ns2:decorative val="1"/>
+              </ns1:ext>
+            </ns1:extLst>
+          </ns0:cNvPr>
+          <ns0:cNvPicPr>
+            <ns1:picLocks noChangeAspect="1"/>
+          </ns0:cNvPicPr>
+          <ns0:nvPr/>
+        </ns0:nvPicPr>
+        <ns0:blipFill>
+          <ns1:blip ns3:embed="rId5"/>
+          <ns1:stretch>
+            <ns1:fillRect/>
+          </ns1:stretch>
+        </ns0:blipFill>
+        <ns0:spPr>
+          <ns1:xfrm>
+            <ns1:off x="5724227" y="3822502"/>
+            <ns1:ext cx="203150" cy="203150"/>
+          </ns1:xfrm>
+          <ns1:prstGeom prst="rect">
+            <ns1:avLst/>
+          </ns1:prstGeom>
+        </ns0:spPr>
+      </ns0:pic>
+      <ns0:sp>
+        <ns0:nvSpPr>
+          <ns0:cNvPr id="26" name="Text 20"/>
+          <ns0:cNvSpPr/>
+          <ns0:nvPr/>
+        </ns0:nvSpPr>
+        <ns0:spPr>
+          <ns1:xfrm>
+            <ns1:off x="6054328" y="3700611"/>
+            <ns1:ext cx="2442234" cy="447080"/>
+          </ns1:xfrm>
+          <ns1:prstGeom prst="rect">
+            <ns1:avLst/>
+          </ns1:prstGeom>
+          <ns1:noFill/>
+          <ns1:ln/>
+        </ns0:spPr>
+        <ns0:txBody>
+          <ns1:bodyPr wrap="square" lIns="0" tIns="0" rIns="0" bIns="0" rtlCol="0" anchor="t"/>
+          <ns1:lstStyle/>
+          <ns1:p>
+            <ns1:pPr algn="l" indent="0" marL="0">
+              <ns1:lnSpc>
+                <ns1:spcPts val="1760"/>
+              </ns1:lnSpc>
+              <ns1:buNone/>
+            </ns1:pPr>
+            <ns1:r>
+              <ns1:rPr lang="en-US" sz="1450" dirty="0">
+                <ns1:solidFill>
+                  <ns1:srgbClr val="1F2328"/>
+                </ns1:solidFill>
+                <ns1:latin typeface="Arial" pitchFamily="34" charset="0"/>
+                <ns1:ea typeface="Arial" pitchFamily="34" charset="-122"/>
+                <ns1:cs typeface="Arial" pitchFamily="34" charset="-120"/>
+              </ns1:rPr>
+              <ns1:t>Check the </ns1:t>
+            </ns1:r>
+            <ns1:pPr algn="l" indent="0" marL="0">
+              <ns1:lnSpc>
+                <ns1:spcPts val="1760"/>
+              </ns1:lnSpc>
+              <ns1:buNone/>
+            </ns1:pPr>
+            <ns1:r>
+              <ns1:rPr lang="en-US" sz="1450" b="1" dirty="0">
+                <ns1:solidFill>
+                  <ns1:srgbClr val="1F2328"/>
+                </ns1:solidFill>
+                <ns1:latin typeface="Arial" pitchFamily="34" charset="0"/>
+                <ns1:ea typeface="Arial" pitchFamily="34" charset="-122"/>
+                <ns1:cs typeface="Arial" pitchFamily="34" charset="-120"/>
+              </ns1:rPr>
+              <ns1:t>Changes</ns1:t>
+            </ns1:r>
+            <ns1:pPr algn="l" indent="0" marL="0">
+              <ns1:lnSpc>
+                <ns1:spcPts val="1760"/>
+              </ns1:lnSpc>
+              <ns1:buNone/>
+            </ns1:pPr>
+            <ns1:r>
+              <ns1:rPr lang="en-US" sz="1450" dirty="0">
+                <ns1:solidFill>
+                  <ns1:srgbClr val="1F2328"/>
+                </ns1:solidFill>
+                <ns1:latin typeface="Arial" pitchFamily="34" charset="0"/>
+                <ns1:ea typeface="Arial" pitchFamily="34" charset="-122"/>
+                <ns1:cs typeface="Arial" pitchFamily="34" charset="-120"/>
+              </ns1:rPr>
+              <ns1:t> tab: only the approved feature.</ns1:t>
+            </ns1:r>
+            <ns1:endParaRPr lang="en-US" sz="1450" dirty="0"/>
+          </ns1:p>
+        </ns0:txBody>
+      </ns0:sp>
+    </ns0:spTree>
+  </ns0:cSld>
+  <ns0:clrMapOvr>
+    <ns1:masterClrMapping/>
+  </ns0:clrMapOvr>
+</ns0:sld>
 </file>
 
 <file path=ppt/slides/slide13.xml><?xml version="1.0" encoding="utf-8"?>
-<p:sld xmlns:a="http://schemas.openxmlformats.org/drawingml/2006/main" xmlns:r="http://schemas.openxmlformats.org/officeDocument/2006/relationships" xmlns:p="http://schemas.openxmlformats.org/presentationml/2006/main">
-  <p:cSld name="Slide 13">
-    <p:bg>
-      <p:bgPr>
-        <a:solidFill>
-          <a:srgbClr val="FFFFFF"/>
-        </a:solidFill>
-      </p:bgPr>
-    </p:bg>
-    <p:spTree>
-      <p:nvGrpSpPr>
-        <p:cNvPr id="1" name=""/>
-        <p:cNvGrpSpPr/>
-        <p:nvPr/>
-      </p:nvGrpSpPr>
-      <p:grpSpPr>
-        <a:xfrm>
-          <a:off x="0" y="0"/>
-          <a:ext cx="0" cy="0"/>
-          <a:chOff x="0" y="0"/>
-          <a:chExt cx="0" cy="0"/>
-        </a:xfrm>
-      </p:grpSpPr>
-      <p:pic>
-        <p:nvPicPr>
-          <p:cNvPr id="2" name="Image 0" descr="">
-            <a:extLst>
-              <a:ext uri="{C183D7F6-B498-43B3-948B-1728B52AA6E4}">
-                <adec:decorative xmlns:adec="http://schemas.microsoft.com/office/drawing/2017/decorative" val="1"/>
-              </a:ext>
-            </a:extLst>
-          </p:cNvPr>
-          <p:cNvPicPr>
-            <a:picLocks noChangeAspect="1"/>
-          </p:cNvPicPr>
-          <p:nvPr/>
-        </p:nvPicPr>
-        <p:blipFill>
-          <a:blip r:embed="rId1"/>
-          <a:stretch>
-            <a:fillRect/>
-          </a:stretch>
-        </p:blipFill>
-        <p:spPr>
-          <a:xfrm>
-            <a:off x="6349901" y="0"/>
-            <a:ext cx="2793950" cy="1308050"/>
-          </a:xfrm>
-          <a:prstGeom prst="rect">
-            <a:avLst/>
-          </a:prstGeom>
-        </p:spPr>
-      </p:pic>
-      <p:sp>
-        <p:nvSpPr>
-          <p:cNvPr id="3" name="Text 0"/>
-          <p:cNvSpPr/>
-          <p:nvPr/>
-        </p:nvSpPr>
-        <p:spPr>
-          <a:xfrm>
-            <a:off x="7340501" y="177701"/>
-            <a:ext cx="1168301" cy="279350"/>
-          </a:xfrm>
-          <a:prstGeom prst="roundRect">
-            <a:avLst>
-              <a:gd name="adj" fmla="val 22731"/>
-            </a:avLst>
-          </a:prstGeom>
-          <a:solidFill>
-            <a:srgbClr val="1A7F37"/>
-          </a:solidFill>
-          <a:ln/>
-        </p:spPr>
-        <p:txBody>
-          <a:bodyPr wrap="square" rtlCol="0" anchor="ctr"/>
-          <a:lstStyle/>
-          <a:p>
-            <a:pPr indent="0" marL="0">
-              <a:buNone/>
-            </a:pPr>
-            <a:endParaRPr lang="en-US" dirty="0"/>
-          </a:p>
-        </p:txBody>
-      </p:sp>
-      <p:sp>
-        <p:nvSpPr>
-          <p:cNvPr id="4" name="Text 1"/>
-          <p:cNvSpPr/>
-          <p:nvPr/>
-        </p:nvSpPr>
-        <p:spPr>
-          <a:xfrm>
-            <a:off x="7461041" y="231577"/>
-            <a:ext cx="927071" cy="171450"/>
-          </a:xfrm>
-          <a:prstGeom prst="rect">
-            <a:avLst/>
-          </a:prstGeom>
-          <a:noFill/>
-          <a:ln/>
-        </p:spPr>
-        <p:txBody>
-          <a:bodyPr wrap="square" lIns="0" tIns="0" rIns="0" bIns="0" rtlCol="0" anchor="t"/>
-          <a:lstStyle/>
-          <a:p>
-            <a:pPr algn="ctr" indent="0" marL="0">
-              <a:buNone/>
-            </a:pPr>
-            <a:r>
-              <a:rPr lang="en-US" sz="1150" b="1" dirty="0">
-                <a:solidFill>
-                  <a:srgbClr val="FFFFFF"/>
-                </a:solidFill>
-                <a:latin typeface="Arial" pitchFamily="34" charset="0"/>
-                <a:ea typeface="Arial" pitchFamily="34" charset="-122"/>
-                <a:cs typeface="Arial" pitchFamily="34" charset="-120"/>
-              </a:rPr>
-              <a:t>CHAPTER 06</a:t>
-            </a:r>
-            <a:endParaRPr lang="en-US" sz="1150" dirty="0"/>
-          </a:p>
-        </p:txBody>
-      </p:sp>
-      <p:pic>
-        <p:nvPicPr>
-          <p:cNvPr id="5" name="Image 1" descr="Open this chapter on GitHub">
-            <a:hlinkClick r:id="rId3" tooltip="https://github.com/github/copilot-app-for-beginners/tree/main/06-canvases"/>
-          </p:cNvPr>
-          <p:cNvPicPr>
-            <a:picLocks noChangeAspect="1"/>
-          </p:cNvPicPr>
-          <p:nvPr/>
-        </p:nvPicPr>
-        <p:blipFill>
-          <a:blip r:embed="rId2"/>
-          <a:stretch>
-            <a:fillRect/>
-          </a:stretch>
-        </p:blipFill>
-        <p:spPr>
-          <a:xfrm>
-            <a:off x="8610600" y="165050"/>
-            <a:ext cx="304800" cy="304800"/>
-          </a:xfrm>
-          <a:prstGeom prst="rect">
-            <a:avLst/>
-          </a:prstGeom>
-        </p:spPr>
-      </p:pic>
-      <p:sp>
-        <p:nvSpPr>
-          <p:cNvPr id="6" name="Text 2"/>
-          <p:cNvSpPr/>
-          <p:nvPr/>
-        </p:nvSpPr>
-        <p:spPr>
-          <a:xfrm>
-            <a:off x="507950" y="381000"/>
-            <a:ext cx="8161020" cy="190500"/>
-          </a:xfrm>
-          <a:prstGeom prst="rect">
-            <a:avLst/>
-          </a:prstGeom>
-          <a:noFill/>
-          <a:ln/>
-        </p:spPr>
-        <p:txBody>
-          <a:bodyPr wrap="square" lIns="0" tIns="0" rIns="0" bIns="0" rtlCol="0" anchor="t"/>
-          <a:lstStyle/>
-          <a:p>
-            <a:pPr algn="l" indent="0" marL="0">
-              <a:buNone/>
-            </a:pPr>
-            <a:r>
-              <a:rPr lang="en-US" sz="1250" b="1" dirty="0">
-                <a:solidFill>
-                  <a:srgbClr val="1A7F37"/>
-                </a:solidFill>
-                <a:latin typeface="Arial" pitchFamily="34" charset="0"/>
-                <a:ea typeface="Arial" pitchFamily="34" charset="-122"/>
-                <a:cs typeface="Arial" pitchFamily="34" charset="-120"/>
-              </a:rPr>
-              <a:t>EVIDENCE</a:t>
-            </a:r>
-            <a:endParaRPr lang="en-US" sz="1250" dirty="0"/>
-          </a:p>
-        </p:txBody>
-      </p:sp>
-      <p:sp>
-        <p:nvSpPr>
-          <p:cNvPr id="7" name="Text 3"/>
-          <p:cNvSpPr/>
-          <p:nvPr/>
-        </p:nvSpPr>
-        <p:spPr>
-          <a:xfrm>
-            <a:off x="507950" y="622250"/>
-            <a:ext cx="8161020" cy="419100"/>
-          </a:xfrm>
-          <a:prstGeom prst="rect">
-            <a:avLst/>
-          </a:prstGeom>
-          <a:noFill/>
-          <a:ln/>
-        </p:spPr>
-        <p:txBody>
-          <a:bodyPr wrap="square" lIns="0" tIns="0" rIns="0" bIns="0" rtlCol="0" anchor="t"/>
-          <a:lstStyle/>
-          <a:p>
-            <a:pPr algn="l" indent="0" marL="0">
-              <a:lnSpc>
-                <a:spcPts val="3300"/>
-              </a:lnSpc>
-              <a:spcBef>
-                <a:spcPts val="400"/>
-              </a:spcBef>
-              <a:buNone/>
-            </a:pPr>
-            <a:r>
-              <a:rPr lang="en-US" sz="2800" b="1" dirty="0">
-                <a:solidFill>
-                  <a:srgbClr val="1F2328"/>
-                </a:solidFill>
-                <a:latin typeface="Arial" pitchFamily="34" charset="0"/>
-                <a:ea typeface="Arial" pitchFamily="34" charset="-122"/>
-                <a:cs typeface="Arial" pitchFamily="34" charset="-120"/>
-              </a:rPr>
-              <a:t>The board reflects what happened</a:t>
-            </a:r>
-            <a:endParaRPr lang="en-US" sz="2800" dirty="0"/>
-          </a:p>
-        </p:txBody>
-      </p:sp>
-      <p:sp>
-        <p:nvSpPr>
-          <p:cNvPr id="8" name="Text 4"/>
-          <p:cNvSpPr/>
-          <p:nvPr/>
-        </p:nvSpPr>
-        <p:spPr>
-          <a:xfrm>
-            <a:off x="507950" y="1104751"/>
-            <a:ext cx="8161020" cy="254050"/>
-          </a:xfrm>
-          <a:prstGeom prst="rect">
-            <a:avLst/>
-          </a:prstGeom>
-          <a:noFill/>
-          <a:ln/>
-        </p:spPr>
-        <p:txBody>
-          <a:bodyPr wrap="square" lIns="0" tIns="0" rIns="0" bIns="0" rtlCol="0" anchor="t"/>
-          <a:lstStyle/>
-          <a:p>
-            <a:pPr algn="l" indent="0" marL="0">
-              <a:lnSpc>
-                <a:spcPts val="2000"/>
-              </a:lnSpc>
-              <a:spcBef>
-                <a:spcPts val="500"/>
-              </a:spcBef>
-              <a:buNone/>
-            </a:pPr>
-            <a:r>
-              <a:rPr lang="en-US" sz="1650" dirty="0">
-                <a:solidFill>
-                  <a:srgbClr val="59636E"/>
-                </a:solidFill>
-                <a:latin typeface="Arial" pitchFamily="34" charset="0"/>
-                <a:ea typeface="Arial" pitchFamily="34" charset="-122"/>
-                <a:cs typeface="Arial" pitchFamily="34" charset="-120"/>
-              </a:rPr>
-              <a:t>Select </a:t>
-            </a:r>
-            <a:pPr algn="l" indent="0" marL="0">
-              <a:lnSpc>
-                <a:spcPts val="2000"/>
-              </a:lnSpc>
-              <a:spcBef>
-                <a:spcPts val="500"/>
-              </a:spcBef>
-              <a:buNone/>
-            </a:pPr>
-            <a:r>
-              <a:rPr lang="en-US" sz="1650" b="1" dirty="0">
-                <a:solidFill>
-                  <a:srgbClr val="59636E"/>
-                </a:solidFill>
-                <a:latin typeface="Arial" pitchFamily="34" charset="0"/>
-                <a:ea typeface="Arial" pitchFamily="34" charset="-122"/>
-                <a:cs typeface="Arial" pitchFamily="34" charset="-120"/>
-              </a:rPr>
-              <a:t>Run final checks</a:t>
-            </a:r>
-            <a:pPr algn="l" indent="0" marL="0">
-              <a:lnSpc>
-                <a:spcPts val="2000"/>
-              </a:lnSpc>
-              <a:spcBef>
-                <a:spcPts val="500"/>
-              </a:spcBef>
-              <a:buNone/>
-            </a:pPr>
-            <a:r>
-              <a:rPr lang="en-US" sz="1650" dirty="0">
-                <a:solidFill>
-                  <a:srgbClr val="59636E"/>
-                </a:solidFill>
-                <a:latin typeface="Arial" pitchFamily="34" charset="0"/>
-                <a:ea typeface="Arial" pitchFamily="34" charset="-122"/>
-                <a:cs typeface="Arial" pitchFamily="34" charset="-120"/>
-              </a:rPr>
-              <a:t>. You decide if the evidence is enough.</a:t>
-            </a:r>
-            <a:endParaRPr lang="en-US" sz="1650" dirty="0"/>
-          </a:p>
-        </p:txBody>
-      </p:sp>
-      <p:sp>
-        <p:nvSpPr>
-          <p:cNvPr id="9" name="Text 5"/>
-          <p:cNvSpPr/>
-          <p:nvPr/>
-        </p:nvSpPr>
-        <p:spPr>
-          <a:xfrm>
-            <a:off x="511076" y="2204591"/>
-            <a:ext cx="8121551" cy="841921"/>
-          </a:xfrm>
-          <a:prstGeom prst="roundRect">
-            <a:avLst>
-              <a:gd name="adj" fmla="val 9051"/>
-            </a:avLst>
-          </a:prstGeom>
-          <a:solidFill>
-            <a:srgbClr val="FFFFFF"/>
-          </a:solidFill>
-          <a:ln w="9525">
-            <a:solidFill>
-              <a:srgbClr val="D1D9E0"/>
-            </a:solidFill>
-          </a:ln>
-          <a:effectLst>
-            <a:outerShdw sx="100000" sy="100000" kx="0" ky="0" algn="bl" rotWithShape="0" blurRad="38100" dist="9525" dir="5400000">
-              <a:srgbClr val="1f2328">
-                <a:alpha val="12000"/>
-              </a:srgbClr>
-            </a:outerShdw>
-          </a:effectLst>
-        </p:spPr>
-        <p:txBody>
-          <a:bodyPr wrap="square" rtlCol="0" anchor="ctr"/>
-          <a:lstStyle/>
-          <a:p>
-            <a:pPr indent="0" marL="0">
-              <a:buNone/>
-            </a:pPr>
-            <a:endParaRPr lang="en-US" dirty="0"/>
-          </a:p>
-        </p:txBody>
-      </p:sp>
-      <p:pic>
-        <p:nvPicPr>
-          <p:cNvPr id="10" name="Image 2" descr="Feature Workbench with all five stages complete, and evidence that shows 4 baseline tests and 9 final tests">    </p:cNvPr>
-          <p:cNvPicPr>
-            <a:picLocks noChangeAspect="1"/>
-          </p:cNvPicPr>
-          <p:nvPr/>
-        </p:nvPicPr>
-        <p:blipFill>
-          <a:blip r:embed="rId4"/>
-          <a:stretch>
-            <a:fillRect/>
-          </a:stretch>
-        </p:blipFill>
-        <p:spPr>
-          <a:xfrm>
-            <a:off x="558701" y="2252216"/>
-            <a:ext cx="8026301" cy="746671"/>
-          </a:xfrm>
-          <a:prstGeom prst="rect">
-            <a:avLst/>
-          </a:prstGeom>
-        </p:spPr>
-      </p:pic>
-      <p:sp>
-        <p:nvSpPr>
-          <p:cNvPr id="11" name="Text 6"/>
-          <p:cNvSpPr/>
-          <p:nvPr/>
-        </p:nvSpPr>
-        <p:spPr>
-          <a:xfrm>
-            <a:off x="507950" y="3400276"/>
-            <a:ext cx="2413248" cy="768251"/>
-          </a:xfrm>
-          <a:prstGeom prst="roundRect">
-            <a:avLst>
-              <a:gd name="adj" fmla="val 16531"/>
-            </a:avLst>
-          </a:prstGeom>
-          <a:noFill/>
-          <a:ln w="9525">
-            <a:solidFill>
-              <a:srgbClr val="D1D9E0"/>
-            </a:solidFill>
-          </a:ln>
-        </p:spPr>
-        <p:txBody>
-          <a:bodyPr wrap="square" rtlCol="0" anchor="ctr"/>
-          <a:lstStyle/>
-          <a:p>
-            <a:pPr indent="0" marL="0">
-              <a:buNone/>
-            </a:pPr>
-            <a:endParaRPr lang="en-US" dirty="0"/>
-          </a:p>
-        </p:txBody>
-      </p:sp>
-      <p:sp>
-        <p:nvSpPr>
-          <p:cNvPr id="12" name="Text 7"/>
-          <p:cNvSpPr/>
-          <p:nvPr/>
-        </p:nvSpPr>
-        <p:spPr>
-          <a:xfrm>
-            <a:off x="891778" y="3698677"/>
-            <a:ext cx="753103" cy="171450"/>
-          </a:xfrm>
-          <a:prstGeom prst="rect">
-            <a:avLst/>
-          </a:prstGeom>
-          <a:noFill/>
-          <a:ln/>
-        </p:spPr>
-        <p:txBody>
-          <a:bodyPr wrap="square" lIns="0" tIns="0" rIns="0" bIns="0" rtlCol="0" anchor="t"/>
-          <a:lstStyle/>
-          <a:p>
-            <a:pPr algn="l" indent="0" marL="0">
-              <a:buNone/>
-            </a:pPr>
-            <a:r>
-              <a:rPr lang="en-US" sz="1150" b="1" dirty="0">
-                <a:solidFill>
-                  <a:srgbClr val="59636E"/>
-                </a:solidFill>
-                <a:latin typeface="Arial" pitchFamily="34" charset="0"/>
-                <a:ea typeface="Arial" pitchFamily="34" charset="-122"/>
-                <a:cs typeface="Arial" pitchFamily="34" charset="-120"/>
-              </a:rPr>
-              <a:t>BASELINE</a:t>
-            </a:r>
-            <a:endParaRPr lang="en-US" sz="1150" dirty="0"/>
-          </a:p>
-        </p:txBody>
-      </p:sp>
-      <p:sp>
-        <p:nvSpPr>
-          <p:cNvPr id="13" name="Text 8"/>
-          <p:cNvSpPr/>
-          <p:nvPr/>
-        </p:nvSpPr>
-        <p:spPr>
-          <a:xfrm>
-            <a:off x="1782514" y="3536752"/>
-            <a:ext cx="245013" cy="495300"/>
-          </a:xfrm>
-          <a:prstGeom prst="rect">
-            <a:avLst/>
-          </a:prstGeom>
-          <a:noFill/>
-          <a:ln/>
-        </p:spPr>
-        <p:txBody>
-          <a:bodyPr wrap="square" lIns="0" tIns="0" rIns="0" bIns="0" rtlCol="0" anchor="t"/>
-          <a:lstStyle/>
-          <a:p>
-            <a:pPr algn="l" indent="0" marL="0">
-              <a:buNone/>
-            </a:pPr>
-            <a:r>
-              <a:rPr lang="en-US" sz="3400" b="1" dirty="0">
-                <a:solidFill>
-                  <a:srgbClr val="1F2328"/>
-                </a:solidFill>
-                <a:latin typeface="Arial" pitchFamily="34" charset="0"/>
-                <a:ea typeface="Arial" pitchFamily="34" charset="-122"/>
-                <a:cs typeface="Arial" pitchFamily="34" charset="-120"/>
-              </a:rPr>
-              <a:t>4</a:t>
-            </a:r>
-            <a:endParaRPr lang="en-US" sz="3400" dirty="0"/>
-          </a:p>
-        </p:txBody>
-      </p:sp>
-      <p:sp>
-        <p:nvSpPr>
-          <p:cNvPr id="14" name="Text 9"/>
-          <p:cNvSpPr/>
-          <p:nvPr/>
-        </p:nvSpPr>
-        <p:spPr>
-          <a:xfrm>
-            <a:off x="2175123" y="3684389"/>
-            <a:ext cx="369341" cy="200025"/>
-          </a:xfrm>
-          <a:prstGeom prst="rect">
-            <a:avLst/>
-          </a:prstGeom>
-          <a:noFill/>
-          <a:ln/>
-        </p:spPr>
-        <p:txBody>
-          <a:bodyPr wrap="square" lIns="0" tIns="0" rIns="0" bIns="0" rtlCol="0" anchor="t"/>
-          <a:lstStyle/>
-          <a:p>
-            <a:pPr algn="l" indent="0" marL="0">
-              <a:buNone/>
-            </a:pPr>
-            <a:r>
-              <a:rPr lang="en-US" sz="1350" dirty="0">
-                <a:solidFill>
-                  <a:srgbClr val="59636E"/>
-                </a:solidFill>
-                <a:latin typeface="Arial" pitchFamily="34" charset="0"/>
-                <a:ea typeface="Arial" pitchFamily="34" charset="-122"/>
-                <a:cs typeface="Arial" pitchFamily="34" charset="-120"/>
-              </a:rPr>
-              <a:t>tests</a:t>
-            </a:r>
-            <a:endParaRPr lang="en-US" sz="1350" dirty="0"/>
-          </a:p>
-        </p:txBody>
-      </p:sp>
-      <p:sp>
-        <p:nvSpPr>
-          <p:cNvPr id="15" name="Text 10"/>
-          <p:cNvSpPr/>
-          <p:nvPr/>
-        </p:nvSpPr>
-        <p:spPr>
-          <a:xfrm>
-            <a:off x="3073598" y="3400276"/>
-            <a:ext cx="2413397" cy="768251"/>
-          </a:xfrm>
-          <a:prstGeom prst="roundRect">
-            <a:avLst>
-              <a:gd name="adj" fmla="val 16531"/>
-            </a:avLst>
-          </a:prstGeom>
-          <a:solidFill>
-            <a:srgbClr val="DAFBE1"/>
-          </a:solidFill>
-          <a:ln w="9525">
-            <a:solidFill>
-              <a:srgbClr val="8CE7A5"/>
-            </a:solidFill>
-          </a:ln>
-        </p:spPr>
-        <p:txBody>
-          <a:bodyPr wrap="square" rtlCol="0" anchor="ctr"/>
-          <a:lstStyle/>
-          <a:p>
-            <a:pPr indent="0" marL="0">
-              <a:buNone/>
-            </a:pPr>
-            <a:endParaRPr lang="en-US" dirty="0"/>
-          </a:p>
-        </p:txBody>
-      </p:sp>
-      <p:sp>
-        <p:nvSpPr>
-          <p:cNvPr id="16" name="Text 11"/>
-          <p:cNvSpPr/>
-          <p:nvPr/>
-        </p:nvSpPr>
-        <p:spPr>
-          <a:xfrm>
-            <a:off x="3611761" y="3698677"/>
-            <a:ext cx="438564" cy="171450"/>
-          </a:xfrm>
-          <a:prstGeom prst="rect">
-            <a:avLst/>
-          </a:prstGeom>
-          <a:noFill/>
-          <a:ln/>
-        </p:spPr>
-        <p:txBody>
-          <a:bodyPr wrap="square" lIns="0" tIns="0" rIns="0" bIns="0" rtlCol="0" anchor="t"/>
-          <a:lstStyle/>
-          <a:p>
-            <a:pPr algn="l" indent="0" marL="0">
-              <a:buNone/>
-            </a:pPr>
-            <a:r>
-              <a:rPr lang="en-US" sz="1150" b="1" dirty="0">
-                <a:solidFill>
-                  <a:srgbClr val="1A7F37"/>
-                </a:solidFill>
-                <a:latin typeface="Arial" pitchFamily="34" charset="0"/>
-                <a:ea typeface="Arial" pitchFamily="34" charset="-122"/>
-                <a:cs typeface="Arial" pitchFamily="34" charset="-120"/>
-              </a:rPr>
-              <a:t>FINAL</a:t>
-            </a:r>
-            <a:endParaRPr lang="en-US" sz="1150" dirty="0"/>
-          </a:p>
-        </p:txBody>
-      </p:sp>
-      <p:sp>
-        <p:nvSpPr>
-          <p:cNvPr id="17" name="Text 12"/>
-          <p:cNvSpPr/>
-          <p:nvPr/>
-        </p:nvSpPr>
-        <p:spPr>
-          <a:xfrm>
-            <a:off x="4194125" y="3536752"/>
-            <a:ext cx="245013" cy="495300"/>
-          </a:xfrm>
-          <a:prstGeom prst="rect">
-            <a:avLst/>
-          </a:prstGeom>
-          <a:noFill/>
-          <a:ln/>
-        </p:spPr>
-        <p:txBody>
-          <a:bodyPr wrap="square" lIns="0" tIns="0" rIns="0" bIns="0" rtlCol="0" anchor="t"/>
-          <a:lstStyle/>
-          <a:p>
-            <a:pPr algn="l" indent="0" marL="0">
-              <a:buNone/>
-            </a:pPr>
-            <a:r>
-              <a:rPr lang="en-US" sz="3400" b="1" dirty="0">
-                <a:solidFill>
-                  <a:srgbClr val="1A7F37"/>
-                </a:solidFill>
-                <a:latin typeface="Arial" pitchFamily="34" charset="0"/>
-                <a:ea typeface="Arial" pitchFamily="34" charset="-122"/>
-                <a:cs typeface="Arial" pitchFamily="34" charset="-120"/>
-              </a:rPr>
-              <a:t>9</a:t>
-            </a:r>
-            <a:endParaRPr lang="en-US" sz="3400" dirty="0"/>
-          </a:p>
-        </p:txBody>
-      </p:sp>
-      <p:sp>
-        <p:nvSpPr>
-          <p:cNvPr id="18" name="Text 13"/>
-          <p:cNvSpPr/>
-          <p:nvPr/>
-        </p:nvSpPr>
-        <p:spPr>
-          <a:xfrm>
-            <a:off x="4586734" y="3684389"/>
-            <a:ext cx="369341" cy="200025"/>
-          </a:xfrm>
-          <a:prstGeom prst="rect">
-            <a:avLst/>
-          </a:prstGeom>
-          <a:noFill/>
-          <a:ln/>
-        </p:spPr>
-        <p:txBody>
-          <a:bodyPr wrap="square" lIns="0" tIns="0" rIns="0" bIns="0" rtlCol="0" anchor="t"/>
-          <a:lstStyle/>
-          <a:p>
-            <a:pPr algn="l" indent="0" marL="0">
-              <a:buNone/>
-            </a:pPr>
-            <a:r>
-              <a:rPr lang="en-US" sz="1350" dirty="0">
-                <a:solidFill>
-                  <a:srgbClr val="59636E"/>
-                </a:solidFill>
-                <a:latin typeface="Arial" pitchFamily="34" charset="0"/>
-                <a:ea typeface="Arial" pitchFamily="34" charset="-122"/>
-                <a:cs typeface="Arial" pitchFamily="34" charset="-120"/>
-              </a:rPr>
-              <a:t>tests</a:t>
-            </a:r>
-            <a:endParaRPr lang="en-US" sz="1350" dirty="0"/>
-          </a:p>
-        </p:txBody>
-      </p:sp>
-      <p:sp>
-        <p:nvSpPr>
-          <p:cNvPr id="19" name="Text 14"/>
-          <p:cNvSpPr/>
-          <p:nvPr/>
-        </p:nvSpPr>
-        <p:spPr>
-          <a:xfrm>
-            <a:off x="5639395" y="3560862"/>
-            <a:ext cx="3056436" cy="447080"/>
-          </a:xfrm>
-          <a:prstGeom prst="rect">
-            <a:avLst/>
-          </a:prstGeom>
-          <a:noFill/>
-          <a:ln/>
-        </p:spPr>
-        <p:txBody>
-          <a:bodyPr wrap="square" lIns="0" tIns="0" rIns="0" bIns="0" rtlCol="0" anchor="t"/>
-          <a:lstStyle/>
-          <a:p>
-            <a:pPr algn="l" indent="0" marL="0">
-              <a:lnSpc>
-                <a:spcPts val="1760"/>
-              </a:lnSpc>
-              <a:buNone/>
-            </a:pPr>
-            <a:r>
-              <a:rPr lang="en-US" sz="1450" dirty="0">
-                <a:solidFill>
-                  <a:srgbClr val="59636E"/>
-                </a:solidFill>
-                <a:latin typeface="Arial" pitchFamily="34" charset="0"/>
-                <a:ea typeface="Arial" pitchFamily="34" charset="-122"/>
-                <a:cs typeface="Arial" pitchFamily="34" charset="-120"/>
-              </a:rPr>
-              <a:t>The final total must never be lower than the baseline.</a:t>
-            </a:r>
-            <a:endParaRPr lang="en-US" sz="1450" dirty="0"/>
-          </a:p>
-        </p:txBody>
-      </p:sp>
-    </p:spTree>
-  </p:cSld>
-  <p:clrMapOvr>
-    <a:masterClrMapping/>
-  </p:clrMapOvr>
-</p:sld>
+<ns0:sld xmlns:ns0="http://schemas.openxmlformats.org/presentationml/2006/main" xmlns:ns1="http://schemas.openxmlformats.org/drawingml/2006/main" xmlns:ns2="http://schemas.microsoft.com/office/drawing/2017/decorative" xmlns:ns3="http://schemas.openxmlformats.org/officeDocument/2006/relationships">
+  <ns0:cSld name="Slide 13">
+    <ns0:bg>
+      <ns0:bgPr>
+        <ns1:solidFill>
+          <ns1:srgbClr val="FFFFFF"/>
+        </ns1:solidFill>
+      </ns0:bgPr>
+    </ns0:bg>
+    <ns0:spTree>
+      <ns0:nvGrpSpPr>
+        <ns0:cNvPr id="1" name=""/>
+        <ns0:cNvGrpSpPr/>
+        <ns0:nvPr/>
+      </ns0:nvGrpSpPr>
+      <ns0:grpSpPr>
+        <ns1:xfrm>
+          <ns1:off x="0" y="0"/>
+          <ns1:ext cx="0" cy="0"/>
+          <ns1:chOff x="0" y="0"/>
+          <ns1:chExt cx="0" cy="0"/>
+        </ns1:xfrm>
+      </ns0:grpSpPr>
+      <ns0:pic>
+        <ns0:nvPicPr>
+          <ns0:cNvPr id="2" name="Image 0" descr="">
+            <ns1:extLst>
+              <ns1:ext uri="{C183D7F6-B498-43B3-948B-1728B52AA6E4}">
+                <ns2:decorative val="1"/>
+              </ns1:ext>
+            </ns1:extLst>
+          </ns0:cNvPr>
+          <ns0:cNvPicPr>
+            <ns1:picLocks noChangeAspect="1"/>
+          </ns0:cNvPicPr>
+          <ns0:nvPr/>
+        </ns0:nvPicPr>
+        <ns0:blipFill>
+          <ns1:blip ns3:embed="rId1"/>
+          <ns1:stretch>
+            <ns1:fillRect/>
+          </ns1:stretch>
+        </ns0:blipFill>
+        <ns0:spPr>
+          <ns1:xfrm>
+            <ns1:off x="6349901" y="0"/>
+            <ns1:ext cx="2793950" cy="1308050"/>
+          </ns1:xfrm>
+          <ns1:prstGeom prst="rect">
+            <ns1:avLst/>
+          </ns1:prstGeom>
+        </ns0:spPr>
+      </ns0:pic>
+      <ns0:sp>
+        <ns0:nvSpPr>
+          <ns0:cNvPr id="3" name="Text 0"/>
+          <ns0:cNvSpPr/>
+          <ns0:nvPr/>
+        </ns0:nvSpPr>
+        <ns0:spPr>
+          <ns1:xfrm>
+            <ns1:off x="7340501" y="177701"/>
+            <ns1:ext cx="1168301" cy="279350"/>
+          </ns1:xfrm>
+          <ns1:prstGeom prst="roundRect">
+            <ns1:avLst>
+              <ns1:gd name="adj" fmla="val 22731"/>
+            </ns1:avLst>
+          </ns1:prstGeom>
+          <ns1:solidFill>
+            <ns1:srgbClr val="1A7F37"/>
+          </ns1:solidFill>
+          <ns1:ln/>
+        </ns0:spPr>
+        <ns0:txBody>
+          <ns1:bodyPr wrap="square" rtlCol="0" anchor="ctr"/>
+          <ns1:lstStyle/>
+          <ns1:p>
+            <ns1:pPr indent="0" marL="0">
+              <ns1:buNone/>
+            </ns1:pPr>
+            <ns1:endParaRPr lang="en-US" dirty="0"/>
+          </ns1:p>
+        </ns0:txBody>
+      </ns0:sp>
+      <ns0:sp>
+        <ns0:nvSpPr>
+          <ns0:cNvPr id="4" name="Text 1"/>
+          <ns0:cNvSpPr/>
+          <ns0:nvPr/>
+        </ns0:nvSpPr>
+        <ns0:spPr>
+          <ns1:xfrm>
+            <ns1:off x="7461041" y="231577"/>
+            <ns1:ext cx="927071" cy="171450"/>
+          </ns1:xfrm>
+          <ns1:prstGeom prst="rect">
+            <ns1:avLst/>
+          </ns1:prstGeom>
+          <ns1:noFill/>
+          <ns1:ln/>
+        </ns0:spPr>
+        <ns0:txBody>
+          <ns1:bodyPr wrap="square" lIns="0" tIns="0" rIns="0" bIns="0" rtlCol="0" anchor="t"/>
+          <ns1:lstStyle/>
+          <ns1:p>
+            <ns1:pPr algn="ctr" indent="0" marL="0">
+              <ns1:buNone/>
+            </ns1:pPr>
+            <ns1:r>
+              <ns1:rPr lang="en-US" sz="1150" b="1" dirty="0">
+                <ns1:solidFill>
+                  <ns1:srgbClr val="FFFFFF"/>
+                </ns1:solidFill>
+                <ns1:latin typeface="Arial" pitchFamily="34" charset="0"/>
+                <ns1:ea typeface="Arial" pitchFamily="34" charset="-122"/>
+                <ns1:cs typeface="Arial" pitchFamily="34" charset="-120"/>
+              </ns1:rPr>
+              <ns1:t>CHAPTER 06</ns1:t>
+            </ns1:r>
+            <ns1:endParaRPr lang="en-US" sz="1150" dirty="0"/>
+          </ns1:p>
+        </ns0:txBody>
+      </ns0:sp>
+      <ns0:pic>
+        <ns0:nvPicPr>
+          <ns0:cNvPr id="5" name="Image 1" descr="Open this chapter on GitHub">
+            <ns1:hlinkClick ns3:id="rId3" tooltip="https://github.com/github/copilot-app-for-beginners/tree/main/06-canvases"/>
+          </ns0:cNvPr>
+          <ns0:cNvPicPr>
+            <ns1:picLocks noChangeAspect="1"/>
+          </ns0:cNvPicPr>
+          <ns0:nvPr/>
+        </ns0:nvPicPr>
+        <ns0:blipFill>
+          <ns1:blip ns3:embed="rId2"/>
+          <ns1:stretch>
+            <ns1:fillRect/>
+          </ns1:stretch>
+        </ns0:blipFill>
+        <ns0:spPr>
+          <ns1:xfrm>
+            <ns1:off x="8610600" y="165050"/>
+            <ns1:ext cx="304800" cy="304800"/>
+          </ns1:xfrm>
+          <ns1:prstGeom prst="rect">
+            <ns1:avLst/>
+          </ns1:prstGeom>
+        </ns0:spPr>
+      </ns0:pic>
+      <ns0:sp>
+        <ns0:nvSpPr>
+          <ns0:cNvPr id="6" name="Text 2"/>
+          <ns0:cNvSpPr/>
+          <ns0:nvPr/>
+        </ns0:nvSpPr>
+        <ns0:spPr>
+          <ns1:xfrm>
+            <ns1:off x="507950" y="381000"/>
+            <ns1:ext cx="8161020" cy="190500"/>
+          </ns1:xfrm>
+          <ns1:prstGeom prst="rect">
+            <ns1:avLst/>
+          </ns1:prstGeom>
+          <ns1:noFill/>
+          <ns1:ln/>
+        </ns0:spPr>
+        <ns0:txBody>
+          <ns1:bodyPr wrap="square" lIns="0" tIns="0" rIns="0" bIns="0" rtlCol="0" anchor="t"/>
+          <ns1:lstStyle/>
+          <ns1:p>
+            <ns1:pPr algn="l" indent="0" marL="0">
+              <ns1:buNone/>
+            </ns1:pPr>
+            <ns1:r>
+              <ns1:rPr lang="en-US" sz="1250" b="1" dirty="0">
+                <ns1:solidFill>
+                  <ns1:srgbClr val="1A7F37"/>
+                </ns1:solidFill>
+                <ns1:latin typeface="Arial" pitchFamily="34" charset="0"/>
+                <ns1:ea typeface="Arial" pitchFamily="34" charset="-122"/>
+                <ns1:cs typeface="Arial" pitchFamily="34" charset="-120"/>
+              </ns1:rPr>
+              <ns1:t>EVIDENCE</ns1:t>
+            </ns1:r>
+            <ns1:endParaRPr lang="en-US" sz="1250" dirty="0"/>
+          </ns1:p>
+        </ns0:txBody>
+      </ns0:sp>
+      <ns0:sp>
+        <ns0:nvSpPr>
+          <ns0:cNvPr id="7" name="Text 3"/>
+          <ns0:cNvSpPr/>
+          <ns0:nvPr/>
+        </ns0:nvSpPr>
+        <ns0:spPr>
+          <ns1:xfrm>
+            <ns1:off x="507950" y="622250"/>
+            <ns1:ext cx="8161020" cy="419100"/>
+          </ns1:xfrm>
+          <ns1:prstGeom prst="rect">
+            <ns1:avLst/>
+          </ns1:prstGeom>
+          <ns1:noFill/>
+          <ns1:ln/>
+        </ns0:spPr>
+        <ns0:txBody>
+          <ns1:bodyPr wrap="square" lIns="0" tIns="0" rIns="0" bIns="0" rtlCol="0" anchor="t"/>
+          <ns1:lstStyle/>
+          <ns1:p>
+            <ns1:pPr algn="l" indent="0" marL="0">
+              <ns1:lnSpc>
+                <ns1:spcPts val="3300"/>
+              </ns1:lnSpc>
+              <ns1:spcBef>
+                <ns1:spcPts val="400"/>
+              </ns1:spcBef>
+              <ns1:buNone/>
+            </ns1:pPr>
+            <ns1:r>
+              <ns1:rPr lang="en-US" sz="2800" b="1" dirty="0">
+                <ns1:solidFill>
+                  <ns1:srgbClr val="1F2328"/>
+                </ns1:solidFill>
+                <ns1:latin typeface="Arial" pitchFamily="34" charset="0"/>
+                <ns1:ea typeface="Arial" pitchFamily="34" charset="-122"/>
+                <ns1:cs typeface="Arial" pitchFamily="34" charset="-120"/>
+              </ns1:rPr>
+              <ns1:t>The board reflects what happened</ns1:t>
+            </ns1:r>
+            <ns1:endParaRPr lang="en-US" sz="2800" dirty="0"/>
+          </ns1:p>
+        </ns0:txBody>
+      </ns0:sp>
+      <ns0:sp>
+        <ns0:nvSpPr>
+          <ns0:cNvPr id="8" name="Text 4"/>
+          <ns0:cNvSpPr/>
+          <ns0:nvPr/>
+        </ns0:nvSpPr>
+        <ns0:spPr>
+          <ns1:xfrm>
+            <ns1:off x="507950" y="1104751"/>
+            <ns1:ext cx="8161020" cy="254050"/>
+          </ns1:xfrm>
+          <ns1:prstGeom prst="rect">
+            <ns1:avLst/>
+          </ns1:prstGeom>
+          <ns1:noFill/>
+          <ns1:ln/>
+        </ns0:spPr>
+        <ns0:txBody>
+          <ns1:bodyPr wrap="square" lIns="0" tIns="0" rIns="0" bIns="0" rtlCol="0" anchor="t"/>
+          <ns1:lstStyle/>
+          <ns1:p>
+            <ns1:pPr algn="l" indent="0" marL="0">
+              <ns1:lnSpc>
+                <ns1:spcPts val="2000"/>
+              </ns1:lnSpc>
+              <ns1:spcBef>
+                <ns1:spcPts val="500"/>
+              </ns1:spcBef>
+              <ns1:buNone/>
+            </ns1:pPr>
+            <ns1:r>
+              <ns1:rPr lang="en-US" sz="1650" dirty="0">
+                <ns1:solidFill>
+                  <ns1:srgbClr val="59636E"/>
+                </ns1:solidFill>
+                <ns1:latin typeface="Arial" pitchFamily="34" charset="0"/>
+                <ns1:ea typeface="Arial" pitchFamily="34" charset="-122"/>
+                <ns1:cs typeface="Arial" pitchFamily="34" charset="-120"/>
+              </ns1:rPr>
+              <ns1:t>Select </ns1:t>
+            </ns1:r>
+            <ns1:pPr algn="l" indent="0" marL="0">
+              <ns1:lnSpc>
+                <ns1:spcPts val="2000"/>
+              </ns1:lnSpc>
+              <ns1:spcBef>
+                <ns1:spcPts val="500"/>
+              </ns1:spcBef>
+              <ns1:buNone/>
+            </ns1:pPr>
+            <ns1:r>
+              <ns1:rPr lang="en-US" sz="1650" b="1" dirty="0">
+                <ns1:solidFill>
+                  <ns1:srgbClr val="59636E"/>
+                </ns1:solidFill>
+                <ns1:latin typeface="Arial" pitchFamily="34" charset="0"/>
+                <ns1:ea typeface="Arial" pitchFamily="34" charset="-122"/>
+                <ns1:cs typeface="Arial" pitchFamily="34" charset="-120"/>
+              </ns1:rPr>
+              <ns1:t>Run final checks</ns1:t>
+            </ns1:r>
+            <ns1:pPr algn="l" indent="0" marL="0">
+              <ns1:lnSpc>
+                <ns1:spcPts val="2000"/>
+              </ns1:lnSpc>
+              <ns1:spcBef>
+                <ns1:spcPts val="500"/>
+              </ns1:spcBef>
+              <ns1:buNone/>
+            </ns1:pPr>
+            <ns1:r>
+              <ns1:rPr lang="en-US" sz="1650" dirty="0">
+                <ns1:solidFill>
+                  <ns1:srgbClr val="59636E"/>
+                </ns1:solidFill>
+                <ns1:latin typeface="Arial" pitchFamily="34" charset="0"/>
+                <ns1:ea typeface="Arial" pitchFamily="34" charset="-122"/>
+                <ns1:cs typeface="Arial" pitchFamily="34" charset="-120"/>
+              </ns1:rPr>
+              <ns1:t>. You decide if the evidence is enough.</ns1:t>
+            </ns1:r>
+            <ns1:endParaRPr lang="en-US" sz="1650" dirty="0"/>
+          </ns1:p>
+        </ns0:txBody>
+      </ns0:sp>
+      <ns0:sp>
+        <ns0:nvSpPr>
+          <ns0:cNvPr id="9" name="Text 5"/>
+          <ns0:cNvSpPr/>
+          <ns0:nvPr/>
+        </ns0:nvSpPr>
+        <ns0:spPr>
+          <ns1:xfrm>
+            <ns1:off x="511076" y="2204591"/>
+            <ns1:ext cx="8121551" cy="841921"/>
+          </ns1:xfrm>
+          <ns1:prstGeom prst="roundRect">
+            <ns1:avLst>
+              <ns1:gd name="adj" fmla="val 9051"/>
+            </ns1:avLst>
+          </ns1:prstGeom>
+          <ns1:solidFill>
+            <ns1:srgbClr val="FFFFFF"/>
+          </ns1:solidFill>
+          <ns1:ln w="9525">
+            <ns1:solidFill>
+              <ns1:srgbClr val="D1D9E0"/>
+            </ns1:solidFill>
+          </ns1:ln>
+          <ns1:effectLst>
+            <ns1:outerShdw sx="100000" sy="100000" kx="0" ky="0" algn="bl" rotWithShape="0" blurRad="38100" dist="9525" dir="5400000">
+              <ns1:srgbClr val="1f2328">
+                <ns1:alpha val="12000"/>
+              </ns1:srgbClr>
+            </ns1:outerShdw>
+          </ns1:effectLst>
+        </ns0:spPr>
+        <ns0:txBody>
+          <ns1:bodyPr wrap="square" rtlCol="0" anchor="ctr"/>
+          <ns1:lstStyle/>
+          <ns1:p>
+            <ns1:pPr indent="0" marL="0">
+              <ns1:buNone/>
+            </ns1:pPr>
+            <ns1:endParaRPr lang="en-US" dirty="0"/>
+          </ns1:p>
+        </ns0:txBody>
+      </ns0:sp>
+      <ns0:pic>
+        <ns0:nvPicPr>
+          <ns0:cNvPr id="10" name="Image 2" descr="Feature Workbench with all five stages complete, and evidence that shows 4 baseline tests and 14 final tests"/>
+          <ns0:cNvPicPr>
+            <ns1:picLocks noChangeAspect="1"/>
+          </ns0:cNvPicPr>
+          <ns0:nvPr/>
+        </ns0:nvPicPr>
+        <ns0:blipFill>
+          <ns1:blip ns3:embed="rId4"/>
+          <ns1:stretch>
+            <ns1:fillRect/>
+          </ns1:stretch>
+        </ns0:blipFill>
+        <ns0:spPr>
+          <ns1:xfrm>
+            <ns1:off x="558701" y="2252216"/>
+            <ns1:ext cx="8026301" cy="746671"/>
+          </ns1:xfrm>
+          <ns1:prstGeom prst="rect">
+            <ns1:avLst/>
+          </ns1:prstGeom>
+        </ns0:spPr>
+      </ns0:pic>
+      <ns0:sp>
+        <ns0:nvSpPr>
+          <ns0:cNvPr id="11" name="Text 6"/>
+          <ns0:cNvSpPr/>
+          <ns0:nvPr/>
+        </ns0:nvSpPr>
+        <ns0:spPr>
+          <ns1:xfrm>
+            <ns1:off x="507950" y="3400276"/>
+            <ns1:ext cx="2413248" cy="768251"/>
+          </ns1:xfrm>
+          <ns1:prstGeom prst="roundRect">
+            <ns1:avLst>
+              <ns1:gd name="adj" fmla="val 16531"/>
+            </ns1:avLst>
+          </ns1:prstGeom>
+          <ns1:noFill/>
+          <ns1:ln w="9525">
+            <ns1:solidFill>
+              <ns1:srgbClr val="D1D9E0"/>
+            </ns1:solidFill>
+          </ns1:ln>
+        </ns0:spPr>
+        <ns0:txBody>
+          <ns1:bodyPr wrap="square" rtlCol="0" anchor="ctr"/>
+          <ns1:lstStyle/>
+          <ns1:p>
+            <ns1:pPr indent="0" marL="0">
+              <ns1:buNone/>
+            </ns1:pPr>
+            <ns1:endParaRPr lang="en-US" dirty="0"/>
+          </ns1:p>
+        </ns0:txBody>
+      </ns0:sp>
+      <ns0:sp>
+        <ns0:nvSpPr>
+          <ns0:cNvPr id="12" name="Text 7"/>
+          <ns0:cNvSpPr/>
+          <ns0:nvPr/>
+        </ns0:nvSpPr>
+        <ns0:spPr>
+          <ns1:xfrm>
+            <ns1:off x="891778" y="3698677"/>
+            <ns1:ext cx="753103" cy="171450"/>
+          </ns1:xfrm>
+          <ns1:prstGeom prst="rect">
+            <ns1:avLst/>
+          </ns1:prstGeom>
+          <ns1:noFill/>
+          <ns1:ln/>
+        </ns0:spPr>
+        <ns0:txBody>
+          <ns1:bodyPr wrap="square" lIns="0" tIns="0" rIns="0" bIns="0" rtlCol="0" anchor="t"/>
+          <ns1:lstStyle/>
+          <ns1:p>
+            <ns1:pPr algn="l" indent="0" marL="0">
+              <ns1:buNone/>
+            </ns1:pPr>
+            <ns1:r>
+              <ns1:rPr lang="en-US" sz="1150" b="1" dirty="0">
+                <ns1:solidFill>
+                  <ns1:srgbClr val="59636E"/>
+                </ns1:solidFill>
+                <ns1:latin typeface="Arial" pitchFamily="34" charset="0"/>
+                <ns1:ea typeface="Arial" pitchFamily="34" charset="-122"/>
+                <ns1:cs typeface="Arial" pitchFamily="34" charset="-120"/>
+              </ns1:rPr>
+              <ns1:t>BASELINE</ns1:t>
+            </ns1:r>
+            <ns1:endParaRPr lang="en-US" sz="1150" dirty="0"/>
+          </ns1:p>
+        </ns0:txBody>
+      </ns0:sp>
+      <ns0:sp>
+        <ns0:nvSpPr>
+          <ns0:cNvPr id="13" name="Text 8"/>
+          <ns0:cNvSpPr/>
+          <ns0:nvPr/>
+        </ns0:nvSpPr>
+        <ns0:spPr>
+          <ns1:xfrm>
+            <ns1:off x="1782514" y="3536752"/>
+            <ns1:ext cx="245013" cy="495300"/>
+          </ns1:xfrm>
+          <ns1:prstGeom prst="rect">
+            <ns1:avLst/>
+          </ns1:prstGeom>
+          <ns1:noFill/>
+          <ns1:ln/>
+        </ns0:spPr>
+        <ns0:txBody>
+          <ns1:bodyPr wrap="square" lIns="0" tIns="0" rIns="0" bIns="0" rtlCol="0" anchor="t"/>
+          <ns1:lstStyle/>
+          <ns1:p>
+            <ns1:pPr algn="l" indent="0" marL="0">
+              <ns1:buNone/>
+            </ns1:pPr>
+            <ns1:r>
+              <ns1:rPr lang="en-US" sz="3400" b="1" dirty="0">
+                <ns1:solidFill>
+                  <ns1:srgbClr val="1F2328"/>
+                </ns1:solidFill>
+                <ns1:latin typeface="Arial" pitchFamily="34" charset="0"/>
+                <ns1:ea typeface="Arial" pitchFamily="34" charset="-122"/>
+                <ns1:cs typeface="Arial" pitchFamily="34" charset="-120"/>
+              </ns1:rPr>
+              <ns1:t>4</ns1:t>
+            </ns1:r>
+            <ns1:endParaRPr lang="en-US" sz="3400" dirty="0"/>
+          </ns1:p>
+        </ns0:txBody>
+      </ns0:sp>
+      <ns0:sp>
+        <ns0:nvSpPr>
+          <ns0:cNvPr id="14" name="Text 9"/>
+          <ns0:cNvSpPr/>
+          <ns0:nvPr/>
+        </ns0:nvSpPr>
+        <ns0:spPr>
+          <ns1:xfrm>
+            <ns1:off x="2175123" y="3684389"/>
+            <ns1:ext cx="369341" cy="200025"/>
+          </ns1:xfrm>
+          <ns1:prstGeom prst="rect">
+            <ns1:avLst/>
+          </ns1:prstGeom>
+          <ns1:noFill/>
+          <ns1:ln/>
+        </ns0:spPr>
+        <ns0:txBody>
+          <ns1:bodyPr wrap="square" lIns="0" tIns="0" rIns="0" bIns="0" rtlCol="0" anchor="t"/>
+          <ns1:lstStyle/>
+          <ns1:p>
+            <ns1:pPr algn="l" indent="0" marL="0">
+              <ns1:buNone/>
+            </ns1:pPr>
+            <ns1:r>
+              <ns1:rPr lang="en-US" sz="1350" dirty="0">
+                <ns1:solidFill>
+                  <ns1:srgbClr val="59636E"/>
+                </ns1:solidFill>
+                <ns1:latin typeface="Arial" pitchFamily="34" charset="0"/>
+                <ns1:ea typeface="Arial" pitchFamily="34" charset="-122"/>
+                <ns1:cs typeface="Arial" pitchFamily="34" charset="-120"/>
+              </ns1:rPr>
+              <ns1:t>tests</ns1:t>
+            </ns1:r>
+            <ns1:endParaRPr lang="en-US" sz="1350" dirty="0"/>
+          </ns1:p>
+        </ns0:txBody>
+      </ns0:sp>
+      <ns0:sp>
+        <ns0:nvSpPr>
+          <ns0:cNvPr id="15" name="Text 10"/>
+          <ns0:cNvSpPr/>
+          <ns0:nvPr/>
+        </ns0:nvSpPr>
+        <ns0:spPr>
+          <ns1:xfrm>
+            <ns1:off x="3073598" y="3400276"/>
+            <ns1:ext cx="2413397" cy="768251"/>
+          </ns1:xfrm>
+          <ns1:prstGeom prst="roundRect">
+            <ns1:avLst>
+              <ns1:gd name="adj" fmla="val 16531"/>
+            </ns1:avLst>
+          </ns1:prstGeom>
+          <ns1:solidFill>
+            <ns1:srgbClr val="DAFBE1"/>
+          </ns1:solidFill>
+          <ns1:ln w="9525">
+            <ns1:solidFill>
+              <ns1:srgbClr val="8CE7A5"/>
+            </ns1:solidFill>
+          </ns1:ln>
+        </ns0:spPr>
+        <ns0:txBody>
+          <ns1:bodyPr wrap="square" rtlCol="0" anchor="ctr"/>
+          <ns1:lstStyle/>
+          <ns1:p>
+            <ns1:pPr indent="0" marL="0">
+              <ns1:buNone/>
+            </ns1:pPr>
+            <ns1:endParaRPr lang="en-US" dirty="0"/>
+          </ns1:p>
+        </ns0:txBody>
+      </ns0:sp>
+      <ns0:sp>
+        <ns0:nvSpPr>
+          <ns0:cNvPr id="16" name="Text 11"/>
+          <ns0:cNvSpPr/>
+          <ns0:nvPr/>
+        </ns0:nvSpPr>
+        <ns0:spPr>
+          <ns1:xfrm>
+            <ns1:off x="3611761" y="3698677"/>
+            <ns1:ext cx="438564" cy="171450"/>
+          </ns1:xfrm>
+          <ns1:prstGeom prst="rect">
+            <ns1:avLst/>
+          </ns1:prstGeom>
+          <ns1:noFill/>
+          <ns1:ln/>
+        </ns0:spPr>
+        <ns0:txBody>
+          <ns1:bodyPr wrap="square" lIns="0" tIns="0" rIns="0" bIns="0" rtlCol="0" anchor="t"/>
+          <ns1:lstStyle/>
+          <ns1:p>
+            <ns1:pPr algn="l" indent="0" marL="0">
+              <ns1:buNone/>
+            </ns1:pPr>
+            <ns1:r>
+              <ns1:rPr lang="en-US" sz="1150" b="1" dirty="0">
+                <ns1:solidFill>
+                  <ns1:srgbClr val="1A7F37"/>
+                </ns1:solidFill>
+                <ns1:latin typeface="Arial" pitchFamily="34" charset="0"/>
+                <ns1:ea typeface="Arial" pitchFamily="34" charset="-122"/>
+                <ns1:cs typeface="Arial" pitchFamily="34" charset="-120"/>
+              </ns1:rPr>
+              <ns1:t>FINAL</ns1:t>
+            </ns1:r>
+            <ns1:endParaRPr lang="en-US" sz="1150" dirty="0"/>
+          </ns1:p>
+        </ns0:txBody>
+      </ns0:sp>
+      <ns0:sp>
+        <ns0:nvSpPr>
+          <ns0:cNvPr id="17" name="Text 12"/>
+          <ns0:cNvSpPr/>
+          <ns0:nvPr/>
+        </ns0:nvSpPr>
+        <ns0:spPr>
+          <ns1:xfrm>
+            <ns1:off x="4096631" y="3536752"/>
+            <ns1:ext cx="600000" cy="495300"/>
+          </ns1:xfrm>
+          <ns1:prstGeom prst="rect">
+            <ns1:avLst/>
+          </ns1:prstGeom>
+          <ns1:noFill/>
+          <ns1:ln/>
+        </ns0:spPr>
+        <ns0:txBody>
+          <ns1:bodyPr wrap="square" lIns="0" tIns="0" rIns="0" bIns="0" rtlCol="0" anchor="t"/>
+          <ns1:lstStyle/>
+          <ns1:p>
+            <ns1:pPr algn="l" indent="0" marL="0">
+              <ns1:buNone/>
+            </ns1:pPr>
+            <ns1:r>
+              <ns1:rPr lang="en-US" sz="3000" b="1" dirty="0">
+                <ns1:solidFill>
+                  <ns1:srgbClr val="1A7F37"/>
+                </ns1:solidFill>
+                <ns1:latin typeface="Arial" pitchFamily="34" charset="0"/>
+                <ns1:ea typeface="Arial" pitchFamily="34" charset="-122"/>
+                <ns1:cs typeface="Arial" pitchFamily="34" charset="-120"/>
+              </ns1:rPr>
+              <ns1:t>14</ns1:t>
+            </ns1:r>
+            <ns1:endParaRPr lang="en-US" sz="3000" dirty="0"/>
+          </ns1:p>
+        </ns0:txBody>
+      </ns0:sp>
+      <ns0:sp>
+        <ns0:nvSpPr>
+          <ns0:cNvPr id="18" name="Text 13"/>
+          <ns0:cNvSpPr/>
+          <ns0:nvPr/>
+        </ns0:nvSpPr>
+        <ns0:spPr>
+          <ns1:xfrm>
+            <ns1:off x="4586734" y="3684389"/>
+            <ns1:ext cx="369341" cy="200025"/>
+          </ns1:xfrm>
+          <ns1:prstGeom prst="rect">
+            <ns1:avLst/>
+          </ns1:prstGeom>
+          <ns1:noFill/>
+          <ns1:ln/>
+        </ns0:spPr>
+        <ns0:txBody>
+          <ns1:bodyPr wrap="square" lIns="0" tIns="0" rIns="0" bIns="0" rtlCol="0" anchor="t"/>
+          <ns1:lstStyle/>
+          <ns1:p>
+            <ns1:pPr algn="l" indent="0" marL="0">
+              <ns1:buNone/>
+            </ns1:pPr>
+            <ns1:r>
+              <ns1:rPr lang="en-US" sz="1350" dirty="0">
+                <ns1:solidFill>
+                  <ns1:srgbClr val="59636E"/>
+                </ns1:solidFill>
+                <ns1:latin typeface="Arial" pitchFamily="34" charset="0"/>
+                <ns1:ea typeface="Arial" pitchFamily="34" charset="-122"/>
+                <ns1:cs typeface="Arial" pitchFamily="34" charset="-120"/>
+              </ns1:rPr>
+              <ns1:t>tests</ns1:t>
+            </ns1:r>
+            <ns1:endParaRPr lang="en-US" sz="1350" dirty="0"/>
+          </ns1:p>
+        </ns0:txBody>
+      </ns0:sp>
+      <ns0:sp>
+        <ns0:nvSpPr>
+          <ns0:cNvPr id="19" name="Text 14"/>
+          <ns0:cNvSpPr/>
+          <ns0:nvPr/>
+        </ns0:nvSpPr>
+        <ns0:spPr>
+          <ns1:xfrm>
+            <ns1:off x="5639395" y="3560862"/>
+            <ns1:ext cx="3056436" cy="447080"/>
+          </ns1:xfrm>
+          <ns1:prstGeom prst="rect">
+            <ns1:avLst/>
+          </ns1:prstGeom>
+          <ns1:noFill/>
+          <ns1:ln/>
+        </ns0:spPr>
+        <ns0:txBody>
+          <ns1:bodyPr wrap="square" lIns="0" tIns="0" rIns="0" bIns="0" rtlCol="0" anchor="t"/>
+          <ns1:lstStyle/>
+          <ns1:p>
+            <ns1:pPr algn="l" indent="0" marL="0">
+              <ns1:lnSpc>
+                <ns1:spcPts val="1760"/>
+              </ns1:lnSpc>
+              <ns1:buNone/>
+            </ns1:pPr>
+            <ns1:r>
+              <ns1:rPr lang="en-US" sz="1450" dirty="0">
+                <ns1:solidFill>
+                  <ns1:srgbClr val="59636E"/>
+                </ns1:solidFill>
+                <ns1:latin typeface="Arial" pitchFamily="34" charset="0"/>
+                <ns1:ea typeface="Arial" pitchFamily="34" charset="-122"/>
+                <ns1:cs typeface="Arial" pitchFamily="34" charset="-120"/>
+              </ns1:rPr>
+              <ns1:t>The final total must never be lower than the baseline.</ns1:t>
+            </ns1:r>
+            <ns1:endParaRPr lang="en-US" sz="1450" dirty="0"/>
+          </ns1:p>
+        </ns0:txBody>
+      </ns0:sp>
+    </ns0:spTree>
+  </ns0:cSld>
+  <ns0:clrMapOvr>
+    <ns1:masterClrMapping/>
+  </ns0:clrMapOvr>
+</ns0:sld>
 </file>
 
 <file path=ppt/slides/slide14.xml><?xml version="1.0" encoding="utf-8"?>
@@ -10131,7 +10131,7 @@
       </p:sp>
       <p:pic>
         <p:nvPicPr>
-          <p:cNvPr id="10" name="Image 2" descr="Arrangement board analogy for canvases">    </p:cNvPr>
+          <p:cNvPr id="10" name="Image 2" descr="Arrangement board analogy for canvases"/>
           <p:cNvPicPr>
             <a:picLocks noChangeAspect="1"/>
           </p:cNvPicPr>
@@ -10957,7 +10957,7 @@
       </p:sp>
       <p:pic>
         <p:nvPicPr>
-          <p:cNvPr id="10" name="Image 2" descr="You and the agent share one canvas. You use UI controls, the agent uses actions such as get, add, and move, and both sides can change the same board.">    </p:cNvPr>
+          <p:cNvPr id="10" name="Image 2" descr="You and the agent share one canvas. You use UI controls, the agent uses actions such as get, add, and move, and both sides can change the same board."/>
           <p:cNvPicPr>
             <a:picLocks noChangeAspect="1"/>
           </p:cNvPicPr>
@@ -11863,976 +11863,976 @@
 </file>
 
 <file path=ppt/slides/slide7.xml><?xml version="1.0" encoding="utf-8"?>
-<p:sld xmlns:a="http://schemas.openxmlformats.org/drawingml/2006/main" xmlns:r="http://schemas.openxmlformats.org/officeDocument/2006/relationships" xmlns:p="http://schemas.openxmlformats.org/presentationml/2006/main">
-  <p:cSld name="Slide 7">
-    <p:bg>
-      <p:bgPr>
-        <a:solidFill>
-          <a:srgbClr val="FFFFFF"/>
-        </a:solidFill>
-      </p:bgPr>
-    </p:bg>
-    <p:spTree>
-      <p:nvGrpSpPr>
-        <p:cNvPr id="1" name=""/>
-        <p:cNvGrpSpPr/>
-        <p:nvPr/>
-      </p:nvGrpSpPr>
-      <p:grpSpPr>
-        <a:xfrm>
-          <a:off x="0" y="0"/>
-          <a:ext cx="0" cy="0"/>
-          <a:chOff x="0" y="0"/>
-          <a:chExt cx="0" cy="0"/>
-        </a:xfrm>
-      </p:grpSpPr>
-      <p:pic>
-        <p:nvPicPr>
-          <p:cNvPr id="2" name="Image 0" descr="">
-            <a:extLst>
-              <a:ext uri="{C183D7F6-B498-43B3-948B-1728B52AA6E4}">
-                <adec:decorative xmlns:adec="http://schemas.microsoft.com/office/drawing/2017/decorative" val="1"/>
-              </a:ext>
-            </a:extLst>
-          </p:cNvPr>
-          <p:cNvPicPr>
-            <a:picLocks noChangeAspect="1"/>
-          </p:cNvPicPr>
-          <p:nvPr/>
-        </p:nvPicPr>
-        <p:blipFill>
-          <a:blip r:embed="rId1"/>
-          <a:stretch>
-            <a:fillRect/>
-          </a:stretch>
-        </p:blipFill>
-        <p:spPr>
-          <a:xfrm>
-            <a:off x="6349901" y="0"/>
-            <a:ext cx="2793950" cy="1308050"/>
-          </a:xfrm>
-          <a:prstGeom prst="rect">
-            <a:avLst/>
-          </a:prstGeom>
-        </p:spPr>
-      </p:pic>
-      <p:sp>
-        <p:nvSpPr>
-          <p:cNvPr id="3" name="Text 0"/>
-          <p:cNvSpPr/>
-          <p:nvPr/>
-        </p:nvSpPr>
-        <p:spPr>
-          <a:xfrm>
-            <a:off x="7340501" y="177701"/>
-            <a:ext cx="1168301" cy="279350"/>
-          </a:xfrm>
-          <a:prstGeom prst="roundRect">
-            <a:avLst>
-              <a:gd name="adj" fmla="val 22731"/>
-            </a:avLst>
-          </a:prstGeom>
-          <a:solidFill>
-            <a:srgbClr val="1A7F37"/>
-          </a:solidFill>
-          <a:ln/>
-        </p:spPr>
-        <p:txBody>
-          <a:bodyPr wrap="square" rtlCol="0" anchor="ctr"/>
-          <a:lstStyle/>
-          <a:p>
-            <a:pPr indent="0" marL="0">
-              <a:buNone/>
-            </a:pPr>
-            <a:endParaRPr lang="en-US" dirty="0"/>
-          </a:p>
-        </p:txBody>
-      </p:sp>
-      <p:sp>
-        <p:nvSpPr>
-          <p:cNvPr id="4" name="Text 1"/>
-          <p:cNvSpPr/>
-          <p:nvPr/>
-        </p:nvSpPr>
-        <p:spPr>
-          <a:xfrm>
-            <a:off x="7461041" y="231577"/>
-            <a:ext cx="927071" cy="171450"/>
-          </a:xfrm>
-          <a:prstGeom prst="rect">
-            <a:avLst/>
-          </a:prstGeom>
-          <a:noFill/>
-          <a:ln/>
-        </p:spPr>
-        <p:txBody>
-          <a:bodyPr wrap="square" lIns="0" tIns="0" rIns="0" bIns="0" rtlCol="0" anchor="t"/>
-          <a:lstStyle/>
-          <a:p>
-            <a:pPr algn="ctr" indent="0" marL="0">
-              <a:buNone/>
-            </a:pPr>
-            <a:r>
-              <a:rPr lang="en-US" sz="1150" b="1" dirty="0">
-                <a:solidFill>
-                  <a:srgbClr val="FFFFFF"/>
-                </a:solidFill>
-                <a:latin typeface="Arial" pitchFamily="34" charset="0"/>
-                <a:ea typeface="Arial" pitchFamily="34" charset="-122"/>
-                <a:cs typeface="Arial" pitchFamily="34" charset="-120"/>
-              </a:rPr>
-              <a:t>CHAPTER 06</a:t>
-            </a:r>
-            <a:endParaRPr lang="en-US" sz="1150" dirty="0"/>
-          </a:p>
-        </p:txBody>
-      </p:sp>
-      <p:pic>
-        <p:nvPicPr>
-          <p:cNvPr id="5" name="Image 1" descr="Open this chapter on GitHub">
-            <a:hlinkClick r:id="rId3" tooltip="https://github.com/github/copilot-app-for-beginners/tree/main/06-canvases"/>
-          </p:cNvPr>
-          <p:cNvPicPr>
-            <a:picLocks noChangeAspect="1"/>
-          </p:cNvPicPr>
-          <p:nvPr/>
-        </p:nvPicPr>
-        <p:blipFill>
-          <a:blip r:embed="rId2"/>
-          <a:stretch>
-            <a:fillRect/>
-          </a:stretch>
-        </p:blipFill>
-        <p:spPr>
-          <a:xfrm>
-            <a:off x="8610600" y="165050"/>
-            <a:ext cx="304800" cy="304800"/>
-          </a:xfrm>
-          <a:prstGeom prst="rect">
-            <a:avLst/>
-          </a:prstGeom>
-        </p:spPr>
-      </p:pic>
-      <p:sp>
-        <p:nvSpPr>
-          <p:cNvPr id="6" name="Text 2"/>
-          <p:cNvSpPr/>
-          <p:nvPr/>
-        </p:nvSpPr>
-        <p:spPr>
-          <a:xfrm>
-            <a:off x="507950" y="381000"/>
-            <a:ext cx="8161020" cy="190500"/>
-          </a:xfrm>
-          <a:prstGeom prst="rect">
-            <a:avLst/>
-          </a:prstGeom>
-          <a:noFill/>
-          <a:ln/>
-        </p:spPr>
-        <p:txBody>
-          <a:bodyPr wrap="square" lIns="0" tIns="0" rIns="0" bIns="0" rtlCol="0" anchor="t"/>
-          <a:lstStyle/>
-          <a:p>
-            <a:pPr algn="l" indent="0" marL="0">
-              <a:buNone/>
-            </a:pPr>
-            <a:r>
-              <a:rPr lang="en-US" sz="1250" b="1" dirty="0">
-                <a:solidFill>
-                  <a:srgbClr val="8250DF"/>
-                </a:solidFill>
-                <a:latin typeface="Arial" pitchFamily="34" charset="0"/>
-                <a:ea typeface="Arial" pitchFamily="34" charset="-122"/>
-                <a:cs typeface="Arial" pitchFamily="34" charset="-120"/>
-              </a:rPr>
-              <a:t>EXERCISE 1</a:t>
-            </a:r>
-            <a:endParaRPr lang="en-US" sz="1250" dirty="0"/>
-          </a:p>
-        </p:txBody>
-      </p:sp>
-      <p:sp>
-        <p:nvSpPr>
-          <p:cNvPr id="7" name="Text 3"/>
-          <p:cNvSpPr/>
-          <p:nvPr/>
-        </p:nvSpPr>
-        <p:spPr>
-          <a:xfrm>
-            <a:off x="507950" y="622250"/>
-            <a:ext cx="8161020" cy="419100"/>
-          </a:xfrm>
-          <a:prstGeom prst="rect">
-            <a:avLst/>
-          </a:prstGeom>
-          <a:noFill/>
-          <a:ln/>
-        </p:spPr>
-        <p:txBody>
-          <a:bodyPr wrap="square" lIns="0" tIns="0" rIns="0" bIns="0" rtlCol="0" anchor="t"/>
-          <a:lstStyle/>
-          <a:p>
-            <a:pPr algn="l" indent="0" marL="0">
-              <a:lnSpc>
-                <a:spcPts val="3300"/>
-              </a:lnSpc>
-              <a:spcBef>
-                <a:spcPts val="400"/>
-              </a:spcBef>
-              <a:buNone/>
-            </a:pPr>
-            <a:r>
-              <a:rPr lang="en-US" sz="2800" b="1" dirty="0">
-                <a:solidFill>
-                  <a:srgbClr val="1F2328"/>
-                </a:solidFill>
-                <a:latin typeface="Arial" pitchFamily="34" charset="0"/>
-                <a:ea typeface="Arial" pitchFamily="34" charset="-122"/>
-                <a:cs typeface="Arial" pitchFamily="34" charset="-120"/>
-              </a:rPr>
-              <a:t>Try a community canvas</a:t>
-            </a:r>
-            <a:endParaRPr lang="en-US" sz="2800" dirty="0"/>
-          </a:p>
-        </p:txBody>
-      </p:sp>
-      <p:sp>
-        <p:nvSpPr>
-          <p:cNvPr id="8" name="Text 4"/>
-          <p:cNvSpPr/>
-          <p:nvPr/>
-        </p:nvSpPr>
-        <p:spPr>
-          <a:xfrm>
-            <a:off x="507950" y="1104751"/>
-            <a:ext cx="8161020" cy="254050"/>
-          </a:xfrm>
-          <a:prstGeom prst="rect">
-            <a:avLst/>
-          </a:prstGeom>
-          <a:noFill/>
-          <a:ln/>
-        </p:spPr>
-        <p:txBody>
-          <a:bodyPr wrap="square" lIns="0" tIns="0" rIns="0" bIns="0" rtlCol="0" anchor="t"/>
-          <a:lstStyle/>
-          <a:p>
-            <a:pPr algn="l" indent="0" marL="0">
-              <a:lnSpc>
-                <a:spcPts val="2000"/>
-              </a:lnSpc>
-              <a:spcBef>
-                <a:spcPts val="500"/>
-              </a:spcBef>
-              <a:buNone/>
-            </a:pPr>
-            <a:r>
-              <a:rPr lang="en-US" sz="1650" dirty="0">
-                <a:solidFill>
-                  <a:srgbClr val="59636E"/>
-                </a:solidFill>
-                <a:latin typeface="Arial" pitchFamily="34" charset="0"/>
-                <a:ea typeface="Arial" pitchFamily="34" charset="-122"/>
-                <a:cs typeface="Arial" pitchFamily="34" charset="-120"/>
-              </a:rPr>
-              <a:t>Repository Issues Kanban turns issues into a board.</a:t>
-            </a:r>
-            <a:endParaRPr lang="en-US" sz="1650" dirty="0"/>
-          </a:p>
-        </p:txBody>
-      </p:sp>
-      <p:sp>
-        <p:nvSpPr>
-          <p:cNvPr id="9" name="Text 5"/>
-          <p:cNvSpPr/>
-          <p:nvPr/>
-        </p:nvSpPr>
-        <p:spPr>
-          <a:xfrm>
-            <a:off x="511076" y="1923901"/>
-            <a:ext cx="4311551" cy="2298650"/>
-          </a:xfrm>
-          <a:prstGeom prst="roundRect">
-            <a:avLst>
-              <a:gd name="adj" fmla="val 3315"/>
-            </a:avLst>
-          </a:prstGeom>
-          <a:solidFill>
-            <a:srgbClr val="FFFFFF"/>
-          </a:solidFill>
-          <a:ln w="9525">
-            <a:solidFill>
-              <a:srgbClr val="D1D9E0"/>
-            </a:solidFill>
-          </a:ln>
-          <a:effectLst>
-            <a:outerShdw sx="100000" sy="100000" kx="0" ky="0" algn="bl" rotWithShape="0" blurRad="38100" dist="9525" dir="5400000">
-              <a:srgbClr val="1f2328">
-                <a:alpha val="12000"/>
-              </a:srgbClr>
-            </a:outerShdw>
-          </a:effectLst>
-        </p:spPr>
-        <p:txBody>
-          <a:bodyPr wrap="square" rtlCol="0" anchor="ctr"/>
-          <a:lstStyle/>
-          <a:p>
-            <a:pPr indent="0" marL="0">
-              <a:buNone/>
-            </a:pPr>
-            <a:endParaRPr lang="en-US" dirty="0"/>
-          </a:p>
-        </p:txBody>
-      </p:sp>
-      <p:pic>
-        <p:nvPicPr>
-          <p:cNvPr id="10" name="Image 2" descr="Repository Issues Kanban preview">    </p:cNvPr>
-          <p:cNvPicPr>
-            <a:picLocks noChangeAspect="1"/>
-          </p:cNvPicPr>
-          <p:nvPr/>
-        </p:nvPicPr>
-        <p:blipFill>
-          <a:blip r:embed="rId4"/>
-          <a:stretch>
-            <a:fillRect/>
-          </a:stretch>
-        </p:blipFill>
-        <p:spPr>
-          <a:xfrm>
-            <a:off x="558701" y="1971526"/>
-            <a:ext cx="4216301" cy="2203400"/>
-          </a:xfrm>
-          <a:prstGeom prst="rect">
-            <a:avLst/>
-          </a:prstGeom>
-        </p:spPr>
-      </p:pic>
-      <p:sp>
-        <p:nvSpPr>
-          <p:cNvPr id="11" name="Text 6"/>
-          <p:cNvSpPr/>
-          <p:nvPr/>
-        </p:nvSpPr>
-        <p:spPr>
-          <a:xfrm>
-            <a:off x="5079802" y="2120801"/>
-            <a:ext cx="279350" cy="279350"/>
-          </a:xfrm>
-          <a:prstGeom prst="roundRect">
-            <a:avLst>
-              <a:gd name="adj" fmla="val 327331"/>
-            </a:avLst>
-          </a:prstGeom>
-          <a:solidFill>
-            <a:srgbClr val="8250DF"/>
-          </a:solidFill>
-          <a:ln/>
-        </p:spPr>
-        <p:txBody>
-          <a:bodyPr wrap="square" rtlCol="0" anchor="ctr"/>
-          <a:lstStyle/>
-          <a:p>
-            <a:pPr indent="0" marL="0">
-              <a:buNone/>
-            </a:pPr>
-            <a:endParaRPr lang="en-US" dirty="0"/>
-          </a:p>
-        </p:txBody>
-      </p:sp>
-      <p:sp>
-        <p:nvSpPr>
-          <p:cNvPr id="12" name="Text 7"/>
-          <p:cNvSpPr/>
-          <p:nvPr/>
-        </p:nvSpPr>
-        <p:spPr>
-          <a:xfrm>
-            <a:off x="5174467" y="2165152"/>
-            <a:ext cx="90020" cy="190500"/>
-          </a:xfrm>
-          <a:prstGeom prst="rect">
-            <a:avLst/>
-          </a:prstGeom>
-          <a:noFill/>
-          <a:ln/>
-        </p:spPr>
-        <p:txBody>
-          <a:bodyPr wrap="square" lIns="0" tIns="0" rIns="0" bIns="0" rtlCol="0" anchor="t"/>
-          <a:lstStyle/>
-          <a:p>
-            <a:pPr algn="ctr" indent="0" marL="0">
-              <a:buNone/>
-            </a:pPr>
-            <a:r>
-              <a:rPr lang="en-US" sz="1250" b="1" dirty="0">
-                <a:solidFill>
-                  <a:srgbClr val="FFFFFF"/>
-                </a:solidFill>
-                <a:latin typeface="Arial" pitchFamily="34" charset="0"/>
-                <a:ea typeface="Arial" pitchFamily="34" charset="-122"/>
-                <a:cs typeface="Arial" pitchFamily="34" charset="-120"/>
-              </a:rPr>
-              <a:t>1</a:t>
-            </a:r>
-            <a:endParaRPr lang="en-US" sz="1250" dirty="0"/>
-          </a:p>
-        </p:txBody>
-      </p:sp>
-      <p:sp>
-        <p:nvSpPr>
-          <p:cNvPr id="13" name="Text 8"/>
-          <p:cNvSpPr/>
-          <p:nvPr/>
-        </p:nvSpPr>
-        <p:spPr>
-          <a:xfrm>
-            <a:off x="5511552" y="2120801"/>
-            <a:ext cx="2701516" cy="222200"/>
-          </a:xfrm>
-          <a:prstGeom prst="rect">
-            <a:avLst/>
-          </a:prstGeom>
-          <a:noFill/>
-          <a:ln/>
-        </p:spPr>
-        <p:txBody>
-          <a:bodyPr wrap="square" lIns="0" tIns="0" rIns="0" bIns="0" rtlCol="0" anchor="t"/>
-          <a:lstStyle/>
-          <a:p>
-            <a:pPr algn="l" indent="0" marL="0">
-              <a:lnSpc>
-                <a:spcPts val="1750"/>
-              </a:lnSpc>
-              <a:buNone/>
-            </a:pPr>
-            <a:r>
-              <a:rPr lang="en-US" sz="1550" b="1" dirty="0">
-                <a:solidFill>
-                  <a:srgbClr val="1F2328"/>
-                </a:solidFill>
-                <a:latin typeface="Arial" pitchFamily="34" charset="0"/>
-                <a:ea typeface="Arial" pitchFamily="34" charset="-122"/>
-                <a:cs typeface="Arial" pitchFamily="34" charset="-120"/>
-              </a:rPr>
-              <a:t>Install it</a:t>
-            </a:r>
-            <a:endParaRPr lang="en-US" sz="1550" dirty="0"/>
-          </a:p>
-        </p:txBody>
-      </p:sp>
-      <p:sp>
-        <p:nvSpPr>
-          <p:cNvPr id="14" name="Text 9"/>
-          <p:cNvSpPr/>
-          <p:nvPr/>
-        </p:nvSpPr>
-        <p:spPr>
-          <a:xfrm>
-            <a:off x="5511552" y="2368302"/>
-            <a:ext cx="2701516" cy="198090"/>
-          </a:xfrm>
-          <a:prstGeom prst="rect">
-            <a:avLst/>
-          </a:prstGeom>
-          <a:noFill/>
-          <a:ln/>
-        </p:spPr>
-        <p:txBody>
-          <a:bodyPr wrap="square" lIns="0" tIns="0" rIns="0" bIns="0" rtlCol="0" anchor="t"/>
-          <a:lstStyle/>
-          <a:p>
-            <a:pPr algn="l" indent="0" marL="0">
-              <a:lnSpc>
-                <a:spcPts val="1560"/>
-              </a:lnSpc>
-              <a:buNone/>
-            </a:pPr>
-            <a:r>
-              <a:rPr lang="en-US" sz="1350" b="1" dirty="0">
-                <a:solidFill>
-                  <a:srgbClr val="59636E"/>
-                </a:solidFill>
-                <a:latin typeface="Arial" pitchFamily="34" charset="0"/>
-                <a:ea typeface="Arial" pitchFamily="34" charset="-122"/>
-                <a:cs typeface="Arial" pitchFamily="34" charset="-120"/>
-              </a:rPr>
-              <a:t>Open in Copilot app</a:t>
-            </a:r>
-            <a:pPr algn="l" indent="0" marL="0">
-              <a:lnSpc>
-                <a:spcPts val="1560"/>
-              </a:lnSpc>
-              <a:buNone/>
-            </a:pPr>
-            <a:r>
-              <a:rPr lang="en-US" sz="1350" dirty="0">
-                <a:solidFill>
-                  <a:srgbClr val="59636E"/>
-                </a:solidFill>
-                <a:latin typeface="Arial" pitchFamily="34" charset="0"/>
-                <a:ea typeface="Arial" pitchFamily="34" charset="-122"/>
-                <a:cs typeface="Arial" pitchFamily="34" charset="-120"/>
-              </a:rPr>
-              <a:t>, then </a:t>
-            </a:r>
-            <a:pPr algn="l" indent="0" marL="0">
-              <a:lnSpc>
-                <a:spcPts val="1560"/>
-              </a:lnSpc>
-              <a:buNone/>
-            </a:pPr>
-            <a:r>
-              <a:rPr lang="en-US" sz="1350" b="1" dirty="0">
-                <a:solidFill>
-                  <a:srgbClr val="59636E"/>
-                </a:solidFill>
-                <a:latin typeface="Arial" pitchFamily="34" charset="0"/>
-                <a:ea typeface="Arial" pitchFamily="34" charset="-122"/>
-                <a:cs typeface="Arial" pitchFamily="34" charset="-120"/>
-              </a:rPr>
-              <a:t>Install</a:t>
-            </a:r>
-            <a:pPr algn="l" indent="0" marL="0">
-              <a:lnSpc>
-                <a:spcPts val="1560"/>
-              </a:lnSpc>
-              <a:buNone/>
-            </a:pPr>
-            <a:r>
-              <a:rPr lang="en-US" sz="1350" dirty="0">
-                <a:solidFill>
-                  <a:srgbClr val="59636E"/>
-                </a:solidFill>
-                <a:latin typeface="Arial" pitchFamily="34" charset="0"/>
-                <a:ea typeface="Arial" pitchFamily="34" charset="-122"/>
-                <a:cs typeface="Arial" pitchFamily="34" charset="-120"/>
-              </a:rPr>
-              <a:t>.</a:t>
-            </a:r>
-            <a:endParaRPr lang="en-US" sz="1350" dirty="0"/>
-          </a:p>
-        </p:txBody>
-      </p:sp>
-      <p:sp>
-        <p:nvSpPr>
-          <p:cNvPr id="15" name="Text 10"/>
-          <p:cNvSpPr/>
-          <p:nvPr/>
-        </p:nvSpPr>
-        <p:spPr>
-          <a:xfrm>
-            <a:off x="5079802" y="2845743"/>
-            <a:ext cx="279350" cy="279350"/>
-          </a:xfrm>
-          <a:prstGeom prst="roundRect">
-            <a:avLst>
-              <a:gd name="adj" fmla="val 327331"/>
-            </a:avLst>
-          </a:prstGeom>
-          <a:solidFill>
-            <a:srgbClr val="8250DF"/>
-          </a:solidFill>
-          <a:ln/>
-        </p:spPr>
-        <p:txBody>
-          <a:bodyPr wrap="square" rtlCol="0" anchor="ctr"/>
-          <a:lstStyle/>
-          <a:p>
-            <a:pPr indent="0" marL="0">
-              <a:buNone/>
-            </a:pPr>
-            <a:endParaRPr lang="en-US" dirty="0"/>
-          </a:p>
-        </p:txBody>
-      </p:sp>
-      <p:sp>
-        <p:nvSpPr>
-          <p:cNvPr id="16" name="Text 11"/>
-          <p:cNvSpPr/>
-          <p:nvPr/>
-        </p:nvSpPr>
-        <p:spPr>
-          <a:xfrm>
-            <a:off x="5174467" y="2890093"/>
-            <a:ext cx="90020" cy="190500"/>
-          </a:xfrm>
-          <a:prstGeom prst="rect">
-            <a:avLst/>
-          </a:prstGeom>
-          <a:noFill/>
-          <a:ln/>
-        </p:spPr>
-        <p:txBody>
-          <a:bodyPr wrap="square" lIns="0" tIns="0" rIns="0" bIns="0" rtlCol="0" anchor="t"/>
-          <a:lstStyle/>
-          <a:p>
-            <a:pPr algn="ctr" indent="0" marL="0">
-              <a:buNone/>
-            </a:pPr>
-            <a:r>
-              <a:rPr lang="en-US" sz="1250" b="1" dirty="0">
-                <a:solidFill>
-                  <a:srgbClr val="FFFFFF"/>
-                </a:solidFill>
-                <a:latin typeface="Arial" pitchFamily="34" charset="0"/>
-                <a:ea typeface="Arial" pitchFamily="34" charset="-122"/>
-                <a:cs typeface="Arial" pitchFamily="34" charset="-120"/>
-              </a:rPr>
-              <a:t>2</a:t>
-            </a:r>
-            <a:endParaRPr lang="en-US" sz="1250" dirty="0"/>
-          </a:p>
-        </p:txBody>
-      </p:sp>
-      <p:sp>
-        <p:nvSpPr>
-          <p:cNvPr id="17" name="Text 12"/>
-          <p:cNvSpPr/>
-          <p:nvPr/>
-        </p:nvSpPr>
-        <p:spPr>
-          <a:xfrm>
-            <a:off x="5511552" y="2845743"/>
-            <a:ext cx="3129454" cy="222200"/>
-          </a:xfrm>
-          <a:prstGeom prst="rect">
-            <a:avLst/>
-          </a:prstGeom>
-          <a:noFill/>
-          <a:ln/>
-        </p:spPr>
-        <p:txBody>
-          <a:bodyPr wrap="square" lIns="0" tIns="0" rIns="0" bIns="0" rtlCol="0" anchor="t"/>
-          <a:lstStyle/>
-          <a:p>
-            <a:pPr algn="l" indent="0" marL="0">
-              <a:lnSpc>
-                <a:spcPts val="1750"/>
-              </a:lnSpc>
-              <a:buNone/>
-            </a:pPr>
-            <a:r>
-              <a:rPr lang="en-US" sz="1550" b="1" dirty="0">
-                <a:solidFill>
-                  <a:srgbClr val="1F2328"/>
-                </a:solidFill>
-                <a:latin typeface="Arial" pitchFamily="34" charset="0"/>
-                <a:ea typeface="Arial" pitchFamily="34" charset="-122"/>
-                <a:cs typeface="Arial" pitchFamily="34" charset="-120"/>
-              </a:rPr>
-              <a:t>Reload extensions</a:t>
-            </a:r>
-            <a:endParaRPr lang="en-US" sz="1550" dirty="0"/>
-          </a:p>
-        </p:txBody>
-      </p:sp>
-      <p:sp>
-        <p:nvSpPr>
-          <p:cNvPr id="18" name="Text 13"/>
-          <p:cNvSpPr/>
-          <p:nvPr/>
-        </p:nvSpPr>
-        <p:spPr>
-          <a:xfrm>
-            <a:off x="5511552" y="3093244"/>
-            <a:ext cx="3129454" cy="207615"/>
-          </a:xfrm>
-          <a:prstGeom prst="rect">
-            <a:avLst/>
-          </a:prstGeom>
-          <a:noFill/>
-          <a:ln/>
-        </p:spPr>
-        <p:txBody>
-          <a:bodyPr wrap="square" lIns="0" tIns="0" rIns="0" bIns="0" rtlCol="0" anchor="t"/>
-          <a:lstStyle/>
-          <a:p>
-            <a:pPr algn="l" indent="0" marL="0">
-              <a:lnSpc>
-                <a:spcPts val="1560"/>
-              </a:lnSpc>
-              <a:buNone/>
-            </a:pPr>
-            <a:r>
-              <a:rPr lang="en-US" sz="1350" dirty="0">
-                <a:solidFill>
-                  <a:srgbClr val="59636E"/>
-                </a:solidFill>
-                <a:latin typeface="Arial" pitchFamily="34" charset="0"/>
-                <a:ea typeface="Arial" pitchFamily="34" charset="-122"/>
-                <a:cs typeface="Arial" pitchFamily="34" charset="-120"/>
-              </a:rPr>
-              <a:t>Send </a:t>
-            </a:r>
-            <a:pPr algn="l" indent="0" marL="0">
-              <a:lnSpc>
-                <a:spcPts val="1560"/>
-              </a:lnSpc>
-              <a:buNone/>
-            </a:pPr>
-            <a:r>
-              <a:rPr lang="en-US" sz="1350" b="1" dirty="0">
-                <a:solidFill>
-                  <a:srgbClr val="0550AE"/>
-                </a:solidFill>
-                <a:latin typeface="Courier New" pitchFamily="34" charset="0"/>
-                <a:ea typeface="Courier New" pitchFamily="34" charset="-122"/>
-                <a:cs typeface="Courier New" pitchFamily="34" charset="-120"/>
-              </a:rPr>
-              <a:t>Restart canvas extensions</a:t>
-            </a:r>
-            <a:pPr algn="l" indent="0" marL="0">
-              <a:lnSpc>
-                <a:spcPts val="1560"/>
-              </a:lnSpc>
-              <a:buNone/>
-            </a:pPr>
-            <a:r>
-              <a:rPr lang="en-US" sz="1350" dirty="0">
-                <a:solidFill>
-                  <a:srgbClr val="59636E"/>
-                </a:solidFill>
-                <a:latin typeface="Arial" pitchFamily="34" charset="0"/>
-                <a:ea typeface="Arial" pitchFamily="34" charset="-122"/>
-                <a:cs typeface="Arial" pitchFamily="34" charset="-120"/>
-              </a:rPr>
-              <a:t>.</a:t>
-            </a:r>
-            <a:endParaRPr lang="en-US" sz="1350" dirty="0"/>
-          </a:p>
-        </p:txBody>
-      </p:sp>
-      <p:sp>
-        <p:nvSpPr>
-          <p:cNvPr id="19" name="Text 14"/>
-          <p:cNvSpPr/>
-          <p:nvPr/>
-        </p:nvSpPr>
-        <p:spPr>
-          <a:xfrm>
-            <a:off x="5079802" y="3580209"/>
-            <a:ext cx="279350" cy="279350"/>
-          </a:xfrm>
-          <a:prstGeom prst="roundRect">
-            <a:avLst>
-              <a:gd name="adj" fmla="val 327331"/>
-            </a:avLst>
-          </a:prstGeom>
-          <a:solidFill>
-            <a:srgbClr val="8250DF"/>
-          </a:solidFill>
-          <a:ln/>
-        </p:spPr>
-        <p:txBody>
-          <a:bodyPr wrap="square" rtlCol="0" anchor="ctr"/>
-          <a:lstStyle/>
-          <a:p>
-            <a:pPr indent="0" marL="0">
-              <a:buNone/>
-            </a:pPr>
-            <a:endParaRPr lang="en-US" dirty="0"/>
-          </a:p>
-        </p:txBody>
-      </p:sp>
-      <p:sp>
-        <p:nvSpPr>
-          <p:cNvPr id="20" name="Text 15"/>
-          <p:cNvSpPr/>
-          <p:nvPr/>
-        </p:nvSpPr>
-        <p:spPr>
-          <a:xfrm>
-            <a:off x="5174467" y="3624560"/>
-            <a:ext cx="90020" cy="190500"/>
-          </a:xfrm>
-          <a:prstGeom prst="rect">
-            <a:avLst/>
-          </a:prstGeom>
-          <a:noFill/>
-          <a:ln/>
-        </p:spPr>
-        <p:txBody>
-          <a:bodyPr wrap="square" lIns="0" tIns="0" rIns="0" bIns="0" rtlCol="0" anchor="t"/>
-          <a:lstStyle/>
-          <a:p>
-            <a:pPr algn="ctr" indent="0" marL="0">
-              <a:buNone/>
-            </a:pPr>
-            <a:r>
-              <a:rPr lang="en-US" sz="1250" b="1" dirty="0">
-                <a:solidFill>
-                  <a:srgbClr val="FFFFFF"/>
-                </a:solidFill>
-                <a:latin typeface="Arial" pitchFamily="34" charset="0"/>
-                <a:ea typeface="Arial" pitchFamily="34" charset="-122"/>
-                <a:cs typeface="Arial" pitchFamily="34" charset="-120"/>
-              </a:rPr>
-              <a:t>3</a:t>
-            </a:r>
-            <a:endParaRPr lang="en-US" sz="1250" dirty="0"/>
-          </a:p>
-        </p:txBody>
-      </p:sp>
-      <p:sp>
-        <p:nvSpPr>
-          <p:cNvPr id="21" name="Text 16"/>
-          <p:cNvSpPr/>
-          <p:nvPr/>
-        </p:nvSpPr>
-        <p:spPr>
-          <a:xfrm>
-            <a:off x="5511552" y="3580209"/>
-            <a:ext cx="2453771" cy="222200"/>
-          </a:xfrm>
-          <a:prstGeom prst="rect">
-            <a:avLst/>
-          </a:prstGeom>
-          <a:noFill/>
-          <a:ln/>
-        </p:spPr>
-        <p:txBody>
-          <a:bodyPr wrap="square" lIns="0" tIns="0" rIns="0" bIns="0" rtlCol="0" anchor="t"/>
-          <a:lstStyle/>
-          <a:p>
-            <a:pPr algn="l" indent="0" marL="0">
-              <a:lnSpc>
-                <a:spcPts val="1750"/>
-              </a:lnSpc>
-              <a:buNone/>
-            </a:pPr>
-            <a:r>
-              <a:rPr lang="en-US" sz="1550" b="1" dirty="0">
-                <a:solidFill>
-                  <a:srgbClr val="1F2328"/>
-                </a:solidFill>
-                <a:latin typeface="Arial" pitchFamily="34" charset="0"/>
-                <a:ea typeface="Arial" pitchFamily="34" charset="-122"/>
-                <a:cs typeface="Arial" pitchFamily="34" charset="-120"/>
-              </a:rPr>
-              <a:t>Open it and drag an issue</a:t>
-            </a:r>
-            <a:endParaRPr lang="en-US" sz="1550" dirty="0"/>
-          </a:p>
-        </p:txBody>
-      </p:sp>
-      <p:sp>
-        <p:nvSpPr>
-          <p:cNvPr id="22" name="Text 17"/>
-          <p:cNvSpPr/>
-          <p:nvPr/>
-        </p:nvSpPr>
-        <p:spPr>
-          <a:xfrm>
-            <a:off x="5511552" y="3827711"/>
-            <a:ext cx="2453771" cy="198090"/>
-          </a:xfrm>
-          <a:prstGeom prst="rect">
-            <a:avLst/>
-          </a:prstGeom>
-          <a:noFill/>
-          <a:ln/>
-        </p:spPr>
-        <p:txBody>
-          <a:bodyPr wrap="square" lIns="0" tIns="0" rIns="0" bIns="0" rtlCol="0" anchor="t"/>
-          <a:lstStyle/>
-          <a:p>
-            <a:pPr algn="l" indent="0" marL="0">
-              <a:lnSpc>
-                <a:spcPts val="1560"/>
-              </a:lnSpc>
-              <a:buNone/>
-            </a:pPr>
-            <a:r>
-              <a:rPr lang="en-US" sz="1350" dirty="0">
-                <a:solidFill>
-                  <a:srgbClr val="59636E"/>
-                </a:solidFill>
-                <a:latin typeface="Arial" pitchFamily="34" charset="0"/>
-                <a:ea typeface="Arial" pitchFamily="34" charset="-122"/>
-                <a:cs typeface="Arial" pitchFamily="34" charset="-120"/>
-              </a:rPr>
-              <a:t>Review panel </a:t>
-            </a:r>
-            <a:pPr algn="l" indent="0" marL="0">
-              <a:lnSpc>
-                <a:spcPts val="1560"/>
-              </a:lnSpc>
-              <a:buNone/>
-            </a:pPr>
-            <a:r>
-              <a:rPr lang="en-US" sz="1350" b="1" dirty="0">
-                <a:solidFill>
-                  <a:srgbClr val="59636E"/>
-                </a:solidFill>
-                <a:latin typeface="Arial" pitchFamily="34" charset="0"/>
-                <a:ea typeface="Arial" pitchFamily="34" charset="-122"/>
-                <a:cs typeface="Arial" pitchFamily="34" charset="-120"/>
-              </a:rPr>
-              <a:t>+</a:t>
-            </a:r>
-            <a:pPr algn="l" indent="0" marL="0">
-              <a:lnSpc>
-                <a:spcPts val="1560"/>
-              </a:lnSpc>
-              <a:buNone/>
-            </a:pPr>
-            <a:r>
-              <a:rPr lang="en-US" sz="1350" dirty="0">
-                <a:solidFill>
-                  <a:srgbClr val="59636E"/>
-                </a:solidFill>
-                <a:latin typeface="Arial" pitchFamily="34" charset="0"/>
-                <a:ea typeface="Arial" pitchFamily="34" charset="-122"/>
-                <a:cs typeface="Arial" pitchFamily="34" charset="-120"/>
-              </a:rPr>
-              <a:t> &gt; </a:t>
-            </a:r>
-            <a:pPr algn="l" indent="0" marL="0">
-              <a:lnSpc>
-                <a:spcPts val="1560"/>
-              </a:lnSpc>
-              <a:buNone/>
-            </a:pPr>
-            <a:r>
-              <a:rPr lang="en-US" sz="1350" b="1" dirty="0">
-                <a:solidFill>
-                  <a:srgbClr val="59636E"/>
-                </a:solidFill>
-                <a:latin typeface="Arial" pitchFamily="34" charset="0"/>
-                <a:ea typeface="Arial" pitchFamily="34" charset="-122"/>
-                <a:cs typeface="Arial" pitchFamily="34" charset="-120"/>
-              </a:rPr>
-              <a:t>Canvas</a:t>
-            </a:r>
-            <a:pPr algn="l" indent="0" marL="0">
-              <a:lnSpc>
-                <a:spcPts val="1560"/>
-              </a:lnSpc>
-              <a:buNone/>
-            </a:pPr>
-            <a:r>
-              <a:rPr lang="en-US" sz="1350" dirty="0">
-                <a:solidFill>
-                  <a:srgbClr val="59636E"/>
-                </a:solidFill>
-                <a:latin typeface="Arial" pitchFamily="34" charset="0"/>
-                <a:ea typeface="Arial" pitchFamily="34" charset="-122"/>
-                <a:cs typeface="Arial" pitchFamily="34" charset="-120"/>
-              </a:rPr>
-              <a:t>.</a:t>
-            </a:r>
-            <a:endParaRPr lang="en-US" sz="1350" dirty="0"/>
-          </a:p>
-        </p:txBody>
-      </p:sp>
-    </p:spTree>
-  </p:cSld>
-  <p:clrMapOvr>
-    <a:masterClrMapping/>
-  </p:clrMapOvr>
-</p:sld>
+<ns0:sld xmlns:ns0="http://schemas.openxmlformats.org/presentationml/2006/main" xmlns:ns1="http://schemas.openxmlformats.org/drawingml/2006/main" xmlns:ns2="http://schemas.microsoft.com/office/drawing/2017/decorative" xmlns:ns3="http://schemas.openxmlformats.org/officeDocument/2006/relationships">
+  <ns0:cSld name="Slide 7">
+    <ns0:bg>
+      <ns0:bgPr>
+        <ns1:solidFill>
+          <ns1:srgbClr val="FFFFFF"/>
+        </ns1:solidFill>
+      </ns0:bgPr>
+    </ns0:bg>
+    <ns0:spTree>
+      <ns0:nvGrpSpPr>
+        <ns0:cNvPr id="1" name=""/>
+        <ns0:cNvGrpSpPr/>
+        <ns0:nvPr/>
+      </ns0:nvGrpSpPr>
+      <ns0:grpSpPr>
+        <ns1:xfrm>
+          <ns1:off x="0" y="0"/>
+          <ns1:ext cx="0" cy="0"/>
+          <ns1:chOff x="0" y="0"/>
+          <ns1:chExt cx="0" cy="0"/>
+        </ns1:xfrm>
+      </ns0:grpSpPr>
+      <ns0:pic>
+        <ns0:nvPicPr>
+          <ns0:cNvPr id="2" name="Image 0" descr="">
+            <ns1:extLst>
+              <ns1:ext uri="{C183D7F6-B498-43B3-948B-1728B52AA6E4}">
+                <ns2:decorative val="1"/>
+              </ns1:ext>
+            </ns1:extLst>
+          </ns0:cNvPr>
+          <ns0:cNvPicPr>
+            <ns1:picLocks noChangeAspect="1"/>
+          </ns0:cNvPicPr>
+          <ns0:nvPr/>
+        </ns0:nvPicPr>
+        <ns0:blipFill>
+          <ns1:blip ns3:embed="rId1"/>
+          <ns1:stretch>
+            <ns1:fillRect/>
+          </ns1:stretch>
+        </ns0:blipFill>
+        <ns0:spPr>
+          <ns1:xfrm>
+            <ns1:off x="6349901" y="0"/>
+            <ns1:ext cx="2793950" cy="1308050"/>
+          </ns1:xfrm>
+          <ns1:prstGeom prst="rect">
+            <ns1:avLst/>
+          </ns1:prstGeom>
+        </ns0:spPr>
+      </ns0:pic>
+      <ns0:sp>
+        <ns0:nvSpPr>
+          <ns0:cNvPr id="3" name="Text 0"/>
+          <ns0:cNvSpPr/>
+          <ns0:nvPr/>
+        </ns0:nvSpPr>
+        <ns0:spPr>
+          <ns1:xfrm>
+            <ns1:off x="7340501" y="177701"/>
+            <ns1:ext cx="1168301" cy="279350"/>
+          </ns1:xfrm>
+          <ns1:prstGeom prst="roundRect">
+            <ns1:avLst>
+              <ns1:gd name="adj" fmla="val 22731"/>
+            </ns1:avLst>
+          </ns1:prstGeom>
+          <ns1:solidFill>
+            <ns1:srgbClr val="1A7F37"/>
+          </ns1:solidFill>
+          <ns1:ln/>
+        </ns0:spPr>
+        <ns0:txBody>
+          <ns1:bodyPr wrap="square" rtlCol="0" anchor="ctr"/>
+          <ns1:lstStyle/>
+          <ns1:p>
+            <ns1:pPr indent="0" marL="0">
+              <ns1:buNone/>
+            </ns1:pPr>
+            <ns1:endParaRPr lang="en-US" dirty="0"/>
+          </ns1:p>
+        </ns0:txBody>
+      </ns0:sp>
+      <ns0:sp>
+        <ns0:nvSpPr>
+          <ns0:cNvPr id="4" name="Text 1"/>
+          <ns0:cNvSpPr/>
+          <ns0:nvPr/>
+        </ns0:nvSpPr>
+        <ns0:spPr>
+          <ns1:xfrm>
+            <ns1:off x="7461041" y="231577"/>
+            <ns1:ext cx="927071" cy="171450"/>
+          </ns1:xfrm>
+          <ns1:prstGeom prst="rect">
+            <ns1:avLst/>
+          </ns1:prstGeom>
+          <ns1:noFill/>
+          <ns1:ln/>
+        </ns0:spPr>
+        <ns0:txBody>
+          <ns1:bodyPr wrap="square" lIns="0" tIns="0" rIns="0" bIns="0" rtlCol="0" anchor="t"/>
+          <ns1:lstStyle/>
+          <ns1:p>
+            <ns1:pPr algn="ctr" indent="0" marL="0">
+              <ns1:buNone/>
+            </ns1:pPr>
+            <ns1:r>
+              <ns1:rPr lang="en-US" sz="1150" b="1" dirty="0">
+                <ns1:solidFill>
+                  <ns1:srgbClr val="FFFFFF"/>
+                </ns1:solidFill>
+                <ns1:latin typeface="Arial" pitchFamily="34" charset="0"/>
+                <ns1:ea typeface="Arial" pitchFamily="34" charset="-122"/>
+                <ns1:cs typeface="Arial" pitchFamily="34" charset="-120"/>
+              </ns1:rPr>
+              <ns1:t>CHAPTER 06</ns1:t>
+            </ns1:r>
+            <ns1:endParaRPr lang="en-US" sz="1150" dirty="0"/>
+          </ns1:p>
+        </ns0:txBody>
+      </ns0:sp>
+      <ns0:pic>
+        <ns0:nvPicPr>
+          <ns0:cNvPr id="5" name="Image 1" descr="Open this chapter on GitHub">
+            <ns1:hlinkClick ns3:id="rId3" tooltip="https://github.com/github/copilot-app-for-beginners/tree/main/06-canvases"/>
+          </ns0:cNvPr>
+          <ns0:cNvPicPr>
+            <ns1:picLocks noChangeAspect="1"/>
+          </ns0:cNvPicPr>
+          <ns0:nvPr/>
+        </ns0:nvPicPr>
+        <ns0:blipFill>
+          <ns1:blip ns3:embed="rId2"/>
+          <ns1:stretch>
+            <ns1:fillRect/>
+          </ns1:stretch>
+        </ns0:blipFill>
+        <ns0:spPr>
+          <ns1:xfrm>
+            <ns1:off x="8610600" y="165050"/>
+            <ns1:ext cx="304800" cy="304800"/>
+          </ns1:xfrm>
+          <ns1:prstGeom prst="rect">
+            <ns1:avLst/>
+          </ns1:prstGeom>
+        </ns0:spPr>
+      </ns0:pic>
+      <ns0:sp>
+        <ns0:nvSpPr>
+          <ns0:cNvPr id="6" name="Text 2"/>
+          <ns0:cNvSpPr/>
+          <ns0:nvPr/>
+        </ns0:nvSpPr>
+        <ns0:spPr>
+          <ns1:xfrm>
+            <ns1:off x="507950" y="381000"/>
+            <ns1:ext cx="8161020" cy="190500"/>
+          </ns1:xfrm>
+          <ns1:prstGeom prst="rect">
+            <ns1:avLst/>
+          </ns1:prstGeom>
+          <ns1:noFill/>
+          <ns1:ln/>
+        </ns0:spPr>
+        <ns0:txBody>
+          <ns1:bodyPr wrap="square" lIns="0" tIns="0" rIns="0" bIns="0" rtlCol="0" anchor="t"/>
+          <ns1:lstStyle/>
+          <ns1:p>
+            <ns1:pPr algn="l" indent="0" marL="0">
+              <ns1:buNone/>
+            </ns1:pPr>
+            <ns1:r>
+              <ns1:rPr lang="en-US" sz="1250" b="1" dirty="0">
+                <ns1:solidFill>
+                  <ns1:srgbClr val="8250DF"/>
+                </ns1:solidFill>
+                <ns1:latin typeface="Arial" pitchFamily="34" charset="0"/>
+                <ns1:ea typeface="Arial" pitchFamily="34" charset="-122"/>
+                <ns1:cs typeface="Arial" pitchFamily="34" charset="-120"/>
+              </ns1:rPr>
+              <ns1:t>EXERCISE 1</ns1:t>
+            </ns1:r>
+            <ns1:endParaRPr lang="en-US" sz="1250" dirty="0"/>
+          </ns1:p>
+        </ns0:txBody>
+      </ns0:sp>
+      <ns0:sp>
+        <ns0:nvSpPr>
+          <ns0:cNvPr id="7" name="Text 3"/>
+          <ns0:cNvSpPr/>
+          <ns0:nvPr/>
+        </ns0:nvSpPr>
+        <ns0:spPr>
+          <ns1:xfrm>
+            <ns1:off x="507950" y="622250"/>
+            <ns1:ext cx="8161020" cy="419100"/>
+          </ns1:xfrm>
+          <ns1:prstGeom prst="rect">
+            <ns1:avLst/>
+          </ns1:prstGeom>
+          <ns1:noFill/>
+          <ns1:ln/>
+        </ns0:spPr>
+        <ns0:txBody>
+          <ns1:bodyPr wrap="square" lIns="0" tIns="0" rIns="0" bIns="0" rtlCol="0" anchor="t"/>
+          <ns1:lstStyle/>
+          <ns1:p>
+            <ns1:pPr algn="l" indent="0" marL="0">
+              <ns1:lnSpc>
+                <ns1:spcPts val="3300"/>
+              </ns1:lnSpc>
+              <ns1:spcBef>
+                <ns1:spcPts val="400"/>
+              </ns1:spcBef>
+              <ns1:buNone/>
+            </ns1:pPr>
+            <ns1:r>
+              <ns1:rPr lang="en-US" sz="2800" b="1" dirty="0">
+                <ns1:solidFill>
+                  <ns1:srgbClr val="1F2328"/>
+                </ns1:solidFill>
+                <ns1:latin typeface="Arial" pitchFamily="34" charset="0"/>
+                <ns1:ea typeface="Arial" pitchFamily="34" charset="-122"/>
+                <ns1:cs typeface="Arial" pitchFamily="34" charset="-120"/>
+              </ns1:rPr>
+              <ns1:t>Try a community canvas</ns1:t>
+            </ns1:r>
+            <ns1:endParaRPr lang="en-US" sz="2800" dirty="0"/>
+          </ns1:p>
+        </ns0:txBody>
+      </ns0:sp>
+      <ns0:sp>
+        <ns0:nvSpPr>
+          <ns0:cNvPr id="8" name="Text 4"/>
+          <ns0:cNvSpPr/>
+          <ns0:nvPr/>
+        </ns0:nvSpPr>
+        <ns0:spPr>
+          <ns1:xfrm>
+            <ns1:off x="507950" y="1104751"/>
+            <ns1:ext cx="8161020" cy="254050"/>
+          </ns1:xfrm>
+          <ns1:prstGeom prst="rect">
+            <ns1:avLst/>
+          </ns1:prstGeom>
+          <ns1:noFill/>
+          <ns1:ln/>
+        </ns0:spPr>
+        <ns0:txBody>
+          <ns1:bodyPr wrap="square" lIns="0" tIns="0" rIns="0" bIns="0" rtlCol="0" anchor="t"/>
+          <ns1:lstStyle/>
+          <ns1:p>
+            <ns1:pPr algn="l" indent="0" marL="0">
+              <ns1:lnSpc>
+                <ns1:spcPts val="2000"/>
+              </ns1:lnSpc>
+              <ns1:spcBef>
+                <ns1:spcPts val="500"/>
+              </ns1:spcBef>
+              <ns1:buNone/>
+            </ns1:pPr>
+            <ns1:r>
+              <ns1:rPr lang="en-US" sz="1650" dirty="0">
+                <ns1:solidFill>
+                  <ns1:srgbClr val="59636E"/>
+                </ns1:solidFill>
+                <ns1:latin typeface="Arial" pitchFamily="34" charset="0"/>
+                <ns1:ea typeface="Arial" pitchFamily="34" charset="-122"/>
+                <ns1:cs typeface="Arial" pitchFamily="34" charset="-120"/>
+              </ns1:rPr>
+              <ns1:t>Repository Issues Kanban turns issues into a board.</ns1:t>
+            </ns1:r>
+            <ns1:endParaRPr lang="en-US" sz="1650" dirty="0"/>
+          </ns1:p>
+        </ns0:txBody>
+      </ns0:sp>
+      <ns0:sp>
+        <ns0:nvSpPr>
+          <ns0:cNvPr id="9" name="Text 5"/>
+          <ns0:cNvSpPr/>
+          <ns0:nvPr/>
+        </ns0:nvSpPr>
+        <ns0:spPr>
+          <ns1:xfrm>
+            <ns1:off x="511076" y="1923901"/>
+            <ns1:ext cx="4311551" cy="2298650"/>
+          </ns1:xfrm>
+          <ns1:prstGeom prst="roundRect">
+            <ns1:avLst>
+              <ns1:gd name="adj" fmla="val 3315"/>
+            </ns1:avLst>
+          </ns1:prstGeom>
+          <ns1:solidFill>
+            <ns1:srgbClr val="FFFFFF"/>
+          </ns1:solidFill>
+          <ns1:ln w="9525">
+            <ns1:solidFill>
+              <ns1:srgbClr val="D1D9E0"/>
+            </ns1:solidFill>
+          </ns1:ln>
+          <ns1:effectLst>
+            <ns1:outerShdw sx="100000" sy="100000" kx="0" ky="0" algn="bl" rotWithShape="0" blurRad="38100" dist="9525" dir="5400000">
+              <ns1:srgbClr val="1f2328">
+                <ns1:alpha val="12000"/>
+              </ns1:srgbClr>
+            </ns1:outerShdw>
+          </ns1:effectLst>
+        </ns0:spPr>
+        <ns0:txBody>
+          <ns1:bodyPr wrap="square" rtlCol="0" anchor="ctr"/>
+          <ns1:lstStyle/>
+          <ns1:p>
+            <ns1:pPr indent="0" marL="0">
+              <ns1:buNone/>
+            </ns1:pPr>
+            <ns1:endParaRPr lang="en-US" dirty="0"/>
+          </ns1:p>
+        </ns0:txBody>
+      </ns0:sp>
+      <ns0:pic>
+        <ns0:nvPicPr>
+          <ns0:cNvPr id="10" name="Image 2" descr="Repository Issues Kanban preview"/>
+          <ns0:cNvPicPr>
+            <ns1:picLocks noChangeAspect="1"/>
+          </ns0:cNvPicPr>
+          <ns0:nvPr/>
+        </ns0:nvPicPr>
+        <ns0:blipFill>
+          <ns1:blip ns3:embed="rId4"/>
+          <ns1:stretch>
+            <ns1:fillRect/>
+          </ns1:stretch>
+        </ns0:blipFill>
+        <ns0:spPr>
+          <ns1:xfrm>
+            <ns1:off x="558701" y="1971526"/>
+            <ns1:ext cx="4216301" cy="2203400"/>
+          </ns1:xfrm>
+          <ns1:prstGeom prst="rect">
+            <ns1:avLst/>
+          </ns1:prstGeom>
+        </ns0:spPr>
+      </ns0:pic>
+      <ns0:sp>
+        <ns0:nvSpPr>
+          <ns0:cNvPr id="11" name="Text 6"/>
+          <ns0:cNvSpPr/>
+          <ns0:nvPr/>
+        </ns0:nvSpPr>
+        <ns0:spPr>
+          <ns1:xfrm>
+            <ns1:off x="5079802" y="2120801"/>
+            <ns1:ext cx="279350" cy="279350"/>
+          </ns1:xfrm>
+          <ns1:prstGeom prst="roundRect">
+            <ns1:avLst>
+              <ns1:gd name="adj" fmla="val 327331"/>
+            </ns1:avLst>
+          </ns1:prstGeom>
+          <ns1:solidFill>
+            <ns1:srgbClr val="8250DF"/>
+          </ns1:solidFill>
+          <ns1:ln/>
+        </ns0:spPr>
+        <ns0:txBody>
+          <ns1:bodyPr wrap="square" rtlCol="0" anchor="ctr"/>
+          <ns1:lstStyle/>
+          <ns1:p>
+            <ns1:pPr indent="0" marL="0">
+              <ns1:buNone/>
+            </ns1:pPr>
+            <ns1:endParaRPr lang="en-US" dirty="0"/>
+          </ns1:p>
+        </ns0:txBody>
+      </ns0:sp>
+      <ns0:sp>
+        <ns0:nvSpPr>
+          <ns0:cNvPr id="12" name="Text 7"/>
+          <ns0:cNvSpPr/>
+          <ns0:nvPr/>
+        </ns0:nvSpPr>
+        <ns0:spPr>
+          <ns1:xfrm>
+            <ns1:off x="5174467" y="2165152"/>
+            <ns1:ext cx="90020" cy="190500"/>
+          </ns1:xfrm>
+          <ns1:prstGeom prst="rect">
+            <ns1:avLst/>
+          </ns1:prstGeom>
+          <ns1:noFill/>
+          <ns1:ln/>
+        </ns0:spPr>
+        <ns0:txBody>
+          <ns1:bodyPr wrap="square" lIns="0" tIns="0" rIns="0" bIns="0" rtlCol="0" anchor="t"/>
+          <ns1:lstStyle/>
+          <ns1:p>
+            <ns1:pPr algn="ctr" indent="0" marL="0">
+              <ns1:buNone/>
+            </ns1:pPr>
+            <ns1:r>
+              <ns1:rPr lang="en-US" sz="1250" b="1" dirty="0">
+                <ns1:solidFill>
+                  <ns1:srgbClr val="FFFFFF"/>
+                </ns1:solidFill>
+                <ns1:latin typeface="Arial" pitchFamily="34" charset="0"/>
+                <ns1:ea typeface="Arial" pitchFamily="34" charset="-122"/>
+                <ns1:cs typeface="Arial" pitchFamily="34" charset="-120"/>
+              </ns1:rPr>
+              <ns1:t>1</ns1:t>
+            </ns1:r>
+            <ns1:endParaRPr lang="en-US" sz="1250" dirty="0"/>
+          </ns1:p>
+        </ns0:txBody>
+      </ns0:sp>
+      <ns0:sp>
+        <ns0:nvSpPr>
+          <ns0:cNvPr id="13" name="Text 8"/>
+          <ns0:cNvSpPr/>
+          <ns0:nvPr/>
+        </ns0:nvSpPr>
+        <ns0:spPr>
+          <ns1:xfrm>
+            <ns1:off x="5511552" y="2120801"/>
+            <ns1:ext cx="2701516" cy="222200"/>
+          </ns1:xfrm>
+          <ns1:prstGeom prst="rect">
+            <ns1:avLst/>
+          </ns1:prstGeom>
+          <ns1:noFill/>
+          <ns1:ln/>
+        </ns0:spPr>
+        <ns0:txBody>
+          <ns1:bodyPr wrap="square" lIns="0" tIns="0" rIns="0" bIns="0" rtlCol="0" anchor="t"/>
+          <ns1:lstStyle/>
+          <ns1:p>
+            <ns1:pPr algn="l" indent="0" marL="0">
+              <ns1:lnSpc>
+                <ns1:spcPts val="1750"/>
+              </ns1:lnSpc>
+              <ns1:buNone/>
+            </ns1:pPr>
+            <ns1:r>
+              <ns1:rPr lang="en-US" sz="1550" b="1" dirty="0">
+                <ns1:solidFill>
+                  <ns1:srgbClr val="1F2328"/>
+                </ns1:solidFill>
+                <ns1:latin typeface="Arial" pitchFamily="34" charset="0"/>
+                <ns1:ea typeface="Arial" pitchFamily="34" charset="-122"/>
+                <ns1:cs typeface="Arial" pitchFamily="34" charset="-120"/>
+              </ns1:rPr>
+              <ns1:t>Install it</ns1:t>
+            </ns1:r>
+            <ns1:endParaRPr lang="en-US" sz="1550" dirty="0"/>
+          </ns1:p>
+        </ns0:txBody>
+      </ns0:sp>
+      <ns0:sp>
+        <ns0:nvSpPr>
+          <ns0:cNvPr id="14" name="Text 9"/>
+          <ns0:cNvSpPr/>
+          <ns0:nvPr/>
+        </ns0:nvSpPr>
+        <ns0:spPr>
+          <ns1:xfrm>
+            <ns1:off x="5511552" y="2368302"/>
+            <ns1:ext cx="2701516" cy="198090"/>
+          </ns1:xfrm>
+          <ns1:prstGeom prst="rect">
+            <ns1:avLst/>
+          </ns1:prstGeom>
+          <ns1:noFill/>
+          <ns1:ln/>
+        </ns0:spPr>
+        <ns0:txBody>
+          <ns1:bodyPr wrap="square" lIns="0" tIns="0" rIns="0" bIns="0" rtlCol="0" anchor="t"/>
+          <ns1:lstStyle/>
+          <ns1:p>
+            <ns1:pPr algn="l" indent="0" marL="0">
+              <ns1:lnSpc>
+                <ns1:spcPts val="1560"/>
+              </ns1:lnSpc>
+              <ns1:buNone/>
+            </ns1:pPr>
+            <ns1:r>
+              <ns1:rPr lang="en-US" sz="1350" b="1" dirty="0">
+                <ns1:solidFill>
+                  <ns1:srgbClr val="59636E"/>
+                </ns1:solidFill>
+                <ns1:latin typeface="Arial" pitchFamily="34" charset="0"/>
+                <ns1:ea typeface="Arial" pitchFamily="34" charset="-122"/>
+                <ns1:cs typeface="Arial" pitchFamily="34" charset="-120"/>
+              </ns1:rPr>
+              <ns1:t>Open in Copilot app, then Install.</ns1:t>
+            </ns1:r>
+            <ns1:pPr algn="l" indent="0" marL="0">
+              <ns1:lnSpc>
+                <ns1:spcPts val="1560"/>
+              </ns1:lnSpc>
+              <ns1:buNone/>
+            </ns1:pPr>
+            <ns1:r>
+              <ns1:rPr lang="en-US" sz="1350" dirty="0">
+                <ns1:solidFill>
+                  <ns1:srgbClr val="59636E"/>
+                </ns1:solidFill>
+                <ns1:latin typeface="Arial" pitchFamily="34" charset="0"/>
+                <ns1:ea typeface="Arial" pitchFamily="34" charset="-122"/>
+                <ns1:cs typeface="Arial" pitchFamily="34" charset="-120"/>
+              </ns1:rPr>
+              <ns1:t/>
+            </ns1:r>
+            <ns1:pPr algn="l" indent="0" marL="0">
+              <ns1:lnSpc>
+                <ns1:spcPts val="1560"/>
+              </ns1:lnSpc>
+              <ns1:buNone/>
+            </ns1:pPr>
+            <ns1:r>
+              <ns1:rPr lang="en-US" sz="1350" b="1" dirty="0">
+                <ns1:solidFill>
+                  <ns1:srgbClr val="59636E"/>
+                </ns1:solidFill>
+                <ns1:latin typeface="Arial" pitchFamily="34" charset="0"/>
+                <ns1:ea typeface="Arial" pitchFamily="34" charset="-122"/>
+                <ns1:cs typeface="Arial" pitchFamily="34" charset="-120"/>
+              </ns1:rPr>
+              <ns1:t/>
+            </ns1:r>
+            <ns1:pPr algn="l" indent="0" marL="0">
+              <ns1:lnSpc>
+                <ns1:spcPts val="1560"/>
+              </ns1:lnSpc>
+              <ns1:buNone/>
+            </ns1:pPr>
+            <ns1:r>
+              <ns1:rPr lang="en-US" sz="1350" dirty="0">
+                <ns1:solidFill>
+                  <ns1:srgbClr val="59636E"/>
+                </ns1:solidFill>
+                <ns1:latin typeface="Arial" pitchFamily="34" charset="0"/>
+                <ns1:ea typeface="Arial" pitchFamily="34" charset="-122"/>
+                <ns1:cs typeface="Arial" pitchFamily="34" charset="-120"/>
+              </ns1:rPr>
+              <ns1:t/>
+            </ns1:r>
+            <ns1:endParaRPr lang="en-US" sz="1350" dirty="0"/>
+          </ns1:p>
+        </ns0:txBody>
+      </ns0:sp>
+      <ns0:sp>
+        <ns0:nvSpPr>
+          <ns0:cNvPr id="15" name="Text 10"/>
+          <ns0:cNvSpPr/>
+          <ns0:nvPr/>
+        </ns0:nvSpPr>
+        <ns0:spPr>
+          <ns1:xfrm>
+            <ns1:off x="5079802" y="2845743"/>
+            <ns1:ext cx="279350" cy="279350"/>
+          </ns1:xfrm>
+          <ns1:prstGeom prst="roundRect">
+            <ns1:avLst>
+              <ns1:gd name="adj" fmla="val 327331"/>
+            </ns1:avLst>
+          </ns1:prstGeom>
+          <ns1:solidFill>
+            <ns1:srgbClr val="8250DF"/>
+          </ns1:solidFill>
+          <ns1:ln/>
+        </ns0:spPr>
+        <ns0:txBody>
+          <ns1:bodyPr wrap="square" rtlCol="0" anchor="ctr"/>
+          <ns1:lstStyle/>
+          <ns1:p>
+            <ns1:pPr indent="0" marL="0">
+              <ns1:buNone/>
+            </ns1:pPr>
+            <ns1:endParaRPr lang="en-US" dirty="0"/>
+          </ns1:p>
+        </ns0:txBody>
+      </ns0:sp>
+      <ns0:sp>
+        <ns0:nvSpPr>
+          <ns0:cNvPr id="16" name="Text 11"/>
+          <ns0:cNvSpPr/>
+          <ns0:nvPr/>
+        </ns0:nvSpPr>
+        <ns0:spPr>
+          <ns1:xfrm>
+            <ns1:off x="5174467" y="2890093"/>
+            <ns1:ext cx="90020" cy="190500"/>
+          </ns1:xfrm>
+          <ns1:prstGeom prst="rect">
+            <ns1:avLst/>
+          </ns1:prstGeom>
+          <ns1:noFill/>
+          <ns1:ln/>
+        </ns0:spPr>
+        <ns0:txBody>
+          <ns1:bodyPr wrap="square" lIns="0" tIns="0" rIns="0" bIns="0" rtlCol="0" anchor="t"/>
+          <ns1:lstStyle/>
+          <ns1:p>
+            <ns1:pPr algn="ctr" indent="0" marL="0">
+              <ns1:buNone/>
+            </ns1:pPr>
+            <ns1:r>
+              <ns1:rPr lang="en-US" sz="1250" b="1" dirty="0">
+                <ns1:solidFill>
+                  <ns1:srgbClr val="FFFFFF"/>
+                </ns1:solidFill>
+                <ns1:latin typeface="Arial" pitchFamily="34" charset="0"/>
+                <ns1:ea typeface="Arial" pitchFamily="34" charset="-122"/>
+                <ns1:cs typeface="Arial" pitchFamily="34" charset="-120"/>
+              </ns1:rPr>
+              <ns1:t>2</ns1:t>
+            </ns1:r>
+            <ns1:endParaRPr lang="en-US" sz="1250" dirty="0"/>
+          </ns1:p>
+        </ns0:txBody>
+      </ns0:sp>
+      <ns0:sp>
+        <ns0:nvSpPr>
+          <ns0:cNvPr id="17" name="Text 12"/>
+          <ns0:cNvSpPr/>
+          <ns0:nvPr/>
+        </ns0:nvSpPr>
+        <ns0:spPr>
+          <ns1:xfrm>
+            <ns1:off x="5511552" y="2845743"/>
+            <ns1:ext cx="3129454" cy="222200"/>
+          </ns1:xfrm>
+          <ns1:prstGeom prst="rect">
+            <ns1:avLst/>
+          </ns1:prstGeom>
+          <ns1:noFill/>
+          <ns1:ln/>
+        </ns0:spPr>
+        <ns0:txBody>
+          <ns1:bodyPr wrap="square" lIns="0" tIns="0" rIns="0" bIns="0" rtlCol="0" anchor="t"/>
+          <ns1:lstStyle/>
+          <ns1:p>
+            <ns1:pPr algn="l" indent="0" marL="0">
+              <ns1:lnSpc>
+                <ns1:spcPts val="1750"/>
+              </ns1:lnSpc>
+              <ns1:buNone/>
+            </ns1:pPr>
+            <ns1:r>
+              <ns1:rPr lang="en-US" sz="1550" b="1" dirty="0">
+                <ns1:solidFill>
+                  <ns1:srgbClr val="1F2328"/>
+                </ns1:solidFill>
+                <ns1:latin typeface="Arial" pitchFamily="34" charset="0"/>
+                <ns1:ea typeface="Arial" pitchFamily="34" charset="-122"/>
+                <ns1:cs typeface="Arial" pitchFamily="34" charset="-120"/>
+              </ns1:rPr>
+              <ns1:t>Reload extensions</ns1:t>
+            </ns1:r>
+            <ns1:endParaRPr lang="en-US" sz="1550" dirty="0"/>
+          </ns1:p>
+        </ns0:txBody>
+      </ns0:sp>
+      <ns0:sp>
+        <ns0:nvSpPr>
+          <ns0:cNvPr id="18" name="Text 13"/>
+          <ns0:cNvSpPr/>
+          <ns0:nvPr/>
+        </ns0:nvSpPr>
+        <ns0:spPr>
+          <ns1:xfrm>
+            <ns1:off x="5511552" y="3093244"/>
+            <ns1:ext cx="3129454" cy="207615"/>
+          </ns1:xfrm>
+          <ns1:prstGeom prst="rect">
+            <ns1:avLst/>
+          </ns1:prstGeom>
+          <ns1:noFill/>
+          <ns1:ln/>
+        </ns0:spPr>
+        <ns0:txBody>
+          <ns1:bodyPr wrap="square" lIns="0" tIns="0" rIns="0" bIns="0" rtlCol="0" anchor="t"/>
+          <ns1:lstStyle/>
+          <ns1:p>
+            <ns1:pPr algn="l" indent="0" marL="0">
+              <ns1:lnSpc>
+                <ns1:spcPts val="1560"/>
+              </ns1:lnSpc>
+              <ns1:buNone/>
+            </ns1:pPr>
+            <ns1:r>
+              <ns1:rPr lang="en-US" sz="1350" dirty="0">
+                <ns1:solidFill>
+                  <ns1:srgbClr val="59636E"/>
+                </ns1:solidFill>
+                <ns1:latin typeface="Arial" pitchFamily="34" charset="0"/>
+                <ns1:ea typeface="Arial" pitchFamily="34" charset="-122"/>
+                <ns1:cs typeface="Arial" pitchFamily="34" charset="-120"/>
+              </ns1:rPr>
+              <ns1:t>Ask the session to restart canvas extensions.</ns1:t>
+            </ns1:r>
+            <ns1:pPr algn="l" indent="0" marL="0">
+              <ns1:lnSpc>
+                <ns1:spcPts val="1560"/>
+              </ns1:lnSpc>
+              <ns1:buNone/>
+            </ns1:pPr>
+            <ns1:r>
+              <ns1:rPr lang="en-US" sz="1350" b="1" dirty="0">
+                <ns1:solidFill>
+                  <ns1:srgbClr val="0550AE"/>
+                </ns1:solidFill>
+                <ns1:latin typeface="Courier New" pitchFamily="34" charset="0"/>
+                <ns1:ea typeface="Courier New" pitchFamily="34" charset="-122"/>
+                <ns1:cs typeface="Courier New" pitchFamily="34" charset="-120"/>
+              </ns1:rPr>
+              <ns1:t/>
+            </ns1:r>
+            <ns1:pPr algn="l" indent="0" marL="0">
+              <ns1:lnSpc>
+                <ns1:spcPts val="1560"/>
+              </ns1:lnSpc>
+              <ns1:buNone/>
+            </ns1:pPr>
+            <ns1:r>
+              <ns1:rPr lang="en-US" sz="1350" dirty="0">
+                <ns1:solidFill>
+                  <ns1:srgbClr val="59636E"/>
+                </ns1:solidFill>
+                <ns1:latin typeface="Arial" pitchFamily="34" charset="0"/>
+                <ns1:ea typeface="Arial" pitchFamily="34" charset="-122"/>
+                <ns1:cs typeface="Arial" pitchFamily="34" charset="-120"/>
+              </ns1:rPr>
+              <ns1:t/>
+            </ns1:r>
+            <ns1:endParaRPr lang="en-US" sz="1350" dirty="0"/>
+          </ns1:p>
+        </ns0:txBody>
+      </ns0:sp>
+      <ns0:sp>
+        <ns0:nvSpPr>
+          <ns0:cNvPr id="19" name="Text 14"/>
+          <ns0:cNvSpPr/>
+          <ns0:nvPr/>
+        </ns0:nvSpPr>
+        <ns0:spPr>
+          <ns1:xfrm>
+            <ns1:off x="5079802" y="3580209"/>
+            <ns1:ext cx="279350" cy="279350"/>
+          </ns1:xfrm>
+          <ns1:prstGeom prst="roundRect">
+            <ns1:avLst>
+              <ns1:gd name="adj" fmla="val 327331"/>
+            </ns1:avLst>
+          </ns1:prstGeom>
+          <ns1:solidFill>
+            <ns1:srgbClr val="8250DF"/>
+          </ns1:solidFill>
+          <ns1:ln/>
+        </ns0:spPr>
+        <ns0:txBody>
+          <ns1:bodyPr wrap="square" rtlCol="0" anchor="ctr"/>
+          <ns1:lstStyle/>
+          <ns1:p>
+            <ns1:pPr indent="0" marL="0">
+              <ns1:buNone/>
+            </ns1:pPr>
+            <ns1:endParaRPr lang="en-US" dirty="0"/>
+          </ns1:p>
+        </ns0:txBody>
+      </ns0:sp>
+      <ns0:sp>
+        <ns0:nvSpPr>
+          <ns0:cNvPr id="20" name="Text 15"/>
+          <ns0:cNvSpPr/>
+          <ns0:nvPr/>
+        </ns0:nvSpPr>
+        <ns0:spPr>
+          <ns1:xfrm>
+            <ns1:off x="5174467" y="3624560"/>
+            <ns1:ext cx="90020" cy="190500"/>
+          </ns1:xfrm>
+          <ns1:prstGeom prst="rect">
+            <ns1:avLst/>
+          </ns1:prstGeom>
+          <ns1:noFill/>
+          <ns1:ln/>
+        </ns0:spPr>
+        <ns0:txBody>
+          <ns1:bodyPr wrap="square" lIns="0" tIns="0" rIns="0" bIns="0" rtlCol="0" anchor="t"/>
+          <ns1:lstStyle/>
+          <ns1:p>
+            <ns1:pPr algn="ctr" indent="0" marL="0">
+              <ns1:buNone/>
+            </ns1:pPr>
+            <ns1:r>
+              <ns1:rPr lang="en-US" sz="1250" b="1" dirty="0">
+                <ns1:solidFill>
+                  <ns1:srgbClr val="FFFFFF"/>
+                </ns1:solidFill>
+                <ns1:latin typeface="Arial" pitchFamily="34" charset="0"/>
+                <ns1:ea typeface="Arial" pitchFamily="34" charset="-122"/>
+                <ns1:cs typeface="Arial" pitchFamily="34" charset="-120"/>
+              </ns1:rPr>
+              <ns1:t>3</ns1:t>
+            </ns1:r>
+            <ns1:endParaRPr lang="en-US" sz="1250" dirty="0"/>
+          </ns1:p>
+        </ns0:txBody>
+      </ns0:sp>
+      <ns0:sp>
+        <ns0:nvSpPr>
+          <ns0:cNvPr id="21" name="Text 16"/>
+          <ns0:cNvSpPr/>
+          <ns0:nvPr/>
+        </ns0:nvSpPr>
+        <ns0:spPr>
+          <ns1:xfrm>
+            <ns1:off x="5511552" y="3580209"/>
+            <ns1:ext cx="2453771" cy="222200"/>
+          </ns1:xfrm>
+          <ns1:prstGeom prst="rect">
+            <ns1:avLst/>
+          </ns1:prstGeom>
+          <ns1:noFill/>
+          <ns1:ln/>
+        </ns0:spPr>
+        <ns0:txBody>
+          <ns1:bodyPr wrap="square" lIns="0" tIns="0" rIns="0" bIns="0" rtlCol="0" anchor="t"/>
+          <ns1:lstStyle/>
+          <ns1:p>
+            <ns1:pPr algn="l" indent="0" marL="0">
+              <ns1:lnSpc>
+                <ns1:spcPts val="1750"/>
+              </ns1:lnSpc>
+              <ns1:buNone/>
+            </ns1:pPr>
+            <ns1:r>
+              <ns1:rPr lang="en-US" sz="1550" b="1" dirty="0">
+                <ns1:solidFill>
+                  <ns1:srgbClr val="1F2328"/>
+                </ns1:solidFill>
+                <ns1:latin typeface="Arial" pitchFamily="34" charset="0"/>
+                <ns1:ea typeface="Arial" pitchFamily="34" charset="-122"/>
+                <ns1:cs typeface="Arial" pitchFamily="34" charset="-120"/>
+              </ns1:rPr>
+              <ns1:t>Open it and drag an issue</ns1:t>
+            </ns1:r>
+            <ns1:endParaRPr lang="en-US" sz="1550" dirty="0"/>
+          </ns1:p>
+        </ns0:txBody>
+      </ns0:sp>
+      <ns0:sp>
+        <ns0:nvSpPr>
+          <ns0:cNvPr id="22" name="Text 17"/>
+          <ns0:cNvSpPr/>
+          <ns0:nvPr/>
+        </ns0:nvSpPr>
+        <ns0:spPr>
+          <ns1:xfrm>
+            <ns1:off x="5511552" y="3827711"/>
+            <ns1:ext cx="2453771" cy="198090"/>
+          </ns1:xfrm>
+          <ns1:prstGeom prst="rect">
+            <ns1:avLst/>
+          </ns1:prstGeom>
+          <ns1:noFill/>
+          <ns1:ln/>
+        </ns0:spPr>
+        <ns0:txBody>
+          <ns1:bodyPr wrap="square" lIns="0" tIns="0" rIns="0" bIns="0" rtlCol="0" anchor="t"/>
+          <ns1:lstStyle/>
+          <ns1:p>
+            <ns1:pPr algn="l" indent="0" marL="0">
+              <ns1:lnSpc>
+                <ns1:spcPts val="1560"/>
+              </ns1:lnSpc>
+              <ns1:buNone/>
+            </ns1:pPr>
+            <ns1:r>
+              <ns1:rPr lang="en-US" sz="1350" dirty="0">
+                <ns1:solidFill>
+                  <ns1:srgbClr val="59636E"/>
+                </ns1:solidFill>
+                <ns1:latin typeface="Arial" pitchFamily="34" charset="0"/>
+                <ns1:ea typeface="Arial" pitchFamily="34" charset="-122"/>
+                <ns1:cs typeface="Arial" pitchFamily="34" charset="-120"/>
+              </ns1:rPr>
+              <ns1:t>Open it from Add tab &gt; Canvas.</ns1:t>
+            </ns1:r>
+            <ns1:pPr algn="l" indent="0" marL="0">
+              <ns1:lnSpc>
+                <ns1:spcPts val="1560"/>
+              </ns1:lnSpc>
+              <ns1:buNone/>
+            </ns1:pPr>
+            <ns1:r>
+              <ns1:rPr lang="en-US" sz="1350" b="1" dirty="0">
+                <ns1:solidFill>
+                  <ns1:srgbClr val="59636E"/>
+                </ns1:solidFill>
+                <ns1:latin typeface="Arial" pitchFamily="34" charset="0"/>
+                <ns1:ea typeface="Arial" pitchFamily="34" charset="-122"/>
+                <ns1:cs typeface="Arial" pitchFamily="34" charset="-120"/>
+              </ns1:rPr>
+              <ns1:t/>
+            </ns1:r>
+            <ns1:pPr algn="l" indent="0" marL="0">
+              <ns1:lnSpc>
+                <ns1:spcPts val="1560"/>
+              </ns1:lnSpc>
+              <ns1:buNone/>
+            </ns1:pPr>
+            <ns1:r>
+              <ns1:rPr lang="en-US" sz="1350" dirty="0">
+                <ns1:solidFill>
+                  <ns1:srgbClr val="59636E"/>
+                </ns1:solidFill>
+                <ns1:latin typeface="Arial" pitchFamily="34" charset="0"/>
+                <ns1:ea typeface="Arial" pitchFamily="34" charset="-122"/>
+                <ns1:cs typeface="Arial" pitchFamily="34" charset="-120"/>
+              </ns1:rPr>
+              <ns1:t/>
+            </ns1:r>
+            <ns1:pPr algn="l" indent="0" marL="0">
+              <ns1:lnSpc>
+                <ns1:spcPts val="1560"/>
+              </ns1:lnSpc>
+              <ns1:buNone/>
+            </ns1:pPr>
+            <ns1:r>
+              <ns1:rPr lang="en-US" sz="1350" b="1" dirty="0">
+                <ns1:solidFill>
+                  <ns1:srgbClr val="59636E"/>
+                </ns1:solidFill>
+                <ns1:latin typeface="Arial" pitchFamily="34" charset="0"/>
+                <ns1:ea typeface="Arial" pitchFamily="34" charset="-122"/>
+                <ns1:cs typeface="Arial" pitchFamily="34" charset="-120"/>
+              </ns1:rPr>
+              <ns1:t/>
+            </ns1:r>
+            <ns1:pPr algn="l" indent="0" marL="0">
+              <ns1:lnSpc>
+                <ns1:spcPts val="1560"/>
+              </ns1:lnSpc>
+              <ns1:buNone/>
+            </ns1:pPr>
+            <ns1:r>
+              <ns1:rPr lang="en-US" sz="1350" dirty="0">
+                <ns1:solidFill>
+                  <ns1:srgbClr val="59636E"/>
+                </ns1:solidFill>
+                <ns1:latin typeface="Arial" pitchFamily="34" charset="0"/>
+                <ns1:ea typeface="Arial" pitchFamily="34" charset="-122"/>
+                <ns1:cs typeface="Arial" pitchFamily="34" charset="-120"/>
+              </ns1:rPr>
+              <ns1:t/>
+            </ns1:r>
+            <ns1:endParaRPr lang="en-US" sz="1350" dirty="0"/>
+          </ns1:p>
+        </ns0:txBody>
+      </ns0:sp>
+    </ns0:spTree>
+  </ns0:cSld>
+  <ns0:clrMapOvr>
+    <ns1:masterClrMapping/>
+  </ns0:clrMapOvr>
+</ns0:sld>
 </file>
 
 <file path=ppt/slides/slide8.xml><?xml version="1.0" encoding="utf-8"?>
@@ -13543,7 +13543,7 @@
       </p:sp>
       <p:pic>
         <p:nvPicPr>
-          <p:cNvPr id="21" name="Image 4" descr="You and the agent update the same Session Board">    </p:cNvPr>
+          <p:cNvPr id="21" name="Image 4" descr="You and the agent update the same Session Board"/>
           <p:cNvPicPr>
             <a:picLocks noChangeAspect="1"/>
           </p:cNvPicPr>

--- a/slides/06-canvases.pptx
+++ b/slides/06-canvases.pptx
@@ -4380,7 +4380,7 @@
                 <ns1:ea typeface="Arial" pitchFamily="34" charset="-122"/>
                 <ns1:cs typeface="Arial" pitchFamily="34" charset="-120"/>
               </ns1:rPr>
-              <ns1:t>Implement, then check five states</ns1:t>
+              <ns1:t>Implement, then check each state</ns1:t>
             </ns1:r>
             <ns1:endParaRPr lang="en-US" sz="2800" dirty="0"/>
           </ns1:p>
@@ -4425,7 +4425,7 @@
                 <ns1:ea typeface="Arial" pitchFamily="34" charset="-122"/>
                 <ns1:cs typeface="Arial" pitchFamily="34" charset="-120"/>
               </ns1:rPr>
-              <ns1:t>Implement, then validate. Browser limits become notes.</ns1:t>
+              <ns1:t>Unsupported browser checks become notes, not failures.</ns1:t>
             </ns1:r>
             <ns1:pPr algn="l" indent="0" marL="0">
               <ns1:lnSpc>
@@ -4436,17 +4436,6 @@
               </ns1:spcBef>
               <ns1:buNone/>
             </ns1:pPr>
-            <ns1:r>
-              <ns1:rPr lang="en-US" sz="1650" b="1" dirty="0">
-                <ns1:solidFill>
-                  <ns1:srgbClr val="59636E"/>
-                </ns1:solidFill>
-                <ns1:latin typeface="Arial" pitchFamily="34" charset="0"/>
-                <ns1:ea typeface="Arial" pitchFamily="34" charset="-122"/>
-                <ns1:cs typeface="Arial" pitchFamily="34" charset="-120"/>
-              </ns1:rPr>
-              <ns1:t/>
-            </ns1:r>
             <ns1:pPr algn="l" indent="0" marL="0">
               <ns1:lnSpc>
                 <ns1:spcPts val="2000"/>
@@ -4456,17 +4445,6 @@
               </ns1:spcBef>
               <ns1:buNone/>
             </ns1:pPr>
-            <ns1:r>
-              <ns1:rPr lang="en-US" sz="1650" dirty="0">
-                <ns1:solidFill>
-                  <ns1:srgbClr val="59636E"/>
-                </ns1:solidFill>
-                <ns1:latin typeface="Arial" pitchFamily="34" charset="0"/>
-                <ns1:ea typeface="Arial" pitchFamily="34" charset="-122"/>
-                <ns1:cs typeface="Arial" pitchFamily="34" charset="-120"/>
-              </ns1:rPr>
-              <ns1:t/>
-            </ns1:r>
             <ns1:pPr algn="l" indent="0" marL="0">
               <ns1:lnSpc>
                 <ns1:spcPts val="2000"/>
@@ -4476,17 +4454,6 @@
               </ns1:spcBef>
               <ns1:buNone/>
             </ns1:pPr>
-            <ns1:r>
-              <ns1:rPr lang="en-US" sz="1650" b="1" dirty="0">
-                <ns1:solidFill>
-                  <ns1:srgbClr val="59636E"/>
-                </ns1:solidFill>
-                <ns1:latin typeface="Arial" pitchFamily="34" charset="0"/>
-                <ns1:ea typeface="Arial" pitchFamily="34" charset="-122"/>
-                <ns1:cs typeface="Arial" pitchFamily="34" charset="-120"/>
-              </ns1:rPr>
-              <ns1:t/>
-            </ns1:r>
             <ns1:pPr algn="l" indent="0" marL="0">
               <ns1:lnSpc>
                 <ns1:spcPts val="2000"/>
@@ -4496,17 +4463,6 @@
               </ns1:spcBef>
               <ns1:buNone/>
             </ns1:pPr>
-            <ns1:r>
-              <ns1:rPr lang="en-US" sz="1650" dirty="0">
-                <ns1:solidFill>
-                  <ns1:srgbClr val="59636E"/>
-                </ns1:solidFill>
-                <ns1:latin typeface="Arial" pitchFamily="34" charset="0"/>
-                <ns1:ea typeface="Arial" pitchFamily="34" charset="-122"/>
-                <ns1:cs typeface="Arial" pitchFamily="34" charset="-120"/>
-              </ns1:rPr>
-              <ns1:t/>
-            </ns1:r>
             <ns1:endParaRPr lang="en-US" sz="1650" dirty="0"/>
           </ns1:p>
         </ns0:txBody>
@@ -9648,7 +9604,7 @@
         </p:nvSpPr>
         <p:spPr>
           <a:xfrm>
-            <a:off x="711101" y="1571774"/>
+            <a:off x="711101" y="1937534"/>
             <a:ext cx="5570169" cy="209550"/>
           </a:xfrm>
           <a:prstGeom prst="rect">
@@ -9687,7 +9643,7 @@
         </p:nvSpPr>
         <p:spPr>
           <a:xfrm>
-            <a:off x="711101" y="1882825"/>
+            <a:off x="711101" y="2248585"/>
             <a:ext cx="5570169" cy="584150"/>
           </a:xfrm>
           <a:prstGeom prst="rect">
@@ -9732,7 +9688,7 @@
         </p:nvSpPr>
         <p:spPr>
           <a:xfrm>
-            <a:off x="711101" y="2670125"/>
+            <a:off x="711101" y="3035885"/>
             <a:ext cx="609600" cy="63401"/>
           </a:xfrm>
           <a:prstGeom prst="roundRect">
@@ -9753,48 +9709,6 @@
               <a:buNone/>
             </a:pPr>
             <a:endParaRPr lang="en-US" dirty="0"/>
-          </a:p>
-        </p:txBody>
-      </p:sp>
-      <p:sp>
-        <p:nvSpPr>
-          <p:cNvPr id="12" name="Text 8"/>
-          <p:cNvSpPr/>
-          <p:nvPr/>
-        </p:nvSpPr>
-        <p:spPr>
-          <a:xfrm>
-            <a:off x="711101" y="2936677"/>
-            <a:ext cx="5570169" cy="634901"/>
-          </a:xfrm>
-          <a:prstGeom prst="rect">
-            <a:avLst/>
-          </a:prstGeom>
-          <a:noFill/>
-          <a:ln/>
-        </p:spPr>
-        <p:txBody>
-          <a:bodyPr wrap="square" lIns="0" tIns="0" rIns="0" bIns="0" rtlCol="0" anchor="t"/>
-          <a:lstStyle/>
-          <a:p>
-            <a:pPr algn="l" indent="0" marL="0">
-              <a:lnSpc>
-                <a:spcPts val="2500"/>
-              </a:lnSpc>
-              <a:buNone/>
-            </a:pPr>
-            <a:r>
-              <a:rPr lang="en-US" sz="1900" dirty="0">
-                <a:solidFill>
-                  <a:srgbClr val="59636E"/>
-                </a:solidFill>
-                <a:latin typeface="Arial" pitchFamily="34" charset="0"/>
-                <a:ea typeface="Arial" pitchFamily="34" charset="-122"/>
-                <a:cs typeface="Arial" pitchFamily="34" charset="-120"/>
-              </a:rPr>
-              <a:t>Chat is great for talking. Real work needs state you can see at a glance.</a:t>
-            </a:r>
-            <a:endParaRPr lang="en-US" sz="1900" dirty="0"/>
           </a:p>
         </p:txBody>
       </p:sp>
@@ -11704,7 +11618,7 @@
         </p:nvSpPr>
         <p:spPr>
           <a:xfrm>
-            <a:off x="711101" y="1279773"/>
+            <a:off x="711101" y="1645533"/>
             <a:ext cx="5570169" cy="209550"/>
           </a:xfrm>
           <a:prstGeom prst="rect">
@@ -11743,7 +11657,7 @@
         </p:nvSpPr>
         <p:spPr>
           <a:xfrm>
-            <a:off x="711101" y="1590824"/>
+            <a:off x="711101" y="1956584"/>
             <a:ext cx="5570169" cy="1168301"/>
           </a:xfrm>
           <a:prstGeom prst="rect">
@@ -11788,7 +11702,7 @@
         </p:nvSpPr>
         <p:spPr>
           <a:xfrm>
-            <a:off x="711101" y="2962275"/>
+            <a:off x="711101" y="3328035"/>
             <a:ext cx="609600" cy="63401"/>
           </a:xfrm>
           <a:prstGeom prst="roundRect">
@@ -11809,48 +11723,6 @@
               <a:buNone/>
             </a:pPr>
             <a:endParaRPr lang="en-US" dirty="0"/>
-          </a:p>
-        </p:txBody>
-      </p:sp>
-      <p:sp>
-        <p:nvSpPr>
-          <p:cNvPr id="12" name="Text 8"/>
-          <p:cNvSpPr/>
-          <p:nvPr/>
-        </p:nvSpPr>
-        <p:spPr>
-          <a:xfrm>
-            <a:off x="711101" y="3228826"/>
-            <a:ext cx="5570169" cy="634901"/>
-          </a:xfrm>
-          <a:prstGeom prst="rect">
-            <a:avLst/>
-          </a:prstGeom>
-          <a:noFill/>
-          <a:ln/>
-        </p:spPr>
-        <p:txBody>
-          <a:bodyPr wrap="square" lIns="0" tIns="0" rIns="0" bIns="0" rtlCol="0" anchor="t"/>
-          <a:lstStyle/>
-          <a:p>
-            <a:pPr algn="l" indent="0" marL="0">
-              <a:lnSpc>
-                <a:spcPts val="2500"/>
-              </a:lnSpc>
-              <a:buNone/>
-            </a:pPr>
-            <a:r>
-              <a:rPr lang="en-US" sz="1900" dirty="0">
-                <a:solidFill>
-                  <a:srgbClr val="59636E"/>
-                </a:solidFill>
-                <a:latin typeface="Arial" pitchFamily="34" charset="0"/>
-                <a:ea typeface="Arial" pitchFamily="34" charset="-122"/>
-                <a:cs typeface="Arial" pitchFamily="34" charset="-120"/>
-              </a:rPr>
-              <a:t>Try a community canvas, then build a simple board of your own.</a:t>
-            </a:r>
-            <a:endParaRPr lang="en-US" sz="1900" dirty="0"/>
           </a:p>
         </p:txBody>
       </p:sp>
@@ -13834,7 +13706,7 @@
         </p:nvSpPr>
         <p:spPr>
           <a:xfrm>
-            <a:off x="711101" y="1279773"/>
+            <a:off x="711101" y="1645533"/>
             <a:ext cx="5570169" cy="209550"/>
           </a:xfrm>
           <a:prstGeom prst="rect">
@@ -13873,7 +13745,7 @@
         </p:nvSpPr>
         <p:spPr>
           <a:xfrm>
-            <a:off x="711101" y="1590824"/>
+            <a:off x="711101" y="1956584"/>
             <a:ext cx="5570169" cy="1168301"/>
           </a:xfrm>
           <a:prstGeom prst="rect">
@@ -13918,7 +13790,7 @@
         </p:nvSpPr>
         <p:spPr>
           <a:xfrm>
-            <a:off x="711101" y="2962275"/>
+            <a:off x="711101" y="3328035"/>
             <a:ext cx="609600" cy="63401"/>
           </a:xfrm>
           <a:prstGeom prst="roundRect">
@@ -13939,48 +13811,6 @@
               <a:buNone/>
             </a:pPr>
             <a:endParaRPr lang="en-US" dirty="0"/>
-          </a:p>
-        </p:txBody>
-      </p:sp>
-      <p:sp>
-        <p:nvSpPr>
-          <p:cNvPr id="12" name="Text 8"/>
-          <p:cNvSpPr/>
-          <p:nvPr/>
-        </p:nvSpPr>
-        <p:spPr>
-          <a:xfrm>
-            <a:off x="711101" y="3228826"/>
-            <a:ext cx="5570169" cy="634901"/>
-          </a:xfrm>
-          <a:prstGeom prst="rect">
-            <a:avLst/>
-          </a:prstGeom>
-          <a:noFill/>
-          <a:ln/>
-        </p:spPr>
-        <p:txBody>
-          <a:bodyPr wrap="square" lIns="0" tIns="0" rIns="0" bIns="0" rtlCol="0" anchor="t"/>
-          <a:lstStyle/>
-          <a:p>
-            <a:pPr algn="l" indent="0" marL="0">
-              <a:lnSpc>
-                <a:spcPts val="2500"/>
-              </a:lnSpc>
-              <a:buNone/>
-            </a:pPr>
-            <a:r>
-              <a:rPr lang="en-US" sz="1900" dirty="0">
-                <a:solidFill>
-                  <a:srgbClr val="59636E"/>
-                </a:solidFill>
-                <a:latin typeface="Arial" pitchFamily="34" charset="0"/>
-                <a:ea typeface="Arial" pitchFamily="34" charset="-122"/>
-                <a:cs typeface="Arial" pitchFamily="34" charset="-120"/>
-              </a:rPr>
-              <a:t>Add buttons that run real work, and keep the plan and evidence on one board.</a:t>
-            </a:r>
-            <a:endParaRPr lang="en-US" sz="1900" dirty="0"/>
           </a:p>
         </p:txBody>
       </p:sp>

--- a/slides/06-canvases.pptx
+++ b/slides/06-canvases.pptx
@@ -2741,115 +2741,14 @@
       </ns0:sp>
       <ns0:sp>
         <ns0:nvSpPr>
-          <ns0:cNvPr id="9" name="Text 5"/>
+          <ns0:cNvPr id="20" name="Text 13"/>
           <ns0:cNvSpPr/>
           <ns0:nvPr/>
         </ns0:nvSpPr>
         <ns0:spPr>
           <ns1:xfrm>
-            <ns1:off x="507950" y="1765548"/>
-            <ns1:ext cx="381000" cy="381000"/>
-          </ns1:xfrm>
-          <ns1:prstGeom prst="roundRect">
-            <ns1:avLst>
-              <ns1:gd name="adj" fmla="val 23333"/>
-            </ns1:avLst>
-          </ns1:prstGeom>
-          <ns1:solidFill>
-            <ns1:srgbClr val="DAFBE1"/>
-          </ns1:solidFill>
-          <ns1:ln/>
-        </ns0:spPr>
-        <ns0:txBody>
-          <ns1:bodyPr wrap="square" rtlCol="0" anchor="ctr"/>
-          <ns1:lstStyle/>
-          <ns1:p>
-            <ns1:pPr indent="0" marL="0">
-              <ns1:buNone/>
-            </ns1:pPr>
-            <ns1:endParaRPr lang="en-US" dirty="0"/>
-          </ns1:p>
-        </ns0:txBody>
-      </ns0:sp>
-      <ns0:pic>
-        <ns0:nvPicPr>
-          <ns0:cNvPr id="10" name="Image 2" descr="">
-            <ns1:extLst>
-              <ns1:ext uri="{C183D7F6-B498-43B3-948B-1728B52AA6E4}">
-                <ns2:decorative val="1"/>
-              </ns1:ext>
-            </ns1:extLst>
-          </ns0:cNvPr>
-          <ns0:cNvPicPr>
-            <ns1:picLocks noChangeAspect="1"/>
-          </ns0:cNvPicPr>
-          <ns0:nvPr/>
-        </ns0:nvPicPr>
-        <ns0:blipFill>
-          <ns1:blip ns3:embed="rId4"/>
-          <ns1:stretch>
-            <ns1:fillRect/>
-          </ns1:stretch>
-        </ns0:blipFill>
-        <ns0:spPr>
-          <ns1:xfrm>
-            <ns1:off x="590550" y="1848148"/>
-            <ns1:ext cx="215801" cy="215801"/>
-          </ns1:xfrm>
-          <ns1:prstGeom prst="rect">
-            <ns1:avLst/>
-          </ns1:prstGeom>
-        </ns0:spPr>
-      </ns0:pic>
-      <ns0:sp>
-        <ns0:nvSpPr>
-          <ns0:cNvPr id="11" name="Text 6"/>
-          <ns0:cNvSpPr/>
-          <ns0:nvPr/>
-        </ns0:nvSpPr>
-        <ns0:spPr>
-          <ns1:xfrm>
-            <ns1:off x="1041350" y="1730127"/>
-            <ns1:ext cx="1562070" cy="228600"/>
-          </ns1:xfrm>
-          <ns1:prstGeom prst="rect">
-            <ns1:avLst/>
-          </ns1:prstGeom>
-          <ns1:noFill/>
-          <ns1:ln/>
-        </ns0:spPr>
-        <ns0:txBody>
-          <ns1:bodyPr wrap="square" lIns="0" tIns="0" rIns="0" bIns="0" rtlCol="0" anchor="t"/>
-          <ns1:lstStyle/>
-          <ns1:p>
-            <ns1:pPr algn="l" indent="0" marL="0">
-              <ns1:buNone/>
-            </ns1:pPr>
-            <ns1:r>
-              <ns1:rPr lang="en-US" sz="1550" b="1" dirty="0">
-                <ns1:solidFill>
-                  <ns1:srgbClr val="1F2328"/>
-                </ns1:solidFill>
-                <ns1:latin typeface="Arial" pitchFamily="34" charset="0"/>
-                <ns1:ea typeface="Arial" pitchFamily="34" charset="-122"/>
-                <ns1:cs typeface="Arial" pitchFamily="34" charset="-120"/>
-              </ns1:rPr>
-              <ns1:t>Five stages</ns1:t>
-            </ns1:r>
-            <ns1:endParaRPr lang="en-US" sz="1550" dirty="0"/>
-          </ns1:p>
-        </ns0:txBody>
-      </ns0:sp>
-      <ns0:sp>
-        <ns0:nvSpPr>
-          <ns0:cNvPr id="12" name="Text 7"/>
-          <ns0:cNvSpPr/>
-          <ns0:nvPr/>
-        </ns0:nvSpPr>
-        <ns0:spPr>
-          <ns1:xfrm>
-            <ns1:off x="1041350" y="1984028"/>
-            <ns1:ext cx="1562070" cy="198090"/>
+            <ns1:off x="914400" y="4462272"/>
+            <ns1:ext cx="7315200" cy="292608"/>
           </ns1:xfrm>
           <ns1:prstGeom prst="rect">
             <ns1:avLst/>
@@ -2868,7 +2767,7 @@
               <ns1:buNone/>
             </ns1:pPr>
             <ns1:r>
-              <ns1:rPr lang="en-US" sz="1350" dirty="0">
+              <ns1:rPr lang="en-US" sz="1650" dirty="0">
                 <ns1:solidFill>
                   <ns1:srgbClr val="59636E"/>
                 </ns1:solidFill>
@@ -2876,470 +2775,7 @@
                 <ns1:ea typeface="Arial" pitchFamily="34" charset="-122"/>
                 <ns1:cs typeface="Arial" pitchFamily="34" charset="-120"/>
               </ns1:rPr>
-              <ns1:t>Propose to Validate.</ns1:t>
-            </ns1:r>
-            <ns1:endParaRPr lang="en-US" sz="1350" dirty="0"/>
-          </ns1:p>
-        </ns0:txBody>
-      </ns0:sp>
-      <ns0:sp>
-        <ns0:nvSpPr>
-          <ns0:cNvPr id="13" name="Text 8"/>
-          <ns0:cNvSpPr/>
-          <ns0:nvPr/>
-        </ns0:nvSpPr>
-        <ns0:spPr>
-          <ns1:xfrm>
-            <ns1:off x="507950" y="2494359"/>
-            <ns1:ext cx="381000" cy="381000"/>
-          </ns1:xfrm>
-          <ns1:prstGeom prst="roundRect">
-            <ns1:avLst>
-              <ns1:gd name="adj" fmla="val 23333"/>
-            </ns1:avLst>
-          </ns1:prstGeom>
-          <ns1:solidFill>
-            <ns1:srgbClr val="DAFBE1"/>
-          </ns1:solidFill>
-          <ns1:ln/>
-        </ns0:spPr>
-        <ns0:txBody>
-          <ns1:bodyPr wrap="square" rtlCol="0" anchor="ctr"/>
-          <ns1:lstStyle/>
-          <ns1:p>
-            <ns1:pPr indent="0" marL="0">
-              <ns1:buNone/>
-            </ns1:pPr>
-            <ns1:endParaRPr lang="en-US" dirty="0"/>
-          </ns1:p>
-        </ns0:txBody>
-      </ns0:sp>
-      <ns0:pic>
-        <ns0:nvPicPr>
-          <ns0:cNvPr id="14" name="Image 3" descr="">
-            <ns1:extLst>
-              <ns1:ext uri="{C183D7F6-B498-43B3-948B-1728B52AA6E4}">
-                <ns2:decorative val="1"/>
-              </ns1:ext>
-            </ns1:extLst>
-          </ns0:cNvPr>
-          <ns0:cNvPicPr>
-            <ns1:picLocks noChangeAspect="1"/>
-          </ns0:cNvPicPr>
-          <ns0:nvPr/>
-        </ns0:nvPicPr>
-        <ns0:blipFill>
-          <ns1:blip ns3:embed="rId5"/>
-          <ns1:stretch>
-            <ns1:fillRect/>
-          </ns1:stretch>
-        </ns0:blipFill>
-        <ns0:spPr>
-          <ns1:xfrm>
-            <ns1:off x="590550" y="2576959"/>
-            <ns1:ext cx="215801" cy="215801"/>
-          </ns1:xfrm>
-          <ns1:prstGeom prst="rect">
-            <ns1:avLst/>
-          </ns1:prstGeom>
-        </ns0:spPr>
-      </ns0:pic>
-      <ns0:sp>
-        <ns0:nvSpPr>
-          <ns0:cNvPr id="15" name="Text 9"/>
-          <ns0:cNvSpPr/>
-          <ns0:nvPr/>
-        </ns0:nvSpPr>
-        <ns0:spPr>
-          <ns1:xfrm>
-            <ns1:off x="1041350" y="2359819"/>
-            <ns1:ext cx="2564892" cy="228600"/>
-          </ns1:xfrm>
-          <ns1:prstGeom prst="rect">
-            <ns1:avLst/>
-          </ns1:prstGeom>
-          <ns1:noFill/>
-          <ns1:ln/>
-        </ns0:spPr>
-        <ns0:txBody>
-          <ns1:bodyPr wrap="square" lIns="0" tIns="0" rIns="0" bIns="0" rtlCol="0" anchor="t"/>
-          <ns1:lstStyle/>
-          <ns1:p>
-            <ns1:pPr algn="l" indent="0" marL="0">
-              <ns1:buNone/>
-            </ns1:pPr>
-            <ns1:r>
-              <ns1:rPr lang="en-US" sz="1550" b="1" dirty="0">
-                <ns1:solidFill>
-                  <ns1:srgbClr val="1F2328"/>
-                </ns1:solidFill>
-                <ns1:latin typeface="Arial" pitchFamily="34" charset="0"/>
-                <ns1:ea typeface="Arial" pitchFamily="34" charset="-122"/>
-                <ns1:cs typeface="Arial" pitchFamily="34" charset="-120"/>
-              </ns1:rPr>
-              <ns1:t>Proposal</ns1:t>
-            </ns1:r>
-            <ns1:endParaRPr lang="en-US" sz="1550" dirty="0"/>
-          </ns1:p>
-        </ns0:txBody>
-      </ns0:sp>
-      <ns0:sp>
-        <ns0:nvSpPr>
-          <ns0:cNvPr id="16" name="Text 10"/>
-          <ns0:cNvSpPr/>
-          <ns0:nvPr/>
-        </ns0:nvSpPr>
-        <ns0:spPr>
-          <ns1:xfrm>
-            <ns1:off x="1041350" y="2613720"/>
-            <ns1:ext cx="2564892" cy="396180"/>
-          </ns1:xfrm>
-          <ns1:prstGeom prst="rect">
-            <ns1:avLst/>
-          </ns1:prstGeom>
-          <ns1:noFill/>
-          <ns1:ln/>
-        </ns0:spPr>
-        <ns0:txBody>
-          <ns1:bodyPr wrap="square" lIns="0" tIns="0" rIns="0" bIns="0" rtlCol="0" anchor="t"/>
-          <ns1:lstStyle/>
-          <ns1:p>
-            <ns1:pPr algn="l" indent="0" marL="0">
-              <ns1:lnSpc>
-                <ns1:spcPts val="1560"/>
-              </ns1:lnSpc>
-              <ns1:buNone/>
-            </ns1:pPr>
-            <ns1:r>
-              <ns1:rPr lang="en-US" sz="1350" dirty="0">
-                <ns1:solidFill>
-                  <ns1:srgbClr val="59636E"/>
-                </ns1:solidFill>
-                <ns1:latin typeface="Arial" pitchFamily="34" charset="0"/>
-                <ns1:ea typeface="Arial" pitchFamily="34" charset="-122"/>
-                <ns1:cs typeface="Arial" pitchFamily="34" charset="-120"/>
-              </ns1:rPr>
-              <ns1:t>One field, one </ns1:t>
-            </ns1:r>
-            <ns1:pPr algn="l" indent="0" marL="0">
-              <ns1:lnSpc>
-                <ns1:spcPts val="1560"/>
-              </ns1:lnSpc>
-              <ns1:buNone/>
-            </ns1:pPr>
-            <ns1:r>
-              <ns1:rPr lang="en-US" sz="1350" b="1" dirty="0">
-                <ns1:solidFill>
-                  <ns1:srgbClr val="59636E"/>
-                </ns1:solidFill>
-                <ns1:latin typeface="Arial" pitchFamily="34" charset="0"/>
-                <ns1:ea typeface="Arial" pitchFamily="34" charset="-122"/>
-                <ns1:cs typeface="Arial" pitchFamily="34" charset="-120"/>
-              </ns1:rPr>
-              <ns1:t>Generate plan</ns1:t>
-            </ns1:r>
-            <ns1:pPr algn="l" indent="0" marL="0">
-              <ns1:lnSpc>
-                <ns1:spcPts val="1560"/>
-              </ns1:lnSpc>
-              <ns1:buNone/>
-            </ns1:pPr>
-            <ns1:r>
-              <ns1:rPr lang="en-US" sz="1350" dirty="0">
-                <ns1:solidFill>
-                  <ns1:srgbClr val="59636E"/>
-                </ns1:solidFill>
-                <ns1:latin typeface="Arial" pitchFamily="34" charset="0"/>
-                <ns1:ea typeface="Arial" pitchFamily="34" charset="-122"/>
-                <ns1:cs typeface="Arial" pitchFamily="34" charset="-120"/>
-              </ns1:rPr>
-              <ns1:t> button.</ns1:t>
-            </ns1:r>
-            <ns1:endParaRPr lang="en-US" sz="1350" dirty="0"/>
-          </ns1:p>
-        </ns0:txBody>
-      </ns0:sp>
-      <ns0:sp>
-        <ns0:nvSpPr>
-          <ns0:cNvPr id="17" name="Text 11"/>
-          <ns0:cNvSpPr/>
-          <ns0:nvPr/>
-        </ns0:nvSpPr>
-        <ns0:spPr>
-          <ns1:xfrm>
-            <ns1:off x="507950" y="3322141"/>
-            <ns1:ext cx="381000" cy="381000"/>
-          </ns1:xfrm>
-          <ns1:prstGeom prst="roundRect">
-            <ns1:avLst>
-              <ns1:gd name="adj" fmla="val 23333"/>
-            </ns1:avLst>
-          </ns1:prstGeom>
-          <ns1:solidFill>
-            <ns1:srgbClr val="DAFBE1"/>
-          </ns1:solidFill>
-          <ns1:ln/>
-        </ns0:spPr>
-        <ns0:txBody>
-          <ns1:bodyPr wrap="square" rtlCol="0" anchor="ctr"/>
-          <ns1:lstStyle/>
-          <ns1:p>
-            <ns1:pPr indent="0" marL="0">
-              <ns1:buNone/>
-            </ns1:pPr>
-            <ns1:endParaRPr lang="en-US" dirty="0"/>
-          </ns1:p>
-        </ns0:txBody>
-      </ns0:sp>
-      <ns0:pic>
-        <ns0:nvPicPr>
-          <ns0:cNvPr id="18" name="Image 4" descr="">
-            <ns1:extLst>
-              <ns1:ext uri="{C183D7F6-B498-43B3-948B-1728B52AA6E4}">
-                <ns2:decorative val="1"/>
-              </ns1:ext>
-            </ns1:extLst>
-          </ns0:cNvPr>
-          <ns0:cNvPicPr>
-            <ns1:picLocks noChangeAspect="1"/>
-          </ns0:cNvPicPr>
-          <ns0:nvPr/>
-        </ns0:nvPicPr>
-        <ns0:blipFill>
-          <ns1:blip ns3:embed="rId6"/>
-          <ns1:stretch>
-            <ns1:fillRect/>
-          </ns1:stretch>
-        </ns0:blipFill>
-        <ns0:spPr>
-          <ns1:xfrm>
-            <ns1:off x="590550" y="3404741"/>
-            <ns1:ext cx="215801" cy="215801"/>
-          </ns1:xfrm>
-          <ns1:prstGeom prst="rect">
-            <ns1:avLst/>
-          </ns1:prstGeom>
-        </ns0:spPr>
-      </ns0:pic>
-      <ns0:sp>
-        <ns0:nvSpPr>
-          <ns0:cNvPr id="19" name="Text 12"/>
-          <ns0:cNvSpPr/>
-          <ns0:nvPr/>
-        </ns0:nvSpPr>
-        <ns0:spPr>
-          <ns1:xfrm>
-            <ns1:off x="1041350" y="3187601"/>
-            <ns1:ext cx="2564892" cy="228600"/>
-          </ns1:xfrm>
-          <ns1:prstGeom prst="rect">
-            <ns1:avLst/>
-          </ns1:prstGeom>
-          <ns1:noFill/>
-          <ns1:ln/>
-        </ns0:spPr>
-        <ns0:txBody>
-          <ns1:bodyPr wrap="square" lIns="0" tIns="0" rIns="0" bIns="0" rtlCol="0" anchor="t"/>
-          <ns1:lstStyle/>
-          <ns1:p>
-            <ns1:pPr algn="l" indent="0" marL="0">
-              <ns1:buNone/>
-            </ns1:pPr>
-            <ns1:r>
-              <ns1:rPr lang="en-US" sz="1550" b="1" dirty="0">
-                <ns1:solidFill>
-                  <ns1:srgbClr val="1F2328"/>
-                </ns1:solidFill>
-                <ns1:latin typeface="Arial" pitchFamily="34" charset="0"/>
-                <ns1:ea typeface="Arial" pitchFamily="34" charset="-122"/>
-                <ns1:cs typeface="Arial" pitchFamily="34" charset="-120"/>
-              </ns1:rPr>
-              <ns1:t>Actions</ns1:t>
-            </ns1:r>
-            <ns1:endParaRPr lang="en-US" sz="1550" dirty="0"/>
-          </ns1:p>
-        </ns0:txBody>
-      </ns0:sp>
-      <ns0:sp>
-        <ns0:nvSpPr>
-          <ns0:cNvPr id="20" name="Text 13"/>
-          <ns0:cNvSpPr/>
-          <ns0:nvPr/>
-        </ns0:nvSpPr>
-        <ns0:spPr>
-          <ns1:xfrm>
-            <ns1:off x="1041350" y="3441502"/>
-            <ns1:ext cx="2564892" cy="396180"/>
-          </ns1:xfrm>
-          <ns1:prstGeom prst="rect">
-            <ns1:avLst/>
-          </ns1:prstGeom>
-          <ns1:noFill/>
-          <ns1:ln/>
-        </ns0:spPr>
-        <ns0:txBody>
-          <ns1:bodyPr wrap="square" lIns="0" tIns="0" rIns="0" bIns="0" rtlCol="0" anchor="t"/>
-          <ns1:lstStyle/>
-          <ns1:p>
-            <ns1:pPr algn="l" indent="0" marL="0">
-              <ns1:lnSpc>
-                <ns1:spcPts val="1560"/>
-              </ns1:lnSpc>
-              <ns1:buNone/>
-            </ns1:pPr>
-            <ns1:r>
-              <ns1:rPr lang="en-US" sz="1350" dirty="0">
-                <ns1:solidFill>
-                  <ns1:srgbClr val="59636E"/>
-                </ns1:solidFill>
-                <ns1:latin typeface="Arial" pitchFamily="34" charset="0"/>
-                <ns1:ea typeface="Arial" pitchFamily="34" charset="-122"/>
-                <ns1:cs typeface="Arial" pitchFamily="34" charset="-120"/>
-              </ns1:rPr>
-              <ns1:t>Each action runs until its evidence is recorded.</ns1:t>
-            </ns1:r>
-            <ns1:endParaRPr lang="en-US" sz="1350" dirty="0"/>
-          </ns1:p>
-        </ns0:txBody>
-      </ns0:sp>
-      <ns0:sp>
-        <ns0:nvSpPr>
-          <ns0:cNvPr id="21" name="Text 14"/>
-          <ns0:cNvSpPr/>
-          <ns0:nvPr/>
-        </ns0:nvSpPr>
-        <ns0:spPr>
-          <ns1:xfrm>
-            <ns1:off x="507950" y="4050804"/>
-            <ns1:ext cx="381000" cy="381000"/>
-          </ns1:xfrm>
-          <ns1:prstGeom prst="roundRect">
-            <ns1:avLst>
-              <ns1:gd name="adj" fmla="val 23333"/>
-            </ns1:avLst>
-          </ns1:prstGeom>
-          <ns1:solidFill>
-            <ns1:srgbClr val="DAFBE1"/>
-          </ns1:solidFill>
-          <ns1:ln/>
-        </ns0:spPr>
-        <ns0:txBody>
-          <ns1:bodyPr wrap="square" rtlCol="0" anchor="ctr"/>
-          <ns1:lstStyle/>
-          <ns1:p>
-            <ns1:pPr indent="0" marL="0">
-              <ns1:buNone/>
-            </ns1:pPr>
-            <ns1:endParaRPr lang="en-US" dirty="0"/>
-          </ns1:p>
-        </ns0:txBody>
-      </ns0:sp>
-      <ns0:pic>
-        <ns0:nvPicPr>
-          <ns0:cNvPr id="22" name="Image 5" descr="">
-            <ns1:extLst>
-              <ns1:ext uri="{C183D7F6-B498-43B3-948B-1728B52AA6E4}">
-                <ns2:decorative val="1"/>
-              </ns1:ext>
-            </ns1:extLst>
-          </ns0:cNvPr>
-          <ns0:cNvPicPr>
-            <ns1:picLocks noChangeAspect="1"/>
-          </ns0:cNvPicPr>
-          <ns0:nvPr/>
-        </ns0:nvPicPr>
-        <ns0:blipFill>
-          <ns1:blip ns3:embed="rId7"/>
-          <ns1:stretch>
-            <ns1:fillRect/>
-          </ns1:stretch>
-        </ns0:blipFill>
-        <ns0:spPr>
-          <ns1:xfrm>
-            <ns1:off x="590550" y="4133404"/>
-            <ns1:ext cx="215801" cy="215801"/>
-          </ns1:xfrm>
-          <ns1:prstGeom prst="rect">
-            <ns1:avLst/>
-          </ns1:prstGeom>
-        </ns0:spPr>
-      </ns0:pic>
-      <ns0:sp>
-        <ns0:nvSpPr>
-          <ns0:cNvPr id="23" name="Text 15"/>
-          <ns0:cNvSpPr/>
-          <ns0:nvPr/>
-        </ns0:nvSpPr>
-        <ns0:spPr>
-          <ns1:xfrm>
-            <ns1:off x="1041350" y="4015383"/>
-            <ns1:ext cx="2274490" cy="228600"/>
-          </ns1:xfrm>
-          <ns1:prstGeom prst="rect">
-            <ns1:avLst/>
-          </ns1:prstGeom>
-          <ns1:noFill/>
-          <ns1:ln/>
-        </ns0:spPr>
-        <ns0:txBody>
-          <ns1:bodyPr wrap="square" lIns="0" tIns="0" rIns="0" bIns="0" rtlCol="0" anchor="t"/>
-          <ns1:lstStyle/>
-          <ns1:p>
-            <ns1:pPr algn="l" indent="0" marL="0">
-              <ns1:buNone/>
-            </ns1:pPr>
-            <ns1:r>
-              <ns1:rPr lang="en-US" sz="1550" b="1" dirty="0">
-                <ns1:solidFill>
-                  <ns1:srgbClr val="1F2328"/>
-                </ns1:solidFill>
-                <ns1:latin typeface="Arial" pitchFamily="34" charset="0"/>
-                <ns1:ea typeface="Arial" pitchFamily="34" charset="-122"/>
-                <ns1:cs typeface="Arial" pitchFamily="34" charset="-120"/>
-              </ns1:rPr>
-              <ns1:t>Checklist and evidence</ns1:t>
-            </ns1:r>
-            <ns1:endParaRPr lang="en-US" sz="1550" dirty="0"/>
-          </ns1:p>
-        </ns0:txBody>
-      </ns0:sp>
-      <ns0:sp>
-        <ns0:nvSpPr>
-          <ns0:cNvPr id="24" name="Text 16"/>
-          <ns0:cNvSpPr/>
-          <ns0:nvPr/>
-        </ns0:nvSpPr>
-        <ns0:spPr>
-          <ns1:xfrm>
-            <ns1:off x="1041350" y="4269284"/>
-            <ns1:ext cx="2274490" cy="198090"/>
-          </ns1:xfrm>
-          <ns1:prstGeom prst="rect">
-            <ns1:avLst/>
-          </ns1:prstGeom>
-          <ns1:noFill/>
-          <ns1:ln/>
-        </ns0:spPr>
-        <ns0:txBody>
-          <ns1:bodyPr wrap="square" lIns="0" tIns="0" rIns="0" bIns="0" rtlCol="0" anchor="t"/>
-          <ns1:lstStyle/>
-          <ns1:p>
-            <ns1:pPr algn="l" indent="0" marL="0">
-              <ns1:lnSpc>
-                <ns1:spcPts val="1560"/>
-              </ns1:lnSpc>
-              <ns1:buNone/>
-            </ns1:pPr>
-            <ns1:r>
-              <ns1:rPr lang="en-US" sz="1350" dirty="0">
-                <ns1:solidFill>
-                  <ns1:srgbClr val="59636E"/>
-                </ns1:solidFill>
-                <ns1:latin typeface="Arial" pitchFamily="34" charset="0"/>
-                <ns1:ea typeface="Arial" pitchFamily="34" charset="-122"/>
-                <ns1:cs typeface="Arial" pitchFamily="34" charset="-120"/>
-              </ns1:rPr>
-              <ns1:t>Marked only from real output.</ns1:t>
+              <ns1:t>Actions finish when their evidence is recorded.</ns1:t>
             </ns1:r>
             <ns1:endParaRPr lang="en-US" sz="1350" dirty="0"/>
           </ns1:p>
@@ -3353,8 +2789,8 @@
         </ns0:nvSpPr>
         <ns0:spPr>
           <ns1:xfrm>
-            <ns1:off x="3762226" y="1973461"/>
-            <ns1:ext cx="4870400" cy="2250430"/>
+            <ns1:off x="777240" y="1600200"/>
+            <ns1:ext cx="7589520" cy="2514600"/>
           </ns1:xfrm>
           <ns1:prstGeom prst="roundRect">
             <ns1:avLst>
@@ -3390,22 +2826,22 @@
       </ns0:sp>
       <ns0:pic>
         <ns0:nvPicPr>
-          <ns0:cNvPr id="26" name="Image 6" descr="Feature Workbench canvas in the side panel with five stages, a feature proposal field, actions, a checklist, and an empty evidence area"/>
+          <ns0:cNvPr id="26" name="Image 6" descr="Feature Workbench stages and Feature proposal field, with Generate plan and the Plan-tab approval instruction."/>
           <ns0:cNvPicPr>
             <ns1:picLocks noChangeAspect="1"/>
           </ns0:cNvPicPr>
           <ns0:nvPr/>
         </ns0:nvPicPr>
         <ns0:blipFill>
-          <ns1:blip ns3:embed="rId8"/>
+          <ns1:blip ns3:embed="rId11"/>
           <ns1:stretch>
             <ns1:fillRect/>
           </ns1:stretch>
         </ns0:blipFill>
         <ns0:spPr>
           <ns1:xfrm>
-            <ns1:off x="3809851" y="2021086"/>
-            <ns1:ext cx="4775150" cy="2155180"/>
+            <ns1:off x="822960" y="1645920"/>
+            <ns1:ext cx="7498080" cy="2423160"/>
           </ns1:xfrm>
           <ns1:prstGeom prst="rect">
             <ns1:avLst/>
@@ -3748,8 +3184,8 @@
         </ns0:nvSpPr>
         <ns0:spPr>
           <ns1:xfrm>
-            <ns1:off x="507950" y="2313980"/>
-            <ns1:ext cx="330101" cy="330101"/>
+            <ns1:off x="512064" y="1581912"/>
+            <ns1:ext cx="329184" cy="329184"/>
           </ns1:xfrm>
           <ns1:prstGeom prst="roundRect">
             <ns1:avLst>
@@ -3780,8 +3216,8 @@
         </ns0:nvSpPr>
         <ns0:spPr>
           <ns1:xfrm>
-            <ns1:off x="620630" y="2374255"/>
-            <ns1:ext cx="104593" cy="209550"/>
+            <ns1:off x="621792" y="1645920"/>
+            <ns1:ext cx="100584" cy="210312"/>
           </ns1:xfrm>
           <ns1:prstGeom prst="rect">
             <ns1:avLst/>
@@ -3819,8 +3255,8 @@
         </ns0:nvSpPr>
         <ns0:spPr>
           <ns1:xfrm>
-            <ns1:off x="1015752" y="1872555"/>
-            <ns1:ext cx="6475661" cy="1212800"/>
+            <ns1:off x="512064" y="1993392"/>
+            <ns1:ext cx="3950208" cy="1933872"/>
           </ns1:xfrm>
           <ns1:prstGeom prst="roundRect">
             <ns1:avLst>
@@ -3856,22 +3292,22 @@
       </ns0:sp>
       <ns0:pic>
         <ns0:nvPicPr>
-          <ns0:cNvPr id="12" name="Image 2" descr="Feature Workbench with the Propose and Plan stages complete and the status Approved"/>
+          <ns0:cNvPr id="12" name="Image 2" descr="Plan tab and Feature Workbench with the Propose and Plan stages complete and the Approved status visible."/>
           <ns0:cNvPicPr>
             <ns1:picLocks noChangeAspect="1"/>
           </ns0:cNvPicPr>
           <ns0:nvPr/>
         </ns0:nvPicPr>
         <ns0:blipFill>
-          <ns1:blip ns3:embed="rId4"/>
+          <ns1:blip ns3:embed="rId8"/>
           <ns1:stretch>
             <ns1:fillRect/>
           </ns1:stretch>
         </ns0:blipFill>
         <ns0:spPr>
           <ns1:xfrm>
-            <ns1:off x="1063377" y="1920180"/>
-            <ns1:ext cx="6380411" cy="1117550"/>
+            <ns1:off x="557784" y="2039112"/>
+            <ns1:ext cx="3858768" cy="1842432"/>
           </ns1:xfrm>
           <ns1:prstGeom prst="rect">
             <ns1:avLst/>
@@ -3886,8 +3322,8 @@
         </ns0:nvSpPr>
         <ns0:spPr>
           <ns1:xfrm>
-            <ns1:off x="507950" y="3444180"/>
-            <ns1:ext cx="330101" cy="330101"/>
+            <ns1:off x="4681728" y="1581912"/>
+            <ns1:ext cx="329184" cy="329184"/>
           </ns1:xfrm>
           <ns1:prstGeom prst="roundRect">
             <ns1:avLst>
@@ -3918,8 +3354,8 @@
         </ns0:nvSpPr>
         <ns0:spPr>
           <ns1:xfrm>
-            <ns1:off x="620630" y="3504456"/>
-            <ns1:ext cx="104593" cy="209550"/>
+            <ns1:off x="4791456" y="1645920"/>
+            <ns1:ext cx="100584" cy="210312"/>
           </ns1:xfrm>
           <ns1:prstGeom prst="rect">
             <ns1:avLst/>
@@ -3957,8 +3393,8 @@
         </ns0:nvSpPr>
         <ns0:spPr>
           <ns1:xfrm>
-            <ns1:off x="1015752" y="3316486"/>
-            <ns1:ext cx="7613600" cy="585341"/>
+            <ns1:off x="4681728" y="2496312"/>
+            <ns1:ext cx="3950208" cy="850712"/>
           </ns1:xfrm>
           <ns1:prstGeom prst="roundRect">
             <ns1:avLst>
@@ -3994,22 +3430,22 @@
       </ns0:sp>
       <ns0:pic>
         <ns0:nvPicPr>
-          <ns0:cNvPr id="16" name="Image 3" descr="Feature Workbench baseline evidence with 4 of 4 tests passed and a passing build"/>
+          <ns0:cNvPr id="16" name="Image 3" descr="Recorded baseline evidence: Baseline PASS, four of four tests, and build pass."/>
           <ns0:cNvPicPr>
             <ns1:picLocks noChangeAspect="1"/>
           </ns0:cNvPicPr>
           <ns0:nvPr/>
         </ns0:nvPicPr>
         <ns0:blipFill>
-          <ns1:blip ns3:embed="rId5"/>
+          <ns1:blip ns3:embed="rId9"/>
           <ns1:stretch>
             <ns1:fillRect/>
           </ns1:stretch>
         </ns0:blipFill>
         <ns0:spPr>
           <ns1:xfrm>
-            <ns1:off x="1063377" y="3364111"/>
-            <ns1:ext cx="7518350" cy="490091"/>
+            <ns1:off x="4727448" y="2542032"/>
+            <ns1:ext cx="3858768" cy="759272"/>
           </ns1:xfrm>
           <ns1:prstGeom prst="rect">
             <ns1:avLst/>
@@ -4024,8 +3460,8 @@
         </ns0:nvSpPr>
         <ns0:spPr>
           <ns1:xfrm>
-            <ns1:off x="507950" y="4129832"/>
-            <ns1:ext cx="8290509" cy="223540"/>
+            <ns1:off x="512064" y="4389120"/>
+            <ns1:ext cx="8138160" cy="274320"/>
           </ns1:xfrm>
           <ns1:prstGeom prst="rect">
             <ns1:avLst/>
@@ -4138,6 +3574,150 @@
                 <ns1:cs typeface="Arial" pitchFamily="34" charset="-120"/>
               </ns1:rPr>
               <ns1:t/>
+            </ns1:r>
+            <ns1:endParaRPr lang="en-US" sz="1450" dirty="0"/>
+          </ns1:p>
+        </ns0:txBody>
+      </ns0:sp>
+      <ns0:sp>
+        <ns0:nvSpPr>
+          <ns0:cNvPr id="18" name="Review plan label"/>
+          <ns0:cNvSpPr/>
+          <ns0:nvPr/>
+        </ns0:nvSpPr>
+        <ns0:spPr>
+          <ns1:xfrm>
+            <ns1:off x="950976" y="1636776"/>
+            <ns1:ext cx="3383280" cy="274320"/>
+          </ns1:xfrm>
+          <ns1:prstGeom prst="rect">
+            <ns1:avLst/>
+          </ns1:prstGeom>
+          <ns1:noFill/>
+          <ns1:ln/>
+        </ns0:spPr>
+        <ns0:txBody>
+          <ns1:bodyPr wrap="square" lIns="0" tIns="0" rIns="0" bIns="0" rtlCol="0" anchor="t"/>
+          <ns1:lstStyle/>
+          <ns1:p>
+            <ns1:pPr algn="l" indent="0" marL="0">
+              <ns1:lnSpc>
+                <ns1:spcPts val="1760"/>
+              </ns1:lnSpc>
+              <ns1:buNone/>
+            </ns1:pPr>
+            <ns1:pPr algn="l" indent="0" marL="0">
+              <ns1:lnSpc>
+                <ns1:spcPts val="1760"/>
+              </ns1:lnSpc>
+              <ns1:buNone/>
+            </ns1:pPr>
+            <ns1:pPr algn="l" indent="0" marL="0">
+              <ns1:lnSpc>
+                <ns1:spcPts val="1760"/>
+              </ns1:lnSpc>
+              <ns1:buNone/>
+            </ns1:pPr>
+            <ns1:pPr algn="l" indent="0" marL="0">
+              <ns1:lnSpc>
+                <ns1:spcPts val="1760"/>
+              </ns1:lnSpc>
+              <ns1:buNone/>
+            </ns1:pPr>
+            <ns1:pPr algn="l" indent="0" marL="0">
+              <ns1:lnSpc>
+                <ns1:spcPts val="1760"/>
+              </ns1:lnSpc>
+              <ns1:buNone/>
+            </ns1:pPr>
+            <ns1:pPr algn="l" indent="0" marL="0">
+              <ns1:lnSpc>
+                <ns1:spcPts val="1760"/>
+              </ns1:lnSpc>
+              <ns1:buNone/>
+            </ns1:pPr>
+            <ns1:r>
+              <ns1:rPr lang="en-US" sz="1550" b="1" dirty="0">
+                <ns1:solidFill>
+                  <ns1:srgbClr val="1F2328"/>
+                </ns1:solidFill>
+                <ns1:latin typeface="Arial" pitchFamily="34" charset="0"/>
+                <ns1:ea typeface="Arial" pitchFamily="34" charset="-122"/>
+                <ns1:cs typeface="Arial" pitchFamily="34" charset="-120"/>
+              </ns1:rPr>
+              <ns1:t>Plan approved</ns1:t>
+            </ns1:r>
+            <ns1:endParaRPr lang="en-US" sz="1450" dirty="0"/>
+          </ns1:p>
+        </ns0:txBody>
+      </ns0:sp>
+      <ns0:sp>
+        <ns0:nvSpPr>
+          <ns0:cNvPr id="19" name="Review baseline label"/>
+          <ns0:cNvSpPr/>
+          <ns0:nvPr/>
+        </ns0:nvSpPr>
+        <ns0:spPr>
+          <ns1:xfrm>
+            <ns1:off x="5120640" y="1636776"/>
+            <ns1:ext cx="3383280" cy="274320"/>
+          </ns1:xfrm>
+          <ns1:prstGeom prst="rect">
+            <ns1:avLst/>
+          </ns1:prstGeom>
+          <ns1:noFill/>
+          <ns1:ln/>
+        </ns0:spPr>
+        <ns0:txBody>
+          <ns1:bodyPr wrap="square" lIns="0" tIns="0" rIns="0" bIns="0" rtlCol="0" anchor="t"/>
+          <ns1:lstStyle/>
+          <ns1:p>
+            <ns1:pPr algn="l" indent="0" marL="0">
+              <ns1:lnSpc>
+                <ns1:spcPts val="1760"/>
+              </ns1:lnSpc>
+              <ns1:buNone/>
+            </ns1:pPr>
+            <ns1:pPr algn="l" indent="0" marL="0">
+              <ns1:lnSpc>
+                <ns1:spcPts val="1760"/>
+              </ns1:lnSpc>
+              <ns1:buNone/>
+            </ns1:pPr>
+            <ns1:pPr algn="l" indent="0" marL="0">
+              <ns1:lnSpc>
+                <ns1:spcPts val="1760"/>
+              </ns1:lnSpc>
+              <ns1:buNone/>
+            </ns1:pPr>
+            <ns1:pPr algn="l" indent="0" marL="0">
+              <ns1:lnSpc>
+                <ns1:spcPts val="1760"/>
+              </ns1:lnSpc>
+              <ns1:buNone/>
+            </ns1:pPr>
+            <ns1:pPr algn="l" indent="0" marL="0">
+              <ns1:lnSpc>
+                <ns1:spcPts val="1760"/>
+              </ns1:lnSpc>
+              <ns1:buNone/>
+            </ns1:pPr>
+            <ns1:pPr algn="l" indent="0" marL="0">
+              <ns1:lnSpc>
+                <ns1:spcPts val="1760"/>
+              </ns1:lnSpc>
+              <ns1:buNone/>
+            </ns1:pPr>
+            <ns1:r>
+              <ns1:rPr lang="en-US" sz="1550" b="1" dirty="0">
+                <ns1:solidFill>
+                  <ns1:srgbClr val="1F2328"/>
+                </ns1:solidFill>
+                <ns1:latin typeface="Arial" pitchFamily="34" charset="0"/>
+                <ns1:ea typeface="Arial" pitchFamily="34" charset="-122"/>
+                <ns1:cs typeface="Arial" pitchFamily="34" charset="-120"/>
+              </ns1:rPr>
+              <ns1:t>Baseline recorded</ns1:t>
             </ns1:r>
             <ns1:endParaRPr lang="en-US" sz="1450" dirty="0"/>
           </ns1:p>
@@ -4475,8 +4055,8 @@
         </ns0:nvSpPr>
         <ns0:spPr>
           <ns1:xfrm>
-            <ns1:off x="754261" y="1580108"/>
-            <ns1:ext cx="7635180" cy="1415951"/>
+            <ns1:off x="777240" y="1673352"/>
+            <ns1:ext cx="7589520" cy="1076795"/>
           </ns1:xfrm>
           <ns1:prstGeom prst="roundRect">
             <ns1:avLst>
@@ -4512,22 +4092,22 @@
       </ns0:sp>
       <ns0:pic>
         <ns0:nvPicPr>
-          <ns0:cNvPr id="10" name="Image 2" descr="Feature Workbench with the Implement stage complete and a Diff row in the evidence, next to the Changes pill above the prompt box"/>
+          <ns0:cNvPr id="10" name="Image 2" descr="Feature Workbench evidence after implementation: baseline pass and a recorded Diff row."/>
           <ns0:cNvPicPr>
             <ns1:picLocks noChangeAspect="1"/>
           </ns0:cNvPicPr>
           <ns0:nvPr/>
         </ns0:nvPicPr>
         <ns0:blipFill>
-          <ns1:blip ns3:embed="rId4"/>
+          <ns1:blip ns3:embed="rId8"/>
           <ns1:stretch>
             <ns1:fillRect/>
           </ns1:stretch>
         </ns0:blipFill>
         <ns0:spPr>
           <ns1:xfrm>
-            <ns1:off x="801886" y="1627733"/>
-            <ns1:ext cx="7539930" cy="1320701"/>
+            <ns1:off x="822960" y="1719072"/>
+            <ns1:ext cx="7498080" cy="985355"/>
           </ns1:xfrm>
           <ns1:prstGeom prst="rect">
             <ns1:avLst/>
@@ -5483,8 +5063,8 @@
         </ns0:nvSpPr>
         <ns0:spPr>
           <ns1:xfrm>
-            <ns1:off x="511076" y="2204591"/>
-            <ns1:ext cx="8121551" cy="841921"/>
+            <ns1:off x="1371600" y="1801368"/>
+            <ns1:ext cx="6400800" cy="1596425"/>
           </ns1:xfrm>
           <ns1:prstGeom prst="roundRect">
             <ns1:avLst>
@@ -5520,22 +5100,22 @@
       </ns0:sp>
       <ns0:pic>
         <ns0:nvPicPr>
-          <ns0:cNvPr id="10" name="Image 2" descr="Feature Workbench with all five stages complete, and evidence that shows 4 baseline tests and 14 final tests"/>
+          <ns0:cNvPr id="10" name="Image 2" descr="Example evidence: baseline four of four tests and build pass; final fourteen of fourteen tests, delta plus ten, and build pass."/>
           <ns0:cNvPicPr>
             <ns1:picLocks noChangeAspect="1"/>
           </ns0:cNvPicPr>
           <ns0:nvPr/>
         </ns0:nvPicPr>
         <ns0:blipFill>
-          <ns1:blip ns3:embed="rId4"/>
+          <ns1:blip ns3:embed="rId7"/>
           <ns1:stretch>
             <ns1:fillRect/>
           </ns1:stretch>
         </ns0:blipFill>
         <ns0:spPr>
           <ns1:xfrm>
-            <ns1:off x="558701" y="2252216"/>
-            <ns1:ext cx="8026301" cy="746671"/>
+            <ns1:off x="1417320" y="1847088"/>
+            <ns1:ext cx="6309360" cy="1504985"/>
           </ns1:xfrm>
           <ns1:prstGeom prst="rect">
             <ns1:avLst/>
@@ -5544,318 +5124,14 @@
       </ns0:pic>
       <ns0:sp>
         <ns0:nvSpPr>
-          <ns0:cNvPr id="11" name="Text 6"/>
-          <ns0:cNvSpPr/>
-          <ns0:nvPr/>
-        </ns0:nvSpPr>
-        <ns0:spPr>
-          <ns1:xfrm>
-            <ns1:off x="507950" y="3400276"/>
-            <ns1:ext cx="2413248" cy="768251"/>
-          </ns1:xfrm>
-          <ns1:prstGeom prst="roundRect">
-            <ns1:avLst>
-              <ns1:gd name="adj" fmla="val 16531"/>
-            </ns1:avLst>
-          </ns1:prstGeom>
-          <ns1:noFill/>
-          <ns1:ln w="9525">
-            <ns1:solidFill>
-              <ns1:srgbClr val="D1D9E0"/>
-            </ns1:solidFill>
-          </ns1:ln>
-        </ns0:spPr>
-        <ns0:txBody>
-          <ns1:bodyPr wrap="square" rtlCol="0" anchor="ctr"/>
-          <ns1:lstStyle/>
-          <ns1:p>
-            <ns1:pPr indent="0" marL="0">
-              <ns1:buNone/>
-            </ns1:pPr>
-            <ns1:endParaRPr lang="en-US" dirty="0"/>
-          </ns1:p>
-        </ns0:txBody>
-      </ns0:sp>
-      <ns0:sp>
-        <ns0:nvSpPr>
-          <ns0:cNvPr id="12" name="Text 7"/>
-          <ns0:cNvSpPr/>
-          <ns0:nvPr/>
-        </ns0:nvSpPr>
-        <ns0:spPr>
-          <ns1:xfrm>
-            <ns1:off x="891778" y="3698677"/>
-            <ns1:ext cx="753103" cy="171450"/>
-          </ns1:xfrm>
-          <ns1:prstGeom prst="rect">
-            <ns1:avLst/>
-          </ns1:prstGeom>
-          <ns1:noFill/>
-          <ns1:ln/>
-        </ns0:spPr>
-        <ns0:txBody>
-          <ns1:bodyPr wrap="square" lIns="0" tIns="0" rIns="0" bIns="0" rtlCol="0" anchor="t"/>
-          <ns1:lstStyle/>
-          <ns1:p>
-            <ns1:pPr algn="l" indent="0" marL="0">
-              <ns1:buNone/>
-            </ns1:pPr>
-            <ns1:r>
-              <ns1:rPr lang="en-US" sz="1150" b="1" dirty="0">
-                <ns1:solidFill>
-                  <ns1:srgbClr val="59636E"/>
-                </ns1:solidFill>
-                <ns1:latin typeface="Arial" pitchFamily="34" charset="0"/>
-                <ns1:ea typeface="Arial" pitchFamily="34" charset="-122"/>
-                <ns1:cs typeface="Arial" pitchFamily="34" charset="-120"/>
-              </ns1:rPr>
-              <ns1:t>BASELINE</ns1:t>
-            </ns1:r>
-            <ns1:endParaRPr lang="en-US" sz="1150" dirty="0"/>
-          </ns1:p>
-        </ns0:txBody>
-      </ns0:sp>
-      <ns0:sp>
-        <ns0:nvSpPr>
-          <ns0:cNvPr id="13" name="Text 8"/>
-          <ns0:cNvSpPr/>
-          <ns0:nvPr/>
-        </ns0:nvSpPr>
-        <ns0:spPr>
-          <ns1:xfrm>
-            <ns1:off x="1782514" y="3536752"/>
-            <ns1:ext cx="245013" cy="495300"/>
-          </ns1:xfrm>
-          <ns1:prstGeom prst="rect">
-            <ns1:avLst/>
-          </ns1:prstGeom>
-          <ns1:noFill/>
-          <ns1:ln/>
-        </ns0:spPr>
-        <ns0:txBody>
-          <ns1:bodyPr wrap="square" lIns="0" tIns="0" rIns="0" bIns="0" rtlCol="0" anchor="t"/>
-          <ns1:lstStyle/>
-          <ns1:p>
-            <ns1:pPr algn="l" indent="0" marL="0">
-              <ns1:buNone/>
-            </ns1:pPr>
-            <ns1:r>
-              <ns1:rPr lang="en-US" sz="3400" b="1" dirty="0">
-                <ns1:solidFill>
-                  <ns1:srgbClr val="1F2328"/>
-                </ns1:solidFill>
-                <ns1:latin typeface="Arial" pitchFamily="34" charset="0"/>
-                <ns1:ea typeface="Arial" pitchFamily="34" charset="-122"/>
-                <ns1:cs typeface="Arial" pitchFamily="34" charset="-120"/>
-              </ns1:rPr>
-              <ns1:t>4</ns1:t>
-            </ns1:r>
-            <ns1:endParaRPr lang="en-US" sz="3400" dirty="0"/>
-          </ns1:p>
-        </ns0:txBody>
-      </ns0:sp>
-      <ns0:sp>
-        <ns0:nvSpPr>
-          <ns0:cNvPr id="14" name="Text 9"/>
-          <ns0:cNvSpPr/>
-          <ns0:nvPr/>
-        </ns0:nvSpPr>
-        <ns0:spPr>
-          <ns1:xfrm>
-            <ns1:off x="2175123" y="3684389"/>
-            <ns1:ext cx="369341" cy="200025"/>
-          </ns1:xfrm>
-          <ns1:prstGeom prst="rect">
-            <ns1:avLst/>
-          </ns1:prstGeom>
-          <ns1:noFill/>
-          <ns1:ln/>
-        </ns0:spPr>
-        <ns0:txBody>
-          <ns1:bodyPr wrap="square" lIns="0" tIns="0" rIns="0" bIns="0" rtlCol="0" anchor="t"/>
-          <ns1:lstStyle/>
-          <ns1:p>
-            <ns1:pPr algn="l" indent="0" marL="0">
-              <ns1:buNone/>
-            </ns1:pPr>
-            <ns1:r>
-              <ns1:rPr lang="en-US" sz="1350" dirty="0">
-                <ns1:solidFill>
-                  <ns1:srgbClr val="59636E"/>
-                </ns1:solidFill>
-                <ns1:latin typeface="Arial" pitchFamily="34" charset="0"/>
-                <ns1:ea typeface="Arial" pitchFamily="34" charset="-122"/>
-                <ns1:cs typeface="Arial" pitchFamily="34" charset="-120"/>
-              </ns1:rPr>
-              <ns1:t>tests</ns1:t>
-            </ns1:r>
-            <ns1:endParaRPr lang="en-US" sz="1350" dirty="0"/>
-          </ns1:p>
-        </ns0:txBody>
-      </ns0:sp>
-      <ns0:sp>
-        <ns0:nvSpPr>
-          <ns0:cNvPr id="15" name="Text 10"/>
-          <ns0:cNvSpPr/>
-          <ns0:nvPr/>
-        </ns0:nvSpPr>
-        <ns0:spPr>
-          <ns1:xfrm>
-            <ns1:off x="3073598" y="3400276"/>
-            <ns1:ext cx="2413397" cy="768251"/>
-          </ns1:xfrm>
-          <ns1:prstGeom prst="roundRect">
-            <ns1:avLst>
-              <ns1:gd name="adj" fmla="val 16531"/>
-            </ns1:avLst>
-          </ns1:prstGeom>
-          <ns1:solidFill>
-            <ns1:srgbClr val="DAFBE1"/>
-          </ns1:solidFill>
-          <ns1:ln w="9525">
-            <ns1:solidFill>
-              <ns1:srgbClr val="8CE7A5"/>
-            </ns1:solidFill>
-          </ns1:ln>
-        </ns0:spPr>
-        <ns0:txBody>
-          <ns1:bodyPr wrap="square" rtlCol="0" anchor="ctr"/>
-          <ns1:lstStyle/>
-          <ns1:p>
-            <ns1:pPr indent="0" marL="0">
-              <ns1:buNone/>
-            </ns1:pPr>
-            <ns1:endParaRPr lang="en-US" dirty="0"/>
-          </ns1:p>
-        </ns0:txBody>
-      </ns0:sp>
-      <ns0:sp>
-        <ns0:nvSpPr>
-          <ns0:cNvPr id="16" name="Text 11"/>
-          <ns0:cNvSpPr/>
-          <ns0:nvPr/>
-        </ns0:nvSpPr>
-        <ns0:spPr>
-          <ns1:xfrm>
-            <ns1:off x="3611761" y="3698677"/>
-            <ns1:ext cx="438564" cy="171450"/>
-          </ns1:xfrm>
-          <ns1:prstGeom prst="rect">
-            <ns1:avLst/>
-          </ns1:prstGeom>
-          <ns1:noFill/>
-          <ns1:ln/>
-        </ns0:spPr>
-        <ns0:txBody>
-          <ns1:bodyPr wrap="square" lIns="0" tIns="0" rIns="0" bIns="0" rtlCol="0" anchor="t"/>
-          <ns1:lstStyle/>
-          <ns1:p>
-            <ns1:pPr algn="l" indent="0" marL="0">
-              <ns1:buNone/>
-            </ns1:pPr>
-            <ns1:r>
-              <ns1:rPr lang="en-US" sz="1150" b="1" dirty="0">
-                <ns1:solidFill>
-                  <ns1:srgbClr val="1A7F37"/>
-                </ns1:solidFill>
-                <ns1:latin typeface="Arial" pitchFamily="34" charset="0"/>
-                <ns1:ea typeface="Arial" pitchFamily="34" charset="-122"/>
-                <ns1:cs typeface="Arial" pitchFamily="34" charset="-120"/>
-              </ns1:rPr>
-              <ns1:t>FINAL</ns1:t>
-            </ns1:r>
-            <ns1:endParaRPr lang="en-US" sz="1150" dirty="0"/>
-          </ns1:p>
-        </ns0:txBody>
-      </ns0:sp>
-      <ns0:sp>
-        <ns0:nvSpPr>
-          <ns0:cNvPr id="17" name="Text 12"/>
-          <ns0:cNvSpPr/>
-          <ns0:nvPr/>
-        </ns0:nvSpPr>
-        <ns0:spPr>
-          <ns1:xfrm>
-            <ns1:off x="4096631" y="3536752"/>
-            <ns1:ext cx="600000" cy="495300"/>
-          </ns1:xfrm>
-          <ns1:prstGeom prst="rect">
-            <ns1:avLst/>
-          </ns1:prstGeom>
-          <ns1:noFill/>
-          <ns1:ln/>
-        </ns0:spPr>
-        <ns0:txBody>
-          <ns1:bodyPr wrap="square" lIns="0" tIns="0" rIns="0" bIns="0" rtlCol="0" anchor="t"/>
-          <ns1:lstStyle/>
-          <ns1:p>
-            <ns1:pPr algn="l" indent="0" marL="0">
-              <ns1:buNone/>
-            </ns1:pPr>
-            <ns1:r>
-              <ns1:rPr lang="en-US" sz="3000" b="1" dirty="0">
-                <ns1:solidFill>
-                  <ns1:srgbClr val="1A7F37"/>
-                </ns1:solidFill>
-                <ns1:latin typeface="Arial" pitchFamily="34" charset="0"/>
-                <ns1:ea typeface="Arial" pitchFamily="34" charset="-122"/>
-                <ns1:cs typeface="Arial" pitchFamily="34" charset="-120"/>
-              </ns1:rPr>
-              <ns1:t>14</ns1:t>
-            </ns1:r>
-            <ns1:endParaRPr lang="en-US" sz="3000" dirty="0"/>
-          </ns1:p>
-        </ns0:txBody>
-      </ns0:sp>
-      <ns0:sp>
-        <ns0:nvSpPr>
-          <ns0:cNvPr id="18" name="Text 13"/>
-          <ns0:cNvSpPr/>
-          <ns0:nvPr/>
-        </ns0:nvSpPr>
-        <ns0:spPr>
-          <ns1:xfrm>
-            <ns1:off x="4586734" y="3684389"/>
-            <ns1:ext cx="369341" cy="200025"/>
-          </ns1:xfrm>
-          <ns1:prstGeom prst="rect">
-            <ns1:avLst/>
-          </ns1:prstGeom>
-          <ns1:noFill/>
-          <ns1:ln/>
-        </ns0:spPr>
-        <ns0:txBody>
-          <ns1:bodyPr wrap="square" lIns="0" tIns="0" rIns="0" bIns="0" rtlCol="0" anchor="t"/>
-          <ns1:lstStyle/>
-          <ns1:p>
-            <ns1:pPr algn="l" indent="0" marL="0">
-              <ns1:buNone/>
-            </ns1:pPr>
-            <ns1:r>
-              <ns1:rPr lang="en-US" sz="1350" dirty="0">
-                <ns1:solidFill>
-                  <ns1:srgbClr val="59636E"/>
-                </ns1:solidFill>
-                <ns1:latin typeface="Arial" pitchFamily="34" charset="0"/>
-                <ns1:ea typeface="Arial" pitchFamily="34" charset="-122"/>
-                <ns1:cs typeface="Arial" pitchFamily="34" charset="-120"/>
-              </ns1:rPr>
-              <ns1:t>tests</ns1:t>
-            </ns1:r>
-            <ns1:endParaRPr lang="en-US" sz="1350" dirty="0"/>
-          </ns1:p>
-        </ns0:txBody>
-      </ns0:sp>
-      <ns0:sp>
-        <ns0:nvSpPr>
           <ns0:cNvPr id="19" name="Text 14"/>
           <ns0:cNvSpPr/>
           <ns0:nvPr/>
         </ns0:nvSpPr>
         <ns0:spPr>
           <ns1:xfrm>
-            <ns1:off x="5639395" y="3560862"/>
-            <ns1:ext cx="3056436" cy="447080"/>
+            <ns1:off x="822960" y="4096512"/>
+            <ns1:ext cx="7498080" cy="548640"/>
           </ns1:xfrm>
           <ns1:prstGeom prst="rect">
             <ns1:avLst/>
@@ -5874,7 +5150,7 @@
               <ns1:buNone/>
             </ns1:pPr>
             <ns1:r>
-              <ns1:rPr lang="en-US" sz="1450" dirty="0">
+              <ns1:rPr lang="en-US" sz="1650" dirty="0">
                 <ns1:solidFill>
                   <ns1:srgbClr val="59636E"/>
                 </ns1:solidFill>
@@ -5882,7 +5158,7 @@
                 <ns1:ea typeface="Arial" pitchFamily="34" charset="-122"/>
                 <ns1:cs typeface="Arial" pitchFamily="34" charset="-120"/>
               </ns1:rPr>
-              <ns1:t>The final total must never be lower than the baseline.</ns1:t>
+              <ns1:t>Example run. Your test total can differ, but it must not fall below the baseline.</ns1:t>
             </ns1:r>
             <ns1:endParaRPr lang="en-US" sz="1450" dirty="0"/>
           </ns1:p>
